--- a/decks/Heme_02_Anemia-and-Red-Cell-Disorders.pptx
+++ b/decks/Heme_02_Anemia-and-Red-Cell-Disorders.pptx
@@ -29,9 +29,10 @@
     <p:sldId id="277" r:id="rId23"/>
     <p:sldId id="278" r:id="rId24"/>
     <p:sldId id="279" r:id="rId25"/>
+    <p:sldId id="280" r:id="rId26"/>
   </p:sldIdLst>
   <p:notesMasterIdLst>
-    <p:notesMasterId r:id="rId26"/>
+    <p:notesMasterId r:id="rId27"/>
   </p:notesMasterIdLst>
   <p:sldSz cx="12191695" cy="6858000"/>
   <p:notesSz cx="6858000" cy="12191695"/>
@@ -1957,6 +1958,94 @@
             <a:fld id="{F7021451-1387-4CA6-816F-3879F97B5CBC}" type="slidenum">
               <a:rPr lang="en-US"/>
               <a:t>24</a:t>
+            </a:fld>
+            <a:endParaRPr lang="en-US"/>
+          </a:p>
+        </p:txBody>
+      </p:sp>
+    </p:spTree>
+    <p:extLst>
+      <p:ext uri="{BB962C8B-B14F-4D97-AF65-F5344CB8AC3E}">
+        <p14:creationId xmlns:p14="http://schemas.microsoft.com/office/powerpoint/2010/main" val="1024086991"/>
+      </p:ext>
+    </p:extLst>
+  </p:cSld>
+  <p:clrMapOvr>
+    <a:masterClrMapping/>
+  </p:clrMapOvr>
+</p:notes>
+</file>
+
+<file path=ppt/notesSlides/notesSlide25.xml><?xml version="1.0" encoding="utf-8"?>
+<p:notes xmlns:a="http://schemas.openxmlformats.org/drawingml/2006/main" xmlns:r="http://schemas.openxmlformats.org/officeDocument/2006/relationships" xmlns:p="http://schemas.openxmlformats.org/presentationml/2006/main">
+  <p:cSld>
+    <p:spTree>
+      <p:nvGrpSpPr>
+        <p:cNvPr id="1" name=""/>
+        <p:cNvGrpSpPr/>
+        <p:nvPr/>
+      </p:nvGrpSpPr>
+      <p:grpSpPr>
+        <a:xfrm>
+          <a:off x="0" y="0"/>
+          <a:ext cx="0" cy="0"/>
+          <a:chOff x="0" y="0"/>
+          <a:chExt cx="0" cy="0"/>
+        </a:xfrm>
+      </p:grpSpPr>
+      <p:sp>
+        <p:nvSpPr>
+          <p:cNvPr id="2" name="Slide Image Placeholder 1"/>
+          <p:cNvSpPr>
+            <a:spLocks noGrp="1" noRot="1" noChangeAspect="1"/>
+          </p:cNvSpPr>
+          <p:nvPr>
+            <p:ph type="sldImg"/>
+          </p:nvPr>
+        </p:nvSpPr>
+        <p:spPr/>
+      </p:sp>
+      <p:sp>
+        <p:nvSpPr>
+          <p:cNvPr id="3" name="Notes Placeholder 2"/>
+          <p:cNvSpPr>
+            <a:spLocks noGrp="1"/>
+          </p:cNvSpPr>
+          <p:nvPr>
+            <p:ph type="body" idx="1"/>
+          </p:nvPr>
+        </p:nvSpPr>
+        <p:spPr/>
+        <p:txBody>
+          <a:bodyPr/>
+          <a:lstStyle/>
+          <a:p>
+            <a:r>
+              <a:rPr lang="en-US" dirty="0"/>
+              <a:t/>
+            </a:r>
+            <a:endParaRPr lang="en-US" dirty="0"/>
+          </a:p>
+        </p:txBody>
+      </p:sp>
+      <p:sp>
+        <p:nvSpPr>
+          <p:cNvPr id="4" name="Slide Number Placeholder 3"/>
+          <p:cNvSpPr>
+            <a:spLocks noGrp="1"/>
+          </p:cNvSpPr>
+          <p:nvPr>
+            <p:ph type="sldNum" sz="quarter" idx="10"/>
+          </p:nvPr>
+        </p:nvSpPr>
+        <p:spPr/>
+        <p:txBody>
+          <a:bodyPr/>
+          <a:lstStyle/>
+          <a:p>
+            <a:fld id="{F7021451-1387-4CA6-816F-3879F97B5CBC}" type="slidenum">
+              <a:rPr lang="en-US"/>
+              <a:t>25</a:t>
             </a:fld>
             <a:endParaRPr lang="en-US"/>
           </a:p>
@@ -3121,7 +3210,7 @@
                 <a:ea typeface="Calibri" pitchFamily="34" charset="-122"/>
                 <a:cs typeface="Calibri" pitchFamily="34" charset="-120"/>
               </a:rPr>
-              <a:t>Anemia Workup &amp; Red Cell Disorders</a:t>
+              <a:t>Anemia &amp; Red Cell Disorders</a:t>
             </a:r>
             <a:endParaRPr lang="en-US" sz="4600" dirty="0"/>
           </a:p>
@@ -3160,7 +3249,7 @@
                 <a:ea typeface="Calibri" pitchFamily="34" charset="-122"/>
                 <a:cs typeface="Calibri" pitchFamily="34" charset="-120"/>
               </a:rPr>
-              <a:t>Algorithms, Iron Studies, Hemoglobinopathies, and Hemolysis</a:t>
+              <a:t>A Mechanism-Based Approach, Hemolysis, and Hemoglobinopathies</a:t>
             </a:r>
             <a:endParaRPr lang="en-US" sz="1900" dirty="0"/>
           </a:p>
@@ -3352,7 +3441,7 @@
                 <a:ea typeface="Calibri" pitchFamily="34" charset="-122"/>
                 <a:cs typeface="Calibri" pitchFamily="34" charset="-120"/>
               </a:rPr>
-              <a:t>HEMATOLOGY &amp; COAGULATION   ·   HEMOGLOBIN ANALYSIS</a:t>
+              <a:t>HEMATOLOGY &amp; COAGULATION   ·   MACROCYTIC</a:t>
             </a:r>
             <a:endParaRPr lang="en-US" sz="1100" dirty="0"/>
           </a:p>
@@ -3391,877 +3480,51 @@
                 <a:ea typeface="Calibri" pitchFamily="34" charset="-122"/>
                 <a:cs typeface="Calibri" pitchFamily="34" charset="-120"/>
               </a:rPr>
-              <a:t>Hemoglobinopathy Methods</a:t>
+              <a:t>Megaloblastic vs Non-Megaloblastic</a:t>
             </a:r>
             <a:endParaRPr lang="en-US" sz="3000" dirty="0"/>
           </a:p>
         </p:txBody>
       </p:sp>
-      <p:graphicFrame>
-        <p:nvGraphicFramePr>
-          <p:cNvPr id="11" name="Table 0"/>
-          <p:cNvGraphicFramePr>
-            <a:graphicFrameLocks noGrp="1"/>
-          </p:cNvGraphicFramePr>
-          <p:nvPr>
-            <p:extLst>
-              <p:ext uri="{D42A27DB-BD31-4B8C-83A1-F6EECF244321}">
-                <p14:modId xmlns:p14="http://schemas.microsoft.com/office/powerpoint/2010/main" val="1579011935"/>
-              </p:ext>
-            </p:extLst>
-          </p:nvPr>
-        </p:nvGraphicFramePr>
-        <p:xfrm>
-          <a:off x="566928" y="1463040"/>
-          <a:ext cx="11057839" cy="914400"/>
-        </p:xfrm>
-        <a:graphic>
-          <a:graphicData uri="http://schemas.openxmlformats.org/drawingml/2006/table">
-            <a:tbl>
-              <a:tblPr/>
-              <a:tblGrid>
-                <a:gridCol w="3108960"/>
-                <a:gridCol w="3973068"/>
-                <a:gridCol w="3973068"/>
-              </a:tblGrid>
-              <a:tr h="676656">
-                <a:tc>
-                  <a:txBody>
-                    <a:bodyPr/>
-                    <a:lstStyle/>
-                    <a:p>
-                      <a:pPr algn="ctr" indent="0" marL="0">
-                        <a:buNone/>
-                      </a:pPr>
-                      <a:r>
-                        <a:rPr lang="en-US" sz="1200" b="1" dirty="0">
-                          <a:solidFill>
-                            <a:srgbClr val="FFFFFF"/>
-                          </a:solidFill>
-                          <a:latin typeface="Calibri" pitchFamily="34" charset="0"/>
-                          <a:ea typeface="Calibri" pitchFamily="34" charset="-122"/>
-                          <a:cs typeface="Calibri" pitchFamily="34" charset="-120"/>
-                        </a:rPr>
-                        <a:t>Method</a:t>
-                      </a:r>
-                      <a:endParaRPr lang="en-US" sz="1200" dirty="0">
-                        <a:latin typeface="Calibri" charset="0"/>
-                        <a:ea typeface="Calibri" charset="0"/>
-                        <a:cs typeface="Calibri" charset="0"/>
-                      </a:endParaRPr>
-                    </a:p>
-                  </a:txBody>
-                  <a:tcPr marL="91440" marR="91440" marT="45720" marB="45720" anchor="ctr">
-                    <a:lnL w="9525" cap="flat" cmpd="sng" algn="ctr">
-                      <a:solidFill>
-                        <a:srgbClr val="DCE4EC"/>
-                      </a:solidFill>
-                      <a:prstDash val="solid"/>
-                      <a:round/>
-                      <a:headEnd type="none" w="med" len="med"/>
-                      <a:tailEnd type="none" w="med" len="med"/>
-                    </a:lnL>
-                    <a:lnR w="9525" cap="flat" cmpd="sng" algn="ctr">
-                      <a:solidFill>
-                        <a:srgbClr val="DCE4EC"/>
-                      </a:solidFill>
-                      <a:prstDash val="solid"/>
-                      <a:round/>
-                      <a:headEnd type="none" w="med" len="med"/>
-                      <a:tailEnd type="none" w="med" len="med"/>
-                    </a:lnR>
-                    <a:lnT w="9525" cap="flat" cmpd="sng" algn="ctr">
-                      <a:solidFill>
-                        <a:srgbClr val="DCE4EC"/>
-                      </a:solidFill>
-                      <a:prstDash val="solid"/>
-                      <a:round/>
-                      <a:headEnd type="none" w="med" len="med"/>
-                      <a:tailEnd type="none" w="med" len="med"/>
-                    </a:lnT>
-                    <a:lnB w="9525" cap="flat" cmpd="sng" algn="ctr">
-                      <a:solidFill>
-                        <a:srgbClr val="DCE4EC"/>
-                      </a:solidFill>
-                      <a:prstDash val="solid"/>
-                      <a:round/>
-                      <a:headEnd type="none" w="med" len="med"/>
-                      <a:tailEnd type="none" w="med" len="med"/>
-                    </a:lnB>
-                    <a:solidFill>
-                      <a:srgbClr val="C62133"/>
-                    </a:solidFill>
-                  </a:tcPr>
-                </a:tc>
-                <a:tc>
-                  <a:txBody>
-                    <a:bodyPr/>
-                    <a:lstStyle/>
-                    <a:p>
-                      <a:pPr algn="ctr" indent="0" marL="0">
-                        <a:buNone/>
-                      </a:pPr>
-                      <a:r>
-                        <a:rPr lang="en-US" sz="1200" b="1" dirty="0">
-                          <a:solidFill>
-                            <a:srgbClr val="FFFFFF"/>
-                          </a:solidFill>
-                          <a:latin typeface="Calibri" pitchFamily="34" charset="0"/>
-                          <a:ea typeface="Calibri" pitchFamily="34" charset="-122"/>
-                          <a:cs typeface="Calibri" pitchFamily="34" charset="-120"/>
-                        </a:rPr>
-                        <a:t>Strength</a:t>
-                      </a:r>
-                      <a:endParaRPr lang="en-US" sz="1200" dirty="0">
-                        <a:latin typeface="Calibri" charset="0"/>
-                        <a:ea typeface="Calibri" charset="0"/>
-                        <a:cs typeface="Calibri" charset="0"/>
-                      </a:endParaRPr>
-                    </a:p>
-                  </a:txBody>
-                  <a:tcPr marL="91440" marR="91440" marT="45720" marB="45720" anchor="ctr">
-                    <a:lnL w="9525" cap="flat" cmpd="sng" algn="ctr">
-                      <a:solidFill>
-                        <a:srgbClr val="DCE4EC"/>
-                      </a:solidFill>
-                      <a:prstDash val="solid"/>
-                      <a:round/>
-                      <a:headEnd type="none" w="med" len="med"/>
-                      <a:tailEnd type="none" w="med" len="med"/>
-                    </a:lnL>
-                    <a:lnR w="9525" cap="flat" cmpd="sng" algn="ctr">
-                      <a:solidFill>
-                        <a:srgbClr val="DCE4EC"/>
-                      </a:solidFill>
-                      <a:prstDash val="solid"/>
-                      <a:round/>
-                      <a:headEnd type="none" w="med" len="med"/>
-                      <a:tailEnd type="none" w="med" len="med"/>
-                    </a:lnR>
-                    <a:lnT w="9525" cap="flat" cmpd="sng" algn="ctr">
-                      <a:solidFill>
-                        <a:srgbClr val="DCE4EC"/>
-                      </a:solidFill>
-                      <a:prstDash val="solid"/>
-                      <a:round/>
-                      <a:headEnd type="none" w="med" len="med"/>
-                      <a:tailEnd type="none" w="med" len="med"/>
-                    </a:lnT>
-                    <a:lnB w="9525" cap="flat" cmpd="sng" algn="ctr">
-                      <a:solidFill>
-                        <a:srgbClr val="DCE4EC"/>
-                      </a:solidFill>
-                      <a:prstDash val="solid"/>
-                      <a:round/>
-                      <a:headEnd type="none" w="med" len="med"/>
-                      <a:tailEnd type="none" w="med" len="med"/>
-                    </a:lnB>
-                    <a:solidFill>
-                      <a:srgbClr val="C62133"/>
-                    </a:solidFill>
-                  </a:tcPr>
-                </a:tc>
-                <a:tc>
-                  <a:txBody>
-                    <a:bodyPr/>
-                    <a:lstStyle/>
-                    <a:p>
-                      <a:pPr algn="ctr" indent="0" marL="0">
-                        <a:buNone/>
-                      </a:pPr>
-                      <a:r>
-                        <a:rPr lang="en-US" sz="1200" b="1" dirty="0">
-                          <a:solidFill>
-                            <a:srgbClr val="FFFFFF"/>
-                          </a:solidFill>
-                          <a:latin typeface="Calibri" pitchFamily="34" charset="0"/>
-                          <a:ea typeface="Calibri" pitchFamily="34" charset="-122"/>
-                          <a:cs typeface="Calibri" pitchFamily="34" charset="-120"/>
-                        </a:rPr>
-                        <a:t>Caveat</a:t>
-                      </a:r>
-                      <a:endParaRPr lang="en-US" sz="1200" dirty="0">
-                        <a:latin typeface="Calibri" charset="0"/>
-                        <a:ea typeface="Calibri" charset="0"/>
-                        <a:cs typeface="Calibri" charset="0"/>
-                      </a:endParaRPr>
-                    </a:p>
-                  </a:txBody>
-                  <a:tcPr marL="91440" marR="91440" marT="45720" marB="45720" anchor="ctr">
-                    <a:lnL w="9525" cap="flat" cmpd="sng" algn="ctr">
-                      <a:solidFill>
-                        <a:srgbClr val="DCE4EC"/>
-                      </a:solidFill>
-                      <a:prstDash val="solid"/>
-                      <a:round/>
-                      <a:headEnd type="none" w="med" len="med"/>
-                      <a:tailEnd type="none" w="med" len="med"/>
-                    </a:lnL>
-                    <a:lnR w="9525" cap="flat" cmpd="sng" algn="ctr">
-                      <a:solidFill>
-                        <a:srgbClr val="DCE4EC"/>
-                      </a:solidFill>
-                      <a:prstDash val="solid"/>
-                      <a:round/>
-                      <a:headEnd type="none" w="med" len="med"/>
-                      <a:tailEnd type="none" w="med" len="med"/>
-                    </a:lnR>
-                    <a:lnT w="9525" cap="flat" cmpd="sng" algn="ctr">
-                      <a:solidFill>
-                        <a:srgbClr val="DCE4EC"/>
-                      </a:solidFill>
-                      <a:prstDash val="solid"/>
-                      <a:round/>
-                      <a:headEnd type="none" w="med" len="med"/>
-                      <a:tailEnd type="none" w="med" len="med"/>
-                    </a:lnT>
-                    <a:lnB w="9525" cap="flat" cmpd="sng" algn="ctr">
-                      <a:solidFill>
-                        <a:srgbClr val="DCE4EC"/>
-                      </a:solidFill>
-                      <a:prstDash val="solid"/>
-                      <a:round/>
-                      <a:headEnd type="none" w="med" len="med"/>
-                      <a:tailEnd type="none" w="med" len="med"/>
-                    </a:lnB>
-                    <a:solidFill>
-                      <a:srgbClr val="C62133"/>
-                    </a:solidFill>
-                  </a:tcPr>
-                </a:tc>
-              </a:tr>
-              <a:tr h="676656">
-                <a:tc>
-                  <a:txBody>
-                    <a:bodyPr/>
-                    <a:lstStyle/>
-                    <a:p>
-                      <a:pPr algn="l" indent="0" marL="0">
-                        <a:buNone/>
-                      </a:pPr>
-                      <a:r>
-                        <a:rPr lang="en-US" sz="1100" b="1" dirty="0">
-                          <a:solidFill>
-                            <a:srgbClr val="1B2A38"/>
-                          </a:solidFill>
-                          <a:latin typeface="Calibri" pitchFamily="34" charset="0"/>
-                          <a:ea typeface="Calibri" pitchFamily="34" charset="-122"/>
-                          <a:cs typeface="Calibri" pitchFamily="34" charset="-120"/>
-                        </a:rPr>
-                        <a:t>HPLC</a:t>
-                      </a:r>
-                      <a:endParaRPr lang="en-US" sz="1100" dirty="0">
-                        <a:latin typeface="Calibri" charset="0"/>
-                        <a:ea typeface="Calibri" charset="0"/>
-                        <a:cs typeface="Calibri" charset="0"/>
-                      </a:endParaRPr>
-                    </a:p>
-                  </a:txBody>
-                  <a:tcPr marL="91440" marR="91440" marT="45720" marB="45720" anchor="ctr">
-                    <a:lnL w="9525" cap="flat" cmpd="sng" algn="ctr">
-                      <a:solidFill>
-                        <a:srgbClr val="DCE4EC"/>
-                      </a:solidFill>
-                      <a:prstDash val="solid"/>
-                      <a:round/>
-                      <a:headEnd type="none" w="med" len="med"/>
-                      <a:tailEnd type="none" w="med" len="med"/>
-                    </a:lnL>
-                    <a:lnR w="9525" cap="flat" cmpd="sng" algn="ctr">
-                      <a:solidFill>
-                        <a:srgbClr val="DCE4EC"/>
-                      </a:solidFill>
-                      <a:prstDash val="solid"/>
-                      <a:round/>
-                      <a:headEnd type="none" w="med" len="med"/>
-                      <a:tailEnd type="none" w="med" len="med"/>
-                    </a:lnR>
-                    <a:lnT w="9525" cap="flat" cmpd="sng" algn="ctr">
-                      <a:solidFill>
-                        <a:srgbClr val="DCE4EC"/>
-                      </a:solidFill>
-                      <a:prstDash val="solid"/>
-                      <a:round/>
-                      <a:headEnd type="none" w="med" len="med"/>
-                      <a:tailEnd type="none" w="med" len="med"/>
-                    </a:lnT>
-                    <a:lnB w="9525" cap="flat" cmpd="sng" algn="ctr">
-                      <a:solidFill>
-                        <a:srgbClr val="DCE4EC"/>
-                      </a:solidFill>
-                      <a:prstDash val="solid"/>
-                      <a:round/>
-                      <a:headEnd type="none" w="med" len="med"/>
-                      <a:tailEnd type="none" w="med" len="med"/>
-                    </a:lnB>
-                    <a:solidFill>
-                      <a:srgbClr val="F3F7FA"/>
-                    </a:solidFill>
-                  </a:tcPr>
-                </a:tc>
-                <a:tc>
-                  <a:txBody>
-                    <a:bodyPr/>
-                    <a:lstStyle/>
-                    <a:p>
-                      <a:pPr algn="ctr" indent="0" marL="0">
-                        <a:buNone/>
-                      </a:pPr>
-                      <a:r>
-                        <a:rPr lang="en-US" sz="1100" dirty="0">
-                          <a:solidFill>
-                            <a:srgbClr val="33444F"/>
-                          </a:solidFill>
-                          <a:latin typeface="Calibri" pitchFamily="34" charset="0"/>
-                          <a:ea typeface="Calibri" pitchFamily="34" charset="-122"/>
-                          <a:cs typeface="Calibri" pitchFamily="34" charset="-120"/>
-                        </a:rPr>
-                        <a:t>Accurate Hb A2 and Hb F quantitation; good first-line</a:t>
-                      </a:r>
-                      <a:endParaRPr lang="en-US" sz="1100" dirty="0">
-                        <a:latin typeface="Calibri" charset="0"/>
-                        <a:ea typeface="Calibri" charset="0"/>
-                        <a:cs typeface="Calibri" charset="0"/>
-                      </a:endParaRPr>
-                    </a:p>
-                  </a:txBody>
-                  <a:tcPr marL="91440" marR="91440" marT="45720" marB="45720" anchor="ctr">
-                    <a:lnL w="9525" cap="flat" cmpd="sng" algn="ctr">
-                      <a:solidFill>
-                        <a:srgbClr val="DCE4EC"/>
-                      </a:solidFill>
-                      <a:prstDash val="solid"/>
-                      <a:round/>
-                      <a:headEnd type="none" w="med" len="med"/>
-                      <a:tailEnd type="none" w="med" len="med"/>
-                    </a:lnL>
-                    <a:lnR w="9525" cap="flat" cmpd="sng" algn="ctr">
-                      <a:solidFill>
-                        <a:srgbClr val="DCE4EC"/>
-                      </a:solidFill>
-                      <a:prstDash val="solid"/>
-                      <a:round/>
-                      <a:headEnd type="none" w="med" len="med"/>
-                      <a:tailEnd type="none" w="med" len="med"/>
-                    </a:lnR>
-                    <a:lnT w="9525" cap="flat" cmpd="sng" algn="ctr">
-                      <a:solidFill>
-                        <a:srgbClr val="DCE4EC"/>
-                      </a:solidFill>
-                      <a:prstDash val="solid"/>
-                      <a:round/>
-                      <a:headEnd type="none" w="med" len="med"/>
-                      <a:tailEnd type="none" w="med" len="med"/>
-                    </a:lnT>
-                    <a:lnB w="9525" cap="flat" cmpd="sng" algn="ctr">
-                      <a:solidFill>
-                        <a:srgbClr val="DCE4EC"/>
-                      </a:solidFill>
-                      <a:prstDash val="solid"/>
-                      <a:round/>
-                      <a:headEnd type="none" w="med" len="med"/>
-                      <a:tailEnd type="none" w="med" len="med"/>
-                    </a:lnB>
-                    <a:solidFill>
-                      <a:srgbClr val="F3F7FA"/>
-                    </a:solidFill>
-                  </a:tcPr>
-                </a:tc>
-                <a:tc>
-                  <a:txBody>
-                    <a:bodyPr/>
-                    <a:lstStyle/>
-                    <a:p>
-                      <a:pPr algn="ctr" indent="0" marL="0">
-                        <a:buNone/>
-                      </a:pPr>
-                      <a:r>
-                        <a:rPr lang="en-US" sz="1100" dirty="0">
-                          <a:solidFill>
-                            <a:srgbClr val="33444F"/>
-                          </a:solidFill>
-                          <a:latin typeface="Calibri" pitchFamily="34" charset="0"/>
-                          <a:ea typeface="Calibri" pitchFamily="34" charset="-122"/>
-                          <a:cs typeface="Calibri" pitchFamily="34" charset="-120"/>
-                        </a:rPr>
-                        <a:t>Hb S adducts interfere with Hb A2; can’t separate Hb A2′ from Hb S or Hb A2 from Hb E on most systems</a:t>
-                      </a:r>
-                      <a:endParaRPr lang="en-US" sz="1100" dirty="0">
-                        <a:latin typeface="Calibri" charset="0"/>
-                        <a:ea typeface="Calibri" charset="0"/>
-                        <a:cs typeface="Calibri" charset="0"/>
-                      </a:endParaRPr>
-                    </a:p>
-                  </a:txBody>
-                  <a:tcPr marL="91440" marR="91440" marT="45720" marB="45720" anchor="ctr">
-                    <a:lnL w="9525" cap="flat" cmpd="sng" algn="ctr">
-                      <a:solidFill>
-                        <a:srgbClr val="DCE4EC"/>
-                      </a:solidFill>
-                      <a:prstDash val="solid"/>
-                      <a:round/>
-                      <a:headEnd type="none" w="med" len="med"/>
-                      <a:tailEnd type="none" w="med" len="med"/>
-                    </a:lnL>
-                    <a:lnR w="9525" cap="flat" cmpd="sng" algn="ctr">
-                      <a:solidFill>
-                        <a:srgbClr val="DCE4EC"/>
-                      </a:solidFill>
-                      <a:prstDash val="solid"/>
-                      <a:round/>
-                      <a:headEnd type="none" w="med" len="med"/>
-                      <a:tailEnd type="none" w="med" len="med"/>
-                    </a:lnR>
-                    <a:lnT w="9525" cap="flat" cmpd="sng" algn="ctr">
-                      <a:solidFill>
-                        <a:srgbClr val="DCE4EC"/>
-                      </a:solidFill>
-                      <a:prstDash val="solid"/>
-                      <a:round/>
-                      <a:headEnd type="none" w="med" len="med"/>
-                      <a:tailEnd type="none" w="med" len="med"/>
-                    </a:lnT>
-                    <a:lnB w="9525" cap="flat" cmpd="sng" algn="ctr">
-                      <a:solidFill>
-                        <a:srgbClr val="DCE4EC"/>
-                      </a:solidFill>
-                      <a:prstDash val="solid"/>
-                      <a:round/>
-                      <a:headEnd type="none" w="med" len="med"/>
-                      <a:tailEnd type="none" w="med" len="med"/>
-                    </a:lnB>
-                    <a:solidFill>
-                      <a:srgbClr val="F3F7FA"/>
-                    </a:solidFill>
-                  </a:tcPr>
-                </a:tc>
-              </a:tr>
-              <a:tr h="676656">
-                <a:tc>
-                  <a:txBody>
-                    <a:bodyPr/>
-                    <a:lstStyle/>
-                    <a:p>
-                      <a:pPr algn="l" indent="0" marL="0">
-                        <a:buNone/>
-                      </a:pPr>
-                      <a:r>
-                        <a:rPr lang="en-US" sz="1100" b="1" dirty="0">
-                          <a:solidFill>
-                            <a:srgbClr val="1B2A38"/>
-                          </a:solidFill>
-                          <a:latin typeface="Calibri" pitchFamily="34" charset="0"/>
-                          <a:ea typeface="Calibri" pitchFamily="34" charset="-122"/>
-                          <a:cs typeface="Calibri" pitchFamily="34" charset="-120"/>
-                        </a:rPr>
-                        <a:t>Capillary electrophoresis</a:t>
-                      </a:r>
-                      <a:endParaRPr lang="en-US" sz="1100" dirty="0">
-                        <a:latin typeface="Calibri" charset="0"/>
-                        <a:ea typeface="Calibri" charset="0"/>
-                        <a:cs typeface="Calibri" charset="0"/>
-                      </a:endParaRPr>
-                    </a:p>
-                  </a:txBody>
-                  <a:tcPr marL="91440" marR="91440" marT="45720" marB="45720" anchor="ctr">
-                    <a:lnL w="9525" cap="flat" cmpd="sng" algn="ctr">
-                      <a:solidFill>
-                        <a:srgbClr val="DCE4EC"/>
-                      </a:solidFill>
-                      <a:prstDash val="solid"/>
-                      <a:round/>
-                      <a:headEnd type="none" w="med" len="med"/>
-                      <a:tailEnd type="none" w="med" len="med"/>
-                    </a:lnL>
-                    <a:lnR w="9525" cap="flat" cmpd="sng" algn="ctr">
-                      <a:solidFill>
-                        <a:srgbClr val="DCE4EC"/>
-                      </a:solidFill>
-                      <a:prstDash val="solid"/>
-                      <a:round/>
-                      <a:headEnd type="none" w="med" len="med"/>
-                      <a:tailEnd type="none" w="med" len="med"/>
-                    </a:lnR>
-                    <a:lnT w="9525" cap="flat" cmpd="sng" algn="ctr">
-                      <a:solidFill>
-                        <a:srgbClr val="DCE4EC"/>
-                      </a:solidFill>
-                      <a:prstDash val="solid"/>
-                      <a:round/>
-                      <a:headEnd type="none" w="med" len="med"/>
-                      <a:tailEnd type="none" w="med" len="med"/>
-                    </a:lnT>
-                    <a:lnB w="9525" cap="flat" cmpd="sng" algn="ctr">
-                      <a:solidFill>
-                        <a:srgbClr val="DCE4EC"/>
-                      </a:solidFill>
-                      <a:prstDash val="solid"/>
-                      <a:round/>
-                      <a:headEnd type="none" w="med" len="med"/>
-                      <a:tailEnd type="none" w="med" len="med"/>
-                    </a:lnB>
-                    <a:solidFill>
-                      <a:srgbClr val="FFFFFF"/>
-                    </a:solidFill>
-                  </a:tcPr>
-                </a:tc>
-                <a:tc>
-                  <a:txBody>
-                    <a:bodyPr/>
-                    <a:lstStyle/>
-                    <a:p>
-                      <a:pPr algn="ctr" indent="0" marL="0">
-                        <a:buNone/>
-                      </a:pPr>
-                      <a:r>
-                        <a:rPr lang="en-US" sz="1100" dirty="0">
-                          <a:solidFill>
-                            <a:srgbClr val="33444F"/>
-                          </a:solidFill>
-                          <a:latin typeface="Calibri" pitchFamily="34" charset="0"/>
-                          <a:ea typeface="Calibri" pitchFamily="34" charset="-122"/>
-                          <a:cs typeface="Calibri" pitchFamily="34" charset="-120"/>
-                        </a:rPr>
-                        <a:t>Good variant separation; quantifies A2 / F</a:t>
-                      </a:r>
-                      <a:endParaRPr lang="en-US" sz="1100" dirty="0">
-                        <a:latin typeface="Calibri" charset="0"/>
-                        <a:ea typeface="Calibri" charset="0"/>
-                        <a:cs typeface="Calibri" charset="0"/>
-                      </a:endParaRPr>
-                    </a:p>
-                  </a:txBody>
-                  <a:tcPr marL="91440" marR="91440" marT="45720" marB="45720" anchor="ctr">
-                    <a:lnL w="9525" cap="flat" cmpd="sng" algn="ctr">
-                      <a:solidFill>
-                        <a:srgbClr val="DCE4EC"/>
-                      </a:solidFill>
-                      <a:prstDash val="solid"/>
-                      <a:round/>
-                      <a:headEnd type="none" w="med" len="med"/>
-                      <a:tailEnd type="none" w="med" len="med"/>
-                    </a:lnL>
-                    <a:lnR w="9525" cap="flat" cmpd="sng" algn="ctr">
-                      <a:solidFill>
-                        <a:srgbClr val="DCE4EC"/>
-                      </a:solidFill>
-                      <a:prstDash val="solid"/>
-                      <a:round/>
-                      <a:headEnd type="none" w="med" len="med"/>
-                      <a:tailEnd type="none" w="med" len="med"/>
-                    </a:lnR>
-                    <a:lnT w="9525" cap="flat" cmpd="sng" algn="ctr">
-                      <a:solidFill>
-                        <a:srgbClr val="DCE4EC"/>
-                      </a:solidFill>
-                      <a:prstDash val="solid"/>
-                      <a:round/>
-                      <a:headEnd type="none" w="med" len="med"/>
-                      <a:tailEnd type="none" w="med" len="med"/>
-                    </a:lnT>
-                    <a:lnB w="9525" cap="flat" cmpd="sng" algn="ctr">
-                      <a:solidFill>
-                        <a:srgbClr val="DCE4EC"/>
-                      </a:solidFill>
-                      <a:prstDash val="solid"/>
-                      <a:round/>
-                      <a:headEnd type="none" w="med" len="med"/>
-                      <a:tailEnd type="none" w="med" len="med"/>
-                    </a:lnB>
-                    <a:solidFill>
-                      <a:srgbClr val="FFFFFF"/>
-                    </a:solidFill>
-                  </a:tcPr>
-                </a:tc>
-                <a:tc>
-                  <a:txBody>
-                    <a:bodyPr/>
-                    <a:lstStyle/>
-                    <a:p>
-                      <a:pPr algn="ctr" indent="0" marL="0">
-                        <a:buNone/>
-                      </a:pPr>
-                      <a:r>
-                        <a:rPr lang="en-US" sz="1100" dirty="0">
-                          <a:solidFill>
-                            <a:srgbClr val="33444F"/>
-                          </a:solidFill>
-                          <a:latin typeface="Calibri" pitchFamily="34" charset="0"/>
-                          <a:ea typeface="Calibri" pitchFamily="34" charset="-122"/>
-                          <a:cs typeface="Calibri" pitchFamily="34" charset="-120"/>
-                        </a:rPr>
-                        <a:t>Complementary; some variants co-migrate</a:t>
-                      </a:r>
-                      <a:endParaRPr lang="en-US" sz="1100" dirty="0">
-                        <a:latin typeface="Calibri" charset="0"/>
-                        <a:ea typeface="Calibri" charset="0"/>
-                        <a:cs typeface="Calibri" charset="0"/>
-                      </a:endParaRPr>
-                    </a:p>
-                  </a:txBody>
-                  <a:tcPr marL="91440" marR="91440" marT="45720" marB="45720" anchor="ctr">
-                    <a:lnL w="9525" cap="flat" cmpd="sng" algn="ctr">
-                      <a:solidFill>
-                        <a:srgbClr val="DCE4EC"/>
-                      </a:solidFill>
-                      <a:prstDash val="solid"/>
-                      <a:round/>
-                      <a:headEnd type="none" w="med" len="med"/>
-                      <a:tailEnd type="none" w="med" len="med"/>
-                    </a:lnL>
-                    <a:lnR w="9525" cap="flat" cmpd="sng" algn="ctr">
-                      <a:solidFill>
-                        <a:srgbClr val="DCE4EC"/>
-                      </a:solidFill>
-                      <a:prstDash val="solid"/>
-                      <a:round/>
-                      <a:headEnd type="none" w="med" len="med"/>
-                      <a:tailEnd type="none" w="med" len="med"/>
-                    </a:lnR>
-                    <a:lnT w="9525" cap="flat" cmpd="sng" algn="ctr">
-                      <a:solidFill>
-                        <a:srgbClr val="DCE4EC"/>
-                      </a:solidFill>
-                      <a:prstDash val="solid"/>
-                      <a:round/>
-                      <a:headEnd type="none" w="med" len="med"/>
-                      <a:tailEnd type="none" w="med" len="med"/>
-                    </a:lnT>
-                    <a:lnB w="9525" cap="flat" cmpd="sng" algn="ctr">
-                      <a:solidFill>
-                        <a:srgbClr val="DCE4EC"/>
-                      </a:solidFill>
-                      <a:prstDash val="solid"/>
-                      <a:round/>
-                      <a:headEnd type="none" w="med" len="med"/>
-                      <a:tailEnd type="none" w="med" len="med"/>
-                    </a:lnB>
-                    <a:solidFill>
-                      <a:srgbClr val="FFFFFF"/>
-                    </a:solidFill>
-                  </a:tcPr>
-                </a:tc>
-              </a:tr>
-              <a:tr h="676656">
-                <a:tc>
-                  <a:txBody>
-                    <a:bodyPr/>
-                    <a:lstStyle/>
-                    <a:p>
-                      <a:pPr algn="l" indent="0" marL="0">
-                        <a:buNone/>
-                      </a:pPr>
-                      <a:r>
-                        <a:rPr lang="en-US" sz="1100" b="1" dirty="0">
-                          <a:solidFill>
-                            <a:srgbClr val="1B2A38"/>
-                          </a:solidFill>
-                          <a:latin typeface="Calibri" pitchFamily="34" charset="0"/>
-                          <a:ea typeface="Calibri" pitchFamily="34" charset="-122"/>
-                          <a:cs typeface="Calibri" pitchFamily="34" charset="-120"/>
-                        </a:rPr>
-                        <a:t>Gel / alkaline electrophoresis</a:t>
-                      </a:r>
-                      <a:endParaRPr lang="en-US" sz="1100" dirty="0">
-                        <a:latin typeface="Calibri" charset="0"/>
-                        <a:ea typeface="Calibri" charset="0"/>
-                        <a:cs typeface="Calibri" charset="0"/>
-                      </a:endParaRPr>
-                    </a:p>
-                  </a:txBody>
-                  <a:tcPr marL="91440" marR="91440" marT="45720" marB="45720" anchor="ctr">
-                    <a:lnL w="9525" cap="flat" cmpd="sng" algn="ctr">
-                      <a:solidFill>
-                        <a:srgbClr val="DCE4EC"/>
-                      </a:solidFill>
-                      <a:prstDash val="solid"/>
-                      <a:round/>
-                      <a:headEnd type="none" w="med" len="med"/>
-                      <a:tailEnd type="none" w="med" len="med"/>
-                    </a:lnL>
-                    <a:lnR w="9525" cap="flat" cmpd="sng" algn="ctr">
-                      <a:solidFill>
-                        <a:srgbClr val="DCE4EC"/>
-                      </a:solidFill>
-                      <a:prstDash val="solid"/>
-                      <a:round/>
-                      <a:headEnd type="none" w="med" len="med"/>
-                      <a:tailEnd type="none" w="med" len="med"/>
-                    </a:lnR>
-                    <a:lnT w="9525" cap="flat" cmpd="sng" algn="ctr">
-                      <a:solidFill>
-                        <a:srgbClr val="DCE4EC"/>
-                      </a:solidFill>
-                      <a:prstDash val="solid"/>
-                      <a:round/>
-                      <a:headEnd type="none" w="med" len="med"/>
-                      <a:tailEnd type="none" w="med" len="med"/>
-                    </a:lnT>
-                    <a:lnB w="9525" cap="flat" cmpd="sng" algn="ctr">
-                      <a:solidFill>
-                        <a:srgbClr val="DCE4EC"/>
-                      </a:solidFill>
-                      <a:prstDash val="solid"/>
-                      <a:round/>
-                      <a:headEnd type="none" w="med" len="med"/>
-                      <a:tailEnd type="none" w="med" len="med"/>
-                    </a:lnB>
-                    <a:solidFill>
-                      <a:srgbClr val="F3F7FA"/>
-                    </a:solidFill>
-                  </a:tcPr>
-                </a:tc>
-                <a:tc>
-                  <a:txBody>
-                    <a:bodyPr/>
-                    <a:lstStyle/>
-                    <a:p>
-                      <a:pPr algn="ctr" indent="0" marL="0">
-                        <a:buNone/>
-                      </a:pPr>
-                      <a:r>
-                        <a:rPr lang="en-US" sz="1100" dirty="0">
-                          <a:solidFill>
-                            <a:srgbClr val="33444F"/>
-                          </a:solidFill>
-                          <a:latin typeface="Calibri" pitchFamily="34" charset="0"/>
-                          <a:ea typeface="Calibri" pitchFamily="34" charset="-122"/>
-                          <a:cs typeface="Calibri" pitchFamily="34" charset="-120"/>
-                        </a:rPr>
-                        <a:t>Wide availability; visual screen</a:t>
-                      </a:r>
-                      <a:endParaRPr lang="en-US" sz="1100" dirty="0">
-                        <a:latin typeface="Calibri" charset="0"/>
-                        <a:ea typeface="Calibri" charset="0"/>
-                        <a:cs typeface="Calibri" charset="0"/>
-                      </a:endParaRPr>
-                    </a:p>
-                  </a:txBody>
-                  <a:tcPr marL="91440" marR="91440" marT="45720" marB="45720" anchor="ctr">
-                    <a:lnL w="9525" cap="flat" cmpd="sng" algn="ctr">
-                      <a:solidFill>
-                        <a:srgbClr val="DCE4EC"/>
-                      </a:solidFill>
-                      <a:prstDash val="solid"/>
-                      <a:round/>
-                      <a:headEnd type="none" w="med" len="med"/>
-                      <a:tailEnd type="none" w="med" len="med"/>
-                    </a:lnL>
-                    <a:lnR w="9525" cap="flat" cmpd="sng" algn="ctr">
-                      <a:solidFill>
-                        <a:srgbClr val="DCE4EC"/>
-                      </a:solidFill>
-                      <a:prstDash val="solid"/>
-                      <a:round/>
-                      <a:headEnd type="none" w="med" len="med"/>
-                      <a:tailEnd type="none" w="med" len="med"/>
-                    </a:lnR>
-                    <a:lnT w="9525" cap="flat" cmpd="sng" algn="ctr">
-                      <a:solidFill>
-                        <a:srgbClr val="DCE4EC"/>
-                      </a:solidFill>
-                      <a:prstDash val="solid"/>
-                      <a:round/>
-                      <a:headEnd type="none" w="med" len="med"/>
-                      <a:tailEnd type="none" w="med" len="med"/>
-                    </a:lnT>
-                    <a:lnB w="9525" cap="flat" cmpd="sng" algn="ctr">
-                      <a:solidFill>
-                        <a:srgbClr val="DCE4EC"/>
-                      </a:solidFill>
-                      <a:prstDash val="solid"/>
-                      <a:round/>
-                      <a:headEnd type="none" w="med" len="med"/>
-                      <a:tailEnd type="none" w="med" len="med"/>
-                    </a:lnB>
-                    <a:solidFill>
-                      <a:srgbClr val="F3F7FA"/>
-                    </a:solidFill>
-                  </a:tcPr>
-                </a:tc>
-                <a:tc>
-                  <a:txBody>
-                    <a:bodyPr/>
-                    <a:lstStyle/>
-                    <a:p>
-                      <a:pPr algn="ctr" indent="0" marL="0">
-                        <a:buNone/>
-                      </a:pPr>
-                      <a:r>
-                        <a:rPr lang="en-US" sz="1100" dirty="0">
-                          <a:solidFill>
-                            <a:srgbClr val="33444F"/>
-                          </a:solidFill>
-                          <a:latin typeface="Calibri" pitchFamily="34" charset="0"/>
-                          <a:ea typeface="Calibri" pitchFamily="34" charset="-122"/>
-                          <a:cs typeface="Calibri" pitchFamily="34" charset="-120"/>
-                        </a:rPr>
-                        <a:t>Borderline for measuring Hb A2 and Hb F</a:t>
-                      </a:r>
-                      <a:endParaRPr lang="en-US" sz="1100" dirty="0">
-                        <a:latin typeface="Calibri" charset="0"/>
-                        <a:ea typeface="Calibri" charset="0"/>
-                        <a:cs typeface="Calibri" charset="0"/>
-                      </a:endParaRPr>
-                    </a:p>
-                  </a:txBody>
-                  <a:tcPr marL="91440" marR="91440" marT="45720" marB="45720" anchor="ctr">
-                    <a:lnL w="9525" cap="flat" cmpd="sng" algn="ctr">
-                      <a:solidFill>
-                        <a:srgbClr val="DCE4EC"/>
-                      </a:solidFill>
-                      <a:prstDash val="solid"/>
-                      <a:round/>
-                      <a:headEnd type="none" w="med" len="med"/>
-                      <a:tailEnd type="none" w="med" len="med"/>
-                    </a:lnL>
-                    <a:lnR w="9525" cap="flat" cmpd="sng" algn="ctr">
-                      <a:solidFill>
-                        <a:srgbClr val="DCE4EC"/>
-                      </a:solidFill>
-                      <a:prstDash val="solid"/>
-                      <a:round/>
-                      <a:headEnd type="none" w="med" len="med"/>
-                      <a:tailEnd type="none" w="med" len="med"/>
-                    </a:lnR>
-                    <a:lnT w="9525" cap="flat" cmpd="sng" algn="ctr">
-                      <a:solidFill>
-                        <a:srgbClr val="DCE4EC"/>
-                      </a:solidFill>
-                      <a:prstDash val="solid"/>
-                      <a:round/>
-                      <a:headEnd type="none" w="med" len="med"/>
-                      <a:tailEnd type="none" w="med" len="med"/>
-                    </a:lnT>
-                    <a:lnB w="9525" cap="flat" cmpd="sng" algn="ctr">
-                      <a:solidFill>
-                        <a:srgbClr val="DCE4EC"/>
-                      </a:solidFill>
-                      <a:prstDash val="solid"/>
-                      <a:round/>
-                      <a:headEnd type="none" w="med" len="med"/>
-                      <a:tailEnd type="none" w="med" len="med"/>
-                    </a:lnB>
-                    <a:solidFill>
-                      <a:srgbClr val="F3F7FA"/>
-                    </a:solidFill>
-                  </a:tcPr>
-                </a:tc>
-              </a:tr>
-            </a:tbl>
-          </a:graphicData>
-        </a:graphic>
-      </p:graphicFrame>
-      <p:sp>
-        <p:nvSpPr>
-          <p:cNvPr id="5" name="Text 2"/>
-          <p:cNvSpPr/>
-          <p:nvPr/>
-        </p:nvSpPr>
-        <p:spPr>
-          <a:xfrm>
-            <a:off x="566928" y="6016752"/>
-            <a:ext cx="11057839" cy="365760"/>
+      <p:sp>
+        <p:nvSpPr>
+          <p:cNvPr id="4" name="Shape 2"/>
+          <p:cNvSpPr/>
+          <p:nvPr/>
+        </p:nvSpPr>
+        <p:spPr>
+          <a:xfrm>
+            <a:off x="566928" y="1517904"/>
+            <a:ext cx="5346040" cy="4114800"/>
+          </a:xfrm>
+          <a:prstGeom prst="roundRect">
+            <a:avLst>
+              <a:gd name="adj" fmla="val 2000"/>
+            </a:avLst>
+          </a:prstGeom>
+          <a:solidFill>
+            <a:srgbClr val="FBEAEC"/>
+          </a:solidFill>
+          <a:ln/>
+          <a:effectLst>
+            <a:outerShdw sx="100000" sy="100000" kx="0" ky="0" algn="bl" rotWithShape="0" blurRad="88900" dist="25400" dir="5400000">
+              <a:srgbClr val="22303C">
+                <a:alpha val="12000"/>
+              </a:srgbClr>
+            </a:outerShdw>
+          </a:effectLst>
+        </p:spPr>
+      </p:sp>
+      <p:sp>
+        <p:nvSpPr>
+          <p:cNvPr id="5" name="Text 3"/>
+          <p:cNvSpPr/>
+          <p:nvPr/>
+        </p:nvSpPr>
+        <p:spPr>
+          <a:xfrm>
+            <a:off x="804672" y="1682496"/>
+            <a:ext cx="4888840" cy="274320"/>
           </a:xfrm>
           <a:prstGeom prst="rect">
             <a:avLst/>
@@ -4273,27 +3536,307 @@
           <a:bodyPr wrap="square" lIns="0" tIns="0" rIns="0" bIns="0" rtlCol="0" anchor="ctr"/>
           <a:lstStyle/>
           <a:p>
-            <a:pPr algn="l" indent="0" marL="0">
-              <a:buNone/>
-            </a:pPr>
-            <a:r>
-              <a:rPr lang="en-US" sz="1050" i="1" dirty="0">
-                <a:solidFill>
-                  <a:srgbClr val="6B7B8A"/>
-                </a:solidFill>
-                <a:latin typeface="Calibri" pitchFamily="34" charset="0"/>
-                <a:ea typeface="Calibri" pitchFamily="34" charset="-122"/>
-                <a:cs typeface="Calibri" pitchFamily="34" charset="-120"/>
-              </a:rPr>
-              <a:t>Normal adult fractions: Hb A2 2.2–3.4%, Hb F &lt;2%. Elevated Hb A2 is the hallmark of β-thalassemia trait. (Dept. teaching: D. Keren, Hemoglobinopathy Evaluation.)</a:t>
-            </a:r>
-            <a:endParaRPr lang="en-US" sz="1050" dirty="0"/>
-          </a:p>
-        </p:txBody>
-      </p:sp>
-      <p:sp>
-        <p:nvSpPr>
-          <p:cNvPr id="6" name="Text 3"/>
+            <a:pPr indent="0" marL="0">
+              <a:buNone/>
+            </a:pPr>
+            <a:r>
+              <a:rPr lang="en-US" sz="1200" b="1" spc="100" kern="0" dirty="0">
+                <a:solidFill>
+                  <a:srgbClr val="8E1622"/>
+                </a:solidFill>
+                <a:latin typeface="Calibri" pitchFamily="34" charset="0"/>
+                <a:ea typeface="Calibri" pitchFamily="34" charset="-122"/>
+                <a:cs typeface="Calibri" pitchFamily="34" charset="-120"/>
+              </a:rPr>
+              <a:t>MEGALOBLASTIC</a:t>
+            </a:r>
+            <a:endParaRPr lang="en-US" sz="1200" dirty="0"/>
+          </a:p>
+        </p:txBody>
+      </p:sp>
+      <p:sp>
+        <p:nvSpPr>
+          <p:cNvPr id="6" name="Text 4"/>
+          <p:cNvSpPr/>
+          <p:nvPr/>
+        </p:nvSpPr>
+        <p:spPr>
+          <a:xfrm>
+            <a:off x="804672" y="2029968"/>
+            <a:ext cx="4870552" cy="3474720"/>
+          </a:xfrm>
+          <a:prstGeom prst="rect">
+            <a:avLst/>
+          </a:prstGeom>
+          <a:noFill/>
+          <a:ln/>
+        </p:spPr>
+        <p:txBody>
+          <a:bodyPr wrap="square" lIns="0" tIns="0" rIns="0" bIns="0" rtlCol="0" anchor="t"/>
+          <a:lstStyle/>
+          <a:p>
+            <a:pPr algn="l" marL="177800" indent="-177800">
+              <a:spcAft>
+                <a:spcPts val="900"/>
+              </a:spcAft>
+              <a:buSzPct val="100000"/>
+              <a:buChar char="•"/>
+            </a:pPr>
+            <a:r>
+              <a:rPr lang="en-US" sz="1250" b="1" dirty="0">
+                <a:solidFill>
+                  <a:srgbClr val="1B2A38"/>
+                </a:solidFill>
+                <a:latin typeface="Calibri" pitchFamily="34" charset="0"/>
+                <a:ea typeface="Calibri" pitchFamily="34" charset="-122"/>
+                <a:cs typeface="Calibri" pitchFamily="34" charset="-120"/>
+              </a:rPr>
+              <a:t>B12 or folate deficiency → hypersegmented neutrophils, oval macrocytes.</a:t>
+            </a:r>
+            <a:endParaRPr lang="en-US" sz="1250" dirty="0"/>
+          </a:p>
+          <a:p>
+            <a:pPr algn="l" marL="177800" indent="-177800">
+              <a:spcAft>
+                <a:spcPts val="900"/>
+              </a:spcAft>
+              <a:buSzPct val="100000"/>
+              <a:buChar char="•"/>
+            </a:pPr>
+            <a:r>
+              <a:rPr lang="en-US" sz="1250" dirty="0">
+                <a:solidFill>
+                  <a:srgbClr val="33444F"/>
+                </a:solidFill>
+                <a:latin typeface="Calibri" pitchFamily="34" charset="0"/>
+                <a:ea typeface="Calibri" pitchFamily="34" charset="-122"/>
+                <a:cs typeface="Calibri" pitchFamily="34" charset="-120"/>
+              </a:rPr>
+              <a:t>May cause pancytopenia and elevated LDH/indirect bilirubin (ineffective erythropoiesis).</a:t>
+            </a:r>
+            <a:endParaRPr lang="en-US" sz="1250" dirty="0"/>
+          </a:p>
+          <a:p>
+            <a:pPr algn="l" marL="177800" indent="-177800">
+              <a:spcAft>
+                <a:spcPts val="900"/>
+              </a:spcAft>
+              <a:buSzPct val="100000"/>
+              <a:buChar char="•"/>
+            </a:pPr>
+            <a:r>
+              <a:rPr lang="en-US" sz="1250" dirty="0">
+                <a:solidFill>
+                  <a:srgbClr val="33444F"/>
+                </a:solidFill>
+                <a:latin typeface="Calibri" pitchFamily="34" charset="0"/>
+                <a:ea typeface="Calibri" pitchFamily="34" charset="-122"/>
+                <a:cs typeface="Calibri" pitchFamily="34" charset="-120"/>
+              </a:rPr>
+              <a:t>Check B12, folate, methylmalonic acid.</a:t>
+            </a:r>
+            <a:endParaRPr lang="en-US" sz="1250" dirty="0"/>
+          </a:p>
+          <a:p>
+            <a:pPr algn="l" marL="177800" indent="-177800">
+              <a:spcAft>
+                <a:spcPts val="900"/>
+              </a:spcAft>
+              <a:buSzPct val="100000"/>
+              <a:buChar char="•"/>
+            </a:pPr>
+            <a:r>
+              <a:rPr lang="en-US" sz="1250" dirty="0">
+                <a:solidFill>
+                  <a:srgbClr val="33444F"/>
+                </a:solidFill>
+                <a:latin typeface="Calibri" pitchFamily="34" charset="0"/>
+                <a:ea typeface="Calibri" pitchFamily="34" charset="-122"/>
+                <a:cs typeface="Calibri" pitchFamily="34" charset="-120"/>
+              </a:rPr>
+              <a:t>Neurologic features with B12 deficiency.</a:t>
+            </a:r>
+            <a:endParaRPr lang="en-US" sz="1250" dirty="0"/>
+          </a:p>
+        </p:txBody>
+      </p:sp>
+      <p:sp>
+        <p:nvSpPr>
+          <p:cNvPr id="7" name="Shape 5"/>
+          <p:cNvSpPr/>
+          <p:nvPr/>
+        </p:nvSpPr>
+        <p:spPr>
+          <a:xfrm>
+            <a:off x="6278728" y="1517904"/>
+            <a:ext cx="5346040" cy="4114800"/>
+          </a:xfrm>
+          <a:prstGeom prst="roundRect">
+            <a:avLst>
+              <a:gd name="adj" fmla="val 2000"/>
+            </a:avLst>
+          </a:prstGeom>
+          <a:solidFill>
+            <a:srgbClr val="FBE7E9"/>
+          </a:solidFill>
+          <a:ln/>
+          <a:effectLst>
+            <a:outerShdw sx="100000" sy="100000" kx="0" ky="0" algn="bl" rotWithShape="0" blurRad="88900" dist="25400" dir="5400000">
+              <a:srgbClr val="22303C">
+                <a:alpha val="12000"/>
+              </a:srgbClr>
+            </a:outerShdw>
+          </a:effectLst>
+        </p:spPr>
+      </p:sp>
+      <p:sp>
+        <p:nvSpPr>
+          <p:cNvPr id="8" name="Text 6"/>
+          <p:cNvSpPr/>
+          <p:nvPr/>
+        </p:nvSpPr>
+        <p:spPr>
+          <a:xfrm>
+            <a:off x="6516472" y="1682496"/>
+            <a:ext cx="4888840" cy="274320"/>
+          </a:xfrm>
+          <a:prstGeom prst="rect">
+            <a:avLst/>
+          </a:prstGeom>
+          <a:noFill/>
+          <a:ln/>
+        </p:spPr>
+        <p:txBody>
+          <a:bodyPr wrap="square" lIns="0" tIns="0" rIns="0" bIns="0" rtlCol="0" anchor="ctr"/>
+          <a:lstStyle/>
+          <a:p>
+            <a:pPr indent="0" marL="0">
+              <a:buNone/>
+            </a:pPr>
+            <a:r>
+              <a:rPr lang="en-US" sz="1200" b="1" spc="100" kern="0" dirty="0">
+                <a:solidFill>
+                  <a:srgbClr val="8E1622"/>
+                </a:solidFill>
+                <a:latin typeface="Calibri" pitchFamily="34" charset="0"/>
+                <a:ea typeface="Calibri" pitchFamily="34" charset="-122"/>
+                <a:cs typeface="Calibri" pitchFamily="34" charset="-120"/>
+              </a:rPr>
+              <a:t>NON-MEGALOBLASTIC</a:t>
+            </a:r>
+            <a:endParaRPr lang="en-US" sz="1200" dirty="0"/>
+          </a:p>
+        </p:txBody>
+      </p:sp>
+      <p:sp>
+        <p:nvSpPr>
+          <p:cNvPr id="9" name="Text 7"/>
+          <p:cNvSpPr/>
+          <p:nvPr/>
+        </p:nvSpPr>
+        <p:spPr>
+          <a:xfrm>
+            <a:off x="6516472" y="2029968"/>
+            <a:ext cx="4870552" cy="3474720"/>
+          </a:xfrm>
+          <a:prstGeom prst="rect">
+            <a:avLst/>
+          </a:prstGeom>
+          <a:noFill/>
+          <a:ln/>
+        </p:spPr>
+        <p:txBody>
+          <a:bodyPr wrap="square" lIns="0" tIns="0" rIns="0" bIns="0" rtlCol="0" anchor="t"/>
+          <a:lstStyle/>
+          <a:p>
+            <a:pPr algn="l" marL="177800" indent="-177800">
+              <a:spcAft>
+                <a:spcPts val="900"/>
+              </a:spcAft>
+              <a:buSzPct val="100000"/>
+              <a:buChar char="•"/>
+            </a:pPr>
+            <a:r>
+              <a:rPr lang="en-US" sz="1250" b="1" dirty="0">
+                <a:solidFill>
+                  <a:srgbClr val="1B2A38"/>
+                </a:solidFill>
+                <a:latin typeface="Calibri" pitchFamily="34" charset="0"/>
+                <a:ea typeface="Calibri" pitchFamily="34" charset="-122"/>
+                <a:cs typeface="Calibri" pitchFamily="34" charset="-120"/>
+              </a:rPr>
+              <a:t>Liver disease, alcohol, hypothyroidism, reticulocytosis, drugs.</a:t>
+            </a:r>
+            <a:endParaRPr lang="en-US" sz="1250" dirty="0"/>
+          </a:p>
+          <a:p>
+            <a:pPr algn="l" marL="177800" indent="-177800">
+              <a:spcAft>
+                <a:spcPts val="900"/>
+              </a:spcAft>
+              <a:buSzPct val="100000"/>
+              <a:buChar char="•"/>
+            </a:pPr>
+            <a:r>
+              <a:rPr lang="en-US" sz="1250" dirty="0">
+                <a:solidFill>
+                  <a:srgbClr val="33444F"/>
+                </a:solidFill>
+                <a:latin typeface="Calibri" pitchFamily="34" charset="0"/>
+                <a:ea typeface="Calibri" pitchFamily="34" charset="-122"/>
+                <a:cs typeface="Calibri" pitchFamily="34" charset="-120"/>
+              </a:rPr>
+              <a:t>Myelodysplastic syndrome in older patients.</a:t>
+            </a:r>
+            <a:endParaRPr lang="en-US" sz="1250" dirty="0"/>
+          </a:p>
+          <a:p>
+            <a:pPr algn="l" marL="177800" indent="-177800">
+              <a:spcAft>
+                <a:spcPts val="900"/>
+              </a:spcAft>
+              <a:buSzPct val="100000"/>
+              <a:buChar char="•"/>
+            </a:pPr>
+            <a:r>
+              <a:rPr lang="en-US" sz="1250" dirty="0">
+                <a:solidFill>
+                  <a:srgbClr val="33444F"/>
+                </a:solidFill>
+                <a:latin typeface="Calibri" pitchFamily="34" charset="0"/>
+                <a:ea typeface="Calibri" pitchFamily="34" charset="-122"/>
+                <a:cs typeface="Calibri" pitchFamily="34" charset="-120"/>
+              </a:rPr>
+              <a:t>Smear and history distinguish causes.</a:t>
+            </a:r>
+            <a:endParaRPr lang="en-US" sz="1250" dirty="0"/>
+          </a:p>
+          <a:p>
+            <a:pPr algn="l" marL="177800" indent="-177800">
+              <a:spcAft>
+                <a:spcPts val="900"/>
+              </a:spcAft>
+              <a:buSzPct val="100000"/>
+              <a:buChar char="•"/>
+            </a:pPr>
+            <a:r>
+              <a:rPr lang="en-US" sz="1250" dirty="0">
+                <a:solidFill>
+                  <a:srgbClr val="33444F"/>
+                </a:solidFill>
+                <a:latin typeface="Calibri" pitchFamily="34" charset="0"/>
+                <a:ea typeface="Calibri" pitchFamily="34" charset="-122"/>
+                <a:cs typeface="Calibri" pitchFamily="34" charset="-120"/>
+              </a:rPr>
+              <a:t>MDS may need marrow evaluation.</a:t>
+            </a:r>
+            <a:endParaRPr lang="en-US" sz="1250" dirty="0"/>
+          </a:p>
+        </p:txBody>
+      </p:sp>
+      <p:sp>
+        <p:nvSpPr>
+          <p:cNvPr id="10" name="Text 8"/>
           <p:cNvSpPr/>
           <p:nvPr/>
         </p:nvSpPr>
@@ -4332,7 +3875,7 @@
       </p:sp>
       <p:sp>
         <p:nvSpPr>
-          <p:cNvPr id="7" name="Text 4"/>
+          <p:cNvPr id="11" name="Text 9"/>
           <p:cNvSpPr/>
           <p:nvPr/>
         </p:nvSpPr>
@@ -4462,7 +4005,7 @@
                 <a:ea typeface="Calibri" pitchFamily="34" charset="-122"/>
                 <a:cs typeface="Calibri" pitchFamily="34" charset="-120"/>
               </a:rPr>
-              <a:t>HEMATOLOGY &amp; COAGULATION   ·   MACROCYTIC</a:t>
+              <a:t>HEMATOLOGY &amp; COAGULATION   ·   MORPHOLOGY</a:t>
             </a:r>
             <a:endParaRPr lang="en-US" sz="1100" dirty="0"/>
           </a:p>
@@ -4501,7 +4044,7 @@
                 <a:ea typeface="Calibri" pitchFamily="34" charset="-122"/>
                 <a:cs typeface="Calibri" pitchFamily="34" charset="-120"/>
               </a:rPr>
-              <a:t>Megaloblastic vs Non-Megaloblastic</a:t>
+              <a:t>Morphology in Anemia &amp; Hemolysis</a:t>
             </a:r>
             <a:endParaRPr lang="en-US" sz="3000" dirty="0"/>
           </a:p>
@@ -4515,18 +4058,23 @@
         </p:nvSpPr>
         <p:spPr>
           <a:xfrm>
-            <a:off x="566928" y="1517904"/>
-            <a:ext cx="5346040" cy="4114800"/>
+            <a:off x="1066648" y="1481328"/>
+            <a:ext cx="10058400" cy="4187952"/>
           </a:xfrm>
           <a:prstGeom prst="roundRect">
             <a:avLst>
-              <a:gd name="adj" fmla="val 2000"/>
+              <a:gd name="adj" fmla="val 1965"/>
             </a:avLst>
           </a:prstGeom>
           <a:solidFill>
-            <a:srgbClr val="FBEAEC"/>
+            <a:srgbClr val="FFFFFF"/>
           </a:solidFill>
-          <a:ln/>
+          <a:ln w="12700">
+            <a:solidFill>
+              <a:srgbClr val="DCE4EC"/>
+            </a:solidFill>
+            <a:prstDash val="solid"/>
+          </a:ln>
           <a:effectLst>
             <a:outerShdw sx="100000" sy="100000" kx="0" ky="0" algn="bl" rotWithShape="0" blurRad="88900" dist="25400" dir="5400000">
               <a:srgbClr val="22303C">
@@ -4536,55 +4084,40 @@
           </a:effectLst>
         </p:spPr>
       </p:sp>
-      <p:sp>
-        <p:nvSpPr>
-          <p:cNvPr id="5" name="Text 3"/>
-          <p:cNvSpPr/>
-          <p:nvPr/>
-        </p:nvSpPr>
-        <p:spPr>
-          <a:xfrm>
-            <a:off x="804672" y="1682496"/>
-            <a:ext cx="4888840" cy="274320"/>
-          </a:xfrm>
-          <a:prstGeom prst="rect">
-            <a:avLst/>
-          </a:prstGeom>
-          <a:noFill/>
-          <a:ln/>
-        </p:spPr>
-        <p:txBody>
-          <a:bodyPr wrap="square" lIns="0" tIns="0" rIns="0" bIns="0" rtlCol="0" anchor="ctr"/>
-          <a:lstStyle/>
-          <a:p>
-            <a:pPr indent="0" marL="0">
-              <a:buNone/>
-            </a:pPr>
-            <a:r>
-              <a:rPr lang="en-US" sz="1200" b="1" spc="100" kern="0" dirty="0">
-                <a:solidFill>
-                  <a:srgbClr val="8E1622"/>
-                </a:solidFill>
-                <a:latin typeface="Calibri" pitchFamily="34" charset="0"/>
-                <a:ea typeface="Calibri" pitchFamily="34" charset="-122"/>
-                <a:cs typeface="Calibri" pitchFamily="34" charset="-120"/>
-              </a:rPr>
-              <a:t>MEGALOBLASTIC</a:t>
-            </a:r>
-            <a:endParaRPr lang="en-US" sz="1200" dirty="0"/>
-          </a:p>
-        </p:txBody>
-      </p:sp>
-      <p:sp>
-        <p:nvSpPr>
-          <p:cNvPr id="6" name="Text 4"/>
-          <p:cNvSpPr/>
-          <p:nvPr/>
-        </p:nvSpPr>
-        <p:spPr>
-          <a:xfrm>
-            <a:off x="804672" y="2029968"/>
-            <a:ext cx="4870552" cy="3474720"/>
+      <p:pic>
+        <p:nvPicPr>
+          <p:cNvPr id="5" name="Image 0" descr="/tmp/cp_work2/art/heme_morph.png">    </p:cNvPr>
+          <p:cNvPicPr>
+            <a:picLocks noChangeAspect="1"/>
+          </p:cNvPicPr>
+          <p:nvPr/>
+        </p:nvPicPr>
+        <p:blipFill>
+          <a:blip r:embed="rId1"/>
+          <a:stretch>
+            <a:fillRect/>
+          </a:stretch>
+        </p:blipFill>
+        <p:spPr>
+          <a:xfrm>
+            <a:off x="1194664" y="1609344"/>
+            <a:ext cx="9802368" cy="3931920"/>
+          </a:xfrm>
+          <a:prstGeom prst="rect">
+            <a:avLst/>
+          </a:prstGeom>
+        </p:spPr>
+      </p:pic>
+      <p:sp>
+        <p:nvSpPr>
+          <p:cNvPr id="6" name="Text 3"/>
+          <p:cNvSpPr/>
+          <p:nvPr/>
+        </p:nvSpPr>
+        <p:spPr>
+          <a:xfrm>
+            <a:off x="566928" y="5742432"/>
+            <a:ext cx="11057839" cy="365760"/>
           </a:xfrm>
           <a:prstGeom prst="rect">
             <a:avLst/>
@@ -4596,268 +4129,27 @@
           <a:bodyPr wrap="square" lIns="0" tIns="0" rIns="0" bIns="0" rtlCol="0" anchor="t"/>
           <a:lstStyle/>
           <a:p>
-            <a:pPr algn="l" marL="177800" indent="-177800">
-              <a:spcAft>
-                <a:spcPts val="900"/>
-              </a:spcAft>
-              <a:buSzPct val="100000"/>
-              <a:buChar char="•"/>
-            </a:pPr>
-            <a:r>
-              <a:rPr lang="en-US" sz="1250" b="1" dirty="0">
-                <a:solidFill>
-                  <a:srgbClr val="1B2A38"/>
-                </a:solidFill>
-                <a:latin typeface="Calibri" pitchFamily="34" charset="0"/>
-                <a:ea typeface="Calibri" pitchFamily="34" charset="-122"/>
-                <a:cs typeface="Calibri" pitchFamily="34" charset="-120"/>
-              </a:rPr>
-              <a:t>B12/folate deficiency impairing DNA synthesis.</a:t>
-            </a:r>
-            <a:endParaRPr lang="en-US" sz="1250" dirty="0"/>
-          </a:p>
-          <a:p>
-            <a:pPr algn="l" marL="177800" indent="-177800">
-              <a:spcAft>
-                <a:spcPts val="900"/>
-              </a:spcAft>
-              <a:buSzPct val="100000"/>
-              <a:buChar char="•"/>
-            </a:pPr>
-            <a:r>
-              <a:rPr lang="en-US" sz="1250" dirty="0">
-                <a:solidFill>
-                  <a:srgbClr val="33444F"/>
-                </a:solidFill>
-                <a:latin typeface="Calibri" pitchFamily="34" charset="0"/>
-                <a:ea typeface="Calibri" pitchFamily="34" charset="-122"/>
-                <a:cs typeface="Calibri" pitchFamily="34" charset="-120"/>
-              </a:rPr>
-              <a:t>Smear: oval macrocytes and hypersegmented neutrophils.</a:t>
-            </a:r>
-            <a:endParaRPr lang="en-US" sz="1250" dirty="0"/>
-          </a:p>
-          <a:p>
-            <a:pPr algn="l" marL="177800" indent="-177800">
-              <a:spcAft>
-                <a:spcPts val="900"/>
-              </a:spcAft>
-              <a:buSzPct val="100000"/>
-              <a:buChar char="•"/>
-            </a:pPr>
-            <a:r>
-              <a:rPr lang="en-US" sz="1250" dirty="0">
-                <a:solidFill>
-                  <a:srgbClr val="33444F"/>
-                </a:solidFill>
-                <a:latin typeface="Calibri" pitchFamily="34" charset="0"/>
-                <a:ea typeface="Calibri" pitchFamily="34" charset="-122"/>
-                <a:cs typeface="Calibri" pitchFamily="34" charset="-120"/>
-              </a:rPr>
-              <a:t>↑LDH and ↑indirect bilirubin (ineffective erythropoiesis).</a:t>
-            </a:r>
-            <a:endParaRPr lang="en-US" sz="1250" dirty="0"/>
-          </a:p>
-          <a:p>
-            <a:pPr algn="l" marL="177800" indent="-177800">
-              <a:spcAft>
-                <a:spcPts val="900"/>
-              </a:spcAft>
-              <a:buSzPct val="100000"/>
-              <a:buChar char="•"/>
-            </a:pPr>
-            <a:r>
-              <a:rPr lang="en-US" sz="1250" dirty="0">
-                <a:solidFill>
-                  <a:srgbClr val="33444F"/>
-                </a:solidFill>
-                <a:latin typeface="Calibri" pitchFamily="34" charset="0"/>
-                <a:ea typeface="Calibri" pitchFamily="34" charset="-122"/>
-                <a:cs typeface="Calibri" pitchFamily="34" charset="-120"/>
-              </a:rPr>
-              <a:t>B12 deficiency may cause neuropathy; check methylmalonic acid.</a:t>
-            </a:r>
-            <a:endParaRPr lang="en-US" sz="1250" dirty="0"/>
-          </a:p>
-        </p:txBody>
-      </p:sp>
-      <p:sp>
-        <p:nvSpPr>
-          <p:cNvPr id="7" name="Shape 5"/>
-          <p:cNvSpPr/>
-          <p:nvPr/>
-        </p:nvSpPr>
-        <p:spPr>
-          <a:xfrm>
-            <a:off x="6278728" y="1517904"/>
-            <a:ext cx="5346040" cy="4114800"/>
-          </a:xfrm>
-          <a:prstGeom prst="roundRect">
-            <a:avLst>
-              <a:gd name="adj" fmla="val 2000"/>
-            </a:avLst>
-          </a:prstGeom>
-          <a:solidFill>
-            <a:srgbClr val="FBEAEC"/>
-          </a:solidFill>
-          <a:ln/>
-          <a:effectLst>
-            <a:outerShdw sx="100000" sy="100000" kx="0" ky="0" algn="bl" rotWithShape="0" blurRad="88900" dist="25400" dir="5400000">
-              <a:srgbClr val="22303C">
-                <a:alpha val="12000"/>
-              </a:srgbClr>
-            </a:outerShdw>
-          </a:effectLst>
-        </p:spPr>
-      </p:sp>
-      <p:sp>
-        <p:nvSpPr>
-          <p:cNvPr id="8" name="Text 6"/>
-          <p:cNvSpPr/>
-          <p:nvPr/>
-        </p:nvSpPr>
-        <p:spPr>
-          <a:xfrm>
-            <a:off x="6516472" y="1682496"/>
-            <a:ext cx="4888840" cy="274320"/>
-          </a:xfrm>
-          <a:prstGeom prst="rect">
-            <a:avLst/>
-          </a:prstGeom>
-          <a:noFill/>
-          <a:ln/>
-        </p:spPr>
-        <p:txBody>
-          <a:bodyPr wrap="square" lIns="0" tIns="0" rIns="0" bIns="0" rtlCol="0" anchor="ctr"/>
-          <a:lstStyle/>
-          <a:p>
-            <a:pPr indent="0" marL="0">
-              <a:buNone/>
-            </a:pPr>
-            <a:r>
-              <a:rPr lang="en-US" sz="1200" b="1" spc="100" kern="0" dirty="0">
-                <a:solidFill>
-                  <a:srgbClr val="8E1622"/>
-                </a:solidFill>
-                <a:latin typeface="Calibri" pitchFamily="34" charset="0"/>
-                <a:ea typeface="Calibri" pitchFamily="34" charset="-122"/>
-                <a:cs typeface="Calibri" pitchFamily="34" charset="-120"/>
-              </a:rPr>
-              <a:t>NON-MEGALOBLASTIC</a:t>
-            </a:r>
-            <a:endParaRPr lang="en-US" sz="1200" dirty="0"/>
-          </a:p>
-        </p:txBody>
-      </p:sp>
-      <p:sp>
-        <p:nvSpPr>
-          <p:cNvPr id="9" name="Text 7"/>
-          <p:cNvSpPr/>
-          <p:nvPr/>
-        </p:nvSpPr>
-        <p:spPr>
-          <a:xfrm>
-            <a:off x="6516472" y="2029968"/>
-            <a:ext cx="4870552" cy="3474720"/>
-          </a:xfrm>
-          <a:prstGeom prst="rect">
-            <a:avLst/>
-          </a:prstGeom>
-          <a:noFill/>
-          <a:ln/>
-        </p:spPr>
-        <p:txBody>
-          <a:bodyPr wrap="square" lIns="0" tIns="0" rIns="0" bIns="0" rtlCol="0" anchor="t"/>
-          <a:lstStyle/>
-          <a:p>
-            <a:pPr algn="l" marL="177800" indent="-177800">
-              <a:spcAft>
-                <a:spcPts val="900"/>
-              </a:spcAft>
-              <a:buSzPct val="100000"/>
-              <a:buChar char="•"/>
-            </a:pPr>
-            <a:r>
-              <a:rPr lang="en-US" sz="1250" b="1" dirty="0">
-                <a:solidFill>
-                  <a:srgbClr val="1B2A38"/>
-                </a:solidFill>
-                <a:latin typeface="Calibri" pitchFamily="34" charset="0"/>
-                <a:ea typeface="Calibri" pitchFamily="34" charset="-122"/>
-                <a:cs typeface="Calibri" pitchFamily="34" charset="-120"/>
-              </a:rPr>
-              <a:t>DNA synthesis intact; macrocytosis from other causes.</a:t>
-            </a:r>
-            <a:endParaRPr lang="en-US" sz="1250" dirty="0"/>
-          </a:p>
-          <a:p>
-            <a:pPr algn="l" marL="177800" indent="-177800">
-              <a:spcAft>
-                <a:spcPts val="900"/>
-              </a:spcAft>
-              <a:buSzPct val="100000"/>
-              <a:buChar char="•"/>
-            </a:pPr>
-            <a:r>
-              <a:rPr lang="en-US" sz="1250" dirty="0">
-                <a:solidFill>
-                  <a:srgbClr val="33444F"/>
-                </a:solidFill>
-                <a:latin typeface="Calibri" pitchFamily="34" charset="0"/>
-                <a:ea typeface="Calibri" pitchFamily="34" charset="-122"/>
-                <a:cs typeface="Calibri" pitchFamily="34" charset="-120"/>
-              </a:rPr>
-              <a:t>Alcohol and liver disease (round macrocytes, targets).</a:t>
-            </a:r>
-            <a:endParaRPr lang="en-US" sz="1250" dirty="0"/>
-          </a:p>
-          <a:p>
-            <a:pPr algn="l" marL="177800" indent="-177800">
-              <a:spcAft>
-                <a:spcPts val="900"/>
-              </a:spcAft>
-              <a:buSzPct val="100000"/>
-              <a:buChar char="•"/>
-            </a:pPr>
-            <a:r>
-              <a:rPr lang="en-US" sz="1250" dirty="0">
-                <a:solidFill>
-                  <a:srgbClr val="33444F"/>
-                </a:solidFill>
-                <a:latin typeface="Calibri" pitchFamily="34" charset="0"/>
-                <a:ea typeface="Calibri" pitchFamily="34" charset="-122"/>
-                <a:cs typeface="Calibri" pitchFamily="34" charset="-120"/>
-              </a:rPr>
-              <a:t>Myelodysplastic syndrome (dysplasia, cytopenias).</a:t>
-            </a:r>
-            <a:endParaRPr lang="en-US" sz="1250" dirty="0"/>
-          </a:p>
-          <a:p>
-            <a:pPr algn="l" marL="177800" indent="-177800">
-              <a:spcAft>
-                <a:spcPts val="900"/>
-              </a:spcAft>
-              <a:buSzPct val="100000"/>
-              <a:buChar char="•"/>
-            </a:pPr>
-            <a:r>
-              <a:rPr lang="en-US" sz="1250" dirty="0">
-                <a:solidFill>
-                  <a:srgbClr val="33444F"/>
-                </a:solidFill>
-                <a:latin typeface="Calibri" pitchFamily="34" charset="0"/>
-                <a:ea typeface="Calibri" pitchFamily="34" charset="-122"/>
-                <a:cs typeface="Calibri" pitchFamily="34" charset="-120"/>
-              </a:rPr>
-              <a:t>Brisk reticulocytosis; hypothyroidism; drugs.</a:t>
-            </a:r>
-            <a:endParaRPr lang="en-US" sz="1250" dirty="0"/>
-          </a:p>
-        </p:txBody>
-      </p:sp>
-      <p:sp>
-        <p:nvSpPr>
-          <p:cNvPr id="10" name="Text 8"/>
+            <a:pPr algn="ctr" indent="0" marL="0">
+              <a:buNone/>
+            </a:pPr>
+            <a:r>
+              <a:rPr lang="en-US" sz="1150" i="1" dirty="0">
+                <a:solidFill>
+                  <a:srgbClr val="6B7B8A"/>
+                </a:solidFill>
+                <a:latin typeface="Calibri" pitchFamily="34" charset="0"/>
+                <a:ea typeface="Calibri" pitchFamily="34" charset="-122"/>
+                <a:cs typeface="Calibri" pitchFamily="34" charset="-120"/>
+              </a:rPr>
+              <a:t>Original schematic. Red-cell shape localizes the cause: schistocytes (microangiopathy), spherocytes (immune/HS), bite cells (G6PD), target cells (Hb disorders).</a:t>
+            </a:r>
+            <a:endParaRPr lang="en-US" sz="1150" dirty="0"/>
+          </a:p>
+        </p:txBody>
+      </p:sp>
+      <p:sp>
+        <p:nvSpPr>
+          <p:cNvPr id="7" name="Text 4"/>
           <p:cNvSpPr/>
           <p:nvPr/>
         </p:nvSpPr>
@@ -4896,7 +4188,7 @@
       </p:sp>
       <p:sp>
         <p:nvSpPr>
-          <p:cNvPr id="11" name="Text 9"/>
+          <p:cNvPr id="8" name="Text 5"/>
           <p:cNvSpPr/>
           <p:nvPr/>
         </p:nvSpPr>
@@ -5026,7 +4318,7 @@
                 <a:ea typeface="Calibri" pitchFamily="34" charset="-122"/>
                 <a:cs typeface="Calibri" pitchFamily="34" charset="-120"/>
               </a:rPr>
-              <a:t>HEMATOLOGY &amp; COAGULATION   ·   HEMOLYTIC</a:t>
+              <a:t>HEMATOLOGY &amp; COAGULATION   ·   HEMOLYSIS</a:t>
             </a:r>
             <a:endParaRPr lang="en-US" sz="1100" dirty="0"/>
           </a:p>
@@ -5065,7 +4357,7 @@
                 <a:ea typeface="Calibri" pitchFamily="34" charset="-122"/>
                 <a:cs typeface="Calibri" pitchFamily="34" charset="-120"/>
               </a:rPr>
-              <a:t>Intravascular vs Extravascular and the DAT</a:t>
+              <a:t>Confirming Hemolysis &amp; Hemoglobinopathies</a:t>
             </a:r>
             <a:endParaRPr lang="en-US" sz="3000" dirty="0"/>
           </a:p>
@@ -5133,7 +4425,7 @@
                 <a:ea typeface="Calibri" pitchFamily="34" charset="-122"/>
                 <a:cs typeface="Calibri" pitchFamily="34" charset="-120"/>
               </a:rPr>
-              <a:t>LOCALIZE THE HEMOLYSIS</a:t>
+              <a:t>HEMOLYSIS WORKUP</a:t>
             </a:r>
             <a:endParaRPr lang="en-US" sz="1200" dirty="0"/>
           </a:p>
@@ -5168,7 +4460,7 @@
               <a:buChar char="•"/>
             </a:pPr>
             <a:r>
-              <a:rPr lang="en-US" sz="1250" b="1" dirty="0">
+              <a:rPr lang="en-US" sz="1200" b="1" dirty="0">
                 <a:solidFill>
                   <a:srgbClr val="1B2A38"/>
                 </a:solidFill>
@@ -5176,9 +4468,9 @@
                 <a:ea typeface="Calibri" pitchFamily="34" charset="-122"/>
                 <a:cs typeface="Calibri" pitchFamily="34" charset="-120"/>
               </a:rPr>
-              <a:t>Intravascular: very low haptoglobin, hemoglobinuria, schistocytes (MAHA), severe ↑LDH.</a:t>
-            </a:r>
-            <a:endParaRPr lang="en-US" sz="1250" dirty="0"/>
+              <a:t>Reticulocytosis, high LDH, high indirect bilirubin, LOW haptoglobin.</a:t>
+            </a:r>
+            <a:endParaRPr lang="en-US" sz="1200" dirty="0"/>
           </a:p>
           <a:p>
             <a:pPr algn="l" marL="177800" indent="-177800">
@@ -5189,7 +4481,7 @@
               <a:buChar char="•"/>
             </a:pPr>
             <a:r>
-              <a:rPr lang="en-US" sz="1250" dirty="0">
+              <a:rPr lang="en-US" sz="1200" dirty="0">
                 <a:solidFill>
                   <a:srgbClr val="33444F"/>
                 </a:solidFill>
@@ -5197,9 +4489,9 @@
                 <a:ea typeface="Calibri" pitchFamily="34" charset="-122"/>
                 <a:cs typeface="Calibri" pitchFamily="34" charset="-120"/>
               </a:rPr>
-              <a:t>Extravascular (splenic): spherocytes, milder labs.</a:t>
-            </a:r>
-            <a:endParaRPr lang="en-US" sz="1250" dirty="0"/>
+              <a:t>DAT (Coombs) separates immune from non-immune.</a:t>
+            </a:r>
+            <a:endParaRPr lang="en-US" sz="1200" dirty="0"/>
           </a:p>
           <a:p>
             <a:pPr algn="l" marL="177800" indent="-177800">
@@ -5210,7 +4502,7 @@
               <a:buChar char="•"/>
             </a:pPr>
             <a:r>
-              <a:rPr lang="en-US" sz="1250" dirty="0">
+              <a:rPr lang="en-US" sz="1200" dirty="0">
                 <a:solidFill>
                   <a:srgbClr val="33444F"/>
                 </a:solidFill>
@@ -5218,9 +4510,9 @@
                 <a:ea typeface="Calibri" pitchFamily="34" charset="-122"/>
                 <a:cs typeface="Calibri" pitchFamily="34" charset="-120"/>
               </a:rPr>
-              <a:t>Reticulocytosis indicates marrow response.</a:t>
-            </a:r>
-            <a:endParaRPr lang="en-US" sz="1250" dirty="0"/>
+              <a:t>Smear: schistocytes (microangiopathy), spherocytes (immune/HS), bite cells (G6PD).</a:t>
+            </a:r>
+            <a:endParaRPr lang="en-US" sz="1200" dirty="0"/>
           </a:p>
           <a:p>
             <a:pPr algn="l" marL="177800" indent="-177800">
@@ -5231,7 +4523,7 @@
               <a:buChar char="•"/>
             </a:pPr>
             <a:r>
-              <a:rPr lang="en-US" sz="1250" dirty="0">
+              <a:rPr lang="en-US" sz="1200" dirty="0">
                 <a:solidFill>
                   <a:srgbClr val="33444F"/>
                 </a:solidFill>
@@ -5239,9 +4531,9 @@
                 <a:ea typeface="Calibri" pitchFamily="34" charset="-122"/>
                 <a:cs typeface="Calibri" pitchFamily="34" charset="-120"/>
               </a:rPr>
-              <a:t>Confirm with the LDH/haptoglobin/bilirubin pattern.</a:t>
-            </a:r>
-            <a:endParaRPr lang="en-US" sz="1250" dirty="0"/>
+              <a:t>Identify and treat the cause.</a:t>
+            </a:r>
+            <a:endParaRPr lang="en-US" sz="1200" dirty="0"/>
           </a:p>
         </p:txBody>
       </p:sp>
@@ -5262,7 +4554,7 @@
             </a:avLst>
           </a:prstGeom>
           <a:solidFill>
-            <a:srgbClr val="FBEAEC"/>
+            <a:srgbClr val="FBE7E9"/>
           </a:solidFill>
           <a:ln/>
           <a:effectLst>
@@ -5307,7 +4599,7 @@
                 <a:ea typeface="Calibri" pitchFamily="34" charset="-122"/>
                 <a:cs typeface="Calibri" pitchFamily="34" charset="-120"/>
               </a:rPr>
-              <a:t>THE DAT</a:t>
+              <a:t>HEMOGLOBINOPATHIES</a:t>
             </a:r>
             <a:endParaRPr lang="en-US" sz="1200" dirty="0"/>
           </a:p>
@@ -5342,7 +4634,7 @@
               <a:buChar char="•"/>
             </a:pPr>
             <a:r>
-              <a:rPr lang="en-US" sz="1250" b="1" dirty="0">
+              <a:rPr lang="en-US" sz="1200" b="1" dirty="0">
                 <a:solidFill>
                   <a:srgbClr val="1B2A38"/>
                 </a:solidFill>
@@ -5350,9 +4642,9 @@
                 <a:ea typeface="Calibri" pitchFamily="34" charset="-122"/>
                 <a:cs typeface="Calibri" pitchFamily="34" charset="-120"/>
               </a:rPr>
-              <a:t>DAT distinguishes immune causes.</a:t>
-            </a:r>
-            <a:endParaRPr lang="en-US" sz="1250" dirty="0"/>
+              <a:t>Hemoglobin separation (HPLC/electrophoresis) identifies HbS, HbC, and ↑HbA2 (β-thal trait).</a:t>
+            </a:r>
+            <a:endParaRPr lang="en-US" sz="1200" dirty="0"/>
           </a:p>
           <a:p>
             <a:pPr algn="l" marL="177800" indent="-177800">
@@ -5363,7 +4655,7 @@
               <a:buChar char="•"/>
             </a:pPr>
             <a:r>
-              <a:rPr lang="en-US" sz="1250" dirty="0">
+              <a:rPr lang="en-US" sz="1200" dirty="0">
                 <a:solidFill>
                   <a:srgbClr val="33444F"/>
                 </a:solidFill>
@@ -5371,9 +4663,9 @@
                 <a:ea typeface="Calibri" pitchFamily="34" charset="-122"/>
                 <a:cs typeface="Calibri" pitchFamily="34" charset="-120"/>
               </a:rPr>
-              <a:t>Warm AIHA: IgG ± C3, spherocytes.</a:t>
-            </a:r>
-            <a:endParaRPr lang="en-US" sz="1250" dirty="0"/>
+              <a:t>Sickle solubility screens but does not distinguish trait from disease.</a:t>
+            </a:r>
+            <a:endParaRPr lang="en-US" sz="1200" dirty="0"/>
           </a:p>
           <a:p>
             <a:pPr algn="l" marL="177800" indent="-177800">
@@ -5384,7 +4676,7 @@
               <a:buChar char="•"/>
             </a:pPr>
             <a:r>
-              <a:rPr lang="en-US" sz="1250" dirty="0">
+              <a:rPr lang="en-US" sz="1200" dirty="0">
                 <a:solidFill>
                   <a:srgbClr val="33444F"/>
                 </a:solidFill>
@@ -5392,9 +4684,9 @@
                 <a:ea typeface="Calibri" pitchFamily="34" charset="-122"/>
                 <a:cs typeface="Calibri" pitchFamily="34" charset="-120"/>
               </a:rPr>
-              <a:t>Cold agglutinin disease: C3, agglutination, anti-I.</a:t>
-            </a:r>
-            <a:endParaRPr lang="en-US" sz="1250" dirty="0"/>
+              <a:t>Correlate with CBC, smear, and family/ethnic background.</a:t>
+            </a:r>
+            <a:endParaRPr lang="en-US" sz="1200" dirty="0"/>
           </a:p>
           <a:p>
             <a:pPr algn="l" marL="177800" indent="-177800">
@@ -5405,7 +4697,7 @@
               <a:buChar char="•"/>
             </a:pPr>
             <a:r>
-              <a:rPr lang="en-US" sz="1250" dirty="0">
+              <a:rPr lang="en-US" sz="1200" dirty="0">
                 <a:solidFill>
                   <a:srgbClr val="33444F"/>
                 </a:solidFill>
@@ -5413,9 +4705,9 @@
                 <a:ea typeface="Calibri" pitchFamily="34" charset="-122"/>
                 <a:cs typeface="Calibri" pitchFamily="34" charset="-120"/>
               </a:rPr>
-              <a:t>Hereditary spherocytosis: spherocytes but DAT negative.</a:t>
-            </a:r>
-            <a:endParaRPr lang="en-US" sz="1250" dirty="0"/>
+              <a:t>Confirm structural variants by a second method.</a:t>
+            </a:r>
+            <a:endParaRPr lang="en-US" sz="1200" dirty="0"/>
           </a:p>
         </p:txBody>
       </p:sp>
@@ -5932,7 +5224,7 @@
                 <a:ea typeface="Calibri" pitchFamily="34" charset="-122"/>
                 <a:cs typeface="Calibri" pitchFamily="34" charset="-120"/>
               </a:rPr>
-              <a:t>A 25-year-old man of Mediterranean descent: Hb 11.5, MCV 68 fL, RBC 6.0 × 10¹²/L, RDW 13.5% (normal), normal ferritin; oral iron has not helped.</a:t>
+              <a:t>A young woman has microcytic anemia, high RDW, low ferritin, and high TIBC.</a:t>
             </a:r>
             <a:endParaRPr lang="en-US" sz="1450" dirty="0"/>
           </a:p>
@@ -6039,7 +5331,7 @@
                 <a:ea typeface="Calibri" pitchFamily="34" charset="-122"/>
                 <a:cs typeface="Calibri" pitchFamily="34" charset="-120"/>
               </a:rPr>
-              <a:t>Why has iron failed, what does the Mentzer index suggest, and what confirms the diagnosis?</a:t>
+              <a:t>What is the diagnosis and the essential next step?</a:t>
             </a:r>
             <a:endParaRPr lang="en-US" sz="1500" dirty="0"/>
           </a:p>
@@ -6255,7 +5547,7 @@
                 <a:ea typeface="Calibri" pitchFamily="34" charset="-122"/>
                 <a:cs typeface="Calibri" pitchFamily="34" charset="-120"/>
               </a:rPr>
-              <a:t>Case 1: β-Thalassemia Trait</a:t>
+              <a:t>Case 1: Iron Deficiency</a:t>
             </a:r>
             <a:endParaRPr lang="en-US" sz="3000" dirty="0"/>
           </a:p>
@@ -6298,7 +5590,7 @@
                 <a:ea typeface="Calibri" pitchFamily="34" charset="-122"/>
                 <a:cs typeface="Calibri" pitchFamily="34" charset="-120"/>
               </a:rPr>
-              <a:t>Thalassemia trait, not iron deficiency — iron won’t help and risks overload.</a:t>
+              <a:t>Low ferritin with microcytosis and high RDW confirms iron-deficiency anemia.</a:t>
             </a:r>
             <a:endParaRPr lang="en-US" sz="1400" dirty="0"/>
           </a:p>
@@ -6319,7 +5611,7 @@
                 <a:ea typeface="Calibri" pitchFamily="34" charset="-122"/>
                 <a:cs typeface="Calibri" pitchFamily="34" charset="-120"/>
               </a:rPr>
-              <a:t>Clues: marked microcytosis with mild anemia, high-normal RBC, normal RDW, normal ferritin.</a:t>
+              <a:t>Identify the source of loss (commonly GI in adults).</a:t>
             </a:r>
             <a:endParaRPr lang="en-US" sz="1400" dirty="0"/>
           </a:p>
@@ -6340,7 +5632,7 @@
                 <a:ea typeface="Calibri" pitchFamily="34" charset="-122"/>
                 <a:cs typeface="Calibri" pitchFamily="34" charset="-120"/>
               </a:rPr>
-              <a:t>Mentzer index &lt;13 favors trait.</a:t>
+              <a:t>Treat with iron and confirm a reticulocyte response.</a:t>
             </a:r>
             <a:endParaRPr lang="en-US" sz="1400" dirty="0"/>
           </a:p>
@@ -6361,7 +5653,7 @@
                 <a:ea typeface="Calibri" pitchFamily="34" charset="-122"/>
                 <a:cs typeface="Calibri" pitchFamily="34" charset="-120"/>
               </a:rPr>
-              <a:t>Confirm with hemoglobin analysis: elevated Hb A2 indicates β-thalassemia trait.</a:t>
+              <a:t>Ferritin can be falsely normal in inflammation.</a:t>
             </a:r>
             <a:endParaRPr lang="en-US" sz="1400" dirty="0"/>
           </a:p>
@@ -6471,7 +5763,7 @@
                 <a:ea typeface="Calibri" pitchFamily="34" charset="-122"/>
                 <a:cs typeface="Calibri" pitchFamily="34" charset="-120"/>
               </a:rPr>
-              <a:t>Normal ferritin + normal RDW + high RBC count in a microcytic patient should stop reflexive iron and trigger hemoglobin analysis.</a:t>
+              <a:t>Low ferritin is the most specific test for iron deficiency — then find and treat the cause of loss.</a:t>
             </a:r>
             <a:endParaRPr lang="en-US" sz="1350" dirty="0"/>
           </a:p>
@@ -6797,7 +6089,7 @@
                 <a:ea typeface="Calibri" pitchFamily="34" charset="-122"/>
                 <a:cs typeface="Calibri" pitchFamily="34" charset="-120"/>
               </a:rPr>
-              <a:t>A 58-year-old woman has fatigue and jaundice. Hb 7.8, reticulocytes high, LDH high, haptoglobin low, indirect bilirubin elevated; smear shows spherocytes; DAT positive for IgG.</a:t>
+              <a:t>A patient has microcytosis with a near-normal RDW, high RBC count, and normal iron studies; HbA2 is elevated.</a:t>
             </a:r>
             <a:endParaRPr lang="en-US" sz="1450" dirty="0"/>
           </a:p>
@@ -6904,7 +6196,7 @@
                 <a:ea typeface="Calibri" pitchFamily="34" charset="-122"/>
                 <a:cs typeface="Calibri" pitchFamily="34" charset="-120"/>
               </a:rPr>
-              <a:t>Diagnosis and mechanism from the DAT pattern?</a:t>
+              <a:t>What does this indicate?</a:t>
             </a:r>
             <a:endParaRPr lang="en-US" sz="1500" dirty="0"/>
           </a:p>
@@ -7120,7 +6412,7 @@
                 <a:ea typeface="Calibri" pitchFamily="34" charset="-122"/>
                 <a:cs typeface="Calibri" pitchFamily="34" charset="-120"/>
               </a:rPr>
-              <a:t>Case 2: Warm AIHA</a:t>
+              <a:t>Case 2: Beta-Thalassemia Trait</a:t>
             </a:r>
             <a:endParaRPr lang="en-US" sz="3000" dirty="0"/>
           </a:p>
@@ -7163,7 +6455,7 @@
                 <a:ea typeface="Calibri" pitchFamily="34" charset="-122"/>
                 <a:cs typeface="Calibri" pitchFamily="34" charset="-120"/>
               </a:rPr>
-              <a:t>Warm autoimmune hemolytic anemia — IgG opsonizes red cells for splenic clearance.</a:t>
+              <a:t>Microcytosis with normal iron studies and elevated HbA2 indicates β-thalassemia trait.</a:t>
             </a:r>
             <a:endParaRPr lang="en-US" sz="1400" dirty="0"/>
           </a:p>
@@ -7184,7 +6476,7 @@
                 <a:ea typeface="Calibri" pitchFamily="34" charset="-122"/>
                 <a:cs typeface="Calibri" pitchFamily="34" charset="-120"/>
               </a:rPr>
-              <a:t>The hemolysis pattern is present; spherocytes reflect partial membrane removal.</a:t>
+              <a:t>A high-normal RBC count with disproportionately low MCV is a clue.</a:t>
             </a:r>
             <a:endParaRPr lang="en-US" sz="1400" dirty="0"/>
           </a:p>
@@ -7205,7 +6497,7 @@
                 <a:ea typeface="Calibri" pitchFamily="34" charset="-122"/>
                 <a:cs typeface="Calibri" pitchFamily="34" charset="-120"/>
               </a:rPr>
-              <a:t>DAT positive for IgG (±C3) defines the immune mechanism.</a:t>
+              <a:t>Avoid unnecessary iron therapy.</a:t>
             </a:r>
             <a:endParaRPr lang="en-US" sz="1400" dirty="0"/>
           </a:p>
@@ -7226,7 +6518,7 @@
                 <a:ea typeface="Calibri" pitchFamily="34" charset="-122"/>
                 <a:cs typeface="Calibri" pitchFamily="34" charset="-120"/>
               </a:rPr>
-              <a:t>Investigate for underlying lymphoproliferative/autoimmune disease.</a:t>
+              <a:t>Offer genetic counseling where appropriate.</a:t>
             </a:r>
             <a:endParaRPr lang="en-US" sz="1400" dirty="0"/>
           </a:p>
@@ -7336,7 +6628,7 @@
                 <a:ea typeface="Calibri" pitchFamily="34" charset="-122"/>
                 <a:cs typeface="Calibri" pitchFamily="34" charset="-120"/>
               </a:rPr>
-              <a:t>Spherocytes have two classic causes — hereditary spherocytosis (DAT negative) and warm AIHA (DAT positive). The DAT separates them.</a:t>
+              <a:t>Microcytosis with normal iron studies and ↑HbA2 is β-thalassemia trait — not iron deficiency; do not over-treat with iron.</a:t>
             </a:r>
             <a:endParaRPr lang="en-US" sz="1350" dirty="0"/>
           </a:p>
@@ -7662,7 +6954,7 @@
                 <a:ea typeface="Calibri" pitchFamily="34" charset="-122"/>
                 <a:cs typeface="Calibri" pitchFamily="34" charset="-120"/>
               </a:rPr>
-              <a:t>A 70-year-old man: Hb 9.0, MCV 116 fL, mild pancytopenia, foot paresthesias; smear shows oval macrocytes and hypersegmented neutrophils; LDH high, haptoglobin low.</a:t>
+              <a:t>A patient has anemia with reticulocytosis, high LDH, high indirect bilirubin, and undetectable haptoglobin; the DAT is positive.</a:t>
             </a:r>
             <a:endParaRPr lang="en-US" sz="1450" dirty="0"/>
           </a:p>
@@ -7769,7 +7061,7 @@
                 <a:ea typeface="Calibri" pitchFamily="34" charset="-122"/>
                 <a:cs typeface="Calibri" pitchFamily="34" charset="-120"/>
               </a:rPr>
-              <a:t>Unifying diagnosis and the confirmatory test if the level is borderline?</a:t>
+              <a:t>What is occurring, and what does the DAT add?</a:t>
             </a:r>
             <a:endParaRPr lang="en-US" sz="1500" dirty="0"/>
           </a:p>
@@ -7985,7 +7277,7 @@
                 <a:ea typeface="Calibri" pitchFamily="34" charset="-122"/>
                 <a:cs typeface="Calibri" pitchFamily="34" charset="-120"/>
               </a:rPr>
-              <a:t>Case 3: Vitamin B12 Deficiency</a:t>
+              <a:t>Case 3: Immune Hemolytic Anemia</a:t>
             </a:r>
             <a:endParaRPr lang="en-US" sz="3000" dirty="0"/>
           </a:p>
@@ -8028,7 +7320,7 @@
                 <a:ea typeface="Calibri" pitchFamily="34" charset="-122"/>
                 <a:cs typeface="Calibri" pitchFamily="34" charset="-120"/>
               </a:rPr>
-              <a:t>Megaloblastic anemia from B12 deficiency — macrocytosis, hypersegmented neutrophils, neuropathy.</a:t>
+              <a:t>The pattern indicates hemolysis; a positive DAT identifies an immune (autoimmune) mechanism.</a:t>
             </a:r>
             <a:endParaRPr lang="en-US" sz="1400" dirty="0"/>
           </a:p>
@@ -8049,7 +7341,7 @@
                 <a:ea typeface="Calibri" pitchFamily="34" charset="-122"/>
                 <a:cs typeface="Calibri" pitchFamily="34" charset="-120"/>
               </a:rPr>
-              <a:t>Ineffective erythropoiesis explains the high LDH and low haptoglobin (an intramedullary 'hemolysis' pattern).</a:t>
+              <a:t>Low haptoglobin and high LDH/indirect bilirubin support intravascular/extravascular hemolysis.</a:t>
             </a:r>
             <a:endParaRPr lang="en-US" sz="1400" dirty="0"/>
           </a:p>
@@ -8070,7 +7362,7 @@
                 <a:ea typeface="Calibri" pitchFamily="34" charset="-122"/>
                 <a:cs typeface="Calibri" pitchFamily="34" charset="-120"/>
               </a:rPr>
-              <a:t>Mild pancytopenia can occur in severe deficiency.</a:t>
+              <a:t>Spherocytes may be seen on the smear.</a:t>
             </a:r>
             <a:endParaRPr lang="en-US" sz="1400" dirty="0"/>
           </a:p>
@@ -8091,7 +7383,7 @@
                 <a:ea typeface="Calibri" pitchFamily="34" charset="-122"/>
                 <a:cs typeface="Calibri" pitchFamily="34" charset="-120"/>
               </a:rPr>
-              <a:t>If B12 is borderline, elevated methylmalonic acid confirms deficiency.</a:t>
+              <a:t>Investigate cause (drug, autoimmune, lymphoproliferative).</a:t>
             </a:r>
             <a:endParaRPr lang="en-US" sz="1400" dirty="0"/>
           </a:p>
@@ -8201,7 +7493,7 @@
                 <a:ea typeface="Calibri" pitchFamily="34" charset="-122"/>
                 <a:cs typeface="Calibri" pitchFamily="34" charset="-120"/>
               </a:rPr>
-              <a:t>Megaloblastic anemia can mimic hemolysis biochemically; the smear (hypersegmented neutrophils, oval macrocytes) reveals the real cause.</a:t>
+              <a:t>Hemolysis = high LDH/indirect bilirubin + low haptoglobin + reticulocytosis; the DAT then separates immune from non-immune causes.</a:t>
             </a:r>
             <a:endParaRPr lang="en-US" sz="1350" dirty="0"/>
           </a:p>
@@ -8524,7 +7816,7 @@
                 <a:ea typeface="Calibri" pitchFamily="34" charset="-122"/>
                 <a:cs typeface="Calibri" pitchFamily="34" charset="-120"/>
               </a:rPr>
-              <a:t>Splits anemia into micro-, normo-, and macrocytic</a:t>
+              <a:t>Anchors the initial classification</a:t>
             </a:r>
             <a:endParaRPr lang="en-US" sz="1150" dirty="0"/>
           </a:p>
@@ -8631,7 +7923,7 @@
                 <a:ea typeface="Calibri" pitchFamily="34" charset="-122"/>
                 <a:cs typeface="Calibri" pitchFamily="34" charset="-120"/>
               </a:rPr>
-              <a:t>Separates production failure from loss/destruction</a:t>
+              <a:t>Separates production defects from loss/hemolysis</a:t>
             </a:r>
             <a:endParaRPr lang="en-US" sz="1150" dirty="0"/>
           </a:p>
@@ -8699,7 +7991,7 @@
                 <a:ea typeface="Calibri" pitchFamily="34" charset="-122"/>
                 <a:cs typeface="Calibri" pitchFamily="34" charset="-120"/>
               </a:rPr>
-              <a:t>RDW</a:t>
+              <a:t>HPLC</a:t>
             </a:r>
             <a:endParaRPr lang="en-US" sz="3600" dirty="0"/>
           </a:p>
@@ -8738,7 +8030,7 @@
                 <a:ea typeface="Calibri" pitchFamily="34" charset="-122"/>
                 <a:cs typeface="Calibri" pitchFamily="34" charset="-120"/>
               </a:rPr>
-              <a:t>Often the quickest clue: iron deficiency vs thalassemia trait</a:t>
+              <a:t>Hemoglobinopathies are confirmed by separation methods</a:t>
             </a:r>
             <a:endParaRPr lang="en-US" sz="1150" dirty="0"/>
           </a:p>
@@ -8809,7 +8101,7 @@
                 <a:ea typeface="Calibri" pitchFamily="34" charset="-122"/>
                 <a:cs typeface="Calibri" pitchFamily="34" charset="-120"/>
               </a:rPr>
-              <a:t>A disciplined MCV-and-reticulocyte approach turns a long differential into a short, testable list — and prevents the classic error of iron-treating a thalassemia trait.</a:t>
+              <a:t>Anemia is a finding, not a diagnosis. A mechanism-based approach — size, then marrow response, then targeted testing — efficiently reaches the cause, including the hemoglobinopathies relevant to this region.</a:t>
             </a:r>
             <a:endParaRPr lang="en-US" sz="1450" dirty="0"/>
           </a:p>
@@ -8852,7 +8144,7 @@
                 <a:ea typeface="Calibri" pitchFamily="34" charset="-122"/>
                 <a:cs typeface="Calibri" pitchFamily="34" charset="-120"/>
               </a:rPr>
-              <a:t>Hemolysis is a pattern, not one test: ↑LDH, ↑indirect bilirubin, ↓haptoglobin, reticulocytosis, and the DAT together.</a:t>
+              <a:t>Classify by MCV, then ask the marrow: is the reticulocyte response appropriate? That splits production defects from loss/hemolysis.</a:t>
             </a:r>
             <a:endParaRPr lang="en-US" sz="1300" dirty="0"/>
           </a:p>
@@ -9110,7 +8402,7 @@
                 <a:ea typeface="Calibri" pitchFamily="34" charset="-122"/>
                 <a:cs typeface="Calibri" pitchFamily="34" charset="-120"/>
               </a:rPr>
-              <a:t>A microcytic patient has normal RBC count, normal RDW, normal ferritin, and Mentzer &lt;13. Best next test?</a:t>
+              <a:t>The most specific laboratory marker of iron-deficiency anemia is:</a:t>
             </a:r>
             <a:endParaRPr lang="en-US" sz="1450" dirty="0"/>
           </a:p>
@@ -9152,7 +8444,7 @@
                 <a:ea typeface="Calibri" pitchFamily="34" charset="-122"/>
                 <a:cs typeface="Calibri" pitchFamily="34" charset="-120"/>
               </a:rPr>
-              <a:t>A. A trial of oral iron</a:t>
+              <a:t>A. Serum iron</a:t>
             </a:r>
             <a:endParaRPr lang="en-US" sz="1350" dirty="0"/>
           </a:p>
@@ -9164,15 +8456,15 @@
               <a:buNone/>
             </a:pPr>
             <a:r>
-              <a:rPr lang="en-US" sz="1350" dirty="0">
-                <a:solidFill>
-                  <a:srgbClr val="33444F"/>
-                </a:solidFill>
-                <a:latin typeface="Calibri" pitchFamily="34" charset="0"/>
-                <a:ea typeface="Calibri" pitchFamily="34" charset="-122"/>
-                <a:cs typeface="Calibri" pitchFamily="34" charset="-120"/>
-              </a:rPr>
-              <a:t>B. Bone marrow biopsy</a:t>
+              <a:rPr lang="en-US" sz="1350" b="1" dirty="0">
+                <a:solidFill>
+                  <a:srgbClr val="8E1622"/>
+                </a:solidFill>
+                <a:latin typeface="Calibri" pitchFamily="34" charset="0"/>
+                <a:ea typeface="Calibri" pitchFamily="34" charset="-122"/>
+                <a:cs typeface="Calibri" pitchFamily="34" charset="-120"/>
+              </a:rPr>
+              <a:t>B. Low ferritin</a:t>
             </a:r>
             <a:endParaRPr lang="en-US" sz="1350" dirty="0"/>
           </a:p>
@@ -9184,15 +8476,15 @@
               <a:buNone/>
             </a:pPr>
             <a:r>
-              <a:rPr lang="en-US" sz="1350" b="1" dirty="0">
-                <a:solidFill>
-                  <a:srgbClr val="8E1622"/>
-                </a:solidFill>
-                <a:latin typeface="Calibri" pitchFamily="34" charset="0"/>
-                <a:ea typeface="Calibri" pitchFamily="34" charset="-122"/>
-                <a:cs typeface="Calibri" pitchFamily="34" charset="-120"/>
-              </a:rPr>
-              <a:t>C. Hemoglobin analysis (HPLC / electrophoresis)</a:t>
+              <a:rPr lang="en-US" sz="1350" dirty="0">
+                <a:solidFill>
+                  <a:srgbClr val="33444F"/>
+                </a:solidFill>
+                <a:latin typeface="Calibri" pitchFamily="34" charset="0"/>
+                <a:ea typeface="Calibri" pitchFamily="34" charset="-122"/>
+                <a:cs typeface="Calibri" pitchFamily="34" charset="-120"/>
+              </a:rPr>
+              <a:t>C. MCV</a:t>
             </a:r>
             <a:endParaRPr lang="en-US" sz="1350" dirty="0"/>
           </a:p>
@@ -9212,7 +8504,7 @@
                 <a:ea typeface="Calibri" pitchFamily="34" charset="-122"/>
                 <a:cs typeface="Calibri" pitchFamily="34" charset="-120"/>
               </a:rPr>
-              <a:t>D. Serum erythropoietin</a:t>
+              <a:t>D. RDW</a:t>
             </a:r>
             <a:endParaRPr lang="en-US" sz="1350" dirty="0"/>
           </a:p>
@@ -9232,7 +8524,7 @@
                 <a:ea typeface="Calibri" pitchFamily="34" charset="-122"/>
                 <a:cs typeface="Calibri" pitchFamily="34" charset="-120"/>
               </a:rPr>
-              <a:t>E. Reticulocyte count only</a:t>
+              <a:t>E. Transferrin</a:t>
             </a:r>
             <a:endParaRPr lang="en-US" sz="1350" dirty="0"/>
           </a:p>
@@ -9314,7 +8606,7 @@
                 <a:ea typeface="Calibri" pitchFamily="34" charset="-122"/>
                 <a:cs typeface="Calibri" pitchFamily="34" charset="-120"/>
               </a:rPr>
-              <a:t>C — Hemoglobin analysis</a:t>
+              <a:t>B — Low ferritin</a:t>
             </a:r>
             <a:endParaRPr lang="en-US" sz="1500" dirty="0"/>
           </a:p>
@@ -9356,7 +8648,7 @@
                 <a:ea typeface="Calibri" pitchFamily="34" charset="-122"/>
                 <a:cs typeface="Calibri" pitchFamily="34" charset="-120"/>
               </a:rPr>
-              <a:t>The profile fits thalassemia trait; hemoglobin analysis showing elevated Hb A2 confirms β-thalassemia trait. Empiric iron is inappropriate.</a:t>
+              <a:t>Low ferritin reflects depleted iron stores; note it can be falsely normal as an acute-phase reactant.</a:t>
             </a:r>
             <a:endParaRPr lang="en-US" sz="1250" dirty="0"/>
           </a:p>
@@ -9614,7 +8906,7 @@
                 <a:ea typeface="Calibri" pitchFamily="34" charset="-122"/>
                 <a:cs typeface="Calibri" pitchFamily="34" charset="-120"/>
               </a:rPr>
-              <a:t>Jaundice, high reticulocytes, high LDH, low haptoglobin, spherocytes, and a DAT positive for IgG indicate:</a:t>
+              <a:t>Which best distinguishes β-thalassemia trait from iron deficiency?</a:t>
             </a:r>
             <a:endParaRPr lang="en-US" sz="1450" dirty="0"/>
           </a:p>
@@ -9656,7 +8948,7 @@
                 <a:ea typeface="Calibri" pitchFamily="34" charset="-122"/>
                 <a:cs typeface="Calibri" pitchFamily="34" charset="-120"/>
               </a:rPr>
-              <a:t>A. Hereditary spherocytosis</a:t>
+              <a:t>A. High RDW</a:t>
             </a:r>
             <a:endParaRPr lang="en-US" sz="1350" dirty="0"/>
           </a:p>
@@ -9668,15 +8960,15 @@
               <a:buNone/>
             </a:pPr>
             <a:r>
-              <a:rPr lang="en-US" sz="1350" b="1" dirty="0">
-                <a:solidFill>
-                  <a:srgbClr val="8E1622"/>
-                </a:solidFill>
-                <a:latin typeface="Calibri" pitchFamily="34" charset="0"/>
-                <a:ea typeface="Calibri" pitchFamily="34" charset="-122"/>
-                <a:cs typeface="Calibri" pitchFamily="34" charset="-120"/>
-              </a:rPr>
-              <a:t>B. Warm autoimmune hemolytic anemia</a:t>
+              <a:rPr lang="en-US" sz="1350" dirty="0">
+                <a:solidFill>
+                  <a:srgbClr val="33444F"/>
+                </a:solidFill>
+                <a:latin typeface="Calibri" pitchFamily="34" charset="0"/>
+                <a:ea typeface="Calibri" pitchFamily="34" charset="-122"/>
+                <a:cs typeface="Calibri" pitchFamily="34" charset="-120"/>
+              </a:rPr>
+              <a:t>B. Low ferritin</a:t>
             </a:r>
             <a:endParaRPr lang="en-US" sz="1350" dirty="0"/>
           </a:p>
@@ -9688,15 +8980,15 @@
               <a:buNone/>
             </a:pPr>
             <a:r>
-              <a:rPr lang="en-US" sz="1350" dirty="0">
-                <a:solidFill>
-                  <a:srgbClr val="33444F"/>
-                </a:solidFill>
-                <a:latin typeface="Calibri" pitchFamily="34" charset="0"/>
-                <a:ea typeface="Calibri" pitchFamily="34" charset="-122"/>
-                <a:cs typeface="Calibri" pitchFamily="34" charset="-120"/>
-              </a:rPr>
-              <a:t>C. Microangiopathic hemolysis</a:t>
+              <a:rPr lang="en-US" sz="1350" b="1" dirty="0">
+                <a:solidFill>
+                  <a:srgbClr val="8E1622"/>
+                </a:solidFill>
+                <a:latin typeface="Calibri" pitchFamily="34" charset="0"/>
+                <a:ea typeface="Calibri" pitchFamily="34" charset="-122"/>
+                <a:cs typeface="Calibri" pitchFamily="34" charset="-120"/>
+              </a:rPr>
+              <a:t>C. Elevated HbA2 with normal iron studies</a:t>
             </a:r>
             <a:endParaRPr lang="en-US" sz="1350" dirty="0"/>
           </a:p>
@@ -9716,7 +9008,7 @@
                 <a:ea typeface="Calibri" pitchFamily="34" charset="-122"/>
                 <a:cs typeface="Calibri" pitchFamily="34" charset="-120"/>
               </a:rPr>
-              <a:t>D. G6PD deficiency</a:t>
+              <a:t>D. High TIBC</a:t>
             </a:r>
             <a:endParaRPr lang="en-US" sz="1350" dirty="0"/>
           </a:p>
@@ -9736,7 +9028,7 @@
                 <a:ea typeface="Calibri" pitchFamily="34" charset="-122"/>
                 <a:cs typeface="Calibri" pitchFamily="34" charset="-120"/>
               </a:rPr>
-              <a:t>E. Iron deficiency</a:t>
+              <a:t>E. Low RBC count</a:t>
             </a:r>
             <a:endParaRPr lang="en-US" sz="1350" dirty="0"/>
           </a:p>
@@ -9818,7 +9110,7 @@
                 <a:ea typeface="Calibri" pitchFamily="34" charset="-122"/>
                 <a:cs typeface="Calibri" pitchFamily="34" charset="-120"/>
               </a:rPr>
-              <a:t>B — Warm AIHA</a:t>
+              <a:t>C — ↑HbA2 with normal iron studies</a:t>
             </a:r>
             <a:endParaRPr lang="en-US" sz="1500" dirty="0"/>
           </a:p>
@@ -9860,7 +9152,7 @@
                 <a:ea typeface="Calibri" pitchFamily="34" charset="-122"/>
                 <a:cs typeface="Calibri" pitchFamily="34" charset="-120"/>
               </a:rPr>
-              <a:t>IgG-positive DAT with spherocytes indicates warm AIHA (extravascular). Hereditary spherocytosis has the same smear but a negative DAT.</a:t>
+              <a:t>β-thalassemia trait shows elevated HbA2 and normal iron studies; iron deficiency shows low ferritin and high RDW.</a:t>
             </a:r>
             <a:endParaRPr lang="en-US" sz="1250" dirty="0"/>
           </a:p>
@@ -10118,7 +9410,7 @@
                 <a:ea typeface="Calibri" pitchFamily="34" charset="-122"/>
                 <a:cs typeface="Calibri" pitchFamily="34" charset="-120"/>
               </a:rPr>
-              <a:t>Elevated Hb A2 quantified by HPLC is the laboratory hallmark of:</a:t>
+              <a:t>The triad confirming hemolysis is:</a:t>
             </a:r>
             <a:endParaRPr lang="en-US" sz="1450" dirty="0"/>
           </a:p>
@@ -10160,7 +9452,7 @@
                 <a:ea typeface="Calibri" pitchFamily="34" charset="-122"/>
                 <a:cs typeface="Calibri" pitchFamily="34" charset="-120"/>
               </a:rPr>
-              <a:t>A. α-thalassemia trait</a:t>
+              <a:t>A. High haptoglobin, low LDH, low retic</a:t>
             </a:r>
             <a:endParaRPr lang="en-US" sz="1350" dirty="0"/>
           </a:p>
@@ -10180,7 +9472,7 @@
                 <a:ea typeface="Calibri" pitchFamily="34" charset="-122"/>
                 <a:cs typeface="Calibri" pitchFamily="34" charset="-120"/>
               </a:rPr>
-              <a:t>B. β-thalassemia trait</a:t>
+              <a:t>B. Low haptoglobin, high LDH, high indirect bilirubin</a:t>
             </a:r>
             <a:endParaRPr lang="en-US" sz="1350" dirty="0"/>
           </a:p>
@@ -10200,7 +9492,7 @@
                 <a:ea typeface="Calibri" pitchFamily="34" charset="-122"/>
                 <a:cs typeface="Calibri" pitchFamily="34" charset="-120"/>
               </a:rPr>
-              <a:t>C. Sickle cell trait</a:t>
+              <a:t>C. High ferritin, low MCV</a:t>
             </a:r>
             <a:endParaRPr lang="en-US" sz="1350" dirty="0"/>
           </a:p>
@@ -10220,7 +9512,7 @@
                 <a:ea typeface="Calibri" pitchFamily="34" charset="-122"/>
                 <a:cs typeface="Calibri" pitchFamily="34" charset="-120"/>
               </a:rPr>
-              <a:t>D. Iron deficiency</a:t>
+              <a:t>D. High B12, low folate</a:t>
             </a:r>
             <a:endParaRPr lang="en-US" sz="1350" dirty="0"/>
           </a:p>
@@ -10240,7 +9532,7 @@
                 <a:ea typeface="Calibri" pitchFamily="34" charset="-122"/>
                 <a:cs typeface="Calibri" pitchFamily="34" charset="-120"/>
               </a:rPr>
-              <a:t>E. Hb H disease</a:t>
+              <a:t>E. Low RDW, high MCHC</a:t>
             </a:r>
             <a:endParaRPr lang="en-US" sz="1350" dirty="0"/>
           </a:p>
@@ -10322,7 +9614,7 @@
                 <a:ea typeface="Calibri" pitchFamily="34" charset="-122"/>
                 <a:cs typeface="Calibri" pitchFamily="34" charset="-120"/>
               </a:rPr>
-              <a:t>B — β-thalassemia trait</a:t>
+              <a:t>B — Low haptoglobin, high LDH, high indirect bilirubin</a:t>
             </a:r>
             <a:endParaRPr lang="en-US" sz="1500" dirty="0"/>
           </a:p>
@@ -10364,7 +9656,7 @@
                 <a:ea typeface="Calibri" pitchFamily="34" charset="-122"/>
                 <a:cs typeface="Calibri" pitchFamily="34" charset="-120"/>
               </a:rPr>
-              <a:t>Elevated Hb A2 (normal 2.2–3.4%) marks β-thalassemia trait; HPLC quantifies it accurately, though Hb S/E can interfere and need a complementary method.</a:t>
+              <a:t>Hemolysis releases LDH and bilirubin and consumes haptoglobin, with a compensatory reticulocytosis.</a:t>
             </a:r>
             <a:endParaRPr lang="en-US" sz="1250" dirty="0"/>
           </a:p>
@@ -10487,6 +9779,510 @@
 <file path=ppt/slides/slide23.xml><?xml version="1.0" encoding="utf-8"?>
 <p:sld xmlns:a="http://schemas.openxmlformats.org/drawingml/2006/main" xmlns:r="http://schemas.openxmlformats.org/officeDocument/2006/relationships" xmlns:p="http://schemas.openxmlformats.org/presentationml/2006/main">
   <p:cSld name="Slide 23">
+    <p:bg>
+      <p:bgPr>
+        <a:solidFill>
+          <a:srgbClr val="FFFFFF"/>
+        </a:solidFill>
+      </p:bgPr>
+    </p:bg>
+    <p:spTree>
+      <p:nvGrpSpPr>
+        <p:cNvPr id="1" name=""/>
+        <p:cNvGrpSpPr/>
+        <p:nvPr/>
+      </p:nvGrpSpPr>
+      <p:grpSpPr>
+        <a:xfrm>
+          <a:off x="0" y="0"/>
+          <a:ext cx="0" cy="0"/>
+          <a:chOff x="0" y="0"/>
+          <a:chExt cx="0" cy="0"/>
+        </a:xfrm>
+      </p:grpSpPr>
+      <p:sp>
+        <p:nvSpPr>
+          <p:cNvPr id="2" name="Text 0"/>
+          <p:cNvSpPr/>
+          <p:nvPr/>
+        </p:nvSpPr>
+        <p:spPr>
+          <a:xfrm>
+            <a:off x="566928" y="329184"/>
+            <a:ext cx="10515600" cy="310896"/>
+          </a:xfrm>
+          <a:prstGeom prst="rect">
+            <a:avLst/>
+          </a:prstGeom>
+          <a:noFill/>
+          <a:ln/>
+        </p:spPr>
+        <p:txBody>
+          <a:bodyPr wrap="square" lIns="0" tIns="0" rIns="0" bIns="0" rtlCol="0" anchor="ctr"/>
+          <a:lstStyle/>
+          <a:p>
+            <a:pPr algn="l" indent="0" marL="0">
+              <a:buNone/>
+            </a:pPr>
+            <a:r>
+              <a:rPr lang="en-US" sz="1100" b="1" spc="150" kern="0" dirty="0">
+                <a:solidFill>
+                  <a:srgbClr val="C62133"/>
+                </a:solidFill>
+                <a:latin typeface="Calibri" pitchFamily="34" charset="0"/>
+                <a:ea typeface="Calibri" pitchFamily="34" charset="-122"/>
+                <a:cs typeface="Calibri" pitchFamily="34" charset="-120"/>
+              </a:rPr>
+              <a:t>HEMATOLOGY &amp; COAGULATION   ·   BOARD REVIEW  ·  Q4</a:t>
+            </a:r>
+            <a:endParaRPr lang="en-US" sz="1100" dirty="0"/>
+          </a:p>
+        </p:txBody>
+      </p:sp>
+      <p:sp>
+        <p:nvSpPr>
+          <p:cNvPr id="3" name="Text 1"/>
+          <p:cNvSpPr/>
+          <p:nvPr/>
+        </p:nvSpPr>
+        <p:spPr>
+          <a:xfrm>
+            <a:off x="566928" y="713232"/>
+            <a:ext cx="11064240" cy="749808"/>
+          </a:xfrm>
+          <a:prstGeom prst="rect">
+            <a:avLst/>
+          </a:prstGeom>
+          <a:noFill/>
+          <a:ln/>
+        </p:spPr>
+        <p:txBody>
+          <a:bodyPr wrap="square" lIns="0" tIns="0" rIns="0" bIns="0" rtlCol="0" anchor="ctr"/>
+          <a:lstStyle/>
+          <a:p>
+            <a:pPr algn="l" indent="0" marL="0">
+              <a:buNone/>
+            </a:pPr>
+            <a:r>
+              <a:rPr lang="en-US" sz="2600" b="1" dirty="0">
+                <a:solidFill>
+                  <a:srgbClr val="0E3A5F"/>
+                </a:solidFill>
+                <a:latin typeface="Calibri" pitchFamily="34" charset="0"/>
+                <a:ea typeface="Calibri" pitchFamily="34" charset="-122"/>
+                <a:cs typeface="Calibri" pitchFamily="34" charset="-120"/>
+              </a:rPr>
+              <a:t>Board-Style Review</a:t>
+            </a:r>
+            <a:endParaRPr lang="en-US" sz="2600" dirty="0"/>
+          </a:p>
+        </p:txBody>
+      </p:sp>
+      <p:sp>
+        <p:nvSpPr>
+          <p:cNvPr id="4" name="Text 2"/>
+          <p:cNvSpPr/>
+          <p:nvPr/>
+        </p:nvSpPr>
+        <p:spPr>
+          <a:xfrm>
+            <a:off x="566928" y="1417320"/>
+            <a:ext cx="11057839" cy="914400"/>
+          </a:xfrm>
+          <a:prstGeom prst="rect">
+            <a:avLst/>
+          </a:prstGeom>
+          <a:noFill/>
+          <a:ln/>
+        </p:spPr>
+        <p:txBody>
+          <a:bodyPr wrap="square" lIns="0" tIns="0" rIns="0" bIns="0" rtlCol="0" anchor="t"/>
+          <a:lstStyle/>
+          <a:p>
+            <a:pPr algn="l" indent="0" marL="0">
+              <a:lnSpc>
+                <a:spcPct val="105000"/>
+              </a:lnSpc>
+              <a:buNone/>
+            </a:pPr>
+            <a:r>
+              <a:rPr lang="en-US" sz="1450" b="1" dirty="0">
+                <a:solidFill>
+                  <a:srgbClr val="1B2A38"/>
+                </a:solidFill>
+                <a:latin typeface="Calibri" pitchFamily="34" charset="0"/>
+                <a:ea typeface="Calibri" pitchFamily="34" charset="-122"/>
+                <a:cs typeface="Calibri" pitchFamily="34" charset="-120"/>
+              </a:rPr>
+              <a:t>A positive direct antiglobulin test (DAT) in a hemolytic anemia indicates:</a:t>
+            </a:r>
+            <a:endParaRPr lang="en-US" sz="1450" dirty="0"/>
+          </a:p>
+        </p:txBody>
+      </p:sp>
+      <p:sp>
+        <p:nvSpPr>
+          <p:cNvPr id="5" name="Text 3"/>
+          <p:cNvSpPr/>
+          <p:nvPr/>
+        </p:nvSpPr>
+        <p:spPr>
+          <a:xfrm>
+            <a:off x="658368" y="2395728"/>
+            <a:ext cx="6192390" cy="3017520"/>
+          </a:xfrm>
+          <a:prstGeom prst="rect">
+            <a:avLst/>
+          </a:prstGeom>
+          <a:noFill/>
+          <a:ln/>
+        </p:spPr>
+        <p:txBody>
+          <a:bodyPr wrap="square" lIns="0" tIns="0" rIns="0" bIns="0" rtlCol="0" anchor="t"/>
+          <a:lstStyle/>
+          <a:p>
+            <a:pPr algn="l" indent="0" marL="0">
+              <a:spcAft>
+                <a:spcPts val="600"/>
+              </a:spcAft>
+              <a:buNone/>
+            </a:pPr>
+            <a:r>
+              <a:rPr lang="en-US" sz="1350" dirty="0">
+                <a:solidFill>
+                  <a:srgbClr val="33444F"/>
+                </a:solidFill>
+                <a:latin typeface="Calibri" pitchFamily="34" charset="0"/>
+                <a:ea typeface="Calibri" pitchFamily="34" charset="-122"/>
+                <a:cs typeface="Calibri" pitchFamily="34" charset="-120"/>
+              </a:rPr>
+              <a:t>A. Microangiopathy</a:t>
+            </a:r>
+            <a:endParaRPr lang="en-US" sz="1350" dirty="0"/>
+          </a:p>
+          <a:p>
+            <a:pPr algn="l" indent="0" marL="0">
+              <a:spcAft>
+                <a:spcPts val="600"/>
+              </a:spcAft>
+              <a:buNone/>
+            </a:pPr>
+            <a:r>
+              <a:rPr lang="en-US" sz="1350" b="1" dirty="0">
+                <a:solidFill>
+                  <a:srgbClr val="8E1622"/>
+                </a:solidFill>
+                <a:latin typeface="Calibri" pitchFamily="34" charset="0"/>
+                <a:ea typeface="Calibri" pitchFamily="34" charset="-122"/>
+                <a:cs typeface="Calibri" pitchFamily="34" charset="-120"/>
+              </a:rPr>
+              <a:t>B. An immune (antibody-mediated) mechanism</a:t>
+            </a:r>
+            <a:endParaRPr lang="en-US" sz="1350" dirty="0"/>
+          </a:p>
+          <a:p>
+            <a:pPr algn="l" indent="0" marL="0">
+              <a:spcAft>
+                <a:spcPts val="600"/>
+              </a:spcAft>
+              <a:buNone/>
+            </a:pPr>
+            <a:r>
+              <a:rPr lang="en-US" sz="1350" dirty="0">
+                <a:solidFill>
+                  <a:srgbClr val="33444F"/>
+                </a:solidFill>
+                <a:latin typeface="Calibri" pitchFamily="34" charset="0"/>
+                <a:ea typeface="Calibri" pitchFamily="34" charset="-122"/>
+                <a:cs typeface="Calibri" pitchFamily="34" charset="-120"/>
+              </a:rPr>
+              <a:t>C. G6PD deficiency</a:t>
+            </a:r>
+            <a:endParaRPr lang="en-US" sz="1350" dirty="0"/>
+          </a:p>
+          <a:p>
+            <a:pPr algn="l" indent="0" marL="0">
+              <a:spcAft>
+                <a:spcPts val="600"/>
+              </a:spcAft>
+              <a:buNone/>
+            </a:pPr>
+            <a:r>
+              <a:rPr lang="en-US" sz="1350" dirty="0">
+                <a:solidFill>
+                  <a:srgbClr val="33444F"/>
+                </a:solidFill>
+                <a:latin typeface="Calibri" pitchFamily="34" charset="0"/>
+                <a:ea typeface="Calibri" pitchFamily="34" charset="-122"/>
+                <a:cs typeface="Calibri" pitchFamily="34" charset="-120"/>
+              </a:rPr>
+              <a:t>D. Hereditary spherocytosis</a:t>
+            </a:r>
+            <a:endParaRPr lang="en-US" sz="1350" dirty="0"/>
+          </a:p>
+          <a:p>
+            <a:pPr algn="l" indent="0" marL="0">
+              <a:spcAft>
+                <a:spcPts val="600"/>
+              </a:spcAft>
+              <a:buNone/>
+            </a:pPr>
+            <a:r>
+              <a:rPr lang="en-US" sz="1350" dirty="0">
+                <a:solidFill>
+                  <a:srgbClr val="33444F"/>
+                </a:solidFill>
+                <a:latin typeface="Calibri" pitchFamily="34" charset="0"/>
+                <a:ea typeface="Calibri" pitchFamily="34" charset="-122"/>
+                <a:cs typeface="Calibri" pitchFamily="34" charset="-120"/>
+              </a:rPr>
+              <a:t>E. Thalassemia</a:t>
+            </a:r>
+            <a:endParaRPr lang="en-US" sz="1350" dirty="0"/>
+          </a:p>
+        </p:txBody>
+      </p:sp>
+      <p:sp>
+        <p:nvSpPr>
+          <p:cNvPr id="6" name="Shape 4"/>
+          <p:cNvSpPr/>
+          <p:nvPr/>
+        </p:nvSpPr>
+        <p:spPr>
+          <a:xfrm>
+            <a:off x="7201632" y="2395728"/>
+            <a:ext cx="4423136" cy="3246120"/>
+          </a:xfrm>
+          <a:prstGeom prst="roundRect">
+            <a:avLst>
+              <a:gd name="adj" fmla="val 2535"/>
+            </a:avLst>
+          </a:prstGeom>
+          <a:solidFill>
+            <a:srgbClr val="FBEAEC"/>
+          </a:solidFill>
+          <a:ln/>
+          <a:effectLst>
+            <a:outerShdw sx="100000" sy="100000" kx="0" ky="0" algn="bl" rotWithShape="0" blurRad="88900" dist="25400" dir="5400000">
+              <a:srgbClr val="22303C">
+                <a:alpha val="12000"/>
+              </a:srgbClr>
+            </a:outerShdw>
+          </a:effectLst>
+        </p:spPr>
+      </p:sp>
+      <p:sp>
+        <p:nvSpPr>
+          <p:cNvPr id="7" name="Text 5"/>
+          <p:cNvSpPr/>
+          <p:nvPr/>
+        </p:nvSpPr>
+        <p:spPr>
+          <a:xfrm>
+            <a:off x="7439376" y="2578608"/>
+            <a:ext cx="3965936" cy="457200"/>
+          </a:xfrm>
+          <a:prstGeom prst="rect">
+            <a:avLst/>
+          </a:prstGeom>
+          <a:noFill/>
+          <a:ln/>
+        </p:spPr>
+        <p:txBody>
+          <a:bodyPr wrap="square" lIns="0" tIns="0" rIns="0" bIns="0" rtlCol="0" anchor="ctr"/>
+          <a:lstStyle/>
+          <a:p>
+            <a:pPr indent="0" marL="0">
+              <a:buNone/>
+            </a:pPr>
+            <a:r>
+              <a:rPr lang="en-US" sz="1500" b="1" dirty="0">
+                <a:solidFill>
+                  <a:srgbClr val="C62133"/>
+                </a:solidFill>
+                <a:latin typeface="Calibri" pitchFamily="34" charset="0"/>
+                <a:ea typeface="Calibri" pitchFamily="34" charset="-122"/>
+                <a:cs typeface="Calibri" pitchFamily="34" charset="-120"/>
+              </a:rPr>
+              <a:t>ANSWER  </a:t>
+            </a:r>
+            <a:pPr indent="0" marL="0">
+              <a:buNone/>
+            </a:pPr>
+            <a:r>
+              <a:rPr lang="en-US" sz="1500" b="1" dirty="0">
+                <a:solidFill>
+                  <a:srgbClr val="1B2A38"/>
+                </a:solidFill>
+                <a:latin typeface="Calibri" pitchFamily="34" charset="0"/>
+                <a:ea typeface="Calibri" pitchFamily="34" charset="-122"/>
+                <a:cs typeface="Calibri" pitchFamily="34" charset="-120"/>
+              </a:rPr>
+              <a:t>B — Immune mechanism</a:t>
+            </a:r>
+            <a:endParaRPr lang="en-US" sz="1500" dirty="0"/>
+          </a:p>
+        </p:txBody>
+      </p:sp>
+      <p:sp>
+        <p:nvSpPr>
+          <p:cNvPr id="8" name="Text 6"/>
+          <p:cNvSpPr/>
+          <p:nvPr/>
+        </p:nvSpPr>
+        <p:spPr>
+          <a:xfrm>
+            <a:off x="7439376" y="3127248"/>
+            <a:ext cx="3947648" cy="2377440"/>
+          </a:xfrm>
+          <a:prstGeom prst="rect">
+            <a:avLst/>
+          </a:prstGeom>
+          <a:noFill/>
+          <a:ln/>
+        </p:spPr>
+        <p:txBody>
+          <a:bodyPr wrap="square" lIns="0" tIns="0" rIns="0" bIns="0" rtlCol="0" anchor="t"/>
+          <a:lstStyle/>
+          <a:p>
+            <a:pPr algn="l" indent="0" marL="0">
+              <a:lnSpc>
+                <a:spcPct val="108000"/>
+              </a:lnSpc>
+              <a:buNone/>
+            </a:pPr>
+            <a:r>
+              <a:rPr lang="en-US" sz="1250" dirty="0">
+                <a:solidFill>
+                  <a:srgbClr val="33444F"/>
+                </a:solidFill>
+                <a:latin typeface="Calibri" pitchFamily="34" charset="0"/>
+                <a:ea typeface="Calibri" pitchFamily="34" charset="-122"/>
+                <a:cs typeface="Calibri" pitchFamily="34" charset="-120"/>
+              </a:rPr>
+              <a:t>The DAT detects antibody/complement on red cells, identifying immune-mediated hemolysis.</a:t>
+            </a:r>
+            <a:endParaRPr lang="en-US" sz="1250" dirty="0"/>
+          </a:p>
+        </p:txBody>
+      </p:sp>
+      <p:sp>
+        <p:nvSpPr>
+          <p:cNvPr id="9" name="Text 7"/>
+          <p:cNvSpPr/>
+          <p:nvPr/>
+        </p:nvSpPr>
+        <p:spPr>
+          <a:xfrm>
+            <a:off x="566928" y="6473952"/>
+            <a:ext cx="7772400" cy="274320"/>
+          </a:xfrm>
+          <a:prstGeom prst="rect">
+            <a:avLst/>
+          </a:prstGeom>
+          <a:noFill/>
+          <a:ln/>
+        </p:spPr>
+        <p:txBody>
+          <a:bodyPr wrap="square" lIns="0" tIns="0" rIns="0" bIns="0" rtlCol="0" anchor="ctr"/>
+          <a:lstStyle/>
+          <a:p>
+            <a:pPr algn="l" indent="0" marL="0">
+              <a:buNone/>
+            </a:pPr>
+            <a:r>
+              <a:rPr lang="en-US" sz="850" dirty="0">
+                <a:solidFill>
+                  <a:srgbClr val="9AA8B4"/>
+                </a:solidFill>
+                <a:latin typeface="Calibri" pitchFamily="34" charset="0"/>
+                <a:ea typeface="Calibri" pitchFamily="34" charset="-122"/>
+                <a:cs typeface="Calibri" pitchFamily="34" charset="-120"/>
+              </a:rPr>
+              <a:t>Makassed General Hospital  ·  Department of Laboratory Medicine</a:t>
+            </a:r>
+            <a:endParaRPr lang="en-US" sz="850" dirty="0"/>
+          </a:p>
+        </p:txBody>
+      </p:sp>
+      <p:sp>
+        <p:nvSpPr>
+          <p:cNvPr id="10" name="Text 8"/>
+          <p:cNvSpPr/>
+          <p:nvPr/>
+        </p:nvSpPr>
+        <p:spPr>
+          <a:xfrm>
+            <a:off x="9814255" y="6473952"/>
+            <a:ext cx="1828800" cy="274320"/>
+          </a:xfrm>
+          <a:prstGeom prst="rect">
+            <a:avLst/>
+          </a:prstGeom>
+          <a:noFill/>
+          <a:ln/>
+        </p:spPr>
+        <p:txBody>
+          <a:bodyPr wrap="square" lIns="0" tIns="0" rIns="0" bIns="0" rtlCol="0" anchor="ctr"/>
+          <a:lstStyle/>
+          <a:p>
+            <a:pPr algn="r" indent="0" marL="0">
+              <a:buNone/>
+            </a:pPr>
+            <a:r>
+              <a:rPr lang="en-US" sz="850" dirty="0">
+                <a:solidFill>
+                  <a:srgbClr val="9AA8B4"/>
+                </a:solidFill>
+                <a:latin typeface="Calibri" pitchFamily="34" charset="0"/>
+                <a:ea typeface="Calibri" pitchFamily="34" charset="-122"/>
+                <a:cs typeface="Calibri" pitchFamily="34" charset="-120"/>
+              </a:rPr>
+              <a:t>CP Lecture Series</a:t>
+            </a:r>
+            <a:pPr algn="r" indent="0" marL="0">
+              <a:buNone/>
+            </a:pPr>
+            <a:r>
+              <a:rPr lang="en-US" sz="850" dirty="0">
+                <a:solidFill>
+                  <a:srgbClr val="DCE4EC"/>
+                </a:solidFill>
+                <a:latin typeface="Calibri" pitchFamily="34" charset="0"/>
+                <a:ea typeface="Calibri" pitchFamily="34" charset="-122"/>
+                <a:cs typeface="Calibri" pitchFamily="34" charset="-120"/>
+              </a:rPr>
+              <a:t>   ·   </a:t>
+            </a:r>
+            <a:pPr algn="r" indent="0" marL="0">
+              <a:buNone/>
+            </a:pPr>
+            <a:r>
+              <a:rPr lang="en-US" sz="850" b="1" dirty="0">
+                <a:solidFill>
+                  <a:srgbClr val="C62133"/>
+                </a:solidFill>
+                <a:latin typeface="Calibri" pitchFamily="34" charset="0"/>
+                <a:ea typeface="Calibri" pitchFamily="34" charset="-122"/>
+                <a:cs typeface="Calibri" pitchFamily="34" charset="-120"/>
+              </a:rPr>
+              <a:t>20</a:t>
+            </a:r>
+            <a:endParaRPr lang="en-US" sz="850" dirty="0"/>
+          </a:p>
+        </p:txBody>
+      </p:sp>
+    </p:spTree>
+  </p:cSld>
+  <p:clrMapOvr>
+    <a:masterClrMapping/>
+  </p:clrMapOvr>
+</p:sld>
+</file>
+
+<file path=ppt/slides/slide24.xml><?xml version="1.0" encoding="utf-8"?>
+<p:sld xmlns:a="http://schemas.openxmlformats.org/drawingml/2006/main" xmlns:r="http://schemas.openxmlformats.org/officeDocument/2006/relationships" xmlns:p="http://schemas.openxmlformats.org/presentationml/2006/main">
+  <p:cSld name="Slide 24">
     <p:bg>
       <p:bgPr>
         <a:solidFill>
@@ -10707,7 +10503,7 @@
                 <a:ea typeface="Calibri" pitchFamily="34" charset="-122"/>
                 <a:cs typeface="Calibri" pitchFamily="34" charset="-120"/>
               </a:rPr>
-              <a:t>Start every anemia with MCV and the reticulocyte count.</a:t>
+              <a:t>Classify anemia by MCV, then use the reticulocyte response to separate underproduction from loss/hemolysis.</a:t>
             </a:r>
             <a:endParaRPr lang="en-US" sz="1350" dirty="0"/>
           </a:p>
@@ -10834,7 +10630,7 @@
                 <a:ea typeface="Calibri" pitchFamily="34" charset="-122"/>
                 <a:cs typeface="Calibri" pitchFamily="34" charset="-120"/>
               </a:rPr>
-              <a:t>Low ferritin proves iron deficiency; normal ferritin + normal RDW + high RBC suggests thalassemia trait — don’t reflexively give iron.</a:t>
+              <a:t>Microcytic: low ferritin = iron deficiency (find the source); normal iron + ↑HbA2 = β-thalassemia trait (don’t over-treat with iron).</a:t>
             </a:r>
             <a:endParaRPr lang="en-US" sz="1350" dirty="0"/>
           </a:p>
@@ -10961,7 +10757,7 @@
                 <a:ea typeface="Calibri" pitchFamily="34" charset="-122"/>
                 <a:cs typeface="Calibri" pitchFamily="34" charset="-120"/>
               </a:rPr>
-              <a:t>Confirm hemoglobinopathies with HPLC/electrophoresis; elevated Hb A2 marks β-thalassemia trait.</a:t>
+              <a:t>Macrocytic: distinguish megaloblastic (B12/folate; hypersegmented neutrophils) from non-megaloblastic (liver, alcohol, MDS).</a:t>
             </a:r>
             <a:endParaRPr lang="en-US" sz="1350" dirty="0"/>
           </a:p>
@@ -11088,7 +10884,7 @@
                 <a:ea typeface="Calibri" pitchFamily="34" charset="-122"/>
                 <a:cs typeface="Calibri" pitchFamily="34" charset="-120"/>
               </a:rPr>
-              <a:t>Hemolysis is a pattern (↑LDH, ↑indirect bilirubin, ↓haptoglobin, reticulocytosis), then use the DAT.</a:t>
+              <a:t>Confirm hemolysis with ↑LDH, ↑indirect bilirubin, low haptoglobin, reticulocytosis; the DAT separates immune from non-immune.</a:t>
             </a:r>
             <a:endParaRPr lang="en-US" sz="1350" dirty="0"/>
           </a:p>
@@ -11215,7 +11011,7 @@
                 <a:ea typeface="Calibri" pitchFamily="34" charset="-122"/>
                 <a:cs typeface="Calibri" pitchFamily="34" charset="-120"/>
               </a:rPr>
-              <a:t>Megaloblastic anemia can biochemically mimic hemolysis; the smear reveals the cause.</a:t>
+              <a:t>Confirm hemoglobinopathies with HPLC/electrophoresis and correlate with CBC, smear, and background.</a:t>
             </a:r>
             <a:endParaRPr lang="en-US" sz="1350" dirty="0"/>
           </a:p>
@@ -11293,7 +11089,7 @@
                 <a:ea typeface="Calibri" pitchFamily="34" charset="-122"/>
                 <a:cs typeface="Calibri" pitchFamily="34" charset="-120"/>
               </a:rPr>
-              <a:t>20</a:t>
+              <a:t>21</a:t>
             </a:r>
             <a:endParaRPr lang="en-US" sz="850" dirty="0"/>
           </a:p>
@@ -11307,9 +11103,9 @@
 </p:sld>
 </file>
 
-<file path=ppt/slides/slide24.xml><?xml version="1.0" encoding="utf-8"?>
+<file path=ppt/slides/slide25.xml><?xml version="1.0" encoding="utf-8"?>
 <p:sld xmlns:a="http://schemas.openxmlformats.org/drawingml/2006/main" xmlns:r="http://schemas.openxmlformats.org/officeDocument/2006/relationships" xmlns:p="http://schemas.openxmlformats.org/presentationml/2006/main">
-  <p:cSld name="Slide 24">
+  <p:cSld name="Slide 25">
     <p:bg>
       <p:bgPr>
         <a:solidFill>
@@ -11445,7 +11241,7 @@
                 <a:ea typeface="Calibri" pitchFamily="34" charset="-122"/>
                 <a:cs typeface="Calibri" pitchFamily="34" charset="-120"/>
               </a:rPr>
-              <a:t>1.   Keohane EM, et al. Rodak’s Hematology, 6th ed. Elsevier, 2020.</a:t>
+              <a:t>1.   Keohane E, et al. Rodak’s Hematology, 6th ed.</a:t>
             </a:r>
             <a:endParaRPr lang="en-US" sz="1150" dirty="0"/>
           </a:p>
@@ -11465,7 +11261,7 @@
                 <a:ea typeface="Calibri" pitchFamily="34" charset="-122"/>
                 <a:cs typeface="Calibri" pitchFamily="34" charset="-120"/>
               </a:rPr>
-              <a:t>2.   WHO/CLSI laboratory diagnosis of hemoglobinopathies and thalassemias.</a:t>
+              <a:t>2.   Bain BJ. Blood Cells: A Practical Guide, 6th ed.</a:t>
             </a:r>
             <a:endParaRPr lang="en-US" sz="1150" dirty="0"/>
           </a:p>
@@ -11485,7 +11281,7 @@
                 <a:ea typeface="Calibri" pitchFamily="34" charset="-122"/>
                 <a:cs typeface="Calibri" pitchFamily="34" charset="-120"/>
               </a:rPr>
-              <a:t>3.   Keren DF. Protein/hemoglobin electrophoresis in clinical diagnosis.</a:t>
+              <a:t>3.   Hoffman R, et al. Hematology: Basic Principles and Practice.</a:t>
             </a:r>
             <a:endParaRPr lang="en-US" sz="1150" dirty="0"/>
           </a:p>
@@ -11505,7 +11301,7 @@
                 <a:ea typeface="Calibri" pitchFamily="34" charset="-122"/>
                 <a:cs typeface="Calibri" pitchFamily="34" charset="-120"/>
               </a:rPr>
-              <a:t>4.   Means RT, Glader B. Wintrobe’s Clinical Hematology — anemia (current ed.).</a:t>
+              <a:t>4.   CLSI guidance on hemoglobinopathy testing.</a:t>
             </a:r>
             <a:endParaRPr lang="en-US" sz="1150" dirty="0"/>
           </a:p>
@@ -11611,7 +11407,7 @@
                 <a:ea typeface="Calibri" pitchFamily="34" charset="-122"/>
                 <a:cs typeface="Calibri" pitchFamily="34" charset="-120"/>
               </a:rPr>
-              <a:t>21</a:t>
+              <a:t>22</a:t>
             </a:r>
             <a:endParaRPr lang="en-US" sz="850" dirty="0"/>
           </a:p>
@@ -11855,7 +11651,7 @@
                 <a:ea typeface="Calibri" pitchFamily="34" charset="-122"/>
                 <a:cs typeface="Calibri" pitchFamily="34" charset="-120"/>
               </a:rPr>
-              <a:t>Apply an MCV- and reticulocyte-based algorithm to anemia.</a:t>
+              <a:t>Classify anemia by MCV and reticulocyte response.</a:t>
             </a:r>
             <a:endParaRPr lang="en-US" sz="1350" dirty="0"/>
           </a:p>
@@ -11989,7 +11785,7 @@
                 <a:ea typeface="Calibri" pitchFamily="34" charset="-122"/>
                 <a:cs typeface="Calibri" pitchFamily="34" charset="-120"/>
               </a:rPr>
-              <a:t>Interpret iron studies and distinguish IDA, ACD, and thalassemia trait.</a:t>
+              <a:t>Work up microcytic anemia (iron studies; thalassemia).</a:t>
             </a:r>
             <a:endParaRPr lang="en-US" sz="1350" dirty="0"/>
           </a:p>
@@ -12123,7 +11919,7 @@
                 <a:ea typeface="Calibri" pitchFamily="34" charset="-122"/>
                 <a:cs typeface="Calibri" pitchFamily="34" charset="-120"/>
               </a:rPr>
-              <a:t>Select hemoglobinopathy methods (HPLC, capillary/gel electrophoresis).</a:t>
+              <a:t>Work up macrocytic anemia (B12/folate; MDS).</a:t>
             </a:r>
             <a:endParaRPr lang="en-US" sz="1350" dirty="0"/>
           </a:p>
@@ -12257,7 +12053,7 @@
                 <a:ea typeface="Calibri" pitchFamily="34" charset="-122"/>
                 <a:cs typeface="Calibri" pitchFamily="34" charset="-120"/>
               </a:rPr>
-              <a:t>Work up macrocytic anemia (megaloblastic vs non-megaloblastic).</a:t>
+              <a:t>Recognize and confirm hemolysis.</a:t>
             </a:r>
             <a:endParaRPr lang="en-US" sz="1350" dirty="0"/>
           </a:p>
@@ -12391,7 +12187,7 @@
                 <a:ea typeface="Calibri" pitchFamily="34" charset="-122"/>
                 <a:cs typeface="Calibri" pitchFamily="34" charset="-120"/>
               </a:rPr>
-              <a:t>Construct a hemolysis workup and interpret the DAT.</a:t>
+              <a:t>Interpret hemoglobinopathy testing (HPLC/electrophoresis).</a:t>
             </a:r>
             <a:endParaRPr lang="en-US" sz="1350" dirty="0"/>
           </a:p>
@@ -12525,7 +12321,7 @@
                 <a:ea typeface="Calibri" pitchFamily="34" charset="-122"/>
                 <a:cs typeface="Calibri" pitchFamily="34" charset="-120"/>
               </a:rPr>
-              <a:t>Avoid common pitfalls, including iron-treating thalassemia trait.</a:t>
+              <a:t>Apply a logical, cost-conscious workup.</a:t>
             </a:r>
             <a:endParaRPr lang="en-US" sz="1350" dirty="0"/>
           </a:p>
@@ -12875,7 +12671,7 @@
                 <a:ea typeface="Calibri" pitchFamily="34" charset="-122"/>
                 <a:cs typeface="Calibri" pitchFamily="34" charset="-120"/>
               </a:rPr>
-              <a:t>The anemia algorithm</a:t>
+              <a:t>Classification</a:t>
             </a:r>
             <a:pPr algn="l" indent="0" marL="0">
               <a:buNone/>
@@ -12889,7 +12685,7 @@
                 <a:ea typeface="Calibri" pitchFamily="34" charset="-122"/>
                 <a:cs typeface="Calibri" pitchFamily="34" charset="-120"/>
               </a:rPr>
-              <a:t>   —  MCV × reticulocyte</a:t>
+              <a:t>   —  MCV + reticulocytes</a:t>
             </a:r>
             <a:endParaRPr lang="en-US" sz="1400" dirty="0"/>
           </a:p>
@@ -13016,7 +12812,7 @@
                 <a:ea typeface="Calibri" pitchFamily="34" charset="-122"/>
                 <a:cs typeface="Calibri" pitchFamily="34" charset="-120"/>
               </a:rPr>
-              <a:t>Microcytic anemia</a:t>
+              <a:t>Microcytic</a:t>
             </a:r>
             <a:pPr algn="l" indent="0" marL="0">
               <a:buNone/>
@@ -13030,7 +12826,7 @@
                 <a:ea typeface="Calibri" pitchFamily="34" charset="-122"/>
                 <a:cs typeface="Calibri" pitchFamily="34" charset="-120"/>
               </a:rPr>
-              <a:t>   —  iron studies; IDA/ACD/thalassemia</a:t>
+              <a:t>   —  iron vs thalassemia</a:t>
             </a:r>
             <a:endParaRPr lang="en-US" sz="1400" dirty="0"/>
           </a:p>
@@ -13164,7 +12960,7 @@
                 <a:ea typeface="Calibri" pitchFamily="34" charset="-122"/>
                 <a:cs typeface="Calibri" pitchFamily="34" charset="-120"/>
               </a:rPr>
-              <a:t>Hemoglobinopathy methods</a:t>
+              <a:t>Macrocytic</a:t>
             </a:r>
             <a:pPr algn="l" indent="0" marL="0">
               <a:buNone/>
@@ -13178,7 +12974,7 @@
                 <a:ea typeface="Calibri" pitchFamily="34" charset="-122"/>
                 <a:cs typeface="Calibri" pitchFamily="34" charset="-120"/>
               </a:rPr>
-              <a:t>   —  HPLC, electrophoresis</a:t>
+              <a:t>   —  megaloblastic vs not</a:t>
             </a:r>
             <a:endParaRPr lang="en-US" sz="1400" dirty="0"/>
           </a:p>
@@ -13305,7 +13101,7 @@
                 <a:ea typeface="Calibri" pitchFamily="34" charset="-122"/>
                 <a:cs typeface="Calibri" pitchFamily="34" charset="-120"/>
               </a:rPr>
-              <a:t>Macrocytic &amp; hemolytic</a:t>
+              <a:t>Hemolysis &amp; Hb</a:t>
             </a:r>
             <a:pPr algn="l" indent="0" marL="0">
               <a:buNone/>
@@ -13319,7 +13115,7 @@
                 <a:ea typeface="Calibri" pitchFamily="34" charset="-122"/>
                 <a:cs typeface="Calibri" pitchFamily="34" charset="-120"/>
               </a:rPr>
-              <a:t>   —  megaloblastic, DAT</a:t>
+              <a:t>   —  confirmation and hemoglobinopathies</a:t>
             </a:r>
             <a:endParaRPr lang="en-US" sz="1400" dirty="0"/>
           </a:p>
@@ -13752,7 +13548,7 @@
                 <a:ea typeface="Calibri" pitchFamily="34" charset="-122"/>
                 <a:cs typeface="Calibri" pitchFamily="34" charset="-120"/>
               </a:rPr>
-              <a:t>The Anemia Algorithm</a:t>
+              <a:t>Classifying Anemia</a:t>
             </a:r>
             <a:endParaRPr lang="en-US" sz="3800" dirty="0"/>
           </a:p>
@@ -13823,7 +13619,7 @@
                 <a:ea typeface="Calibri" pitchFamily="34" charset="-122"/>
                 <a:cs typeface="Calibri" pitchFamily="34" charset="-120"/>
               </a:rPr>
-              <a:t>HEMATOLOGY &amp; COAGULATION   ·   THE CORE ALGORITHM</a:t>
+              <a:t>HEMATOLOGY &amp; COAGULATION   ·   APPROACH</a:t>
             </a:r>
             <a:endParaRPr lang="en-US" sz="1100" dirty="0"/>
           </a:p>
@@ -13862,7 +13658,7 @@
                 <a:ea typeface="Calibri" pitchFamily="34" charset="-122"/>
                 <a:cs typeface="Calibri" pitchFamily="34" charset="-120"/>
               </a:rPr>
-              <a:t>MCV and the Reticulocyte Response</a:t>
+              <a:t>The MCV-Based Approach</a:t>
             </a:r>
             <a:endParaRPr lang="en-US" sz="3000" dirty="0"/>
           </a:p>
@@ -13876,18 +13672,23 @@
         </p:nvSpPr>
         <p:spPr>
           <a:xfrm>
-            <a:off x="566928" y="1517904"/>
-            <a:ext cx="5346040" cy="4114800"/>
+            <a:off x="883768" y="1481328"/>
+            <a:ext cx="10424160" cy="4507992"/>
           </a:xfrm>
           <a:prstGeom prst="roundRect">
             <a:avLst>
-              <a:gd name="adj" fmla="val 2000"/>
+              <a:gd name="adj" fmla="val 1826"/>
             </a:avLst>
           </a:prstGeom>
           <a:solidFill>
-            <a:srgbClr val="FBEAEC"/>
+            <a:srgbClr val="FFFFFF"/>
           </a:solidFill>
-          <a:ln/>
+          <a:ln w="12700">
+            <a:solidFill>
+              <a:srgbClr val="DCE4EC"/>
+            </a:solidFill>
+            <a:prstDash val="solid"/>
+          </a:ln>
           <a:effectLst>
             <a:outerShdw sx="100000" sy="100000" kx="0" ky="0" algn="bl" rotWithShape="0" blurRad="88900" dist="25400" dir="5400000">
               <a:srgbClr val="22303C">
@@ -13897,55 +13698,40 @@
           </a:effectLst>
         </p:spPr>
       </p:sp>
-      <p:sp>
-        <p:nvSpPr>
-          <p:cNvPr id="5" name="Text 3"/>
-          <p:cNvSpPr/>
-          <p:nvPr/>
-        </p:nvSpPr>
-        <p:spPr>
-          <a:xfrm>
-            <a:off x="804672" y="1682496"/>
-            <a:ext cx="4888840" cy="274320"/>
-          </a:xfrm>
-          <a:prstGeom prst="rect">
-            <a:avLst/>
-          </a:prstGeom>
-          <a:noFill/>
-          <a:ln/>
-        </p:spPr>
-        <p:txBody>
-          <a:bodyPr wrap="square" lIns="0" tIns="0" rIns="0" bIns="0" rtlCol="0" anchor="ctr"/>
-          <a:lstStyle/>
-          <a:p>
-            <a:pPr indent="0" marL="0">
-              <a:buNone/>
-            </a:pPr>
-            <a:r>
-              <a:rPr lang="en-US" sz="1200" b="1" spc="100" kern="0" dirty="0">
-                <a:solidFill>
-                  <a:srgbClr val="8E1622"/>
-                </a:solidFill>
-                <a:latin typeface="Calibri" pitchFamily="34" charset="0"/>
-                <a:ea typeface="Calibri" pitchFamily="34" charset="-122"/>
-                <a:cs typeface="Calibri" pitchFamily="34" charset="-120"/>
-              </a:rPr>
-              <a:t>BY MCV</a:t>
-            </a:r>
-            <a:endParaRPr lang="en-US" sz="1200" dirty="0"/>
-          </a:p>
-        </p:txBody>
-      </p:sp>
-      <p:sp>
-        <p:nvSpPr>
-          <p:cNvPr id="6" name="Text 4"/>
-          <p:cNvSpPr/>
-          <p:nvPr/>
-        </p:nvSpPr>
-        <p:spPr>
-          <a:xfrm>
-            <a:off x="804672" y="2029968"/>
-            <a:ext cx="4870552" cy="3474720"/>
+      <p:pic>
+        <p:nvPicPr>
+          <p:cNvPr id="5" name="Image 0" descr="/tmp/cp_work2/art/heme_anemia.png">    </p:cNvPr>
+          <p:cNvPicPr>
+            <a:picLocks noChangeAspect="1"/>
+          </p:cNvPicPr>
+          <p:nvPr/>
+        </p:nvPicPr>
+        <p:blipFill>
+          <a:blip r:embed="rId1"/>
+          <a:stretch>
+            <a:fillRect/>
+          </a:stretch>
+        </p:blipFill>
+        <p:spPr>
+          <a:xfrm>
+            <a:off x="1011784" y="1609344"/>
+            <a:ext cx="10168128" cy="4251960"/>
+          </a:xfrm>
+          <a:prstGeom prst="rect">
+            <a:avLst/>
+          </a:prstGeom>
+        </p:spPr>
+      </p:pic>
+      <p:sp>
+        <p:nvSpPr>
+          <p:cNvPr id="6" name="Text 3"/>
+          <p:cNvSpPr/>
+          <p:nvPr/>
+        </p:nvSpPr>
+        <p:spPr>
+          <a:xfrm>
+            <a:off x="566928" y="6062472"/>
+            <a:ext cx="11057839" cy="365760"/>
           </a:xfrm>
           <a:prstGeom prst="rect">
             <a:avLst/>
@@ -13957,268 +13743,27 @@
           <a:bodyPr wrap="square" lIns="0" tIns="0" rIns="0" bIns="0" rtlCol="0" anchor="t"/>
           <a:lstStyle/>
           <a:p>
-            <a:pPr algn="l" marL="177800" indent="-177800">
-              <a:spcAft>
-                <a:spcPts val="900"/>
-              </a:spcAft>
-              <a:buSzPct val="100000"/>
-              <a:buChar char="•"/>
-            </a:pPr>
-            <a:r>
-              <a:rPr lang="en-US" sz="1250" b="1" dirty="0">
-                <a:solidFill>
-                  <a:srgbClr val="1B2A38"/>
-                </a:solidFill>
-                <a:latin typeface="Calibri" pitchFamily="34" charset="0"/>
-                <a:ea typeface="Calibri" pitchFamily="34" charset="-122"/>
-                <a:cs typeface="Calibri" pitchFamily="34" charset="-120"/>
-              </a:rPr>
-              <a:t>Microcytic (&lt;80): iron deficiency, thalassemia, ACD (some), sideroblastic.</a:t>
-            </a:r>
-            <a:endParaRPr lang="en-US" sz="1250" dirty="0"/>
-          </a:p>
-          <a:p>
-            <a:pPr algn="l" marL="177800" indent="-177800">
-              <a:spcAft>
-                <a:spcPts val="900"/>
-              </a:spcAft>
-              <a:buSzPct val="100000"/>
-              <a:buChar char="•"/>
-            </a:pPr>
-            <a:r>
-              <a:rPr lang="en-US" sz="1250" dirty="0">
-                <a:solidFill>
-                  <a:srgbClr val="33444F"/>
-                </a:solidFill>
-                <a:latin typeface="Calibri" pitchFamily="34" charset="0"/>
-                <a:ea typeface="Calibri" pitchFamily="34" charset="-122"/>
-                <a:cs typeface="Calibri" pitchFamily="34" charset="-120"/>
-              </a:rPr>
-              <a:t>Normocytic (80–100): ACD, renal, early IDA, hemolysis, marrow failure.</a:t>
-            </a:r>
-            <a:endParaRPr lang="en-US" sz="1250" dirty="0"/>
-          </a:p>
-          <a:p>
-            <a:pPr algn="l" marL="177800" indent="-177800">
-              <a:spcAft>
-                <a:spcPts val="900"/>
-              </a:spcAft>
-              <a:buSzPct val="100000"/>
-              <a:buChar char="•"/>
-            </a:pPr>
-            <a:r>
-              <a:rPr lang="en-US" sz="1250" dirty="0">
-                <a:solidFill>
-                  <a:srgbClr val="33444F"/>
-                </a:solidFill>
-                <a:latin typeface="Calibri" pitchFamily="34" charset="0"/>
-                <a:ea typeface="Calibri" pitchFamily="34" charset="-122"/>
-                <a:cs typeface="Calibri" pitchFamily="34" charset="-120"/>
-              </a:rPr>
-              <a:t>Macrocytic (&gt;100): megaloblastic, alcohol/liver, MDS, reticulocytosis, hypothyroid.</a:t>
-            </a:r>
-            <a:endParaRPr lang="en-US" sz="1250" dirty="0"/>
-          </a:p>
-          <a:p>
-            <a:pPr algn="l" marL="177800" indent="-177800">
-              <a:spcAft>
-                <a:spcPts val="900"/>
-              </a:spcAft>
-              <a:buSzPct val="100000"/>
-              <a:buChar char="•"/>
-            </a:pPr>
-            <a:r>
-              <a:rPr lang="en-US" sz="1250" dirty="0">
-                <a:solidFill>
-                  <a:srgbClr val="33444F"/>
-                </a:solidFill>
-                <a:latin typeface="Calibri" pitchFamily="34" charset="0"/>
-                <a:ea typeface="Calibri" pitchFamily="34" charset="-122"/>
-                <a:cs typeface="Calibri" pitchFamily="34" charset="-120"/>
-              </a:rPr>
-              <a:t>MCV is the first, most useful branch.</a:t>
-            </a:r>
-            <a:endParaRPr lang="en-US" sz="1250" dirty="0"/>
-          </a:p>
-        </p:txBody>
-      </p:sp>
-      <p:sp>
-        <p:nvSpPr>
-          <p:cNvPr id="7" name="Shape 5"/>
-          <p:cNvSpPr/>
-          <p:nvPr/>
-        </p:nvSpPr>
-        <p:spPr>
-          <a:xfrm>
-            <a:off x="6278728" y="1517904"/>
-            <a:ext cx="5346040" cy="4114800"/>
-          </a:xfrm>
-          <a:prstGeom prst="roundRect">
-            <a:avLst>
-              <a:gd name="adj" fmla="val 2000"/>
-            </a:avLst>
-          </a:prstGeom>
-          <a:solidFill>
-            <a:srgbClr val="FBEAEC"/>
-          </a:solidFill>
-          <a:ln/>
-          <a:effectLst>
-            <a:outerShdw sx="100000" sy="100000" kx="0" ky="0" algn="bl" rotWithShape="0" blurRad="88900" dist="25400" dir="5400000">
-              <a:srgbClr val="22303C">
-                <a:alpha val="12000"/>
-              </a:srgbClr>
-            </a:outerShdw>
-          </a:effectLst>
-        </p:spPr>
-      </p:sp>
-      <p:sp>
-        <p:nvSpPr>
-          <p:cNvPr id="8" name="Text 6"/>
-          <p:cNvSpPr/>
-          <p:nvPr/>
-        </p:nvSpPr>
-        <p:spPr>
-          <a:xfrm>
-            <a:off x="6516472" y="1682496"/>
-            <a:ext cx="4888840" cy="274320"/>
-          </a:xfrm>
-          <a:prstGeom prst="rect">
-            <a:avLst/>
-          </a:prstGeom>
-          <a:noFill/>
-          <a:ln/>
-        </p:spPr>
-        <p:txBody>
-          <a:bodyPr wrap="square" lIns="0" tIns="0" rIns="0" bIns="0" rtlCol="0" anchor="ctr"/>
-          <a:lstStyle/>
-          <a:p>
-            <a:pPr indent="0" marL="0">
-              <a:buNone/>
-            </a:pPr>
-            <a:r>
-              <a:rPr lang="en-US" sz="1200" b="1" spc="100" kern="0" dirty="0">
-                <a:solidFill>
-                  <a:srgbClr val="8E1622"/>
-                </a:solidFill>
-                <a:latin typeface="Calibri" pitchFamily="34" charset="0"/>
-                <a:ea typeface="Calibri" pitchFamily="34" charset="-122"/>
-                <a:cs typeface="Calibri" pitchFamily="34" charset="-120"/>
-              </a:rPr>
-              <a:t>RETICULOCYTES &amp; HEMOLYSIS</a:t>
-            </a:r>
-            <a:endParaRPr lang="en-US" sz="1200" dirty="0"/>
-          </a:p>
-        </p:txBody>
-      </p:sp>
-      <p:sp>
-        <p:nvSpPr>
-          <p:cNvPr id="9" name="Text 7"/>
-          <p:cNvSpPr/>
-          <p:nvPr/>
-        </p:nvSpPr>
-        <p:spPr>
-          <a:xfrm>
-            <a:off x="6516472" y="2029968"/>
-            <a:ext cx="4870552" cy="3474720"/>
-          </a:xfrm>
-          <a:prstGeom prst="rect">
-            <a:avLst/>
-          </a:prstGeom>
-          <a:noFill/>
-          <a:ln/>
-        </p:spPr>
-        <p:txBody>
-          <a:bodyPr wrap="square" lIns="0" tIns="0" rIns="0" bIns="0" rtlCol="0" anchor="t"/>
-          <a:lstStyle/>
-          <a:p>
-            <a:pPr algn="l" marL="177800" indent="-177800">
-              <a:spcAft>
-                <a:spcPts val="900"/>
-              </a:spcAft>
-              <a:buSzPct val="100000"/>
-              <a:buChar char="•"/>
-            </a:pPr>
-            <a:r>
-              <a:rPr lang="en-US" sz="1250" b="1" dirty="0">
-                <a:solidFill>
-                  <a:srgbClr val="1B2A38"/>
-                </a:solidFill>
-                <a:latin typeface="Calibri" pitchFamily="34" charset="0"/>
-                <a:ea typeface="Calibri" pitchFamily="34" charset="-122"/>
-                <a:cs typeface="Calibri" pitchFamily="34" charset="-120"/>
-              </a:rPr>
-              <a:t>Low/inappropriately normal retic → hypoproliferative; high → appropriate response (hemolysis/blood loss).</a:t>
-            </a:r>
-            <a:endParaRPr lang="en-US" sz="1250" dirty="0"/>
-          </a:p>
-          <a:p>
-            <a:pPr algn="l" marL="177800" indent="-177800">
-              <a:spcAft>
-                <a:spcPts val="900"/>
-              </a:spcAft>
-              <a:buSzPct val="100000"/>
-              <a:buChar char="•"/>
-            </a:pPr>
-            <a:r>
-              <a:rPr lang="en-US" sz="1250" dirty="0">
-                <a:solidFill>
-                  <a:srgbClr val="33444F"/>
-                </a:solidFill>
-                <a:latin typeface="Calibri" pitchFamily="34" charset="0"/>
-                <a:ea typeface="Calibri" pitchFamily="34" charset="-122"/>
-                <a:cs typeface="Calibri" pitchFamily="34" charset="-120"/>
-              </a:rPr>
-              <a:t>Use the reticulocyte production index at low hematocrit.</a:t>
-            </a:r>
-            <a:endParaRPr lang="en-US" sz="1250" dirty="0"/>
-          </a:p>
-          <a:p>
-            <a:pPr algn="l" marL="177800" indent="-177800">
-              <a:spcAft>
-                <a:spcPts val="900"/>
-              </a:spcAft>
-              <a:buSzPct val="100000"/>
-              <a:buChar char="•"/>
-            </a:pPr>
-            <a:r>
-              <a:rPr lang="en-US" sz="1250" dirty="0">
-                <a:solidFill>
-                  <a:srgbClr val="33444F"/>
-                </a:solidFill>
-                <a:latin typeface="Calibri" pitchFamily="34" charset="0"/>
-                <a:ea typeface="Calibri" pitchFamily="34" charset="-122"/>
-                <a:cs typeface="Calibri" pitchFamily="34" charset="-120"/>
-              </a:rPr>
-              <a:t>Hemolysis pattern: ↑LDH, ↑indirect bilirubin, ↓haptoglobin, polychromasia.</a:t>
-            </a:r>
-            <a:endParaRPr lang="en-US" sz="1250" dirty="0"/>
-          </a:p>
-          <a:p>
-            <a:pPr algn="l" marL="177800" indent="-177800">
-              <a:spcAft>
-                <a:spcPts val="900"/>
-              </a:spcAft>
-              <a:buSzPct val="100000"/>
-              <a:buChar char="•"/>
-            </a:pPr>
-            <a:r>
-              <a:rPr lang="en-US" sz="1250" dirty="0">
-                <a:solidFill>
-                  <a:srgbClr val="33444F"/>
-                </a:solidFill>
-                <a:latin typeface="Calibri" pitchFamily="34" charset="0"/>
-                <a:ea typeface="Calibri" pitchFamily="34" charset="-122"/>
-                <a:cs typeface="Calibri" pitchFamily="34" charset="-120"/>
-              </a:rPr>
-              <a:t>DAT identifies immune causes.</a:t>
-            </a:r>
-            <a:endParaRPr lang="en-US" sz="1250" dirty="0"/>
-          </a:p>
-        </p:txBody>
-      </p:sp>
-      <p:sp>
-        <p:nvSpPr>
-          <p:cNvPr id="10" name="Text 8"/>
+            <a:pPr algn="ctr" indent="0" marL="0">
+              <a:buNone/>
+            </a:pPr>
+            <a:r>
+              <a:rPr lang="en-US" sz="1150" i="1" dirty="0">
+                <a:solidFill>
+                  <a:srgbClr val="6B7B8A"/>
+                </a:solidFill>
+                <a:latin typeface="Calibri" pitchFamily="34" charset="0"/>
+                <a:ea typeface="Calibri" pitchFamily="34" charset="-122"/>
+                <a:cs typeface="Calibri" pitchFamily="34" charset="-120"/>
+              </a:rPr>
+              <a:t>Original schematic. MCV narrows the differential; the reticulocyte response then separates underproduction from loss/hemolysis.</a:t>
+            </a:r>
+            <a:endParaRPr lang="en-US" sz="1150" dirty="0"/>
+          </a:p>
+        </p:txBody>
+      </p:sp>
+      <p:sp>
+        <p:nvSpPr>
+          <p:cNvPr id="7" name="Text 4"/>
           <p:cNvSpPr/>
           <p:nvPr/>
         </p:nvSpPr>
@@ -14257,7 +13802,7 @@
       </p:sp>
       <p:sp>
         <p:nvSpPr>
-          <p:cNvPr id="11" name="Text 9"/>
+          <p:cNvPr id="8" name="Text 5"/>
           <p:cNvSpPr/>
           <p:nvPr/>
         </p:nvSpPr>
@@ -14387,7 +13932,7 @@
                 <a:ea typeface="Calibri" pitchFamily="34" charset="-122"/>
                 <a:cs typeface="Calibri" pitchFamily="34" charset="-120"/>
               </a:rPr>
-              <a:t>HEMATOLOGY &amp; COAGULATION   ·   MICROCYTIC ANEMIA</a:t>
+              <a:t>HEMATOLOGY &amp; COAGULATION   ·   FRAMEWORK</a:t>
             </a:r>
             <a:endParaRPr lang="en-US" sz="1100" dirty="0"/>
           </a:p>
@@ -14426,1972 +13971,51 @@
                 <a:ea typeface="Calibri" pitchFamily="34" charset="-122"/>
                 <a:cs typeface="Calibri" pitchFamily="34" charset="-120"/>
               </a:rPr>
-              <a:t>Sorting Out Microcytic Anemia</a:t>
+              <a:t>Size, Then Marrow Response</a:t>
             </a:r>
             <a:endParaRPr lang="en-US" sz="3000" dirty="0"/>
           </a:p>
         </p:txBody>
       </p:sp>
-      <p:graphicFrame>
-        <p:nvGraphicFramePr>
-          <p:cNvPr id="8" name="Table 0"/>
-          <p:cNvGraphicFramePr>
-            <a:graphicFrameLocks noGrp="1"/>
-          </p:cNvGraphicFramePr>
-          <p:nvPr>
-            <p:extLst>
-              <p:ext uri="{D42A27DB-BD31-4B8C-83A1-F6EECF244321}">
-                <p14:modId xmlns:p14="http://schemas.microsoft.com/office/powerpoint/2010/main" val="1579011935"/>
-              </p:ext>
-            </p:extLst>
-          </p:nvPr>
-        </p:nvGraphicFramePr>
-        <p:xfrm>
-          <a:off x="566928" y="1463040"/>
-          <a:ext cx="11057839" cy="914400"/>
-        </p:xfrm>
-        <a:graphic>
-          <a:graphicData uri="http://schemas.openxmlformats.org/drawingml/2006/table">
-            <a:tbl>
-              <a:tblPr/>
-              <a:tblGrid>
-                <a:gridCol w="2743200"/>
-                <a:gridCol w="2770632"/>
-                <a:gridCol w="2770632"/>
-                <a:gridCol w="2770632"/>
-              </a:tblGrid>
-              <a:tr h="548640">
-                <a:tc>
-                  <a:txBody>
-                    <a:bodyPr/>
-                    <a:lstStyle/>
-                    <a:p>
-                      <a:pPr algn="ctr" indent="0" marL="0">
-                        <a:buNone/>
-                      </a:pPr>
-                      <a:r>
-                        <a:rPr lang="en-US" sz="1200" b="1" dirty="0">
-                          <a:solidFill>
-                            <a:srgbClr val="FFFFFF"/>
-                          </a:solidFill>
-                          <a:latin typeface="Calibri" pitchFamily="34" charset="0"/>
-                          <a:ea typeface="Calibri" pitchFamily="34" charset="-122"/>
-                          <a:cs typeface="Calibri" pitchFamily="34" charset="-120"/>
-                        </a:rPr>
-                        <a:t>Feature</a:t>
-                      </a:r>
-                      <a:endParaRPr lang="en-US" sz="1200" dirty="0">
-                        <a:latin typeface="Calibri" charset="0"/>
-                        <a:ea typeface="Calibri" charset="0"/>
-                        <a:cs typeface="Calibri" charset="0"/>
-                      </a:endParaRPr>
-                    </a:p>
-                  </a:txBody>
-                  <a:tcPr marL="91440" marR="91440" marT="45720" marB="45720" anchor="ctr">
-                    <a:lnL w="9525" cap="flat" cmpd="sng" algn="ctr">
-                      <a:solidFill>
-                        <a:srgbClr val="DCE4EC"/>
-                      </a:solidFill>
-                      <a:prstDash val="solid"/>
-                      <a:round/>
-                      <a:headEnd type="none" w="med" len="med"/>
-                      <a:tailEnd type="none" w="med" len="med"/>
-                    </a:lnL>
-                    <a:lnR w="9525" cap="flat" cmpd="sng" algn="ctr">
-                      <a:solidFill>
-                        <a:srgbClr val="DCE4EC"/>
-                      </a:solidFill>
-                      <a:prstDash val="solid"/>
-                      <a:round/>
-                      <a:headEnd type="none" w="med" len="med"/>
-                      <a:tailEnd type="none" w="med" len="med"/>
-                    </a:lnR>
-                    <a:lnT w="9525" cap="flat" cmpd="sng" algn="ctr">
-                      <a:solidFill>
-                        <a:srgbClr val="DCE4EC"/>
-                      </a:solidFill>
-                      <a:prstDash val="solid"/>
-                      <a:round/>
-                      <a:headEnd type="none" w="med" len="med"/>
-                      <a:tailEnd type="none" w="med" len="med"/>
-                    </a:lnT>
-                    <a:lnB w="9525" cap="flat" cmpd="sng" algn="ctr">
-                      <a:solidFill>
-                        <a:srgbClr val="DCE4EC"/>
-                      </a:solidFill>
-                      <a:prstDash val="solid"/>
-                      <a:round/>
-                      <a:headEnd type="none" w="med" len="med"/>
-                      <a:tailEnd type="none" w="med" len="med"/>
-                    </a:lnB>
-                    <a:solidFill>
-                      <a:srgbClr val="C62133"/>
-                    </a:solidFill>
-                  </a:tcPr>
-                </a:tc>
-                <a:tc>
-                  <a:txBody>
-                    <a:bodyPr/>
-                    <a:lstStyle/>
-                    <a:p>
-                      <a:pPr algn="ctr" indent="0" marL="0">
-                        <a:buNone/>
-                      </a:pPr>
-                      <a:r>
-                        <a:rPr lang="en-US" sz="1200" b="1" dirty="0">
-                          <a:solidFill>
-                            <a:srgbClr val="FFFFFF"/>
-                          </a:solidFill>
-                          <a:latin typeface="Calibri" pitchFamily="34" charset="0"/>
-                          <a:ea typeface="Calibri" pitchFamily="34" charset="-122"/>
-                          <a:cs typeface="Calibri" pitchFamily="34" charset="-120"/>
-                        </a:rPr>
-                        <a:t>Iron deficiency</a:t>
-                      </a:r>
-                      <a:endParaRPr lang="en-US" sz="1200" dirty="0">
-                        <a:latin typeface="Calibri" charset="0"/>
-                        <a:ea typeface="Calibri" charset="0"/>
-                        <a:cs typeface="Calibri" charset="0"/>
-                      </a:endParaRPr>
-                    </a:p>
-                  </a:txBody>
-                  <a:tcPr marL="91440" marR="91440" marT="45720" marB="45720" anchor="ctr">
-                    <a:lnL w="9525" cap="flat" cmpd="sng" algn="ctr">
-                      <a:solidFill>
-                        <a:srgbClr val="DCE4EC"/>
-                      </a:solidFill>
-                      <a:prstDash val="solid"/>
-                      <a:round/>
-                      <a:headEnd type="none" w="med" len="med"/>
-                      <a:tailEnd type="none" w="med" len="med"/>
-                    </a:lnL>
-                    <a:lnR w="9525" cap="flat" cmpd="sng" algn="ctr">
-                      <a:solidFill>
-                        <a:srgbClr val="DCE4EC"/>
-                      </a:solidFill>
-                      <a:prstDash val="solid"/>
-                      <a:round/>
-                      <a:headEnd type="none" w="med" len="med"/>
-                      <a:tailEnd type="none" w="med" len="med"/>
-                    </a:lnR>
-                    <a:lnT w="9525" cap="flat" cmpd="sng" algn="ctr">
-                      <a:solidFill>
-                        <a:srgbClr val="DCE4EC"/>
-                      </a:solidFill>
-                      <a:prstDash val="solid"/>
-                      <a:round/>
-                      <a:headEnd type="none" w="med" len="med"/>
-                      <a:tailEnd type="none" w="med" len="med"/>
-                    </a:lnT>
-                    <a:lnB w="9525" cap="flat" cmpd="sng" algn="ctr">
-                      <a:solidFill>
-                        <a:srgbClr val="DCE4EC"/>
-                      </a:solidFill>
-                      <a:prstDash val="solid"/>
-                      <a:round/>
-                      <a:headEnd type="none" w="med" len="med"/>
-                      <a:tailEnd type="none" w="med" len="med"/>
-                    </a:lnB>
-                    <a:solidFill>
-                      <a:srgbClr val="C62133"/>
-                    </a:solidFill>
-                  </a:tcPr>
-                </a:tc>
-                <a:tc>
-                  <a:txBody>
-                    <a:bodyPr/>
-                    <a:lstStyle/>
-                    <a:p>
-                      <a:pPr algn="ctr" indent="0" marL="0">
-                        <a:buNone/>
-                      </a:pPr>
-                      <a:r>
-                        <a:rPr lang="en-US" sz="1200" b="1" dirty="0">
-                          <a:solidFill>
-                            <a:srgbClr val="FFFFFF"/>
-                          </a:solidFill>
-                          <a:latin typeface="Calibri" pitchFamily="34" charset="0"/>
-                          <a:ea typeface="Calibri" pitchFamily="34" charset="-122"/>
-                          <a:cs typeface="Calibri" pitchFamily="34" charset="-120"/>
-                        </a:rPr>
-                        <a:t>Chronic disease</a:t>
-                      </a:r>
-                      <a:endParaRPr lang="en-US" sz="1200" dirty="0">
-                        <a:latin typeface="Calibri" charset="0"/>
-                        <a:ea typeface="Calibri" charset="0"/>
-                        <a:cs typeface="Calibri" charset="0"/>
-                      </a:endParaRPr>
-                    </a:p>
-                  </a:txBody>
-                  <a:tcPr marL="91440" marR="91440" marT="45720" marB="45720" anchor="ctr">
-                    <a:lnL w="9525" cap="flat" cmpd="sng" algn="ctr">
-                      <a:solidFill>
-                        <a:srgbClr val="DCE4EC"/>
-                      </a:solidFill>
-                      <a:prstDash val="solid"/>
-                      <a:round/>
-                      <a:headEnd type="none" w="med" len="med"/>
-                      <a:tailEnd type="none" w="med" len="med"/>
-                    </a:lnL>
-                    <a:lnR w="9525" cap="flat" cmpd="sng" algn="ctr">
-                      <a:solidFill>
-                        <a:srgbClr val="DCE4EC"/>
-                      </a:solidFill>
-                      <a:prstDash val="solid"/>
-                      <a:round/>
-                      <a:headEnd type="none" w="med" len="med"/>
-                      <a:tailEnd type="none" w="med" len="med"/>
-                    </a:lnR>
-                    <a:lnT w="9525" cap="flat" cmpd="sng" algn="ctr">
-                      <a:solidFill>
-                        <a:srgbClr val="DCE4EC"/>
-                      </a:solidFill>
-                      <a:prstDash val="solid"/>
-                      <a:round/>
-                      <a:headEnd type="none" w="med" len="med"/>
-                      <a:tailEnd type="none" w="med" len="med"/>
-                    </a:lnT>
-                    <a:lnB w="9525" cap="flat" cmpd="sng" algn="ctr">
-                      <a:solidFill>
-                        <a:srgbClr val="DCE4EC"/>
-                      </a:solidFill>
-                      <a:prstDash val="solid"/>
-                      <a:round/>
-                      <a:headEnd type="none" w="med" len="med"/>
-                      <a:tailEnd type="none" w="med" len="med"/>
-                    </a:lnB>
-                    <a:solidFill>
-                      <a:srgbClr val="C62133"/>
-                    </a:solidFill>
-                  </a:tcPr>
-                </a:tc>
-                <a:tc>
-                  <a:txBody>
-                    <a:bodyPr/>
-                    <a:lstStyle/>
-                    <a:p>
-                      <a:pPr algn="ctr" indent="0" marL="0">
-                        <a:buNone/>
-                      </a:pPr>
-                      <a:r>
-                        <a:rPr lang="en-US" sz="1200" b="1" dirty="0">
-                          <a:solidFill>
-                            <a:srgbClr val="FFFFFF"/>
-                          </a:solidFill>
-                          <a:latin typeface="Calibri" pitchFamily="34" charset="0"/>
-                          <a:ea typeface="Calibri" pitchFamily="34" charset="-122"/>
-                          <a:cs typeface="Calibri" pitchFamily="34" charset="-120"/>
-                        </a:rPr>
-                        <a:t>Thalassemia trait</a:t>
-                      </a:r>
-                      <a:endParaRPr lang="en-US" sz="1200" dirty="0">
-                        <a:latin typeface="Calibri" charset="0"/>
-                        <a:ea typeface="Calibri" charset="0"/>
-                        <a:cs typeface="Calibri" charset="0"/>
-                      </a:endParaRPr>
-                    </a:p>
-                  </a:txBody>
-                  <a:tcPr marL="91440" marR="91440" marT="45720" marB="45720" anchor="ctr">
-                    <a:lnL w="9525" cap="flat" cmpd="sng" algn="ctr">
-                      <a:solidFill>
-                        <a:srgbClr val="DCE4EC"/>
-                      </a:solidFill>
-                      <a:prstDash val="solid"/>
-                      <a:round/>
-                      <a:headEnd type="none" w="med" len="med"/>
-                      <a:tailEnd type="none" w="med" len="med"/>
-                    </a:lnL>
-                    <a:lnR w="9525" cap="flat" cmpd="sng" algn="ctr">
-                      <a:solidFill>
-                        <a:srgbClr val="DCE4EC"/>
-                      </a:solidFill>
-                      <a:prstDash val="solid"/>
-                      <a:round/>
-                      <a:headEnd type="none" w="med" len="med"/>
-                      <a:tailEnd type="none" w="med" len="med"/>
-                    </a:lnR>
-                    <a:lnT w="9525" cap="flat" cmpd="sng" algn="ctr">
-                      <a:solidFill>
-                        <a:srgbClr val="DCE4EC"/>
-                      </a:solidFill>
-                      <a:prstDash val="solid"/>
-                      <a:round/>
-                      <a:headEnd type="none" w="med" len="med"/>
-                      <a:tailEnd type="none" w="med" len="med"/>
-                    </a:lnT>
-                    <a:lnB w="9525" cap="flat" cmpd="sng" algn="ctr">
-                      <a:solidFill>
-                        <a:srgbClr val="DCE4EC"/>
-                      </a:solidFill>
-                      <a:prstDash val="solid"/>
-                      <a:round/>
-                      <a:headEnd type="none" w="med" len="med"/>
-                      <a:tailEnd type="none" w="med" len="med"/>
-                    </a:lnB>
-                    <a:solidFill>
-                      <a:srgbClr val="C62133"/>
-                    </a:solidFill>
-                  </a:tcPr>
-                </a:tc>
-              </a:tr>
-              <a:tr h="548640">
-                <a:tc>
-                  <a:txBody>
-                    <a:bodyPr/>
-                    <a:lstStyle/>
-                    <a:p>
-                      <a:pPr algn="l" indent="0" marL="0">
-                        <a:buNone/>
-                      </a:pPr>
-                      <a:r>
-                        <a:rPr lang="en-US" sz="1100" b="1" dirty="0">
-                          <a:solidFill>
-                            <a:srgbClr val="1B2A38"/>
-                          </a:solidFill>
-                          <a:latin typeface="Calibri" pitchFamily="34" charset="0"/>
-                          <a:ea typeface="Calibri" pitchFamily="34" charset="-122"/>
-                          <a:cs typeface="Calibri" pitchFamily="34" charset="-120"/>
-                        </a:rPr>
-                        <a:t>Ferritin</a:t>
-                      </a:r>
-                      <a:endParaRPr lang="en-US" sz="1100" dirty="0">
-                        <a:latin typeface="Calibri" charset="0"/>
-                        <a:ea typeface="Calibri" charset="0"/>
-                        <a:cs typeface="Calibri" charset="0"/>
-                      </a:endParaRPr>
-                    </a:p>
-                  </a:txBody>
-                  <a:tcPr marL="91440" marR="91440" marT="45720" marB="45720" anchor="ctr">
-                    <a:lnL w="9525" cap="flat" cmpd="sng" algn="ctr">
-                      <a:solidFill>
-                        <a:srgbClr val="DCE4EC"/>
-                      </a:solidFill>
-                      <a:prstDash val="solid"/>
-                      <a:round/>
-                      <a:headEnd type="none" w="med" len="med"/>
-                      <a:tailEnd type="none" w="med" len="med"/>
-                    </a:lnL>
-                    <a:lnR w="9525" cap="flat" cmpd="sng" algn="ctr">
-                      <a:solidFill>
-                        <a:srgbClr val="DCE4EC"/>
-                      </a:solidFill>
-                      <a:prstDash val="solid"/>
-                      <a:round/>
-                      <a:headEnd type="none" w="med" len="med"/>
-                      <a:tailEnd type="none" w="med" len="med"/>
-                    </a:lnR>
-                    <a:lnT w="9525" cap="flat" cmpd="sng" algn="ctr">
-                      <a:solidFill>
-                        <a:srgbClr val="DCE4EC"/>
-                      </a:solidFill>
-                      <a:prstDash val="solid"/>
-                      <a:round/>
-                      <a:headEnd type="none" w="med" len="med"/>
-                      <a:tailEnd type="none" w="med" len="med"/>
-                    </a:lnT>
-                    <a:lnB w="9525" cap="flat" cmpd="sng" algn="ctr">
-                      <a:solidFill>
-                        <a:srgbClr val="DCE4EC"/>
-                      </a:solidFill>
-                      <a:prstDash val="solid"/>
-                      <a:round/>
-                      <a:headEnd type="none" w="med" len="med"/>
-                      <a:tailEnd type="none" w="med" len="med"/>
-                    </a:lnB>
-                    <a:solidFill>
-                      <a:srgbClr val="F3F7FA"/>
-                    </a:solidFill>
-                  </a:tcPr>
-                </a:tc>
-                <a:tc>
-                  <a:txBody>
-                    <a:bodyPr/>
-                    <a:lstStyle/>
-                    <a:p>
-                      <a:pPr algn="ctr" indent="0" marL="0">
-                        <a:buNone/>
-                      </a:pPr>
-                      <a:r>
-                        <a:rPr lang="en-US" sz="1100" dirty="0">
-                          <a:solidFill>
-                            <a:srgbClr val="33444F"/>
-                          </a:solidFill>
-                          <a:latin typeface="Calibri" pitchFamily="34" charset="0"/>
-                          <a:ea typeface="Calibri" pitchFamily="34" charset="-122"/>
-                          <a:cs typeface="Calibri" pitchFamily="34" charset="-120"/>
-                        </a:rPr>
-                        <a:t>Low</a:t>
-                      </a:r>
-                      <a:endParaRPr lang="en-US" sz="1100" dirty="0">
-                        <a:latin typeface="Calibri" charset="0"/>
-                        <a:ea typeface="Calibri" charset="0"/>
-                        <a:cs typeface="Calibri" charset="0"/>
-                      </a:endParaRPr>
-                    </a:p>
-                  </a:txBody>
-                  <a:tcPr marL="91440" marR="91440" marT="45720" marB="45720" anchor="ctr">
-                    <a:lnL w="9525" cap="flat" cmpd="sng" algn="ctr">
-                      <a:solidFill>
-                        <a:srgbClr val="DCE4EC"/>
-                      </a:solidFill>
-                      <a:prstDash val="solid"/>
-                      <a:round/>
-                      <a:headEnd type="none" w="med" len="med"/>
-                      <a:tailEnd type="none" w="med" len="med"/>
-                    </a:lnL>
-                    <a:lnR w="9525" cap="flat" cmpd="sng" algn="ctr">
-                      <a:solidFill>
-                        <a:srgbClr val="DCE4EC"/>
-                      </a:solidFill>
-                      <a:prstDash val="solid"/>
-                      <a:round/>
-                      <a:headEnd type="none" w="med" len="med"/>
-                      <a:tailEnd type="none" w="med" len="med"/>
-                    </a:lnR>
-                    <a:lnT w="9525" cap="flat" cmpd="sng" algn="ctr">
-                      <a:solidFill>
-                        <a:srgbClr val="DCE4EC"/>
-                      </a:solidFill>
-                      <a:prstDash val="solid"/>
-                      <a:round/>
-                      <a:headEnd type="none" w="med" len="med"/>
-                      <a:tailEnd type="none" w="med" len="med"/>
-                    </a:lnT>
-                    <a:lnB w="9525" cap="flat" cmpd="sng" algn="ctr">
-                      <a:solidFill>
-                        <a:srgbClr val="DCE4EC"/>
-                      </a:solidFill>
-                      <a:prstDash val="solid"/>
-                      <a:round/>
-                      <a:headEnd type="none" w="med" len="med"/>
-                      <a:tailEnd type="none" w="med" len="med"/>
-                    </a:lnB>
-                    <a:solidFill>
-                      <a:srgbClr val="F3F7FA"/>
-                    </a:solidFill>
-                  </a:tcPr>
-                </a:tc>
-                <a:tc>
-                  <a:txBody>
-                    <a:bodyPr/>
-                    <a:lstStyle/>
-                    <a:p>
-                      <a:pPr algn="ctr" indent="0" marL="0">
-                        <a:buNone/>
-                      </a:pPr>
-                      <a:r>
-                        <a:rPr lang="en-US" sz="1100" dirty="0">
-                          <a:solidFill>
-                            <a:srgbClr val="33444F"/>
-                          </a:solidFill>
-                          <a:latin typeface="Calibri" pitchFamily="34" charset="0"/>
-                          <a:ea typeface="Calibri" pitchFamily="34" charset="-122"/>
-                          <a:cs typeface="Calibri" pitchFamily="34" charset="-120"/>
-                        </a:rPr>
-                        <a:t>Normal / high</a:t>
-                      </a:r>
-                      <a:endParaRPr lang="en-US" sz="1100" dirty="0">
-                        <a:latin typeface="Calibri" charset="0"/>
-                        <a:ea typeface="Calibri" charset="0"/>
-                        <a:cs typeface="Calibri" charset="0"/>
-                      </a:endParaRPr>
-                    </a:p>
-                  </a:txBody>
-                  <a:tcPr marL="91440" marR="91440" marT="45720" marB="45720" anchor="ctr">
-                    <a:lnL w="9525" cap="flat" cmpd="sng" algn="ctr">
-                      <a:solidFill>
-                        <a:srgbClr val="DCE4EC"/>
-                      </a:solidFill>
-                      <a:prstDash val="solid"/>
-                      <a:round/>
-                      <a:headEnd type="none" w="med" len="med"/>
-                      <a:tailEnd type="none" w="med" len="med"/>
-                    </a:lnL>
-                    <a:lnR w="9525" cap="flat" cmpd="sng" algn="ctr">
-                      <a:solidFill>
-                        <a:srgbClr val="DCE4EC"/>
-                      </a:solidFill>
-                      <a:prstDash val="solid"/>
-                      <a:round/>
-                      <a:headEnd type="none" w="med" len="med"/>
-                      <a:tailEnd type="none" w="med" len="med"/>
-                    </a:lnR>
-                    <a:lnT w="9525" cap="flat" cmpd="sng" algn="ctr">
-                      <a:solidFill>
-                        <a:srgbClr val="DCE4EC"/>
-                      </a:solidFill>
-                      <a:prstDash val="solid"/>
-                      <a:round/>
-                      <a:headEnd type="none" w="med" len="med"/>
-                      <a:tailEnd type="none" w="med" len="med"/>
-                    </a:lnT>
-                    <a:lnB w="9525" cap="flat" cmpd="sng" algn="ctr">
-                      <a:solidFill>
-                        <a:srgbClr val="DCE4EC"/>
-                      </a:solidFill>
-                      <a:prstDash val="solid"/>
-                      <a:round/>
-                      <a:headEnd type="none" w="med" len="med"/>
-                      <a:tailEnd type="none" w="med" len="med"/>
-                    </a:lnB>
-                    <a:solidFill>
-                      <a:srgbClr val="F3F7FA"/>
-                    </a:solidFill>
-                  </a:tcPr>
-                </a:tc>
-                <a:tc>
-                  <a:txBody>
-                    <a:bodyPr/>
-                    <a:lstStyle/>
-                    <a:p>
-                      <a:pPr algn="ctr" indent="0" marL="0">
-                        <a:buNone/>
-                      </a:pPr>
-                      <a:r>
-                        <a:rPr lang="en-US" sz="1100" dirty="0">
-                          <a:solidFill>
-                            <a:srgbClr val="33444F"/>
-                          </a:solidFill>
-                          <a:latin typeface="Calibri" pitchFamily="34" charset="0"/>
-                          <a:ea typeface="Calibri" pitchFamily="34" charset="-122"/>
-                          <a:cs typeface="Calibri" pitchFamily="34" charset="-120"/>
-                        </a:rPr>
-                        <a:t>Normal</a:t>
-                      </a:r>
-                      <a:endParaRPr lang="en-US" sz="1100" dirty="0">
-                        <a:latin typeface="Calibri" charset="0"/>
-                        <a:ea typeface="Calibri" charset="0"/>
-                        <a:cs typeface="Calibri" charset="0"/>
-                      </a:endParaRPr>
-                    </a:p>
-                  </a:txBody>
-                  <a:tcPr marL="91440" marR="91440" marT="45720" marB="45720" anchor="ctr">
-                    <a:lnL w="9525" cap="flat" cmpd="sng" algn="ctr">
-                      <a:solidFill>
-                        <a:srgbClr val="DCE4EC"/>
-                      </a:solidFill>
-                      <a:prstDash val="solid"/>
-                      <a:round/>
-                      <a:headEnd type="none" w="med" len="med"/>
-                      <a:tailEnd type="none" w="med" len="med"/>
-                    </a:lnL>
-                    <a:lnR w="9525" cap="flat" cmpd="sng" algn="ctr">
-                      <a:solidFill>
-                        <a:srgbClr val="DCE4EC"/>
-                      </a:solidFill>
-                      <a:prstDash val="solid"/>
-                      <a:round/>
-                      <a:headEnd type="none" w="med" len="med"/>
-                      <a:tailEnd type="none" w="med" len="med"/>
-                    </a:lnR>
-                    <a:lnT w="9525" cap="flat" cmpd="sng" algn="ctr">
-                      <a:solidFill>
-                        <a:srgbClr val="DCE4EC"/>
-                      </a:solidFill>
-                      <a:prstDash val="solid"/>
-                      <a:round/>
-                      <a:headEnd type="none" w="med" len="med"/>
-                      <a:tailEnd type="none" w="med" len="med"/>
-                    </a:lnT>
-                    <a:lnB w="9525" cap="flat" cmpd="sng" algn="ctr">
-                      <a:solidFill>
-                        <a:srgbClr val="DCE4EC"/>
-                      </a:solidFill>
-                      <a:prstDash val="solid"/>
-                      <a:round/>
-                      <a:headEnd type="none" w="med" len="med"/>
-                      <a:tailEnd type="none" w="med" len="med"/>
-                    </a:lnB>
-                    <a:solidFill>
-                      <a:srgbClr val="F3F7FA"/>
-                    </a:solidFill>
-                  </a:tcPr>
-                </a:tc>
-              </a:tr>
-              <a:tr h="548640">
-                <a:tc>
-                  <a:txBody>
-                    <a:bodyPr/>
-                    <a:lstStyle/>
-                    <a:p>
-                      <a:pPr algn="l" indent="0" marL="0">
-                        <a:buNone/>
-                      </a:pPr>
-                      <a:r>
-                        <a:rPr lang="en-US" sz="1100" b="1" dirty="0">
-                          <a:solidFill>
-                            <a:srgbClr val="1B2A38"/>
-                          </a:solidFill>
-                          <a:latin typeface="Calibri" pitchFamily="34" charset="0"/>
-                          <a:ea typeface="Calibri" pitchFamily="34" charset="-122"/>
-                          <a:cs typeface="Calibri" pitchFamily="34" charset="-120"/>
-                        </a:rPr>
-                        <a:t>Transferrin sat.</a:t>
-                      </a:r>
-                      <a:endParaRPr lang="en-US" sz="1100" dirty="0">
-                        <a:latin typeface="Calibri" charset="0"/>
-                        <a:ea typeface="Calibri" charset="0"/>
-                        <a:cs typeface="Calibri" charset="0"/>
-                      </a:endParaRPr>
-                    </a:p>
-                  </a:txBody>
-                  <a:tcPr marL="91440" marR="91440" marT="45720" marB="45720" anchor="ctr">
-                    <a:lnL w="9525" cap="flat" cmpd="sng" algn="ctr">
-                      <a:solidFill>
-                        <a:srgbClr val="DCE4EC"/>
-                      </a:solidFill>
-                      <a:prstDash val="solid"/>
-                      <a:round/>
-                      <a:headEnd type="none" w="med" len="med"/>
-                      <a:tailEnd type="none" w="med" len="med"/>
-                    </a:lnL>
-                    <a:lnR w="9525" cap="flat" cmpd="sng" algn="ctr">
-                      <a:solidFill>
-                        <a:srgbClr val="DCE4EC"/>
-                      </a:solidFill>
-                      <a:prstDash val="solid"/>
-                      <a:round/>
-                      <a:headEnd type="none" w="med" len="med"/>
-                      <a:tailEnd type="none" w="med" len="med"/>
-                    </a:lnR>
-                    <a:lnT w="9525" cap="flat" cmpd="sng" algn="ctr">
-                      <a:solidFill>
-                        <a:srgbClr val="DCE4EC"/>
-                      </a:solidFill>
-                      <a:prstDash val="solid"/>
-                      <a:round/>
-                      <a:headEnd type="none" w="med" len="med"/>
-                      <a:tailEnd type="none" w="med" len="med"/>
-                    </a:lnT>
-                    <a:lnB w="9525" cap="flat" cmpd="sng" algn="ctr">
-                      <a:solidFill>
-                        <a:srgbClr val="DCE4EC"/>
-                      </a:solidFill>
-                      <a:prstDash val="solid"/>
-                      <a:round/>
-                      <a:headEnd type="none" w="med" len="med"/>
-                      <a:tailEnd type="none" w="med" len="med"/>
-                    </a:lnB>
-                    <a:solidFill>
-                      <a:srgbClr val="FFFFFF"/>
-                    </a:solidFill>
-                  </a:tcPr>
-                </a:tc>
-                <a:tc>
-                  <a:txBody>
-                    <a:bodyPr/>
-                    <a:lstStyle/>
-                    <a:p>
-                      <a:pPr algn="ctr" indent="0" marL="0">
-                        <a:buNone/>
-                      </a:pPr>
-                      <a:r>
-                        <a:rPr lang="en-US" sz="1100" dirty="0">
-                          <a:solidFill>
-                            <a:srgbClr val="33444F"/>
-                          </a:solidFill>
-                          <a:latin typeface="Calibri" pitchFamily="34" charset="0"/>
-                          <a:ea typeface="Calibri" pitchFamily="34" charset="-122"/>
-                          <a:cs typeface="Calibri" pitchFamily="34" charset="-120"/>
-                        </a:rPr>
-                        <a:t>Low</a:t>
-                      </a:r>
-                      <a:endParaRPr lang="en-US" sz="1100" dirty="0">
-                        <a:latin typeface="Calibri" charset="0"/>
-                        <a:ea typeface="Calibri" charset="0"/>
-                        <a:cs typeface="Calibri" charset="0"/>
-                      </a:endParaRPr>
-                    </a:p>
-                  </a:txBody>
-                  <a:tcPr marL="91440" marR="91440" marT="45720" marB="45720" anchor="ctr">
-                    <a:lnL w="9525" cap="flat" cmpd="sng" algn="ctr">
-                      <a:solidFill>
-                        <a:srgbClr val="DCE4EC"/>
-                      </a:solidFill>
-                      <a:prstDash val="solid"/>
-                      <a:round/>
-                      <a:headEnd type="none" w="med" len="med"/>
-                      <a:tailEnd type="none" w="med" len="med"/>
-                    </a:lnL>
-                    <a:lnR w="9525" cap="flat" cmpd="sng" algn="ctr">
-                      <a:solidFill>
-                        <a:srgbClr val="DCE4EC"/>
-                      </a:solidFill>
-                      <a:prstDash val="solid"/>
-                      <a:round/>
-                      <a:headEnd type="none" w="med" len="med"/>
-                      <a:tailEnd type="none" w="med" len="med"/>
-                    </a:lnR>
-                    <a:lnT w="9525" cap="flat" cmpd="sng" algn="ctr">
-                      <a:solidFill>
-                        <a:srgbClr val="DCE4EC"/>
-                      </a:solidFill>
-                      <a:prstDash val="solid"/>
-                      <a:round/>
-                      <a:headEnd type="none" w="med" len="med"/>
-                      <a:tailEnd type="none" w="med" len="med"/>
-                    </a:lnT>
-                    <a:lnB w="9525" cap="flat" cmpd="sng" algn="ctr">
-                      <a:solidFill>
-                        <a:srgbClr val="DCE4EC"/>
-                      </a:solidFill>
-                      <a:prstDash val="solid"/>
-                      <a:round/>
-                      <a:headEnd type="none" w="med" len="med"/>
-                      <a:tailEnd type="none" w="med" len="med"/>
-                    </a:lnB>
-                    <a:solidFill>
-                      <a:srgbClr val="FFFFFF"/>
-                    </a:solidFill>
-                  </a:tcPr>
-                </a:tc>
-                <a:tc>
-                  <a:txBody>
-                    <a:bodyPr/>
-                    <a:lstStyle/>
-                    <a:p>
-                      <a:pPr algn="ctr" indent="0" marL="0">
-                        <a:buNone/>
-                      </a:pPr>
-                      <a:r>
-                        <a:rPr lang="en-US" sz="1100" dirty="0">
-                          <a:solidFill>
-                            <a:srgbClr val="33444F"/>
-                          </a:solidFill>
-                          <a:latin typeface="Calibri" pitchFamily="34" charset="0"/>
-                          <a:ea typeface="Calibri" pitchFamily="34" charset="-122"/>
-                          <a:cs typeface="Calibri" pitchFamily="34" charset="-120"/>
-                        </a:rPr>
-                        <a:t>Low</a:t>
-                      </a:r>
-                      <a:endParaRPr lang="en-US" sz="1100" dirty="0">
-                        <a:latin typeface="Calibri" charset="0"/>
-                        <a:ea typeface="Calibri" charset="0"/>
-                        <a:cs typeface="Calibri" charset="0"/>
-                      </a:endParaRPr>
-                    </a:p>
-                  </a:txBody>
-                  <a:tcPr marL="91440" marR="91440" marT="45720" marB="45720" anchor="ctr">
-                    <a:lnL w="9525" cap="flat" cmpd="sng" algn="ctr">
-                      <a:solidFill>
-                        <a:srgbClr val="DCE4EC"/>
-                      </a:solidFill>
-                      <a:prstDash val="solid"/>
-                      <a:round/>
-                      <a:headEnd type="none" w="med" len="med"/>
-                      <a:tailEnd type="none" w="med" len="med"/>
-                    </a:lnL>
-                    <a:lnR w="9525" cap="flat" cmpd="sng" algn="ctr">
-                      <a:solidFill>
-                        <a:srgbClr val="DCE4EC"/>
-                      </a:solidFill>
-                      <a:prstDash val="solid"/>
-                      <a:round/>
-                      <a:headEnd type="none" w="med" len="med"/>
-                      <a:tailEnd type="none" w="med" len="med"/>
-                    </a:lnR>
-                    <a:lnT w="9525" cap="flat" cmpd="sng" algn="ctr">
-                      <a:solidFill>
-                        <a:srgbClr val="DCE4EC"/>
-                      </a:solidFill>
-                      <a:prstDash val="solid"/>
-                      <a:round/>
-                      <a:headEnd type="none" w="med" len="med"/>
-                      <a:tailEnd type="none" w="med" len="med"/>
-                    </a:lnT>
-                    <a:lnB w="9525" cap="flat" cmpd="sng" algn="ctr">
-                      <a:solidFill>
-                        <a:srgbClr val="DCE4EC"/>
-                      </a:solidFill>
-                      <a:prstDash val="solid"/>
-                      <a:round/>
-                      <a:headEnd type="none" w="med" len="med"/>
-                      <a:tailEnd type="none" w="med" len="med"/>
-                    </a:lnB>
-                    <a:solidFill>
-                      <a:srgbClr val="FFFFFF"/>
-                    </a:solidFill>
-                  </a:tcPr>
-                </a:tc>
-                <a:tc>
-                  <a:txBody>
-                    <a:bodyPr/>
-                    <a:lstStyle/>
-                    <a:p>
-                      <a:pPr algn="ctr" indent="0" marL="0">
-                        <a:buNone/>
-                      </a:pPr>
-                      <a:r>
-                        <a:rPr lang="en-US" sz="1100" dirty="0">
-                          <a:solidFill>
-                            <a:srgbClr val="33444F"/>
-                          </a:solidFill>
-                          <a:latin typeface="Calibri" pitchFamily="34" charset="0"/>
-                          <a:ea typeface="Calibri" pitchFamily="34" charset="-122"/>
-                          <a:cs typeface="Calibri" pitchFamily="34" charset="-120"/>
-                        </a:rPr>
-                        <a:t>Normal / high</a:t>
-                      </a:r>
-                      <a:endParaRPr lang="en-US" sz="1100" dirty="0">
-                        <a:latin typeface="Calibri" charset="0"/>
-                        <a:ea typeface="Calibri" charset="0"/>
-                        <a:cs typeface="Calibri" charset="0"/>
-                      </a:endParaRPr>
-                    </a:p>
-                  </a:txBody>
-                  <a:tcPr marL="91440" marR="91440" marT="45720" marB="45720" anchor="ctr">
-                    <a:lnL w="9525" cap="flat" cmpd="sng" algn="ctr">
-                      <a:solidFill>
-                        <a:srgbClr val="DCE4EC"/>
-                      </a:solidFill>
-                      <a:prstDash val="solid"/>
-                      <a:round/>
-                      <a:headEnd type="none" w="med" len="med"/>
-                      <a:tailEnd type="none" w="med" len="med"/>
-                    </a:lnL>
-                    <a:lnR w="9525" cap="flat" cmpd="sng" algn="ctr">
-                      <a:solidFill>
-                        <a:srgbClr val="DCE4EC"/>
-                      </a:solidFill>
-                      <a:prstDash val="solid"/>
-                      <a:round/>
-                      <a:headEnd type="none" w="med" len="med"/>
-                      <a:tailEnd type="none" w="med" len="med"/>
-                    </a:lnR>
-                    <a:lnT w="9525" cap="flat" cmpd="sng" algn="ctr">
-                      <a:solidFill>
-                        <a:srgbClr val="DCE4EC"/>
-                      </a:solidFill>
-                      <a:prstDash val="solid"/>
-                      <a:round/>
-                      <a:headEnd type="none" w="med" len="med"/>
-                      <a:tailEnd type="none" w="med" len="med"/>
-                    </a:lnT>
-                    <a:lnB w="9525" cap="flat" cmpd="sng" algn="ctr">
-                      <a:solidFill>
-                        <a:srgbClr val="DCE4EC"/>
-                      </a:solidFill>
-                      <a:prstDash val="solid"/>
-                      <a:round/>
-                      <a:headEnd type="none" w="med" len="med"/>
-                      <a:tailEnd type="none" w="med" len="med"/>
-                    </a:lnB>
-                    <a:solidFill>
-                      <a:srgbClr val="FFFFFF"/>
-                    </a:solidFill>
-                  </a:tcPr>
-                </a:tc>
-              </a:tr>
-              <a:tr h="548640">
-                <a:tc>
-                  <a:txBody>
-                    <a:bodyPr/>
-                    <a:lstStyle/>
-                    <a:p>
-                      <a:pPr algn="l" indent="0" marL="0">
-                        <a:buNone/>
-                      </a:pPr>
-                      <a:r>
-                        <a:rPr lang="en-US" sz="1100" b="1" dirty="0">
-                          <a:solidFill>
-                            <a:srgbClr val="1B2A38"/>
-                          </a:solidFill>
-                          <a:latin typeface="Calibri" pitchFamily="34" charset="0"/>
-                          <a:ea typeface="Calibri" pitchFamily="34" charset="-122"/>
-                          <a:cs typeface="Calibri" pitchFamily="34" charset="-120"/>
-                        </a:rPr>
-                        <a:t>TIBC</a:t>
-                      </a:r>
-                      <a:endParaRPr lang="en-US" sz="1100" dirty="0">
-                        <a:latin typeface="Calibri" charset="0"/>
-                        <a:ea typeface="Calibri" charset="0"/>
-                        <a:cs typeface="Calibri" charset="0"/>
-                      </a:endParaRPr>
-                    </a:p>
-                  </a:txBody>
-                  <a:tcPr marL="91440" marR="91440" marT="45720" marB="45720" anchor="ctr">
-                    <a:lnL w="9525" cap="flat" cmpd="sng" algn="ctr">
-                      <a:solidFill>
-                        <a:srgbClr val="DCE4EC"/>
-                      </a:solidFill>
-                      <a:prstDash val="solid"/>
-                      <a:round/>
-                      <a:headEnd type="none" w="med" len="med"/>
-                      <a:tailEnd type="none" w="med" len="med"/>
-                    </a:lnL>
-                    <a:lnR w="9525" cap="flat" cmpd="sng" algn="ctr">
-                      <a:solidFill>
-                        <a:srgbClr val="DCE4EC"/>
-                      </a:solidFill>
-                      <a:prstDash val="solid"/>
-                      <a:round/>
-                      <a:headEnd type="none" w="med" len="med"/>
-                      <a:tailEnd type="none" w="med" len="med"/>
-                    </a:lnR>
-                    <a:lnT w="9525" cap="flat" cmpd="sng" algn="ctr">
-                      <a:solidFill>
-                        <a:srgbClr val="DCE4EC"/>
-                      </a:solidFill>
-                      <a:prstDash val="solid"/>
-                      <a:round/>
-                      <a:headEnd type="none" w="med" len="med"/>
-                      <a:tailEnd type="none" w="med" len="med"/>
-                    </a:lnT>
-                    <a:lnB w="9525" cap="flat" cmpd="sng" algn="ctr">
-                      <a:solidFill>
-                        <a:srgbClr val="DCE4EC"/>
-                      </a:solidFill>
-                      <a:prstDash val="solid"/>
-                      <a:round/>
-                      <a:headEnd type="none" w="med" len="med"/>
-                      <a:tailEnd type="none" w="med" len="med"/>
-                    </a:lnB>
-                    <a:solidFill>
-                      <a:srgbClr val="F3F7FA"/>
-                    </a:solidFill>
-                  </a:tcPr>
-                </a:tc>
-                <a:tc>
-                  <a:txBody>
-                    <a:bodyPr/>
-                    <a:lstStyle/>
-                    <a:p>
-                      <a:pPr algn="ctr" indent="0" marL="0">
-                        <a:buNone/>
-                      </a:pPr>
-                      <a:r>
-                        <a:rPr lang="en-US" sz="1100" dirty="0">
-                          <a:solidFill>
-                            <a:srgbClr val="33444F"/>
-                          </a:solidFill>
-                          <a:latin typeface="Calibri" pitchFamily="34" charset="0"/>
-                          <a:ea typeface="Calibri" pitchFamily="34" charset="-122"/>
-                          <a:cs typeface="Calibri" pitchFamily="34" charset="-120"/>
-                        </a:rPr>
-                        <a:t>High</a:t>
-                      </a:r>
-                      <a:endParaRPr lang="en-US" sz="1100" dirty="0">
-                        <a:latin typeface="Calibri" charset="0"/>
-                        <a:ea typeface="Calibri" charset="0"/>
-                        <a:cs typeface="Calibri" charset="0"/>
-                      </a:endParaRPr>
-                    </a:p>
-                  </a:txBody>
-                  <a:tcPr marL="91440" marR="91440" marT="45720" marB="45720" anchor="ctr">
-                    <a:lnL w="9525" cap="flat" cmpd="sng" algn="ctr">
-                      <a:solidFill>
-                        <a:srgbClr val="DCE4EC"/>
-                      </a:solidFill>
-                      <a:prstDash val="solid"/>
-                      <a:round/>
-                      <a:headEnd type="none" w="med" len="med"/>
-                      <a:tailEnd type="none" w="med" len="med"/>
-                    </a:lnL>
-                    <a:lnR w="9525" cap="flat" cmpd="sng" algn="ctr">
-                      <a:solidFill>
-                        <a:srgbClr val="DCE4EC"/>
-                      </a:solidFill>
-                      <a:prstDash val="solid"/>
-                      <a:round/>
-                      <a:headEnd type="none" w="med" len="med"/>
-                      <a:tailEnd type="none" w="med" len="med"/>
-                    </a:lnR>
-                    <a:lnT w="9525" cap="flat" cmpd="sng" algn="ctr">
-                      <a:solidFill>
-                        <a:srgbClr val="DCE4EC"/>
-                      </a:solidFill>
-                      <a:prstDash val="solid"/>
-                      <a:round/>
-                      <a:headEnd type="none" w="med" len="med"/>
-                      <a:tailEnd type="none" w="med" len="med"/>
-                    </a:lnT>
-                    <a:lnB w="9525" cap="flat" cmpd="sng" algn="ctr">
-                      <a:solidFill>
-                        <a:srgbClr val="DCE4EC"/>
-                      </a:solidFill>
-                      <a:prstDash val="solid"/>
-                      <a:round/>
-                      <a:headEnd type="none" w="med" len="med"/>
-                      <a:tailEnd type="none" w="med" len="med"/>
-                    </a:lnB>
-                    <a:solidFill>
-                      <a:srgbClr val="F3F7FA"/>
-                    </a:solidFill>
-                  </a:tcPr>
-                </a:tc>
-                <a:tc>
-                  <a:txBody>
-                    <a:bodyPr/>
-                    <a:lstStyle/>
-                    <a:p>
-                      <a:pPr algn="ctr" indent="0" marL="0">
-                        <a:buNone/>
-                      </a:pPr>
-                      <a:r>
-                        <a:rPr lang="en-US" sz="1100" dirty="0">
-                          <a:solidFill>
-                            <a:srgbClr val="33444F"/>
-                          </a:solidFill>
-                          <a:latin typeface="Calibri" pitchFamily="34" charset="0"/>
-                          <a:ea typeface="Calibri" pitchFamily="34" charset="-122"/>
-                          <a:cs typeface="Calibri" pitchFamily="34" charset="-120"/>
-                        </a:rPr>
-                        <a:t>Low / normal</a:t>
-                      </a:r>
-                      <a:endParaRPr lang="en-US" sz="1100" dirty="0">
-                        <a:latin typeface="Calibri" charset="0"/>
-                        <a:ea typeface="Calibri" charset="0"/>
-                        <a:cs typeface="Calibri" charset="0"/>
-                      </a:endParaRPr>
-                    </a:p>
-                  </a:txBody>
-                  <a:tcPr marL="91440" marR="91440" marT="45720" marB="45720" anchor="ctr">
-                    <a:lnL w="9525" cap="flat" cmpd="sng" algn="ctr">
-                      <a:solidFill>
-                        <a:srgbClr val="DCE4EC"/>
-                      </a:solidFill>
-                      <a:prstDash val="solid"/>
-                      <a:round/>
-                      <a:headEnd type="none" w="med" len="med"/>
-                      <a:tailEnd type="none" w="med" len="med"/>
-                    </a:lnL>
-                    <a:lnR w="9525" cap="flat" cmpd="sng" algn="ctr">
-                      <a:solidFill>
-                        <a:srgbClr val="DCE4EC"/>
-                      </a:solidFill>
-                      <a:prstDash val="solid"/>
-                      <a:round/>
-                      <a:headEnd type="none" w="med" len="med"/>
-                      <a:tailEnd type="none" w="med" len="med"/>
-                    </a:lnR>
-                    <a:lnT w="9525" cap="flat" cmpd="sng" algn="ctr">
-                      <a:solidFill>
-                        <a:srgbClr val="DCE4EC"/>
-                      </a:solidFill>
-                      <a:prstDash val="solid"/>
-                      <a:round/>
-                      <a:headEnd type="none" w="med" len="med"/>
-                      <a:tailEnd type="none" w="med" len="med"/>
-                    </a:lnT>
-                    <a:lnB w="9525" cap="flat" cmpd="sng" algn="ctr">
-                      <a:solidFill>
-                        <a:srgbClr val="DCE4EC"/>
-                      </a:solidFill>
-                      <a:prstDash val="solid"/>
-                      <a:round/>
-                      <a:headEnd type="none" w="med" len="med"/>
-                      <a:tailEnd type="none" w="med" len="med"/>
-                    </a:lnB>
-                    <a:solidFill>
-                      <a:srgbClr val="F3F7FA"/>
-                    </a:solidFill>
-                  </a:tcPr>
-                </a:tc>
-                <a:tc>
-                  <a:txBody>
-                    <a:bodyPr/>
-                    <a:lstStyle/>
-                    <a:p>
-                      <a:pPr algn="ctr" indent="0" marL="0">
-                        <a:buNone/>
-                      </a:pPr>
-                      <a:r>
-                        <a:rPr lang="en-US" sz="1100" dirty="0">
-                          <a:solidFill>
-                            <a:srgbClr val="33444F"/>
-                          </a:solidFill>
-                          <a:latin typeface="Calibri" pitchFamily="34" charset="0"/>
-                          <a:ea typeface="Calibri" pitchFamily="34" charset="-122"/>
-                          <a:cs typeface="Calibri" pitchFamily="34" charset="-120"/>
-                        </a:rPr>
-                        <a:t>Normal</a:t>
-                      </a:r>
-                      <a:endParaRPr lang="en-US" sz="1100" dirty="0">
-                        <a:latin typeface="Calibri" charset="0"/>
-                        <a:ea typeface="Calibri" charset="0"/>
-                        <a:cs typeface="Calibri" charset="0"/>
-                      </a:endParaRPr>
-                    </a:p>
-                  </a:txBody>
-                  <a:tcPr marL="91440" marR="91440" marT="45720" marB="45720" anchor="ctr">
-                    <a:lnL w="9525" cap="flat" cmpd="sng" algn="ctr">
-                      <a:solidFill>
-                        <a:srgbClr val="DCE4EC"/>
-                      </a:solidFill>
-                      <a:prstDash val="solid"/>
-                      <a:round/>
-                      <a:headEnd type="none" w="med" len="med"/>
-                      <a:tailEnd type="none" w="med" len="med"/>
-                    </a:lnL>
-                    <a:lnR w="9525" cap="flat" cmpd="sng" algn="ctr">
-                      <a:solidFill>
-                        <a:srgbClr val="DCE4EC"/>
-                      </a:solidFill>
-                      <a:prstDash val="solid"/>
-                      <a:round/>
-                      <a:headEnd type="none" w="med" len="med"/>
-                      <a:tailEnd type="none" w="med" len="med"/>
-                    </a:lnR>
-                    <a:lnT w="9525" cap="flat" cmpd="sng" algn="ctr">
-                      <a:solidFill>
-                        <a:srgbClr val="DCE4EC"/>
-                      </a:solidFill>
-                      <a:prstDash val="solid"/>
-                      <a:round/>
-                      <a:headEnd type="none" w="med" len="med"/>
-                      <a:tailEnd type="none" w="med" len="med"/>
-                    </a:lnT>
-                    <a:lnB w="9525" cap="flat" cmpd="sng" algn="ctr">
-                      <a:solidFill>
-                        <a:srgbClr val="DCE4EC"/>
-                      </a:solidFill>
-                      <a:prstDash val="solid"/>
-                      <a:round/>
-                      <a:headEnd type="none" w="med" len="med"/>
-                      <a:tailEnd type="none" w="med" len="med"/>
-                    </a:lnB>
-                    <a:solidFill>
-                      <a:srgbClr val="F3F7FA"/>
-                    </a:solidFill>
-                  </a:tcPr>
-                </a:tc>
-              </a:tr>
-              <a:tr h="548640">
-                <a:tc>
-                  <a:txBody>
-                    <a:bodyPr/>
-                    <a:lstStyle/>
-                    <a:p>
-                      <a:pPr algn="l" indent="0" marL="0">
-                        <a:buNone/>
-                      </a:pPr>
-                      <a:r>
-                        <a:rPr lang="en-US" sz="1100" b="1" dirty="0">
-                          <a:solidFill>
-                            <a:srgbClr val="1B2A38"/>
-                          </a:solidFill>
-                          <a:latin typeface="Calibri" pitchFamily="34" charset="0"/>
-                          <a:ea typeface="Calibri" pitchFamily="34" charset="-122"/>
-                          <a:cs typeface="Calibri" pitchFamily="34" charset="-120"/>
-                        </a:rPr>
-                        <a:t>RDW</a:t>
-                      </a:r>
-                      <a:endParaRPr lang="en-US" sz="1100" dirty="0">
-                        <a:latin typeface="Calibri" charset="0"/>
-                        <a:ea typeface="Calibri" charset="0"/>
-                        <a:cs typeface="Calibri" charset="0"/>
-                      </a:endParaRPr>
-                    </a:p>
-                  </a:txBody>
-                  <a:tcPr marL="91440" marR="91440" marT="45720" marB="45720" anchor="ctr">
-                    <a:lnL w="9525" cap="flat" cmpd="sng" algn="ctr">
-                      <a:solidFill>
-                        <a:srgbClr val="DCE4EC"/>
-                      </a:solidFill>
-                      <a:prstDash val="solid"/>
-                      <a:round/>
-                      <a:headEnd type="none" w="med" len="med"/>
-                      <a:tailEnd type="none" w="med" len="med"/>
-                    </a:lnL>
-                    <a:lnR w="9525" cap="flat" cmpd="sng" algn="ctr">
-                      <a:solidFill>
-                        <a:srgbClr val="DCE4EC"/>
-                      </a:solidFill>
-                      <a:prstDash val="solid"/>
-                      <a:round/>
-                      <a:headEnd type="none" w="med" len="med"/>
-                      <a:tailEnd type="none" w="med" len="med"/>
-                    </a:lnR>
-                    <a:lnT w="9525" cap="flat" cmpd="sng" algn="ctr">
-                      <a:solidFill>
-                        <a:srgbClr val="DCE4EC"/>
-                      </a:solidFill>
-                      <a:prstDash val="solid"/>
-                      <a:round/>
-                      <a:headEnd type="none" w="med" len="med"/>
-                      <a:tailEnd type="none" w="med" len="med"/>
-                    </a:lnT>
-                    <a:lnB w="9525" cap="flat" cmpd="sng" algn="ctr">
-                      <a:solidFill>
-                        <a:srgbClr val="DCE4EC"/>
-                      </a:solidFill>
-                      <a:prstDash val="solid"/>
-                      <a:round/>
-                      <a:headEnd type="none" w="med" len="med"/>
-                      <a:tailEnd type="none" w="med" len="med"/>
-                    </a:lnB>
-                    <a:solidFill>
-                      <a:srgbClr val="FFFFFF"/>
-                    </a:solidFill>
-                  </a:tcPr>
-                </a:tc>
-                <a:tc>
-                  <a:txBody>
-                    <a:bodyPr/>
-                    <a:lstStyle/>
-                    <a:p>
-                      <a:pPr algn="ctr" indent="0" marL="0">
-                        <a:buNone/>
-                      </a:pPr>
-                      <a:r>
-                        <a:rPr lang="en-US" sz="1100" dirty="0">
-                          <a:solidFill>
-                            <a:srgbClr val="33444F"/>
-                          </a:solidFill>
-                          <a:latin typeface="Calibri" pitchFamily="34" charset="0"/>
-                          <a:ea typeface="Calibri" pitchFamily="34" charset="-122"/>
-                          <a:cs typeface="Calibri" pitchFamily="34" charset="-120"/>
-                        </a:rPr>
-                        <a:t>High</a:t>
-                      </a:r>
-                      <a:endParaRPr lang="en-US" sz="1100" dirty="0">
-                        <a:latin typeface="Calibri" charset="0"/>
-                        <a:ea typeface="Calibri" charset="0"/>
-                        <a:cs typeface="Calibri" charset="0"/>
-                      </a:endParaRPr>
-                    </a:p>
-                  </a:txBody>
-                  <a:tcPr marL="91440" marR="91440" marT="45720" marB="45720" anchor="ctr">
-                    <a:lnL w="9525" cap="flat" cmpd="sng" algn="ctr">
-                      <a:solidFill>
-                        <a:srgbClr val="DCE4EC"/>
-                      </a:solidFill>
-                      <a:prstDash val="solid"/>
-                      <a:round/>
-                      <a:headEnd type="none" w="med" len="med"/>
-                      <a:tailEnd type="none" w="med" len="med"/>
-                    </a:lnL>
-                    <a:lnR w="9525" cap="flat" cmpd="sng" algn="ctr">
-                      <a:solidFill>
-                        <a:srgbClr val="DCE4EC"/>
-                      </a:solidFill>
-                      <a:prstDash val="solid"/>
-                      <a:round/>
-                      <a:headEnd type="none" w="med" len="med"/>
-                      <a:tailEnd type="none" w="med" len="med"/>
-                    </a:lnR>
-                    <a:lnT w="9525" cap="flat" cmpd="sng" algn="ctr">
-                      <a:solidFill>
-                        <a:srgbClr val="DCE4EC"/>
-                      </a:solidFill>
-                      <a:prstDash val="solid"/>
-                      <a:round/>
-                      <a:headEnd type="none" w="med" len="med"/>
-                      <a:tailEnd type="none" w="med" len="med"/>
-                    </a:lnT>
-                    <a:lnB w="9525" cap="flat" cmpd="sng" algn="ctr">
-                      <a:solidFill>
-                        <a:srgbClr val="DCE4EC"/>
-                      </a:solidFill>
-                      <a:prstDash val="solid"/>
-                      <a:round/>
-                      <a:headEnd type="none" w="med" len="med"/>
-                      <a:tailEnd type="none" w="med" len="med"/>
-                    </a:lnB>
-                    <a:solidFill>
-                      <a:srgbClr val="FFFFFF"/>
-                    </a:solidFill>
-                  </a:tcPr>
-                </a:tc>
-                <a:tc>
-                  <a:txBody>
-                    <a:bodyPr/>
-                    <a:lstStyle/>
-                    <a:p>
-                      <a:pPr algn="ctr" indent="0" marL="0">
-                        <a:buNone/>
-                      </a:pPr>
-                      <a:r>
-                        <a:rPr lang="en-US" sz="1100" dirty="0">
-                          <a:solidFill>
-                            <a:srgbClr val="33444F"/>
-                          </a:solidFill>
-                          <a:latin typeface="Calibri" pitchFamily="34" charset="0"/>
-                          <a:ea typeface="Calibri" pitchFamily="34" charset="-122"/>
-                          <a:cs typeface="Calibri" pitchFamily="34" charset="-120"/>
-                        </a:rPr>
-                        <a:t>Normal / high</a:t>
-                      </a:r>
-                      <a:endParaRPr lang="en-US" sz="1100" dirty="0">
-                        <a:latin typeface="Calibri" charset="0"/>
-                        <a:ea typeface="Calibri" charset="0"/>
-                        <a:cs typeface="Calibri" charset="0"/>
-                      </a:endParaRPr>
-                    </a:p>
-                  </a:txBody>
-                  <a:tcPr marL="91440" marR="91440" marT="45720" marB="45720" anchor="ctr">
-                    <a:lnL w="9525" cap="flat" cmpd="sng" algn="ctr">
-                      <a:solidFill>
-                        <a:srgbClr val="DCE4EC"/>
-                      </a:solidFill>
-                      <a:prstDash val="solid"/>
-                      <a:round/>
-                      <a:headEnd type="none" w="med" len="med"/>
-                      <a:tailEnd type="none" w="med" len="med"/>
-                    </a:lnL>
-                    <a:lnR w="9525" cap="flat" cmpd="sng" algn="ctr">
-                      <a:solidFill>
-                        <a:srgbClr val="DCE4EC"/>
-                      </a:solidFill>
-                      <a:prstDash val="solid"/>
-                      <a:round/>
-                      <a:headEnd type="none" w="med" len="med"/>
-                      <a:tailEnd type="none" w="med" len="med"/>
-                    </a:lnR>
-                    <a:lnT w="9525" cap="flat" cmpd="sng" algn="ctr">
-                      <a:solidFill>
-                        <a:srgbClr val="DCE4EC"/>
-                      </a:solidFill>
-                      <a:prstDash val="solid"/>
-                      <a:round/>
-                      <a:headEnd type="none" w="med" len="med"/>
-                      <a:tailEnd type="none" w="med" len="med"/>
-                    </a:lnT>
-                    <a:lnB w="9525" cap="flat" cmpd="sng" algn="ctr">
-                      <a:solidFill>
-                        <a:srgbClr val="DCE4EC"/>
-                      </a:solidFill>
-                      <a:prstDash val="solid"/>
-                      <a:round/>
-                      <a:headEnd type="none" w="med" len="med"/>
-                      <a:tailEnd type="none" w="med" len="med"/>
-                    </a:lnB>
-                    <a:solidFill>
-                      <a:srgbClr val="FFFFFF"/>
-                    </a:solidFill>
-                  </a:tcPr>
-                </a:tc>
-                <a:tc>
-                  <a:txBody>
-                    <a:bodyPr/>
-                    <a:lstStyle/>
-                    <a:p>
-                      <a:pPr algn="ctr" indent="0" marL="0">
-                        <a:buNone/>
-                      </a:pPr>
-                      <a:r>
-                        <a:rPr lang="en-US" sz="1100" dirty="0">
-                          <a:solidFill>
-                            <a:srgbClr val="33444F"/>
-                          </a:solidFill>
-                          <a:latin typeface="Calibri" pitchFamily="34" charset="0"/>
-                          <a:ea typeface="Calibri" pitchFamily="34" charset="-122"/>
-                          <a:cs typeface="Calibri" pitchFamily="34" charset="-120"/>
-                        </a:rPr>
-                        <a:t>Often normal</a:t>
-                      </a:r>
-                      <a:endParaRPr lang="en-US" sz="1100" dirty="0">
-                        <a:latin typeface="Calibri" charset="0"/>
-                        <a:ea typeface="Calibri" charset="0"/>
-                        <a:cs typeface="Calibri" charset="0"/>
-                      </a:endParaRPr>
-                    </a:p>
-                  </a:txBody>
-                  <a:tcPr marL="91440" marR="91440" marT="45720" marB="45720" anchor="ctr">
-                    <a:lnL w="9525" cap="flat" cmpd="sng" algn="ctr">
-                      <a:solidFill>
-                        <a:srgbClr val="DCE4EC"/>
-                      </a:solidFill>
-                      <a:prstDash val="solid"/>
-                      <a:round/>
-                      <a:headEnd type="none" w="med" len="med"/>
-                      <a:tailEnd type="none" w="med" len="med"/>
-                    </a:lnL>
-                    <a:lnR w="9525" cap="flat" cmpd="sng" algn="ctr">
-                      <a:solidFill>
-                        <a:srgbClr val="DCE4EC"/>
-                      </a:solidFill>
-                      <a:prstDash val="solid"/>
-                      <a:round/>
-                      <a:headEnd type="none" w="med" len="med"/>
-                      <a:tailEnd type="none" w="med" len="med"/>
-                    </a:lnR>
-                    <a:lnT w="9525" cap="flat" cmpd="sng" algn="ctr">
-                      <a:solidFill>
-                        <a:srgbClr val="DCE4EC"/>
-                      </a:solidFill>
-                      <a:prstDash val="solid"/>
-                      <a:round/>
-                      <a:headEnd type="none" w="med" len="med"/>
-                      <a:tailEnd type="none" w="med" len="med"/>
-                    </a:lnT>
-                    <a:lnB w="9525" cap="flat" cmpd="sng" algn="ctr">
-                      <a:solidFill>
-                        <a:srgbClr val="DCE4EC"/>
-                      </a:solidFill>
-                      <a:prstDash val="solid"/>
-                      <a:round/>
-                      <a:headEnd type="none" w="med" len="med"/>
-                      <a:tailEnd type="none" w="med" len="med"/>
-                    </a:lnB>
-                    <a:solidFill>
-                      <a:srgbClr val="FFFFFF"/>
-                    </a:solidFill>
-                  </a:tcPr>
-                </a:tc>
-              </a:tr>
-              <a:tr h="548640">
-                <a:tc>
-                  <a:txBody>
-                    <a:bodyPr/>
-                    <a:lstStyle/>
-                    <a:p>
-                      <a:pPr algn="l" indent="0" marL="0">
-                        <a:buNone/>
-                      </a:pPr>
-                      <a:r>
-                        <a:rPr lang="en-US" sz="1100" b="1" dirty="0">
-                          <a:solidFill>
-                            <a:srgbClr val="1B2A38"/>
-                          </a:solidFill>
-                          <a:latin typeface="Calibri" pitchFamily="34" charset="0"/>
-                          <a:ea typeface="Calibri" pitchFamily="34" charset="-122"/>
-                          <a:cs typeface="Calibri" pitchFamily="34" charset="-120"/>
-                        </a:rPr>
-                        <a:t>RBC count</a:t>
-                      </a:r>
-                      <a:endParaRPr lang="en-US" sz="1100" dirty="0">
-                        <a:latin typeface="Calibri" charset="0"/>
-                        <a:ea typeface="Calibri" charset="0"/>
-                        <a:cs typeface="Calibri" charset="0"/>
-                      </a:endParaRPr>
-                    </a:p>
-                  </a:txBody>
-                  <a:tcPr marL="91440" marR="91440" marT="45720" marB="45720" anchor="ctr">
-                    <a:lnL w="9525" cap="flat" cmpd="sng" algn="ctr">
-                      <a:solidFill>
-                        <a:srgbClr val="DCE4EC"/>
-                      </a:solidFill>
-                      <a:prstDash val="solid"/>
-                      <a:round/>
-                      <a:headEnd type="none" w="med" len="med"/>
-                      <a:tailEnd type="none" w="med" len="med"/>
-                    </a:lnL>
-                    <a:lnR w="9525" cap="flat" cmpd="sng" algn="ctr">
-                      <a:solidFill>
-                        <a:srgbClr val="DCE4EC"/>
-                      </a:solidFill>
-                      <a:prstDash val="solid"/>
-                      <a:round/>
-                      <a:headEnd type="none" w="med" len="med"/>
-                      <a:tailEnd type="none" w="med" len="med"/>
-                    </a:lnR>
-                    <a:lnT w="9525" cap="flat" cmpd="sng" algn="ctr">
-                      <a:solidFill>
-                        <a:srgbClr val="DCE4EC"/>
-                      </a:solidFill>
-                      <a:prstDash val="solid"/>
-                      <a:round/>
-                      <a:headEnd type="none" w="med" len="med"/>
-                      <a:tailEnd type="none" w="med" len="med"/>
-                    </a:lnT>
-                    <a:lnB w="9525" cap="flat" cmpd="sng" algn="ctr">
-                      <a:solidFill>
-                        <a:srgbClr val="DCE4EC"/>
-                      </a:solidFill>
-                      <a:prstDash val="solid"/>
-                      <a:round/>
-                      <a:headEnd type="none" w="med" len="med"/>
-                      <a:tailEnd type="none" w="med" len="med"/>
-                    </a:lnB>
-                    <a:solidFill>
-                      <a:srgbClr val="F3F7FA"/>
-                    </a:solidFill>
-                  </a:tcPr>
-                </a:tc>
-                <a:tc>
-                  <a:txBody>
-                    <a:bodyPr/>
-                    <a:lstStyle/>
-                    <a:p>
-                      <a:pPr algn="ctr" indent="0" marL="0">
-                        <a:buNone/>
-                      </a:pPr>
-                      <a:r>
-                        <a:rPr lang="en-US" sz="1100" dirty="0">
-                          <a:solidFill>
-                            <a:srgbClr val="33444F"/>
-                          </a:solidFill>
-                          <a:latin typeface="Calibri" pitchFamily="34" charset="0"/>
-                          <a:ea typeface="Calibri" pitchFamily="34" charset="-122"/>
-                          <a:cs typeface="Calibri" pitchFamily="34" charset="-120"/>
-                        </a:rPr>
-                        <a:t>Low</a:t>
-                      </a:r>
-                      <a:endParaRPr lang="en-US" sz="1100" dirty="0">
-                        <a:latin typeface="Calibri" charset="0"/>
-                        <a:ea typeface="Calibri" charset="0"/>
-                        <a:cs typeface="Calibri" charset="0"/>
-                      </a:endParaRPr>
-                    </a:p>
-                  </a:txBody>
-                  <a:tcPr marL="91440" marR="91440" marT="45720" marB="45720" anchor="ctr">
-                    <a:lnL w="9525" cap="flat" cmpd="sng" algn="ctr">
-                      <a:solidFill>
-                        <a:srgbClr val="DCE4EC"/>
-                      </a:solidFill>
-                      <a:prstDash val="solid"/>
-                      <a:round/>
-                      <a:headEnd type="none" w="med" len="med"/>
-                      <a:tailEnd type="none" w="med" len="med"/>
-                    </a:lnL>
-                    <a:lnR w="9525" cap="flat" cmpd="sng" algn="ctr">
-                      <a:solidFill>
-                        <a:srgbClr val="DCE4EC"/>
-                      </a:solidFill>
-                      <a:prstDash val="solid"/>
-                      <a:round/>
-                      <a:headEnd type="none" w="med" len="med"/>
-                      <a:tailEnd type="none" w="med" len="med"/>
-                    </a:lnR>
-                    <a:lnT w="9525" cap="flat" cmpd="sng" algn="ctr">
-                      <a:solidFill>
-                        <a:srgbClr val="DCE4EC"/>
-                      </a:solidFill>
-                      <a:prstDash val="solid"/>
-                      <a:round/>
-                      <a:headEnd type="none" w="med" len="med"/>
-                      <a:tailEnd type="none" w="med" len="med"/>
-                    </a:lnT>
-                    <a:lnB w="9525" cap="flat" cmpd="sng" algn="ctr">
-                      <a:solidFill>
-                        <a:srgbClr val="DCE4EC"/>
-                      </a:solidFill>
-                      <a:prstDash val="solid"/>
-                      <a:round/>
-                      <a:headEnd type="none" w="med" len="med"/>
-                      <a:tailEnd type="none" w="med" len="med"/>
-                    </a:lnB>
-                    <a:solidFill>
-                      <a:srgbClr val="F3F7FA"/>
-                    </a:solidFill>
-                  </a:tcPr>
-                </a:tc>
-                <a:tc>
-                  <a:txBody>
-                    <a:bodyPr/>
-                    <a:lstStyle/>
-                    <a:p>
-                      <a:pPr algn="ctr" indent="0" marL="0">
-                        <a:buNone/>
-                      </a:pPr>
-                      <a:r>
-                        <a:rPr lang="en-US" sz="1100" dirty="0">
-                          <a:solidFill>
-                            <a:srgbClr val="33444F"/>
-                          </a:solidFill>
-                          <a:latin typeface="Calibri" pitchFamily="34" charset="0"/>
-                          <a:ea typeface="Calibri" pitchFamily="34" charset="-122"/>
-                          <a:cs typeface="Calibri" pitchFamily="34" charset="-120"/>
-                        </a:rPr>
-                        <a:t>Low</a:t>
-                      </a:r>
-                      <a:endParaRPr lang="en-US" sz="1100" dirty="0">
-                        <a:latin typeface="Calibri" charset="0"/>
-                        <a:ea typeface="Calibri" charset="0"/>
-                        <a:cs typeface="Calibri" charset="0"/>
-                      </a:endParaRPr>
-                    </a:p>
-                  </a:txBody>
-                  <a:tcPr marL="91440" marR="91440" marT="45720" marB="45720" anchor="ctr">
-                    <a:lnL w="9525" cap="flat" cmpd="sng" algn="ctr">
-                      <a:solidFill>
-                        <a:srgbClr val="DCE4EC"/>
-                      </a:solidFill>
-                      <a:prstDash val="solid"/>
-                      <a:round/>
-                      <a:headEnd type="none" w="med" len="med"/>
-                      <a:tailEnd type="none" w="med" len="med"/>
-                    </a:lnL>
-                    <a:lnR w="9525" cap="flat" cmpd="sng" algn="ctr">
-                      <a:solidFill>
-                        <a:srgbClr val="DCE4EC"/>
-                      </a:solidFill>
-                      <a:prstDash val="solid"/>
-                      <a:round/>
-                      <a:headEnd type="none" w="med" len="med"/>
-                      <a:tailEnd type="none" w="med" len="med"/>
-                    </a:lnR>
-                    <a:lnT w="9525" cap="flat" cmpd="sng" algn="ctr">
-                      <a:solidFill>
-                        <a:srgbClr val="DCE4EC"/>
-                      </a:solidFill>
-                      <a:prstDash val="solid"/>
-                      <a:round/>
-                      <a:headEnd type="none" w="med" len="med"/>
-                      <a:tailEnd type="none" w="med" len="med"/>
-                    </a:lnT>
-                    <a:lnB w="9525" cap="flat" cmpd="sng" algn="ctr">
-                      <a:solidFill>
-                        <a:srgbClr val="DCE4EC"/>
-                      </a:solidFill>
-                      <a:prstDash val="solid"/>
-                      <a:round/>
-                      <a:headEnd type="none" w="med" len="med"/>
-                      <a:tailEnd type="none" w="med" len="med"/>
-                    </a:lnB>
-                    <a:solidFill>
-                      <a:srgbClr val="F3F7FA"/>
-                    </a:solidFill>
-                  </a:tcPr>
-                </a:tc>
-                <a:tc>
-                  <a:txBody>
-                    <a:bodyPr/>
-                    <a:lstStyle/>
-                    <a:p>
-                      <a:pPr algn="ctr" indent="0" marL="0">
-                        <a:buNone/>
-                      </a:pPr>
-                      <a:r>
-                        <a:rPr lang="en-US" sz="1100" dirty="0">
-                          <a:solidFill>
-                            <a:srgbClr val="33444F"/>
-                          </a:solidFill>
-                          <a:latin typeface="Calibri" pitchFamily="34" charset="0"/>
-                          <a:ea typeface="Calibri" pitchFamily="34" charset="-122"/>
-                          <a:cs typeface="Calibri" pitchFamily="34" charset="-120"/>
-                        </a:rPr>
-                        <a:t>Normal / high</a:t>
-                      </a:r>
-                      <a:endParaRPr lang="en-US" sz="1100" dirty="0">
-                        <a:latin typeface="Calibri" charset="0"/>
-                        <a:ea typeface="Calibri" charset="0"/>
-                        <a:cs typeface="Calibri" charset="0"/>
-                      </a:endParaRPr>
-                    </a:p>
-                  </a:txBody>
-                  <a:tcPr marL="91440" marR="91440" marT="45720" marB="45720" anchor="ctr">
-                    <a:lnL w="9525" cap="flat" cmpd="sng" algn="ctr">
-                      <a:solidFill>
-                        <a:srgbClr val="DCE4EC"/>
-                      </a:solidFill>
-                      <a:prstDash val="solid"/>
-                      <a:round/>
-                      <a:headEnd type="none" w="med" len="med"/>
-                      <a:tailEnd type="none" w="med" len="med"/>
-                    </a:lnL>
-                    <a:lnR w="9525" cap="flat" cmpd="sng" algn="ctr">
-                      <a:solidFill>
-                        <a:srgbClr val="DCE4EC"/>
-                      </a:solidFill>
-                      <a:prstDash val="solid"/>
-                      <a:round/>
-                      <a:headEnd type="none" w="med" len="med"/>
-                      <a:tailEnd type="none" w="med" len="med"/>
-                    </a:lnR>
-                    <a:lnT w="9525" cap="flat" cmpd="sng" algn="ctr">
-                      <a:solidFill>
-                        <a:srgbClr val="DCE4EC"/>
-                      </a:solidFill>
-                      <a:prstDash val="solid"/>
-                      <a:round/>
-                      <a:headEnd type="none" w="med" len="med"/>
-                      <a:tailEnd type="none" w="med" len="med"/>
-                    </a:lnT>
-                    <a:lnB w="9525" cap="flat" cmpd="sng" algn="ctr">
-                      <a:solidFill>
-                        <a:srgbClr val="DCE4EC"/>
-                      </a:solidFill>
-                      <a:prstDash val="solid"/>
-                      <a:round/>
-                      <a:headEnd type="none" w="med" len="med"/>
-                      <a:tailEnd type="none" w="med" len="med"/>
-                    </a:lnB>
-                    <a:solidFill>
-                      <a:srgbClr val="F3F7FA"/>
-                    </a:solidFill>
-                  </a:tcPr>
-                </a:tc>
-              </a:tr>
-              <a:tr h="548640">
-                <a:tc>
-                  <a:txBody>
-                    <a:bodyPr/>
-                    <a:lstStyle/>
-                    <a:p>
-                      <a:pPr algn="l" indent="0" marL="0">
-                        <a:buNone/>
-                      </a:pPr>
-                      <a:r>
-                        <a:rPr lang="en-US" sz="1100" b="1" dirty="0">
-                          <a:solidFill>
-                            <a:srgbClr val="1B2A38"/>
-                          </a:solidFill>
-                          <a:latin typeface="Calibri" pitchFamily="34" charset="0"/>
-                          <a:ea typeface="Calibri" pitchFamily="34" charset="-122"/>
-                          <a:cs typeface="Calibri" pitchFamily="34" charset="-120"/>
-                        </a:rPr>
-                        <a:t>Mentzer (MCV/RBC)</a:t>
-                      </a:r>
-                      <a:endParaRPr lang="en-US" sz="1100" dirty="0">
-                        <a:latin typeface="Calibri" charset="0"/>
-                        <a:ea typeface="Calibri" charset="0"/>
-                        <a:cs typeface="Calibri" charset="0"/>
-                      </a:endParaRPr>
-                    </a:p>
-                  </a:txBody>
-                  <a:tcPr marL="91440" marR="91440" marT="45720" marB="45720" anchor="ctr">
-                    <a:lnL w="9525" cap="flat" cmpd="sng" algn="ctr">
-                      <a:solidFill>
-                        <a:srgbClr val="DCE4EC"/>
-                      </a:solidFill>
-                      <a:prstDash val="solid"/>
-                      <a:round/>
-                      <a:headEnd type="none" w="med" len="med"/>
-                      <a:tailEnd type="none" w="med" len="med"/>
-                    </a:lnL>
-                    <a:lnR w="9525" cap="flat" cmpd="sng" algn="ctr">
-                      <a:solidFill>
-                        <a:srgbClr val="DCE4EC"/>
-                      </a:solidFill>
-                      <a:prstDash val="solid"/>
-                      <a:round/>
-                      <a:headEnd type="none" w="med" len="med"/>
-                      <a:tailEnd type="none" w="med" len="med"/>
-                    </a:lnR>
-                    <a:lnT w="9525" cap="flat" cmpd="sng" algn="ctr">
-                      <a:solidFill>
-                        <a:srgbClr val="DCE4EC"/>
-                      </a:solidFill>
-                      <a:prstDash val="solid"/>
-                      <a:round/>
-                      <a:headEnd type="none" w="med" len="med"/>
-                      <a:tailEnd type="none" w="med" len="med"/>
-                    </a:lnT>
-                    <a:lnB w="9525" cap="flat" cmpd="sng" algn="ctr">
-                      <a:solidFill>
-                        <a:srgbClr val="DCE4EC"/>
-                      </a:solidFill>
-                      <a:prstDash val="solid"/>
-                      <a:round/>
-                      <a:headEnd type="none" w="med" len="med"/>
-                      <a:tailEnd type="none" w="med" len="med"/>
-                    </a:lnB>
-                    <a:solidFill>
-                      <a:srgbClr val="FFFFFF"/>
-                    </a:solidFill>
-                  </a:tcPr>
-                </a:tc>
-                <a:tc>
-                  <a:txBody>
-                    <a:bodyPr/>
-                    <a:lstStyle/>
-                    <a:p>
-                      <a:pPr algn="ctr" indent="0" marL="0">
-                        <a:buNone/>
-                      </a:pPr>
-                      <a:r>
-                        <a:rPr lang="en-US" sz="1100" dirty="0">
-                          <a:solidFill>
-                            <a:srgbClr val="33444F"/>
-                          </a:solidFill>
-                          <a:latin typeface="Calibri" pitchFamily="34" charset="0"/>
-                          <a:ea typeface="Calibri" pitchFamily="34" charset="-122"/>
-                          <a:cs typeface="Calibri" pitchFamily="34" charset="-120"/>
-                        </a:rPr>
-                        <a:t>&gt; 13</a:t>
-                      </a:r>
-                      <a:endParaRPr lang="en-US" sz="1100" dirty="0">
-                        <a:latin typeface="Calibri" charset="0"/>
-                        <a:ea typeface="Calibri" charset="0"/>
-                        <a:cs typeface="Calibri" charset="0"/>
-                      </a:endParaRPr>
-                    </a:p>
-                  </a:txBody>
-                  <a:tcPr marL="91440" marR="91440" marT="45720" marB="45720" anchor="ctr">
-                    <a:lnL w="9525" cap="flat" cmpd="sng" algn="ctr">
-                      <a:solidFill>
-                        <a:srgbClr val="DCE4EC"/>
-                      </a:solidFill>
-                      <a:prstDash val="solid"/>
-                      <a:round/>
-                      <a:headEnd type="none" w="med" len="med"/>
-                      <a:tailEnd type="none" w="med" len="med"/>
-                    </a:lnL>
-                    <a:lnR w="9525" cap="flat" cmpd="sng" algn="ctr">
-                      <a:solidFill>
-                        <a:srgbClr val="DCE4EC"/>
-                      </a:solidFill>
-                      <a:prstDash val="solid"/>
-                      <a:round/>
-                      <a:headEnd type="none" w="med" len="med"/>
-                      <a:tailEnd type="none" w="med" len="med"/>
-                    </a:lnR>
-                    <a:lnT w="9525" cap="flat" cmpd="sng" algn="ctr">
-                      <a:solidFill>
-                        <a:srgbClr val="DCE4EC"/>
-                      </a:solidFill>
-                      <a:prstDash val="solid"/>
-                      <a:round/>
-                      <a:headEnd type="none" w="med" len="med"/>
-                      <a:tailEnd type="none" w="med" len="med"/>
-                    </a:lnT>
-                    <a:lnB w="9525" cap="flat" cmpd="sng" algn="ctr">
-                      <a:solidFill>
-                        <a:srgbClr val="DCE4EC"/>
-                      </a:solidFill>
-                      <a:prstDash val="solid"/>
-                      <a:round/>
-                      <a:headEnd type="none" w="med" len="med"/>
-                      <a:tailEnd type="none" w="med" len="med"/>
-                    </a:lnB>
-                    <a:solidFill>
-                      <a:srgbClr val="FFFFFF"/>
-                    </a:solidFill>
-                  </a:tcPr>
-                </a:tc>
-                <a:tc>
-                  <a:txBody>
-                    <a:bodyPr/>
-                    <a:lstStyle/>
-                    <a:p>
-                      <a:pPr algn="ctr" indent="0" marL="0">
-                        <a:buNone/>
-                      </a:pPr>
-                      <a:r>
-                        <a:rPr lang="en-US" sz="1100" dirty="0">
-                          <a:solidFill>
-                            <a:srgbClr val="33444F"/>
-                          </a:solidFill>
-                          <a:latin typeface="Calibri" pitchFamily="34" charset="0"/>
-                          <a:ea typeface="Calibri" pitchFamily="34" charset="-122"/>
-                          <a:cs typeface="Calibri" pitchFamily="34" charset="-120"/>
-                        </a:rPr>
-                        <a:t>—</a:t>
-                      </a:r>
-                      <a:endParaRPr lang="en-US" sz="1100" dirty="0">
-                        <a:latin typeface="Calibri" charset="0"/>
-                        <a:ea typeface="Calibri" charset="0"/>
-                        <a:cs typeface="Calibri" charset="0"/>
-                      </a:endParaRPr>
-                    </a:p>
-                  </a:txBody>
-                  <a:tcPr marL="91440" marR="91440" marT="45720" marB="45720" anchor="ctr">
-                    <a:lnL w="9525" cap="flat" cmpd="sng" algn="ctr">
-                      <a:solidFill>
-                        <a:srgbClr val="DCE4EC"/>
-                      </a:solidFill>
-                      <a:prstDash val="solid"/>
-                      <a:round/>
-                      <a:headEnd type="none" w="med" len="med"/>
-                      <a:tailEnd type="none" w="med" len="med"/>
-                    </a:lnL>
-                    <a:lnR w="9525" cap="flat" cmpd="sng" algn="ctr">
-                      <a:solidFill>
-                        <a:srgbClr val="DCE4EC"/>
-                      </a:solidFill>
-                      <a:prstDash val="solid"/>
-                      <a:round/>
-                      <a:headEnd type="none" w="med" len="med"/>
-                      <a:tailEnd type="none" w="med" len="med"/>
-                    </a:lnR>
-                    <a:lnT w="9525" cap="flat" cmpd="sng" algn="ctr">
-                      <a:solidFill>
-                        <a:srgbClr val="DCE4EC"/>
-                      </a:solidFill>
-                      <a:prstDash val="solid"/>
-                      <a:round/>
-                      <a:headEnd type="none" w="med" len="med"/>
-                      <a:tailEnd type="none" w="med" len="med"/>
-                    </a:lnT>
-                    <a:lnB w="9525" cap="flat" cmpd="sng" algn="ctr">
-                      <a:solidFill>
-                        <a:srgbClr val="DCE4EC"/>
-                      </a:solidFill>
-                      <a:prstDash val="solid"/>
-                      <a:round/>
-                      <a:headEnd type="none" w="med" len="med"/>
-                      <a:tailEnd type="none" w="med" len="med"/>
-                    </a:lnB>
-                    <a:solidFill>
-                      <a:srgbClr val="FFFFFF"/>
-                    </a:solidFill>
-                  </a:tcPr>
-                </a:tc>
-                <a:tc>
-                  <a:txBody>
-                    <a:bodyPr/>
-                    <a:lstStyle/>
-                    <a:p>
-                      <a:pPr algn="ctr" indent="0" marL="0">
-                        <a:buNone/>
-                      </a:pPr>
-                      <a:r>
-                        <a:rPr lang="en-US" sz="1100" dirty="0">
-                          <a:solidFill>
-                            <a:srgbClr val="33444F"/>
-                          </a:solidFill>
-                          <a:latin typeface="Calibri" pitchFamily="34" charset="0"/>
-                          <a:ea typeface="Calibri" pitchFamily="34" charset="-122"/>
-                          <a:cs typeface="Calibri" pitchFamily="34" charset="-120"/>
-                        </a:rPr>
-                        <a:t>&lt; 13</a:t>
-                      </a:r>
-                      <a:endParaRPr lang="en-US" sz="1100" dirty="0">
-                        <a:latin typeface="Calibri" charset="0"/>
-                        <a:ea typeface="Calibri" charset="0"/>
-                        <a:cs typeface="Calibri" charset="0"/>
-                      </a:endParaRPr>
-                    </a:p>
-                  </a:txBody>
-                  <a:tcPr marL="91440" marR="91440" marT="45720" marB="45720" anchor="ctr">
-                    <a:lnL w="9525" cap="flat" cmpd="sng" algn="ctr">
-                      <a:solidFill>
-                        <a:srgbClr val="DCE4EC"/>
-                      </a:solidFill>
-                      <a:prstDash val="solid"/>
-                      <a:round/>
-                      <a:headEnd type="none" w="med" len="med"/>
-                      <a:tailEnd type="none" w="med" len="med"/>
-                    </a:lnL>
-                    <a:lnR w="9525" cap="flat" cmpd="sng" algn="ctr">
-                      <a:solidFill>
-                        <a:srgbClr val="DCE4EC"/>
-                      </a:solidFill>
-                      <a:prstDash val="solid"/>
-                      <a:round/>
-                      <a:headEnd type="none" w="med" len="med"/>
-                      <a:tailEnd type="none" w="med" len="med"/>
-                    </a:lnR>
-                    <a:lnT w="9525" cap="flat" cmpd="sng" algn="ctr">
-                      <a:solidFill>
-                        <a:srgbClr val="DCE4EC"/>
-                      </a:solidFill>
-                      <a:prstDash val="solid"/>
-                      <a:round/>
-                      <a:headEnd type="none" w="med" len="med"/>
-                      <a:tailEnd type="none" w="med" len="med"/>
-                    </a:lnT>
-                    <a:lnB w="9525" cap="flat" cmpd="sng" algn="ctr">
-                      <a:solidFill>
-                        <a:srgbClr val="DCE4EC"/>
-                      </a:solidFill>
-                      <a:prstDash val="solid"/>
-                      <a:round/>
-                      <a:headEnd type="none" w="med" len="med"/>
-                      <a:tailEnd type="none" w="med" len="med"/>
-                    </a:lnB>
-                    <a:solidFill>
-                      <a:srgbClr val="FFFFFF"/>
-                    </a:solidFill>
-                  </a:tcPr>
-                </a:tc>
-              </a:tr>
-            </a:tbl>
-          </a:graphicData>
-        </a:graphic>
-      </p:graphicFrame>
-      <p:sp>
-        <p:nvSpPr>
-          <p:cNvPr id="5" name="Text 2"/>
-          <p:cNvSpPr/>
-          <p:nvPr/>
-        </p:nvSpPr>
-        <p:spPr>
-          <a:xfrm>
-            <a:off x="566928" y="6016752"/>
-            <a:ext cx="11057839" cy="365760"/>
+      <p:sp>
+        <p:nvSpPr>
+          <p:cNvPr id="4" name="Shape 2"/>
+          <p:cNvSpPr/>
+          <p:nvPr/>
+        </p:nvSpPr>
+        <p:spPr>
+          <a:xfrm>
+            <a:off x="566928" y="1517904"/>
+            <a:ext cx="5346040" cy="4114800"/>
+          </a:xfrm>
+          <a:prstGeom prst="roundRect">
+            <a:avLst>
+              <a:gd name="adj" fmla="val 2000"/>
+            </a:avLst>
+          </a:prstGeom>
+          <a:solidFill>
+            <a:srgbClr val="FBEAEC"/>
+          </a:solidFill>
+          <a:ln/>
+          <a:effectLst>
+            <a:outerShdw sx="100000" sy="100000" kx="0" ky="0" algn="bl" rotWithShape="0" blurRad="88900" dist="25400" dir="5400000">
+              <a:srgbClr val="22303C">
+                <a:alpha val="12000"/>
+              </a:srgbClr>
+            </a:outerShdw>
+          </a:effectLst>
+        </p:spPr>
+      </p:sp>
+      <p:sp>
+        <p:nvSpPr>
+          <p:cNvPr id="5" name="Text 3"/>
+          <p:cNvSpPr/>
+          <p:nvPr/>
+        </p:nvSpPr>
+        <p:spPr>
+          <a:xfrm>
+            <a:off x="804672" y="1682496"/>
+            <a:ext cx="4888840" cy="274320"/>
           </a:xfrm>
           <a:prstGeom prst="rect">
             <a:avLst/>
@@ -16403,27 +14027,307 @@
           <a:bodyPr wrap="square" lIns="0" tIns="0" rIns="0" bIns="0" rtlCol="0" anchor="ctr"/>
           <a:lstStyle/>
           <a:p>
-            <a:pPr algn="l" indent="0" marL="0">
-              <a:buNone/>
-            </a:pPr>
-            <a:r>
-              <a:rPr lang="en-US" sz="1050" i="1" dirty="0">
-                <a:solidFill>
-                  <a:srgbClr val="6B7B8A"/>
-                </a:solidFill>
-                <a:latin typeface="Calibri" pitchFamily="34" charset="0"/>
-                <a:ea typeface="Calibri" pitchFamily="34" charset="-122"/>
-                <a:cs typeface="Calibri" pitchFamily="34" charset="-120"/>
-              </a:rPr>
-              <a:t>Ferritin is the single most useful first test — but it is an acute-phase reactant and can be falsely normal in inflammation.</a:t>
-            </a:r>
-            <a:endParaRPr lang="en-US" sz="1050" dirty="0"/>
-          </a:p>
-        </p:txBody>
-      </p:sp>
-      <p:sp>
-        <p:nvSpPr>
-          <p:cNvPr id="6" name="Text 3"/>
+            <a:pPr indent="0" marL="0">
+              <a:buNone/>
+            </a:pPr>
+            <a:r>
+              <a:rPr lang="en-US" sz="1200" b="1" spc="100" kern="0" dirty="0">
+                <a:solidFill>
+                  <a:srgbClr val="8E1622"/>
+                </a:solidFill>
+                <a:latin typeface="Calibri" pitchFamily="34" charset="0"/>
+                <a:ea typeface="Calibri" pitchFamily="34" charset="-122"/>
+                <a:cs typeface="Calibri" pitchFamily="34" charset="-120"/>
+              </a:rPr>
+              <a:t>STEP 1: MCV</a:t>
+            </a:r>
+            <a:endParaRPr lang="en-US" sz="1200" dirty="0"/>
+          </a:p>
+        </p:txBody>
+      </p:sp>
+      <p:sp>
+        <p:nvSpPr>
+          <p:cNvPr id="6" name="Text 4"/>
+          <p:cNvSpPr/>
+          <p:nvPr/>
+        </p:nvSpPr>
+        <p:spPr>
+          <a:xfrm>
+            <a:off x="804672" y="2029968"/>
+            <a:ext cx="4870552" cy="3474720"/>
+          </a:xfrm>
+          <a:prstGeom prst="rect">
+            <a:avLst/>
+          </a:prstGeom>
+          <a:noFill/>
+          <a:ln/>
+        </p:spPr>
+        <p:txBody>
+          <a:bodyPr wrap="square" lIns="0" tIns="0" rIns="0" bIns="0" rtlCol="0" anchor="t"/>
+          <a:lstStyle/>
+          <a:p>
+            <a:pPr algn="l" marL="177800" indent="-177800">
+              <a:spcAft>
+                <a:spcPts val="900"/>
+              </a:spcAft>
+              <a:buSzPct val="100000"/>
+              <a:buChar char="•"/>
+            </a:pPr>
+            <a:r>
+              <a:rPr lang="en-US" sz="1250" b="1" dirty="0">
+                <a:solidFill>
+                  <a:srgbClr val="1B2A38"/>
+                </a:solidFill>
+                <a:latin typeface="Calibri" pitchFamily="34" charset="0"/>
+                <a:ea typeface="Calibri" pitchFamily="34" charset="-122"/>
+                <a:cs typeface="Calibri" pitchFamily="34" charset="-120"/>
+              </a:rPr>
+              <a:t>Microcytic, normocytic, or macrocytic frames the differential.</a:t>
+            </a:r>
+            <a:endParaRPr lang="en-US" sz="1250" dirty="0"/>
+          </a:p>
+          <a:p>
+            <a:pPr algn="l" marL="177800" indent="-177800">
+              <a:spcAft>
+                <a:spcPts val="900"/>
+              </a:spcAft>
+              <a:buSzPct val="100000"/>
+              <a:buChar char="•"/>
+            </a:pPr>
+            <a:r>
+              <a:rPr lang="en-US" sz="1250" dirty="0">
+                <a:solidFill>
+                  <a:srgbClr val="33444F"/>
+                </a:solidFill>
+                <a:latin typeface="Calibri" pitchFamily="34" charset="0"/>
+                <a:ea typeface="Calibri" pitchFamily="34" charset="-122"/>
+                <a:cs typeface="Calibri" pitchFamily="34" charset="-120"/>
+              </a:rPr>
+              <a:t>Each category has a focused next test.</a:t>
+            </a:r>
+            <a:endParaRPr lang="en-US" sz="1250" dirty="0"/>
+          </a:p>
+          <a:p>
+            <a:pPr algn="l" marL="177800" indent="-177800">
+              <a:spcAft>
+                <a:spcPts val="900"/>
+              </a:spcAft>
+              <a:buSzPct val="100000"/>
+              <a:buChar char="•"/>
+            </a:pPr>
+            <a:r>
+              <a:rPr lang="en-US" sz="1250" dirty="0">
+                <a:solidFill>
+                  <a:srgbClr val="33444F"/>
+                </a:solidFill>
+                <a:latin typeface="Calibri" pitchFamily="34" charset="0"/>
+                <a:ea typeface="Calibri" pitchFamily="34" charset="-122"/>
+                <a:cs typeface="Calibri" pitchFamily="34" charset="-120"/>
+              </a:rPr>
+              <a:t>RDW adds information about heterogeneity.</a:t>
+            </a:r>
+            <a:endParaRPr lang="en-US" sz="1250" dirty="0"/>
+          </a:p>
+          <a:p>
+            <a:pPr algn="l" marL="177800" indent="-177800">
+              <a:spcAft>
+                <a:spcPts val="900"/>
+              </a:spcAft>
+              <a:buSzPct val="100000"/>
+              <a:buChar char="•"/>
+            </a:pPr>
+            <a:r>
+              <a:rPr lang="en-US" sz="1250" dirty="0">
+                <a:solidFill>
+                  <a:srgbClr val="33444F"/>
+                </a:solidFill>
+                <a:latin typeface="Calibri" pitchFamily="34" charset="0"/>
+                <a:ea typeface="Calibri" pitchFamily="34" charset="-122"/>
+                <a:cs typeface="Calibri" pitchFamily="34" charset="-120"/>
+              </a:rPr>
+              <a:t>Review the smear alongside the indices.</a:t>
+            </a:r>
+            <a:endParaRPr lang="en-US" sz="1250" dirty="0"/>
+          </a:p>
+        </p:txBody>
+      </p:sp>
+      <p:sp>
+        <p:nvSpPr>
+          <p:cNvPr id="7" name="Shape 5"/>
+          <p:cNvSpPr/>
+          <p:nvPr/>
+        </p:nvSpPr>
+        <p:spPr>
+          <a:xfrm>
+            <a:off x="6278728" y="1517904"/>
+            <a:ext cx="5346040" cy="4114800"/>
+          </a:xfrm>
+          <a:prstGeom prst="roundRect">
+            <a:avLst>
+              <a:gd name="adj" fmla="val 2000"/>
+            </a:avLst>
+          </a:prstGeom>
+          <a:solidFill>
+            <a:srgbClr val="FBE7E9"/>
+          </a:solidFill>
+          <a:ln/>
+          <a:effectLst>
+            <a:outerShdw sx="100000" sy="100000" kx="0" ky="0" algn="bl" rotWithShape="0" blurRad="88900" dist="25400" dir="5400000">
+              <a:srgbClr val="22303C">
+                <a:alpha val="12000"/>
+              </a:srgbClr>
+            </a:outerShdw>
+          </a:effectLst>
+        </p:spPr>
+      </p:sp>
+      <p:sp>
+        <p:nvSpPr>
+          <p:cNvPr id="8" name="Text 6"/>
+          <p:cNvSpPr/>
+          <p:nvPr/>
+        </p:nvSpPr>
+        <p:spPr>
+          <a:xfrm>
+            <a:off x="6516472" y="1682496"/>
+            <a:ext cx="4888840" cy="274320"/>
+          </a:xfrm>
+          <a:prstGeom prst="rect">
+            <a:avLst/>
+          </a:prstGeom>
+          <a:noFill/>
+          <a:ln/>
+        </p:spPr>
+        <p:txBody>
+          <a:bodyPr wrap="square" lIns="0" tIns="0" rIns="0" bIns="0" rtlCol="0" anchor="ctr"/>
+          <a:lstStyle/>
+          <a:p>
+            <a:pPr indent="0" marL="0">
+              <a:buNone/>
+            </a:pPr>
+            <a:r>
+              <a:rPr lang="en-US" sz="1200" b="1" spc="100" kern="0" dirty="0">
+                <a:solidFill>
+                  <a:srgbClr val="8E1622"/>
+                </a:solidFill>
+                <a:latin typeface="Calibri" pitchFamily="34" charset="0"/>
+                <a:ea typeface="Calibri" pitchFamily="34" charset="-122"/>
+                <a:cs typeface="Calibri" pitchFamily="34" charset="-120"/>
+              </a:rPr>
+              <a:t>STEP 2: RETICULOCYTES</a:t>
+            </a:r>
+            <a:endParaRPr lang="en-US" sz="1200" dirty="0"/>
+          </a:p>
+        </p:txBody>
+      </p:sp>
+      <p:sp>
+        <p:nvSpPr>
+          <p:cNvPr id="9" name="Text 7"/>
+          <p:cNvSpPr/>
+          <p:nvPr/>
+        </p:nvSpPr>
+        <p:spPr>
+          <a:xfrm>
+            <a:off x="6516472" y="2029968"/>
+            <a:ext cx="4870552" cy="3474720"/>
+          </a:xfrm>
+          <a:prstGeom prst="rect">
+            <a:avLst/>
+          </a:prstGeom>
+          <a:noFill/>
+          <a:ln/>
+        </p:spPr>
+        <p:txBody>
+          <a:bodyPr wrap="square" lIns="0" tIns="0" rIns="0" bIns="0" rtlCol="0" anchor="t"/>
+          <a:lstStyle/>
+          <a:p>
+            <a:pPr algn="l" marL="177800" indent="-177800">
+              <a:spcAft>
+                <a:spcPts val="900"/>
+              </a:spcAft>
+              <a:buSzPct val="100000"/>
+              <a:buChar char="•"/>
+            </a:pPr>
+            <a:r>
+              <a:rPr lang="en-US" sz="1250" b="1" dirty="0">
+                <a:solidFill>
+                  <a:srgbClr val="1B2A38"/>
+                </a:solidFill>
+                <a:latin typeface="Calibri" pitchFamily="34" charset="0"/>
+                <a:ea typeface="Calibri" pitchFamily="34" charset="-122"/>
+                <a:cs typeface="Calibri" pitchFamily="34" charset="-120"/>
+              </a:rPr>
+              <a:t>Low reticulocytes = underproduction; high = blood loss or hemolysis.</a:t>
+            </a:r>
+            <a:endParaRPr lang="en-US" sz="1250" dirty="0"/>
+          </a:p>
+          <a:p>
+            <a:pPr algn="l" marL="177800" indent="-177800">
+              <a:spcAft>
+                <a:spcPts val="900"/>
+              </a:spcAft>
+              <a:buSzPct val="100000"/>
+              <a:buChar char="•"/>
+            </a:pPr>
+            <a:r>
+              <a:rPr lang="en-US" sz="1250" dirty="0">
+                <a:solidFill>
+                  <a:srgbClr val="33444F"/>
+                </a:solidFill>
+                <a:latin typeface="Calibri" pitchFamily="34" charset="0"/>
+                <a:ea typeface="Calibri" pitchFamily="34" charset="-122"/>
+                <a:cs typeface="Calibri" pitchFamily="34" charset="-120"/>
+              </a:rPr>
+              <a:t>The reticulocyte response reframes any MCV category.</a:t>
+            </a:r>
+            <a:endParaRPr lang="en-US" sz="1250" dirty="0"/>
+          </a:p>
+          <a:p>
+            <a:pPr algn="l" marL="177800" indent="-177800">
+              <a:spcAft>
+                <a:spcPts val="900"/>
+              </a:spcAft>
+              <a:buSzPct val="100000"/>
+              <a:buChar char="•"/>
+            </a:pPr>
+            <a:r>
+              <a:rPr lang="en-US" sz="1250" dirty="0">
+                <a:solidFill>
+                  <a:srgbClr val="33444F"/>
+                </a:solidFill>
+                <a:latin typeface="Calibri" pitchFamily="34" charset="0"/>
+                <a:ea typeface="Calibri" pitchFamily="34" charset="-122"/>
+                <a:cs typeface="Calibri" pitchFamily="34" charset="-120"/>
+              </a:rPr>
+              <a:t>Guides whether to look at marrow vs destruction.</a:t>
+            </a:r>
+            <a:endParaRPr lang="en-US" sz="1250" dirty="0"/>
+          </a:p>
+          <a:p>
+            <a:pPr algn="l" marL="177800" indent="-177800">
+              <a:spcAft>
+                <a:spcPts val="900"/>
+              </a:spcAft>
+              <a:buSzPct val="100000"/>
+              <a:buChar char="•"/>
+            </a:pPr>
+            <a:r>
+              <a:rPr lang="en-US" sz="1250" dirty="0">
+                <a:solidFill>
+                  <a:srgbClr val="33444F"/>
+                </a:solidFill>
+                <a:latin typeface="Calibri" pitchFamily="34" charset="0"/>
+                <a:ea typeface="Calibri" pitchFamily="34" charset="-122"/>
+                <a:cs typeface="Calibri" pitchFamily="34" charset="-120"/>
+              </a:rPr>
+              <a:t>Cost-efficient triage.</a:t>
+            </a:r>
+            <a:endParaRPr lang="en-US" sz="1250" dirty="0"/>
+          </a:p>
+        </p:txBody>
+      </p:sp>
+      <p:sp>
+        <p:nvSpPr>
+          <p:cNvPr id="10" name="Text 8"/>
           <p:cNvSpPr/>
           <p:nvPr/>
         </p:nvSpPr>
@@ -16462,7 +14366,7 @@
       </p:sp>
       <p:sp>
         <p:nvSpPr>
-          <p:cNvPr id="7" name="Text 4"/>
+          <p:cNvPr id="11" name="Text 9"/>
           <p:cNvSpPr/>
           <p:nvPr/>
         </p:nvSpPr>
@@ -16538,6 +14442,199 @@
 <file path=ppt/slides/slide8.xml><?xml version="1.0" encoding="utf-8"?>
 <p:sld xmlns:a="http://schemas.openxmlformats.org/drawingml/2006/main" xmlns:r="http://schemas.openxmlformats.org/officeDocument/2006/relationships" xmlns:p="http://schemas.openxmlformats.org/presentationml/2006/main">
   <p:cSld name="Slide 8">
+    <p:bg>
+      <p:bgPr>
+        <a:solidFill>
+          <a:srgbClr val="8E1622"/>
+        </a:solidFill>
+      </p:bgPr>
+    </p:bg>
+    <p:spTree>
+      <p:nvGrpSpPr>
+        <p:cNvPr id="1" name=""/>
+        <p:cNvGrpSpPr/>
+        <p:nvPr/>
+      </p:nvGrpSpPr>
+      <p:grpSpPr>
+        <a:xfrm>
+          <a:off x="0" y="0"/>
+          <a:ext cx="0" cy="0"/>
+          <a:chOff x="0" y="0"/>
+          <a:chExt cx="0" cy="0"/>
+        </a:xfrm>
+      </p:grpSpPr>
+      <p:sp>
+        <p:nvSpPr>
+          <p:cNvPr id="2" name="Shape 0"/>
+          <p:cNvSpPr/>
+          <p:nvPr/>
+        </p:nvSpPr>
+        <p:spPr>
+          <a:xfrm>
+            <a:off x="9509760" y="-1280160"/>
+            <a:ext cx="4754880" cy="4754880"/>
+          </a:xfrm>
+          <a:prstGeom prst="ellipse">
+            <a:avLst/>
+          </a:prstGeom>
+          <a:solidFill>
+            <a:srgbClr val="FFFFFF">
+              <a:alpha val="8000"/>
+            </a:srgbClr>
+          </a:solidFill>
+          <a:ln/>
+        </p:spPr>
+      </p:sp>
+      <p:sp>
+        <p:nvSpPr>
+          <p:cNvPr id="3" name="Shape 1"/>
+          <p:cNvSpPr/>
+          <p:nvPr/>
+        </p:nvSpPr>
+        <p:spPr>
+          <a:xfrm>
+            <a:off x="10607040" y="3931920"/>
+            <a:ext cx="3108960" cy="3108960"/>
+          </a:xfrm>
+          <a:prstGeom prst="ellipse">
+            <a:avLst/>
+          </a:prstGeom>
+          <a:solidFill>
+            <a:srgbClr val="FFFFFF">
+              <a:alpha val="6000"/>
+            </a:srgbClr>
+          </a:solidFill>
+          <a:ln/>
+        </p:spPr>
+      </p:sp>
+      <p:sp>
+        <p:nvSpPr>
+          <p:cNvPr id="4" name="Text 2"/>
+          <p:cNvSpPr/>
+          <p:nvPr/>
+        </p:nvSpPr>
+        <p:spPr>
+          <a:xfrm>
+            <a:off x="566928" y="1783080"/>
+            <a:ext cx="2743200" cy="1463040"/>
+          </a:xfrm>
+          <a:prstGeom prst="rect">
+            <a:avLst/>
+          </a:prstGeom>
+          <a:noFill/>
+          <a:ln/>
+        </p:spPr>
+        <p:txBody>
+          <a:bodyPr wrap="square" lIns="0" tIns="0" rIns="0" bIns="0" rtlCol="0" anchor="ctr"/>
+          <a:lstStyle/>
+          <a:p>
+            <a:pPr algn="l" indent="0" marL="0">
+              <a:buNone/>
+            </a:pPr>
+            <a:r>
+              <a:rPr lang="en-US" sz="6400" b="1" dirty="0">
+                <a:solidFill>
+                  <a:srgbClr val="FBEAEC"/>
+                </a:solidFill>
+                <a:latin typeface="Calibri" pitchFamily="34" charset="0"/>
+                <a:ea typeface="Calibri" pitchFamily="34" charset="-122"/>
+                <a:cs typeface="Calibri" pitchFamily="34" charset="-120"/>
+              </a:rPr>
+              <a:t>02</a:t>
+            </a:r>
+            <a:endParaRPr lang="en-US" sz="6400" dirty="0"/>
+          </a:p>
+        </p:txBody>
+      </p:sp>
+      <p:sp>
+        <p:nvSpPr>
+          <p:cNvPr id="5" name="Text 3"/>
+          <p:cNvSpPr/>
+          <p:nvPr/>
+        </p:nvSpPr>
+        <p:spPr>
+          <a:xfrm>
+            <a:off x="566928" y="3246120"/>
+            <a:ext cx="10058400" cy="365760"/>
+          </a:xfrm>
+          <a:prstGeom prst="rect">
+            <a:avLst/>
+          </a:prstGeom>
+          <a:noFill/>
+          <a:ln/>
+        </p:spPr>
+        <p:txBody>
+          <a:bodyPr wrap="square" lIns="0" tIns="0" rIns="0" bIns="0" rtlCol="0" anchor="ctr"/>
+          <a:lstStyle/>
+          <a:p>
+            <a:pPr algn="l" indent="0" marL="0">
+              <a:buNone/>
+            </a:pPr>
+            <a:r>
+              <a:rPr lang="en-US" sz="1300" b="1" spc="250" kern="0" dirty="0">
+                <a:solidFill>
+                  <a:srgbClr val="F2C9D9"/>
+                </a:solidFill>
+                <a:latin typeface="Calibri" pitchFamily="34" charset="0"/>
+                <a:ea typeface="Calibri" pitchFamily="34" charset="-122"/>
+                <a:cs typeface="Calibri" pitchFamily="34" charset="-120"/>
+              </a:rPr>
+              <a:t>PART TWO</a:t>
+            </a:r>
+            <a:endParaRPr lang="en-US" sz="1300" dirty="0"/>
+          </a:p>
+        </p:txBody>
+      </p:sp>
+      <p:sp>
+        <p:nvSpPr>
+          <p:cNvPr id="6" name="Text 4"/>
+          <p:cNvSpPr/>
+          <p:nvPr/>
+        </p:nvSpPr>
+        <p:spPr>
+          <a:xfrm>
+            <a:off x="566928" y="3611880"/>
+            <a:ext cx="10607040" cy="1463040"/>
+          </a:xfrm>
+          <a:prstGeom prst="rect">
+            <a:avLst/>
+          </a:prstGeom>
+          <a:noFill/>
+          <a:ln/>
+        </p:spPr>
+        <p:txBody>
+          <a:bodyPr wrap="square" lIns="0" tIns="0" rIns="0" bIns="0" rtlCol="0" anchor="t"/>
+          <a:lstStyle/>
+          <a:p>
+            <a:pPr algn="l" indent="0" marL="0">
+              <a:buNone/>
+            </a:pPr>
+            <a:r>
+              <a:rPr lang="en-US" sz="3800" b="1" dirty="0">
+                <a:solidFill>
+                  <a:srgbClr val="FFFFFF"/>
+                </a:solidFill>
+                <a:latin typeface="Calibri" pitchFamily="34" charset="0"/>
+                <a:ea typeface="Calibri" pitchFamily="34" charset="-122"/>
+                <a:cs typeface="Calibri" pitchFamily="34" charset="-120"/>
+              </a:rPr>
+              <a:t>Microcytic, Macrocytic &amp; Hemolysis</a:t>
+            </a:r>
+            <a:endParaRPr lang="en-US" sz="3800" dirty="0"/>
+          </a:p>
+        </p:txBody>
+      </p:sp>
+    </p:spTree>
+  </p:cSld>
+  <p:clrMapOvr>
+    <a:masterClrMapping/>
+  </p:clrMapOvr>
+</p:sld>
+</file>
+
+<file path=ppt/slides/slide9.xml><?xml version="1.0" encoding="utf-8"?>
+<p:sld xmlns:a="http://schemas.openxmlformats.org/drawingml/2006/main" xmlns:r="http://schemas.openxmlformats.org/officeDocument/2006/relationships" xmlns:p="http://schemas.openxmlformats.org/presentationml/2006/main">
+  <p:cSld name="Slide 9">
     <p:bg>
       <p:bgPr>
         <a:solidFill>
@@ -16592,7 +14689,7 @@
                 <a:ea typeface="Calibri" pitchFamily="34" charset="-122"/>
                 <a:cs typeface="Calibri" pitchFamily="34" charset="-120"/>
               </a:rPr>
-              <a:t>HEMATOLOGY &amp; COAGULATION   ·   HEMOLYSIS</a:t>
+              <a:t>HEMATOLOGY &amp; COAGULATION   ·   MICROCYTIC</a:t>
             </a:r>
             <a:endParaRPr lang="en-US" sz="1100" dirty="0"/>
           </a:p>
@@ -16631,7 +14728,7 @@
                 <a:ea typeface="Calibri" pitchFamily="34" charset="-122"/>
                 <a:cs typeface="Calibri" pitchFamily="34" charset="-120"/>
               </a:rPr>
-              <a:t>Red-Cell Morphology in Anemia</a:t>
+              <a:t>Iron Deficiency vs Thalassemia</a:t>
             </a:r>
             <a:endParaRPr lang="en-US" sz="3000" dirty="0"/>
           </a:p>
@@ -16645,23 +14742,18 @@
         </p:nvSpPr>
         <p:spPr>
           <a:xfrm>
-            <a:off x="1066648" y="1481328"/>
-            <a:ext cx="10058400" cy="4288536"/>
+            <a:off x="566928" y="1517904"/>
+            <a:ext cx="5346040" cy="4114800"/>
           </a:xfrm>
           <a:prstGeom prst="roundRect">
             <a:avLst>
-              <a:gd name="adj" fmla="val 1919"/>
+              <a:gd name="adj" fmla="val 2000"/>
             </a:avLst>
           </a:prstGeom>
           <a:solidFill>
-            <a:srgbClr val="FFFFFF"/>
+            <a:srgbClr val="FBEAEC"/>
           </a:solidFill>
-          <a:ln w="12700">
-            <a:solidFill>
-              <a:srgbClr val="DCE4EC"/>
-            </a:solidFill>
-            <a:prstDash val="solid"/>
-          </a:ln>
+          <a:ln/>
           <a:effectLst>
             <a:outerShdw sx="100000" sy="100000" kx="0" ky="0" algn="bl" rotWithShape="0" blurRad="88900" dist="25400" dir="5400000">
               <a:srgbClr val="22303C">
@@ -16671,40 +14763,55 @@
           </a:effectLst>
         </p:spPr>
       </p:sp>
-      <p:pic>
-        <p:nvPicPr>
-          <p:cNvPr id="5" name="Image 0" descr="/tmp/cp_work2/art/heme_morph.png">    </p:cNvPr>
-          <p:cNvPicPr>
-            <a:picLocks noChangeAspect="1"/>
-          </p:cNvPicPr>
-          <p:nvPr/>
-        </p:nvPicPr>
-        <p:blipFill>
-          <a:blip r:embed="rId1"/>
-          <a:stretch>
-            <a:fillRect/>
-          </a:stretch>
-        </p:blipFill>
-        <p:spPr>
-          <a:xfrm>
-            <a:off x="1194664" y="1609344"/>
-            <a:ext cx="9802368" cy="4032504"/>
-          </a:xfrm>
-          <a:prstGeom prst="rect">
-            <a:avLst/>
-          </a:prstGeom>
-        </p:spPr>
-      </p:pic>
-      <p:sp>
-        <p:nvSpPr>
-          <p:cNvPr id="6" name="Text 3"/>
-          <p:cNvSpPr/>
-          <p:nvPr/>
-        </p:nvSpPr>
-        <p:spPr>
-          <a:xfrm>
-            <a:off x="566928" y="5843016"/>
-            <a:ext cx="11057839" cy="365760"/>
+      <p:sp>
+        <p:nvSpPr>
+          <p:cNvPr id="5" name="Text 3"/>
+          <p:cNvSpPr/>
+          <p:nvPr/>
+        </p:nvSpPr>
+        <p:spPr>
+          <a:xfrm>
+            <a:off x="804672" y="1682496"/>
+            <a:ext cx="4888840" cy="274320"/>
+          </a:xfrm>
+          <a:prstGeom prst="rect">
+            <a:avLst/>
+          </a:prstGeom>
+          <a:noFill/>
+          <a:ln/>
+        </p:spPr>
+        <p:txBody>
+          <a:bodyPr wrap="square" lIns="0" tIns="0" rIns="0" bIns="0" rtlCol="0" anchor="ctr"/>
+          <a:lstStyle/>
+          <a:p>
+            <a:pPr indent="0" marL="0">
+              <a:buNone/>
+            </a:pPr>
+            <a:r>
+              <a:rPr lang="en-US" sz="1200" b="1" spc="100" kern="0" dirty="0">
+                <a:solidFill>
+                  <a:srgbClr val="8E1622"/>
+                </a:solidFill>
+                <a:latin typeface="Calibri" pitchFamily="34" charset="0"/>
+                <a:ea typeface="Calibri" pitchFamily="34" charset="-122"/>
+                <a:cs typeface="Calibri" pitchFamily="34" charset="-120"/>
+              </a:rPr>
+              <a:t>IRON DEFICIENCY</a:t>
+            </a:r>
+            <a:endParaRPr lang="en-US" sz="1200" dirty="0"/>
+          </a:p>
+        </p:txBody>
+      </p:sp>
+      <p:sp>
+        <p:nvSpPr>
+          <p:cNvPr id="6" name="Text 4"/>
+          <p:cNvSpPr/>
+          <p:nvPr/>
+        </p:nvSpPr>
+        <p:spPr>
+          <a:xfrm>
+            <a:off x="804672" y="2029968"/>
+            <a:ext cx="4870552" cy="3474720"/>
           </a:xfrm>
           <a:prstGeom prst="rect">
             <a:avLst/>
@@ -16716,27 +14823,268 @@
           <a:bodyPr wrap="square" lIns="0" tIns="0" rIns="0" bIns="0" rtlCol="0" anchor="t"/>
           <a:lstStyle/>
           <a:p>
-            <a:pPr algn="ctr" indent="0" marL="0">
-              <a:buNone/>
-            </a:pPr>
-            <a:r>
-              <a:rPr lang="en-US" sz="1150" i="1" dirty="0">
-                <a:solidFill>
-                  <a:srgbClr val="6B7B8A"/>
-                </a:solidFill>
-                <a:latin typeface="Calibri" pitchFamily="34" charset="0"/>
-                <a:ea typeface="Calibri" pitchFamily="34" charset="-122"/>
-                <a:cs typeface="Calibri" pitchFamily="34" charset="-120"/>
-              </a:rPr>
-              <a:t>Original schematic. Spherocytes (HS / warm AIHA), schistocytes (MAHA), bite cells (G6PD), and targets (thalassemia/liver) localize the cause.</a:t>
-            </a:r>
-            <a:endParaRPr lang="en-US" sz="1150" dirty="0"/>
-          </a:p>
-        </p:txBody>
-      </p:sp>
-      <p:sp>
-        <p:nvSpPr>
-          <p:cNvPr id="7" name="Text 4"/>
+            <a:pPr algn="l" marL="177800" indent="-177800">
+              <a:spcAft>
+                <a:spcPts val="900"/>
+              </a:spcAft>
+              <a:buSzPct val="100000"/>
+              <a:buChar char="•"/>
+            </a:pPr>
+            <a:r>
+              <a:rPr lang="en-US" sz="1250" b="1" dirty="0">
+                <a:solidFill>
+                  <a:srgbClr val="1B2A38"/>
+                </a:solidFill>
+                <a:latin typeface="Calibri" pitchFamily="34" charset="0"/>
+                <a:ea typeface="Calibri" pitchFamily="34" charset="-122"/>
+                <a:cs typeface="Calibri" pitchFamily="34" charset="-120"/>
+              </a:rPr>
+              <a:t>Low ferritin is the most specific marker; high RDW; high TIBC, low transferrin saturation.</a:t>
+            </a:r>
+            <a:endParaRPr lang="en-US" sz="1250" dirty="0"/>
+          </a:p>
+          <a:p>
+            <a:pPr algn="l" marL="177800" indent="-177800">
+              <a:spcAft>
+                <a:spcPts val="900"/>
+              </a:spcAft>
+              <a:buSzPct val="100000"/>
+              <a:buChar char="•"/>
+            </a:pPr>
+            <a:r>
+              <a:rPr lang="en-US" sz="1250" dirty="0">
+                <a:solidFill>
+                  <a:srgbClr val="33444F"/>
+                </a:solidFill>
+                <a:latin typeface="Calibri" pitchFamily="34" charset="0"/>
+                <a:ea typeface="Calibri" pitchFamily="34" charset="-122"/>
+                <a:cs typeface="Calibri" pitchFamily="34" charset="-120"/>
+              </a:rPr>
+              <a:t>Pursue the cause (often GI loss in adults).</a:t>
+            </a:r>
+            <a:endParaRPr lang="en-US" sz="1250" dirty="0"/>
+          </a:p>
+          <a:p>
+            <a:pPr algn="l" marL="177800" indent="-177800">
+              <a:spcAft>
+                <a:spcPts val="900"/>
+              </a:spcAft>
+              <a:buSzPct val="100000"/>
+              <a:buChar char="•"/>
+            </a:pPr>
+            <a:r>
+              <a:rPr lang="en-US" sz="1250" dirty="0">
+                <a:solidFill>
+                  <a:srgbClr val="33444F"/>
+                </a:solidFill>
+                <a:latin typeface="Calibri" pitchFamily="34" charset="0"/>
+                <a:ea typeface="Calibri" pitchFamily="34" charset="-122"/>
+                <a:cs typeface="Calibri" pitchFamily="34" charset="-120"/>
+              </a:rPr>
+              <a:t>Ferritin is an acute-phase reactant — may be falsely normal in inflammation.</a:t>
+            </a:r>
+            <a:endParaRPr lang="en-US" sz="1250" dirty="0"/>
+          </a:p>
+          <a:p>
+            <a:pPr algn="l" marL="177800" indent="-177800">
+              <a:spcAft>
+                <a:spcPts val="900"/>
+              </a:spcAft>
+              <a:buSzPct val="100000"/>
+              <a:buChar char="•"/>
+            </a:pPr>
+            <a:r>
+              <a:rPr lang="en-US" sz="1250" dirty="0">
+                <a:solidFill>
+                  <a:srgbClr val="33444F"/>
+                </a:solidFill>
+                <a:latin typeface="Calibri" pitchFamily="34" charset="0"/>
+                <a:ea typeface="Calibri" pitchFamily="34" charset="-122"/>
+                <a:cs typeface="Calibri" pitchFamily="34" charset="-120"/>
+              </a:rPr>
+              <a:t>Responds to iron with a reticulocytosis.</a:t>
+            </a:r>
+            <a:endParaRPr lang="en-US" sz="1250" dirty="0"/>
+          </a:p>
+        </p:txBody>
+      </p:sp>
+      <p:sp>
+        <p:nvSpPr>
+          <p:cNvPr id="7" name="Shape 5"/>
+          <p:cNvSpPr/>
+          <p:nvPr/>
+        </p:nvSpPr>
+        <p:spPr>
+          <a:xfrm>
+            <a:off x="6278728" y="1517904"/>
+            <a:ext cx="5346040" cy="4114800"/>
+          </a:xfrm>
+          <a:prstGeom prst="roundRect">
+            <a:avLst>
+              <a:gd name="adj" fmla="val 2000"/>
+            </a:avLst>
+          </a:prstGeom>
+          <a:solidFill>
+            <a:srgbClr val="FBE7E9"/>
+          </a:solidFill>
+          <a:ln/>
+          <a:effectLst>
+            <a:outerShdw sx="100000" sy="100000" kx="0" ky="0" algn="bl" rotWithShape="0" blurRad="88900" dist="25400" dir="5400000">
+              <a:srgbClr val="22303C">
+                <a:alpha val="12000"/>
+              </a:srgbClr>
+            </a:outerShdw>
+          </a:effectLst>
+        </p:spPr>
+      </p:sp>
+      <p:sp>
+        <p:nvSpPr>
+          <p:cNvPr id="8" name="Text 6"/>
+          <p:cNvSpPr/>
+          <p:nvPr/>
+        </p:nvSpPr>
+        <p:spPr>
+          <a:xfrm>
+            <a:off x="6516472" y="1682496"/>
+            <a:ext cx="4888840" cy="274320"/>
+          </a:xfrm>
+          <a:prstGeom prst="rect">
+            <a:avLst/>
+          </a:prstGeom>
+          <a:noFill/>
+          <a:ln/>
+        </p:spPr>
+        <p:txBody>
+          <a:bodyPr wrap="square" lIns="0" tIns="0" rIns="0" bIns="0" rtlCol="0" anchor="ctr"/>
+          <a:lstStyle/>
+          <a:p>
+            <a:pPr indent="0" marL="0">
+              <a:buNone/>
+            </a:pPr>
+            <a:r>
+              <a:rPr lang="en-US" sz="1200" b="1" spc="100" kern="0" dirty="0">
+                <a:solidFill>
+                  <a:srgbClr val="8E1622"/>
+                </a:solidFill>
+                <a:latin typeface="Calibri" pitchFamily="34" charset="0"/>
+                <a:ea typeface="Calibri" pitchFamily="34" charset="-122"/>
+                <a:cs typeface="Calibri" pitchFamily="34" charset="-120"/>
+              </a:rPr>
+              <a:t>THALASSEMIA TRAIT</a:t>
+            </a:r>
+            <a:endParaRPr lang="en-US" sz="1200" dirty="0"/>
+          </a:p>
+        </p:txBody>
+      </p:sp>
+      <p:sp>
+        <p:nvSpPr>
+          <p:cNvPr id="9" name="Text 7"/>
+          <p:cNvSpPr/>
+          <p:nvPr/>
+        </p:nvSpPr>
+        <p:spPr>
+          <a:xfrm>
+            <a:off x="6516472" y="2029968"/>
+            <a:ext cx="4870552" cy="3474720"/>
+          </a:xfrm>
+          <a:prstGeom prst="rect">
+            <a:avLst/>
+          </a:prstGeom>
+          <a:noFill/>
+          <a:ln/>
+        </p:spPr>
+        <p:txBody>
+          <a:bodyPr wrap="square" lIns="0" tIns="0" rIns="0" bIns="0" rtlCol="0" anchor="t"/>
+          <a:lstStyle/>
+          <a:p>
+            <a:pPr algn="l" marL="177800" indent="-177800">
+              <a:spcAft>
+                <a:spcPts val="900"/>
+              </a:spcAft>
+              <a:buSzPct val="100000"/>
+              <a:buChar char="•"/>
+            </a:pPr>
+            <a:r>
+              <a:rPr lang="en-US" sz="1250" b="1" dirty="0">
+                <a:solidFill>
+                  <a:srgbClr val="1B2A38"/>
+                </a:solidFill>
+                <a:latin typeface="Calibri" pitchFamily="34" charset="0"/>
+                <a:ea typeface="Calibri" pitchFamily="34" charset="-122"/>
+                <a:cs typeface="Calibri" pitchFamily="34" charset="-120"/>
+              </a:rPr>
+              <a:t>Disproportionately low MCV with a near-normal RDW and high-normal RBC count.</a:t>
+            </a:r>
+            <a:endParaRPr lang="en-US" sz="1250" dirty="0"/>
+          </a:p>
+          <a:p>
+            <a:pPr algn="l" marL="177800" indent="-177800">
+              <a:spcAft>
+                <a:spcPts val="900"/>
+              </a:spcAft>
+              <a:buSzPct val="100000"/>
+              <a:buChar char="•"/>
+            </a:pPr>
+            <a:r>
+              <a:rPr lang="en-US" sz="1250" dirty="0">
+                <a:solidFill>
+                  <a:srgbClr val="33444F"/>
+                </a:solidFill>
+                <a:latin typeface="Calibri" pitchFamily="34" charset="0"/>
+                <a:ea typeface="Calibri" pitchFamily="34" charset="-122"/>
+                <a:cs typeface="Calibri" pitchFamily="34" charset="-120"/>
+              </a:rPr>
+              <a:t>Normal iron studies.</a:t>
+            </a:r>
+            <a:endParaRPr lang="en-US" sz="1250" dirty="0"/>
+          </a:p>
+          <a:p>
+            <a:pPr algn="l" marL="177800" indent="-177800">
+              <a:spcAft>
+                <a:spcPts val="900"/>
+              </a:spcAft>
+              <a:buSzPct val="100000"/>
+              <a:buChar char="•"/>
+            </a:pPr>
+            <a:r>
+              <a:rPr lang="en-US" sz="1250" dirty="0">
+                <a:solidFill>
+                  <a:srgbClr val="33444F"/>
+                </a:solidFill>
+                <a:latin typeface="Calibri" pitchFamily="34" charset="0"/>
+                <a:ea typeface="Calibri" pitchFamily="34" charset="-122"/>
+                <a:cs typeface="Calibri" pitchFamily="34" charset="-120"/>
+              </a:rPr>
+              <a:t>Confirm with hemoglobin analysis (β-thal: ↑HbA2).</a:t>
+            </a:r>
+            <a:endParaRPr lang="en-US" sz="1250" dirty="0"/>
+          </a:p>
+          <a:p>
+            <a:pPr algn="l" marL="177800" indent="-177800">
+              <a:spcAft>
+                <a:spcPts val="900"/>
+              </a:spcAft>
+              <a:buSzPct val="100000"/>
+              <a:buChar char="•"/>
+            </a:pPr>
+            <a:r>
+              <a:rPr lang="en-US" sz="1250" dirty="0">
+                <a:solidFill>
+                  <a:srgbClr val="33444F"/>
+                </a:solidFill>
+                <a:latin typeface="Calibri" pitchFamily="34" charset="0"/>
+                <a:ea typeface="Calibri" pitchFamily="34" charset="-122"/>
+                <a:cs typeface="Calibri" pitchFamily="34" charset="-120"/>
+              </a:rPr>
+              <a:t>Avoid iron over-treatment.</a:t>
+            </a:r>
+            <a:endParaRPr lang="en-US" sz="1250" dirty="0"/>
+          </a:p>
+        </p:txBody>
+      </p:sp>
+      <p:sp>
+        <p:nvSpPr>
+          <p:cNvPr id="10" name="Text 8"/>
           <p:cNvSpPr/>
           <p:nvPr/>
         </p:nvSpPr>
@@ -16775,7 +15123,7 @@
       </p:sp>
       <p:sp>
         <p:nvSpPr>
-          <p:cNvPr id="8" name="Text 5"/>
+          <p:cNvPr id="11" name="Text 9"/>
           <p:cNvSpPr/>
           <p:nvPr/>
         </p:nvSpPr>
@@ -16837,199 +15185,6 @@
               <a:t>7</a:t>
             </a:r>
             <a:endParaRPr lang="en-US" sz="850" dirty="0"/>
-          </a:p>
-        </p:txBody>
-      </p:sp>
-    </p:spTree>
-  </p:cSld>
-  <p:clrMapOvr>
-    <a:masterClrMapping/>
-  </p:clrMapOvr>
-</p:sld>
-</file>
-
-<file path=ppt/slides/slide9.xml><?xml version="1.0" encoding="utf-8"?>
-<p:sld xmlns:a="http://schemas.openxmlformats.org/drawingml/2006/main" xmlns:r="http://schemas.openxmlformats.org/officeDocument/2006/relationships" xmlns:p="http://schemas.openxmlformats.org/presentationml/2006/main">
-  <p:cSld name="Slide 9">
-    <p:bg>
-      <p:bgPr>
-        <a:solidFill>
-          <a:srgbClr val="8E1622"/>
-        </a:solidFill>
-      </p:bgPr>
-    </p:bg>
-    <p:spTree>
-      <p:nvGrpSpPr>
-        <p:cNvPr id="1" name=""/>
-        <p:cNvGrpSpPr/>
-        <p:nvPr/>
-      </p:nvGrpSpPr>
-      <p:grpSpPr>
-        <a:xfrm>
-          <a:off x="0" y="0"/>
-          <a:ext cx="0" cy="0"/>
-          <a:chOff x="0" y="0"/>
-          <a:chExt cx="0" cy="0"/>
-        </a:xfrm>
-      </p:grpSpPr>
-      <p:sp>
-        <p:nvSpPr>
-          <p:cNvPr id="2" name="Shape 0"/>
-          <p:cNvSpPr/>
-          <p:nvPr/>
-        </p:nvSpPr>
-        <p:spPr>
-          <a:xfrm>
-            <a:off x="9509760" y="-1280160"/>
-            <a:ext cx="4754880" cy="4754880"/>
-          </a:xfrm>
-          <a:prstGeom prst="ellipse">
-            <a:avLst/>
-          </a:prstGeom>
-          <a:solidFill>
-            <a:srgbClr val="FFFFFF">
-              <a:alpha val="8000"/>
-            </a:srgbClr>
-          </a:solidFill>
-          <a:ln/>
-        </p:spPr>
-      </p:sp>
-      <p:sp>
-        <p:nvSpPr>
-          <p:cNvPr id="3" name="Shape 1"/>
-          <p:cNvSpPr/>
-          <p:nvPr/>
-        </p:nvSpPr>
-        <p:spPr>
-          <a:xfrm>
-            <a:off x="10607040" y="3931920"/>
-            <a:ext cx="3108960" cy="3108960"/>
-          </a:xfrm>
-          <a:prstGeom prst="ellipse">
-            <a:avLst/>
-          </a:prstGeom>
-          <a:solidFill>
-            <a:srgbClr val="FFFFFF">
-              <a:alpha val="6000"/>
-            </a:srgbClr>
-          </a:solidFill>
-          <a:ln/>
-        </p:spPr>
-      </p:sp>
-      <p:sp>
-        <p:nvSpPr>
-          <p:cNvPr id="4" name="Text 2"/>
-          <p:cNvSpPr/>
-          <p:nvPr/>
-        </p:nvSpPr>
-        <p:spPr>
-          <a:xfrm>
-            <a:off x="566928" y="1783080"/>
-            <a:ext cx="2743200" cy="1463040"/>
-          </a:xfrm>
-          <a:prstGeom prst="rect">
-            <a:avLst/>
-          </a:prstGeom>
-          <a:noFill/>
-          <a:ln/>
-        </p:spPr>
-        <p:txBody>
-          <a:bodyPr wrap="square" lIns="0" tIns="0" rIns="0" bIns="0" rtlCol="0" anchor="ctr"/>
-          <a:lstStyle/>
-          <a:p>
-            <a:pPr algn="l" indent="0" marL="0">
-              <a:buNone/>
-            </a:pPr>
-            <a:r>
-              <a:rPr lang="en-US" sz="6400" b="1" dirty="0">
-                <a:solidFill>
-                  <a:srgbClr val="FBEAEC"/>
-                </a:solidFill>
-                <a:latin typeface="Calibri" pitchFamily="34" charset="0"/>
-                <a:ea typeface="Calibri" pitchFamily="34" charset="-122"/>
-                <a:cs typeface="Calibri" pitchFamily="34" charset="-120"/>
-              </a:rPr>
-              <a:t>02</a:t>
-            </a:r>
-            <a:endParaRPr lang="en-US" sz="6400" dirty="0"/>
-          </a:p>
-        </p:txBody>
-      </p:sp>
-      <p:sp>
-        <p:nvSpPr>
-          <p:cNvPr id="5" name="Text 3"/>
-          <p:cNvSpPr/>
-          <p:nvPr/>
-        </p:nvSpPr>
-        <p:spPr>
-          <a:xfrm>
-            <a:off x="566928" y="3246120"/>
-            <a:ext cx="10058400" cy="365760"/>
-          </a:xfrm>
-          <a:prstGeom prst="rect">
-            <a:avLst/>
-          </a:prstGeom>
-          <a:noFill/>
-          <a:ln/>
-        </p:spPr>
-        <p:txBody>
-          <a:bodyPr wrap="square" lIns="0" tIns="0" rIns="0" bIns="0" rtlCol="0" anchor="ctr"/>
-          <a:lstStyle/>
-          <a:p>
-            <a:pPr algn="l" indent="0" marL="0">
-              <a:buNone/>
-            </a:pPr>
-            <a:r>
-              <a:rPr lang="en-US" sz="1300" b="1" spc="250" kern="0" dirty="0">
-                <a:solidFill>
-                  <a:srgbClr val="F2C9D9"/>
-                </a:solidFill>
-                <a:latin typeface="Calibri" pitchFamily="34" charset="0"/>
-                <a:ea typeface="Calibri" pitchFamily="34" charset="-122"/>
-                <a:cs typeface="Calibri" pitchFamily="34" charset="-120"/>
-              </a:rPr>
-              <a:t>PART TWO</a:t>
-            </a:r>
-            <a:endParaRPr lang="en-US" sz="1300" dirty="0"/>
-          </a:p>
-        </p:txBody>
-      </p:sp>
-      <p:sp>
-        <p:nvSpPr>
-          <p:cNvPr id="6" name="Text 4"/>
-          <p:cNvSpPr/>
-          <p:nvPr/>
-        </p:nvSpPr>
-        <p:spPr>
-          <a:xfrm>
-            <a:off x="566928" y="3611880"/>
-            <a:ext cx="10607040" cy="1463040"/>
-          </a:xfrm>
-          <a:prstGeom prst="rect">
-            <a:avLst/>
-          </a:prstGeom>
-          <a:noFill/>
-          <a:ln/>
-        </p:spPr>
-        <p:txBody>
-          <a:bodyPr wrap="square" lIns="0" tIns="0" rIns="0" bIns="0" rtlCol="0" anchor="t"/>
-          <a:lstStyle/>
-          <a:p>
-            <a:pPr algn="l" indent="0" marL="0">
-              <a:buNone/>
-            </a:pPr>
-            <a:r>
-              <a:rPr lang="en-US" sz="3800" b="1" dirty="0">
-                <a:solidFill>
-                  <a:srgbClr val="FFFFFF"/>
-                </a:solidFill>
-                <a:latin typeface="Calibri" pitchFamily="34" charset="0"/>
-                <a:ea typeface="Calibri" pitchFamily="34" charset="-122"/>
-                <a:cs typeface="Calibri" pitchFamily="34" charset="-120"/>
-              </a:rPr>
-              <a:t>Hemoglobinopathies, Macrocytic &amp; Hemolytic Anemia</a:t>
-            </a:r>
-            <a:endParaRPr lang="en-US" sz="3800" dirty="0"/>
           </a:p>
         </p:txBody>
       </p:sp>

--- a/decks/Heme_02_Anemia-and-Red-Cell-Disorders.pptx
+++ b/decks/Heme_02_Anemia-and-Red-Cell-Disorders.pptx
@@ -25,9 +25,13 @@
     <p:sldId id="273" r:id="rId19"/>
     <p:sldId id="274" r:id="rId20"/>
     <p:sldId id="275" r:id="rId21"/>
+    <p:sldId id="284" r:id="rId35"/>
     <p:sldId id="276" r:id="rId22"/>
+    <p:sldId id="283" r:id="rId34"/>
     <p:sldId id="277" r:id="rId23"/>
+    <p:sldId id="282" r:id="rId33"/>
     <p:sldId id="278" r:id="rId24"/>
+    <p:sldId id="281" r:id="rId32"/>
     <p:sldId id="279" r:id="rId25"/>
     <p:sldId id="280" r:id="rId26"/>
   </p:sldIdLst>
@@ -3032,6 +3036,10 @@
           </a:solidFill>
           <a:ln/>
         </p:spPr>
+        <p:txBody>
+          <a:bodyPr/>
+          <a:p/>
+        </p:txBody>
       </p:sp>
       <p:sp>
         <p:nvSpPr>
@@ -3054,6 +3062,10 @@
           </a:solidFill>
           <a:ln/>
         </p:spPr>
+        <p:txBody>
+          <a:bodyPr/>
+          <a:p/>
+        </p:txBody>
       </p:sp>
       <p:sp>
         <p:nvSpPr>
@@ -3076,6 +3088,10 @@
           </a:solidFill>
           <a:ln/>
         </p:spPr>
+        <p:txBody>
+          <a:bodyPr/>
+          <a:p/>
+        </p:txBody>
       </p:sp>
       <p:sp>
         <p:nvSpPr>
@@ -3098,6 +3114,10 @@
           </a:solidFill>
           <a:ln/>
         </p:spPr>
+        <p:txBody>
+          <a:bodyPr/>
+          <a:p/>
+        </p:txBody>
       </p:sp>
       <p:sp>
         <p:nvSpPr>
@@ -3514,6 +3534,10 @@
             </a:outerShdw>
           </a:effectLst>
         </p:spPr>
+        <p:txBody>
+          <a:bodyPr/>
+          <a:p/>
+        </p:txBody>
       </p:sp>
       <p:sp>
         <p:nvSpPr>
@@ -3688,6 +3712,10 @@
             </a:outerShdw>
           </a:effectLst>
         </p:spPr>
+        <p:txBody>
+          <a:bodyPr/>
+          <a:p/>
+        </p:txBody>
       </p:sp>
       <p:sp>
         <p:nvSpPr>
@@ -4083,6 +4111,10 @@
             </a:outerShdw>
           </a:effectLst>
         </p:spPr>
+        <p:txBody>
+          <a:bodyPr/>
+          <a:p/>
+        </p:txBody>
       </p:sp>
       <p:pic>
         <p:nvPicPr>
@@ -4391,6 +4423,10 @@
             </a:outerShdw>
           </a:effectLst>
         </p:spPr>
+        <p:txBody>
+          <a:bodyPr/>
+          <a:p/>
+        </p:txBody>
       </p:sp>
       <p:sp>
         <p:nvSpPr>
@@ -4565,6 +4601,10 @@
             </a:outerShdw>
           </a:effectLst>
         </p:spPr>
+        <p:txBody>
+          <a:bodyPr/>
+          <a:p/>
+        </p:txBody>
       </p:sp>
       <p:sp>
         <p:nvSpPr>
@@ -4870,6 +4910,10 @@
           </a:solidFill>
           <a:ln/>
         </p:spPr>
+        <p:txBody>
+          <a:bodyPr/>
+          <a:p/>
+        </p:txBody>
       </p:sp>
       <p:sp>
         <p:nvSpPr>
@@ -4892,6 +4936,10 @@
           </a:solidFill>
           <a:ln/>
         </p:spPr>
+        <p:txBody>
+          <a:bodyPr/>
+          <a:p/>
+        </p:txBody>
       </p:sp>
       <p:sp>
         <p:nvSpPr>
@@ -5148,6 +5196,10 @@
             </a:outerShdw>
           </a:effectLst>
         </p:spPr>
+        <p:txBody>
+          <a:bodyPr/>
+          <a:p/>
+        </p:txBody>
       </p:sp>
       <p:sp>
         <p:nvSpPr>
@@ -5258,6 +5310,10 @@
             </a:outerShdw>
           </a:effectLst>
         </p:spPr>
+        <p:txBody>
+          <a:bodyPr/>
+          <a:p/>
+        </p:txBody>
       </p:sp>
       <p:sp>
         <p:nvSpPr>
@@ -5687,6 +5743,10 @@
             </a:outerShdw>
           </a:effectLst>
         </p:spPr>
+        <p:txBody>
+          <a:bodyPr/>
+          <a:p/>
+        </p:txBody>
       </p:sp>
       <p:sp>
         <p:nvSpPr>
@@ -6013,6 +6073,10 @@
             </a:outerShdw>
           </a:effectLst>
         </p:spPr>
+        <p:txBody>
+          <a:bodyPr/>
+          <a:p/>
+        </p:txBody>
       </p:sp>
       <p:sp>
         <p:nvSpPr>
@@ -6123,6 +6187,10 @@
             </a:outerShdw>
           </a:effectLst>
         </p:spPr>
+        <p:txBody>
+          <a:bodyPr/>
+          <a:p/>
+        </p:txBody>
       </p:sp>
       <p:sp>
         <p:nvSpPr>
@@ -6552,6 +6620,10 @@
             </a:outerShdw>
           </a:effectLst>
         </p:spPr>
+        <p:txBody>
+          <a:bodyPr/>
+          <a:p/>
+        </p:txBody>
       </p:sp>
       <p:sp>
         <p:nvSpPr>
@@ -6878,6 +6950,10 @@
             </a:outerShdw>
           </a:effectLst>
         </p:spPr>
+        <p:txBody>
+          <a:bodyPr/>
+          <a:p/>
+        </p:txBody>
       </p:sp>
       <p:sp>
         <p:nvSpPr>
@@ -6988,6 +7064,10 @@
             </a:outerShdw>
           </a:effectLst>
         </p:spPr>
+        <p:txBody>
+          <a:bodyPr/>
+          <a:p/>
+        </p:txBody>
       </p:sp>
       <p:sp>
         <p:nvSpPr>
@@ -7417,6 +7497,10 @@
             </a:outerShdw>
           </a:effectLst>
         </p:spPr>
+        <p:txBody>
+          <a:bodyPr/>
+          <a:p/>
+        </p:txBody>
       </p:sp>
       <p:sp>
         <p:nvSpPr>
@@ -7743,6 +7827,10 @@
             </a:outerShdw>
           </a:effectLst>
         </p:spPr>
+        <p:txBody>
+          <a:bodyPr/>
+          <a:p/>
+        </p:txBody>
       </p:sp>
       <p:sp>
         <p:nvSpPr>
@@ -7850,6 +7938,10 @@
             </a:outerShdw>
           </a:effectLst>
         </p:spPr>
+        <p:txBody>
+          <a:bodyPr/>
+          <a:p/>
+        </p:txBody>
       </p:sp>
       <p:sp>
         <p:nvSpPr>
@@ -7957,6 +8049,10 @@
             </a:outerShdw>
           </a:effectLst>
         </p:spPr>
+        <p:txBody>
+          <a:bodyPr/>
+          <a:p/>
+        </p:txBody>
       </p:sp>
       <p:sp>
         <p:nvSpPr>
@@ -8064,6 +8160,10 @@
             </a:outerShdw>
           </a:effectLst>
         </p:spPr>
+        <p:txBody>
+          <a:bodyPr/>
+          <a:p/>
+        </p:txBody>
       </p:sp>
       <p:sp>
         <p:nvSpPr>
@@ -8456,9 +8556,9 @@
               <a:buNone/>
             </a:pPr>
             <a:r>
-              <a:rPr lang="en-US" sz="1350" b="1" dirty="0">
-                <a:solidFill>
-                  <a:srgbClr val="8E1622"/>
+              <a:rPr lang="en-US" sz="1350" b="0" dirty="0">
+                <a:solidFill>
+                  <a:srgbClr val="33444F"/>
                 </a:solidFill>
                 <a:latin typeface="Calibri" pitchFamily="34" charset="0"/>
                 <a:ea typeface="Calibri" pitchFamily="34" charset="-122"/>
@@ -8527,130 +8627,6 @@
               <a:t>E. Transferrin</a:t>
             </a:r>
             <a:endParaRPr lang="en-US" sz="1350" dirty="0"/>
-          </a:p>
-        </p:txBody>
-      </p:sp>
-      <p:sp>
-        <p:nvSpPr>
-          <p:cNvPr id="6" name="Shape 4"/>
-          <p:cNvSpPr/>
-          <p:nvPr/>
-        </p:nvSpPr>
-        <p:spPr>
-          <a:xfrm>
-            <a:off x="7201632" y="2395728"/>
-            <a:ext cx="4423136" cy="3246120"/>
-          </a:xfrm>
-          <a:prstGeom prst="roundRect">
-            <a:avLst>
-              <a:gd name="adj" fmla="val 2535"/>
-            </a:avLst>
-          </a:prstGeom>
-          <a:solidFill>
-            <a:srgbClr val="FBEAEC"/>
-          </a:solidFill>
-          <a:ln/>
-          <a:effectLst>
-            <a:outerShdw sx="100000" sy="100000" kx="0" ky="0" algn="bl" rotWithShape="0" blurRad="88900" dist="25400" dir="5400000">
-              <a:srgbClr val="22303C">
-                <a:alpha val="12000"/>
-              </a:srgbClr>
-            </a:outerShdw>
-          </a:effectLst>
-        </p:spPr>
-      </p:sp>
-      <p:sp>
-        <p:nvSpPr>
-          <p:cNvPr id="7" name="Text 5"/>
-          <p:cNvSpPr/>
-          <p:nvPr/>
-        </p:nvSpPr>
-        <p:spPr>
-          <a:xfrm>
-            <a:off x="7439376" y="2578608"/>
-            <a:ext cx="3965936" cy="457200"/>
-          </a:xfrm>
-          <a:prstGeom prst="rect">
-            <a:avLst/>
-          </a:prstGeom>
-          <a:noFill/>
-          <a:ln/>
-        </p:spPr>
-        <p:txBody>
-          <a:bodyPr wrap="square" lIns="0" tIns="0" rIns="0" bIns="0" rtlCol="0" anchor="ctr"/>
-          <a:lstStyle/>
-          <a:p>
-            <a:pPr indent="0" marL="0">
-              <a:buNone/>
-            </a:pPr>
-            <a:r>
-              <a:rPr lang="en-US" sz="1500" b="1" dirty="0">
-                <a:solidFill>
-                  <a:srgbClr val="C62133"/>
-                </a:solidFill>
-                <a:latin typeface="Calibri" pitchFamily="34" charset="0"/>
-                <a:ea typeface="Calibri" pitchFamily="34" charset="-122"/>
-                <a:cs typeface="Calibri" pitchFamily="34" charset="-120"/>
-              </a:rPr>
-              <a:t>ANSWER  </a:t>
-            </a:r>
-            <a:pPr indent="0" marL="0">
-              <a:buNone/>
-            </a:pPr>
-            <a:r>
-              <a:rPr lang="en-US" sz="1500" b="1" dirty="0">
-                <a:solidFill>
-                  <a:srgbClr val="1B2A38"/>
-                </a:solidFill>
-                <a:latin typeface="Calibri" pitchFamily="34" charset="0"/>
-                <a:ea typeface="Calibri" pitchFamily="34" charset="-122"/>
-                <a:cs typeface="Calibri" pitchFamily="34" charset="-120"/>
-              </a:rPr>
-              <a:t>B — Low ferritin</a:t>
-            </a:r>
-            <a:endParaRPr lang="en-US" sz="1500" dirty="0"/>
-          </a:p>
-        </p:txBody>
-      </p:sp>
-      <p:sp>
-        <p:nvSpPr>
-          <p:cNvPr id="8" name="Text 6"/>
-          <p:cNvSpPr/>
-          <p:nvPr/>
-        </p:nvSpPr>
-        <p:spPr>
-          <a:xfrm>
-            <a:off x="7439376" y="3127248"/>
-            <a:ext cx="3947648" cy="2377440"/>
-          </a:xfrm>
-          <a:prstGeom prst="rect">
-            <a:avLst/>
-          </a:prstGeom>
-          <a:noFill/>
-          <a:ln/>
-        </p:spPr>
-        <p:txBody>
-          <a:bodyPr wrap="square" lIns="0" tIns="0" rIns="0" bIns="0" rtlCol="0" anchor="t"/>
-          <a:lstStyle/>
-          <a:p>
-            <a:pPr algn="l" indent="0" marL="0">
-              <a:lnSpc>
-                <a:spcPct val="108000"/>
-              </a:lnSpc>
-              <a:buNone/>
-            </a:pPr>
-            <a:r>
-              <a:rPr lang="en-US" sz="1250" dirty="0">
-                <a:solidFill>
-                  <a:srgbClr val="33444F"/>
-                </a:solidFill>
-                <a:latin typeface="Calibri" pitchFamily="34" charset="0"/>
-                <a:ea typeface="Calibri" pitchFamily="34" charset="-122"/>
-                <a:cs typeface="Calibri" pitchFamily="34" charset="-120"/>
-              </a:rPr>
-              <a:t>Low ferritin reflects depleted iron stores; note it can be falsely normal as an acute-phase reactant.</a:t>
-            </a:r>
-            <a:endParaRPr lang="en-US" sz="1250" dirty="0"/>
           </a:p>
         </p:txBody>
       </p:sp>
@@ -8980,9 +8956,9 @@
               <a:buNone/>
             </a:pPr>
             <a:r>
-              <a:rPr lang="en-US" sz="1350" b="1" dirty="0">
-                <a:solidFill>
-                  <a:srgbClr val="8E1622"/>
+              <a:rPr lang="en-US" sz="1350" b="0" dirty="0">
+                <a:solidFill>
+                  <a:srgbClr val="33444F"/>
                 </a:solidFill>
                 <a:latin typeface="Calibri" pitchFamily="34" charset="0"/>
                 <a:ea typeface="Calibri" pitchFamily="34" charset="-122"/>
@@ -9031,130 +9007,6 @@
               <a:t>E. Low RBC count</a:t>
             </a:r>
             <a:endParaRPr lang="en-US" sz="1350" dirty="0"/>
-          </a:p>
-        </p:txBody>
-      </p:sp>
-      <p:sp>
-        <p:nvSpPr>
-          <p:cNvPr id="6" name="Shape 4"/>
-          <p:cNvSpPr/>
-          <p:nvPr/>
-        </p:nvSpPr>
-        <p:spPr>
-          <a:xfrm>
-            <a:off x="7201632" y="2395728"/>
-            <a:ext cx="4423136" cy="3246120"/>
-          </a:xfrm>
-          <a:prstGeom prst="roundRect">
-            <a:avLst>
-              <a:gd name="adj" fmla="val 2535"/>
-            </a:avLst>
-          </a:prstGeom>
-          <a:solidFill>
-            <a:srgbClr val="FBEAEC"/>
-          </a:solidFill>
-          <a:ln/>
-          <a:effectLst>
-            <a:outerShdw sx="100000" sy="100000" kx="0" ky="0" algn="bl" rotWithShape="0" blurRad="88900" dist="25400" dir="5400000">
-              <a:srgbClr val="22303C">
-                <a:alpha val="12000"/>
-              </a:srgbClr>
-            </a:outerShdw>
-          </a:effectLst>
-        </p:spPr>
-      </p:sp>
-      <p:sp>
-        <p:nvSpPr>
-          <p:cNvPr id="7" name="Text 5"/>
-          <p:cNvSpPr/>
-          <p:nvPr/>
-        </p:nvSpPr>
-        <p:spPr>
-          <a:xfrm>
-            <a:off x="7439376" y="2578608"/>
-            <a:ext cx="3965936" cy="457200"/>
-          </a:xfrm>
-          <a:prstGeom prst="rect">
-            <a:avLst/>
-          </a:prstGeom>
-          <a:noFill/>
-          <a:ln/>
-        </p:spPr>
-        <p:txBody>
-          <a:bodyPr wrap="square" lIns="0" tIns="0" rIns="0" bIns="0" rtlCol="0" anchor="ctr"/>
-          <a:lstStyle/>
-          <a:p>
-            <a:pPr indent="0" marL="0">
-              <a:buNone/>
-            </a:pPr>
-            <a:r>
-              <a:rPr lang="en-US" sz="1500" b="1" dirty="0">
-                <a:solidFill>
-                  <a:srgbClr val="C62133"/>
-                </a:solidFill>
-                <a:latin typeface="Calibri" pitchFamily="34" charset="0"/>
-                <a:ea typeface="Calibri" pitchFamily="34" charset="-122"/>
-                <a:cs typeface="Calibri" pitchFamily="34" charset="-120"/>
-              </a:rPr>
-              <a:t>ANSWER  </a:t>
-            </a:r>
-            <a:pPr indent="0" marL="0">
-              <a:buNone/>
-            </a:pPr>
-            <a:r>
-              <a:rPr lang="en-US" sz="1500" b="1" dirty="0">
-                <a:solidFill>
-                  <a:srgbClr val="1B2A38"/>
-                </a:solidFill>
-                <a:latin typeface="Calibri" pitchFamily="34" charset="0"/>
-                <a:ea typeface="Calibri" pitchFamily="34" charset="-122"/>
-                <a:cs typeface="Calibri" pitchFamily="34" charset="-120"/>
-              </a:rPr>
-              <a:t>C — ↑HbA2 with normal iron studies</a:t>
-            </a:r>
-            <a:endParaRPr lang="en-US" sz="1500" dirty="0"/>
-          </a:p>
-        </p:txBody>
-      </p:sp>
-      <p:sp>
-        <p:nvSpPr>
-          <p:cNvPr id="8" name="Text 6"/>
-          <p:cNvSpPr/>
-          <p:nvPr/>
-        </p:nvSpPr>
-        <p:spPr>
-          <a:xfrm>
-            <a:off x="7439376" y="3127248"/>
-            <a:ext cx="3947648" cy="2377440"/>
-          </a:xfrm>
-          <a:prstGeom prst="rect">
-            <a:avLst/>
-          </a:prstGeom>
-          <a:noFill/>
-          <a:ln/>
-        </p:spPr>
-        <p:txBody>
-          <a:bodyPr wrap="square" lIns="0" tIns="0" rIns="0" bIns="0" rtlCol="0" anchor="t"/>
-          <a:lstStyle/>
-          <a:p>
-            <a:pPr algn="l" indent="0" marL="0">
-              <a:lnSpc>
-                <a:spcPct val="108000"/>
-              </a:lnSpc>
-              <a:buNone/>
-            </a:pPr>
-            <a:r>
-              <a:rPr lang="en-US" sz="1250" dirty="0">
-                <a:solidFill>
-                  <a:srgbClr val="33444F"/>
-                </a:solidFill>
-                <a:latin typeface="Calibri" pitchFamily="34" charset="0"/>
-                <a:ea typeface="Calibri" pitchFamily="34" charset="-122"/>
-                <a:cs typeface="Calibri" pitchFamily="34" charset="-120"/>
-              </a:rPr>
-              <a:t>β-thalassemia trait shows elevated HbA2 and normal iron studies; iron deficiency shows low ferritin and high RDW.</a:t>
-            </a:r>
-            <a:endParaRPr lang="en-US" sz="1250" dirty="0"/>
           </a:p>
         </p:txBody>
       </p:sp>
@@ -9464,9 +9316,9 @@
               <a:buNone/>
             </a:pPr>
             <a:r>
-              <a:rPr lang="en-US" sz="1350" b="1" dirty="0">
-                <a:solidFill>
-                  <a:srgbClr val="8E1622"/>
+              <a:rPr lang="en-US" sz="1350" b="0" dirty="0">
+                <a:solidFill>
+                  <a:srgbClr val="33444F"/>
                 </a:solidFill>
                 <a:latin typeface="Calibri" pitchFamily="34" charset="0"/>
                 <a:ea typeface="Calibri" pitchFamily="34" charset="-122"/>
@@ -9535,130 +9387,6 @@
               <a:t>E. Low RDW, high MCHC</a:t>
             </a:r>
             <a:endParaRPr lang="en-US" sz="1350" dirty="0"/>
-          </a:p>
-        </p:txBody>
-      </p:sp>
-      <p:sp>
-        <p:nvSpPr>
-          <p:cNvPr id="6" name="Shape 4"/>
-          <p:cNvSpPr/>
-          <p:nvPr/>
-        </p:nvSpPr>
-        <p:spPr>
-          <a:xfrm>
-            <a:off x="7201632" y="2395728"/>
-            <a:ext cx="4423136" cy="3246120"/>
-          </a:xfrm>
-          <a:prstGeom prst="roundRect">
-            <a:avLst>
-              <a:gd name="adj" fmla="val 2535"/>
-            </a:avLst>
-          </a:prstGeom>
-          <a:solidFill>
-            <a:srgbClr val="FBEAEC"/>
-          </a:solidFill>
-          <a:ln/>
-          <a:effectLst>
-            <a:outerShdw sx="100000" sy="100000" kx="0" ky="0" algn="bl" rotWithShape="0" blurRad="88900" dist="25400" dir="5400000">
-              <a:srgbClr val="22303C">
-                <a:alpha val="12000"/>
-              </a:srgbClr>
-            </a:outerShdw>
-          </a:effectLst>
-        </p:spPr>
-      </p:sp>
-      <p:sp>
-        <p:nvSpPr>
-          <p:cNvPr id="7" name="Text 5"/>
-          <p:cNvSpPr/>
-          <p:nvPr/>
-        </p:nvSpPr>
-        <p:spPr>
-          <a:xfrm>
-            <a:off x="7439376" y="2578608"/>
-            <a:ext cx="3965936" cy="457200"/>
-          </a:xfrm>
-          <a:prstGeom prst="rect">
-            <a:avLst/>
-          </a:prstGeom>
-          <a:noFill/>
-          <a:ln/>
-        </p:spPr>
-        <p:txBody>
-          <a:bodyPr wrap="square" lIns="0" tIns="0" rIns="0" bIns="0" rtlCol="0" anchor="ctr"/>
-          <a:lstStyle/>
-          <a:p>
-            <a:pPr indent="0" marL="0">
-              <a:buNone/>
-            </a:pPr>
-            <a:r>
-              <a:rPr lang="en-US" sz="1500" b="1" dirty="0">
-                <a:solidFill>
-                  <a:srgbClr val="C62133"/>
-                </a:solidFill>
-                <a:latin typeface="Calibri" pitchFamily="34" charset="0"/>
-                <a:ea typeface="Calibri" pitchFamily="34" charset="-122"/>
-                <a:cs typeface="Calibri" pitchFamily="34" charset="-120"/>
-              </a:rPr>
-              <a:t>ANSWER  </a:t>
-            </a:r>
-            <a:pPr indent="0" marL="0">
-              <a:buNone/>
-            </a:pPr>
-            <a:r>
-              <a:rPr lang="en-US" sz="1500" b="1" dirty="0">
-                <a:solidFill>
-                  <a:srgbClr val="1B2A38"/>
-                </a:solidFill>
-                <a:latin typeface="Calibri" pitchFamily="34" charset="0"/>
-                <a:ea typeface="Calibri" pitchFamily="34" charset="-122"/>
-                <a:cs typeface="Calibri" pitchFamily="34" charset="-120"/>
-              </a:rPr>
-              <a:t>B — Low haptoglobin, high LDH, high indirect bilirubin</a:t>
-            </a:r>
-            <a:endParaRPr lang="en-US" sz="1500" dirty="0"/>
-          </a:p>
-        </p:txBody>
-      </p:sp>
-      <p:sp>
-        <p:nvSpPr>
-          <p:cNvPr id="8" name="Text 6"/>
-          <p:cNvSpPr/>
-          <p:nvPr/>
-        </p:nvSpPr>
-        <p:spPr>
-          <a:xfrm>
-            <a:off x="7439376" y="3127248"/>
-            <a:ext cx="3947648" cy="2377440"/>
-          </a:xfrm>
-          <a:prstGeom prst="rect">
-            <a:avLst/>
-          </a:prstGeom>
-          <a:noFill/>
-          <a:ln/>
-        </p:spPr>
-        <p:txBody>
-          <a:bodyPr wrap="square" lIns="0" tIns="0" rIns="0" bIns="0" rtlCol="0" anchor="t"/>
-          <a:lstStyle/>
-          <a:p>
-            <a:pPr algn="l" indent="0" marL="0">
-              <a:lnSpc>
-                <a:spcPct val="108000"/>
-              </a:lnSpc>
-              <a:buNone/>
-            </a:pPr>
-            <a:r>
-              <a:rPr lang="en-US" sz="1250" dirty="0">
-                <a:solidFill>
-                  <a:srgbClr val="33444F"/>
-                </a:solidFill>
-                <a:latin typeface="Calibri" pitchFamily="34" charset="0"/>
-                <a:ea typeface="Calibri" pitchFamily="34" charset="-122"/>
-                <a:cs typeface="Calibri" pitchFamily="34" charset="-120"/>
-              </a:rPr>
-              <a:t>Hemolysis releases LDH and bilirubin and consumes haptoglobin, with a compensatory reticulocytosis.</a:t>
-            </a:r>
-            <a:endParaRPr lang="en-US" sz="1250" dirty="0"/>
           </a:p>
         </p:txBody>
       </p:sp>
@@ -9968,9 +9696,9 @@
               <a:buNone/>
             </a:pPr>
             <a:r>
-              <a:rPr lang="en-US" sz="1350" b="1" dirty="0">
-                <a:solidFill>
-                  <a:srgbClr val="8E1622"/>
+              <a:rPr lang="en-US" sz="1350" b="0" dirty="0">
+                <a:solidFill>
+                  <a:srgbClr val="33444F"/>
                 </a:solidFill>
                 <a:latin typeface="Calibri" pitchFamily="34" charset="0"/>
                 <a:ea typeface="Calibri" pitchFamily="34" charset="-122"/>
@@ -10039,130 +9767,6 @@
               <a:t>E. Thalassemia</a:t>
             </a:r>
             <a:endParaRPr lang="en-US" sz="1350" dirty="0"/>
-          </a:p>
-        </p:txBody>
-      </p:sp>
-      <p:sp>
-        <p:nvSpPr>
-          <p:cNvPr id="6" name="Shape 4"/>
-          <p:cNvSpPr/>
-          <p:nvPr/>
-        </p:nvSpPr>
-        <p:spPr>
-          <a:xfrm>
-            <a:off x="7201632" y="2395728"/>
-            <a:ext cx="4423136" cy="3246120"/>
-          </a:xfrm>
-          <a:prstGeom prst="roundRect">
-            <a:avLst>
-              <a:gd name="adj" fmla="val 2535"/>
-            </a:avLst>
-          </a:prstGeom>
-          <a:solidFill>
-            <a:srgbClr val="FBEAEC"/>
-          </a:solidFill>
-          <a:ln/>
-          <a:effectLst>
-            <a:outerShdw sx="100000" sy="100000" kx="0" ky="0" algn="bl" rotWithShape="0" blurRad="88900" dist="25400" dir="5400000">
-              <a:srgbClr val="22303C">
-                <a:alpha val="12000"/>
-              </a:srgbClr>
-            </a:outerShdw>
-          </a:effectLst>
-        </p:spPr>
-      </p:sp>
-      <p:sp>
-        <p:nvSpPr>
-          <p:cNvPr id="7" name="Text 5"/>
-          <p:cNvSpPr/>
-          <p:nvPr/>
-        </p:nvSpPr>
-        <p:spPr>
-          <a:xfrm>
-            <a:off x="7439376" y="2578608"/>
-            <a:ext cx="3965936" cy="457200"/>
-          </a:xfrm>
-          <a:prstGeom prst="rect">
-            <a:avLst/>
-          </a:prstGeom>
-          <a:noFill/>
-          <a:ln/>
-        </p:spPr>
-        <p:txBody>
-          <a:bodyPr wrap="square" lIns="0" tIns="0" rIns="0" bIns="0" rtlCol="0" anchor="ctr"/>
-          <a:lstStyle/>
-          <a:p>
-            <a:pPr indent="0" marL="0">
-              <a:buNone/>
-            </a:pPr>
-            <a:r>
-              <a:rPr lang="en-US" sz="1500" b="1" dirty="0">
-                <a:solidFill>
-                  <a:srgbClr val="C62133"/>
-                </a:solidFill>
-                <a:latin typeface="Calibri" pitchFamily="34" charset="0"/>
-                <a:ea typeface="Calibri" pitchFamily="34" charset="-122"/>
-                <a:cs typeface="Calibri" pitchFamily="34" charset="-120"/>
-              </a:rPr>
-              <a:t>ANSWER  </a:t>
-            </a:r>
-            <a:pPr indent="0" marL="0">
-              <a:buNone/>
-            </a:pPr>
-            <a:r>
-              <a:rPr lang="en-US" sz="1500" b="1" dirty="0">
-                <a:solidFill>
-                  <a:srgbClr val="1B2A38"/>
-                </a:solidFill>
-                <a:latin typeface="Calibri" pitchFamily="34" charset="0"/>
-                <a:ea typeface="Calibri" pitchFamily="34" charset="-122"/>
-                <a:cs typeface="Calibri" pitchFamily="34" charset="-120"/>
-              </a:rPr>
-              <a:t>B — Immune mechanism</a:t>
-            </a:r>
-            <a:endParaRPr lang="en-US" sz="1500" dirty="0"/>
-          </a:p>
-        </p:txBody>
-      </p:sp>
-      <p:sp>
-        <p:nvSpPr>
-          <p:cNvPr id="8" name="Text 6"/>
-          <p:cNvSpPr/>
-          <p:nvPr/>
-        </p:nvSpPr>
-        <p:spPr>
-          <a:xfrm>
-            <a:off x="7439376" y="3127248"/>
-            <a:ext cx="3947648" cy="2377440"/>
-          </a:xfrm>
-          <a:prstGeom prst="rect">
-            <a:avLst/>
-          </a:prstGeom>
-          <a:noFill/>
-          <a:ln/>
-        </p:spPr>
-        <p:txBody>
-          <a:bodyPr wrap="square" lIns="0" tIns="0" rIns="0" bIns="0" rtlCol="0" anchor="t"/>
-          <a:lstStyle/>
-          <a:p>
-            <a:pPr algn="l" indent="0" marL="0">
-              <a:lnSpc>
-                <a:spcPct val="108000"/>
-              </a:lnSpc>
-              <a:buNone/>
-            </a:pPr>
-            <a:r>
-              <a:rPr lang="en-US" sz="1250" dirty="0">
-                <a:solidFill>
-                  <a:srgbClr val="33444F"/>
-                </a:solidFill>
-                <a:latin typeface="Calibri" pitchFamily="34" charset="0"/>
-                <a:ea typeface="Calibri" pitchFamily="34" charset="-122"/>
-                <a:cs typeface="Calibri" pitchFamily="34" charset="-120"/>
-              </a:rPr>
-              <a:t>The DAT detects antibody/complement on red cells, identifying immune-mediated hemolysis.</a:t>
-            </a:r>
-            <a:endParaRPr lang="en-US" sz="1250" dirty="0"/>
           </a:p>
         </p:txBody>
       </p:sp>
@@ -10403,6 +10007,10 @@
           </a:solidFill>
           <a:ln/>
         </p:spPr>
+        <p:txBody>
+          <a:bodyPr/>
+          <a:p/>
+        </p:txBody>
       </p:sp>
       <p:sp>
         <p:nvSpPr>
@@ -10430,6 +10038,10 @@
             </a:outerShdw>
           </a:effectLst>
         </p:spPr>
+        <p:txBody>
+          <a:bodyPr/>
+          <a:p/>
+        </p:txBody>
       </p:sp>
       <p:sp>
         <p:nvSpPr>
@@ -10530,6 +10142,10 @@
           </a:solidFill>
           <a:ln/>
         </p:spPr>
+        <p:txBody>
+          <a:bodyPr/>
+          <a:p/>
+        </p:txBody>
       </p:sp>
       <p:sp>
         <p:nvSpPr>
@@ -10557,6 +10173,10 @@
             </a:outerShdw>
           </a:effectLst>
         </p:spPr>
+        <p:txBody>
+          <a:bodyPr/>
+          <a:p/>
+        </p:txBody>
       </p:sp>
       <p:sp>
         <p:nvSpPr>
@@ -10657,6 +10277,10 @@
           </a:solidFill>
           <a:ln/>
         </p:spPr>
+        <p:txBody>
+          <a:bodyPr/>
+          <a:p/>
+        </p:txBody>
       </p:sp>
       <p:sp>
         <p:nvSpPr>
@@ -10684,6 +10308,10 @@
             </a:outerShdw>
           </a:effectLst>
         </p:spPr>
+        <p:txBody>
+          <a:bodyPr/>
+          <a:p/>
+        </p:txBody>
       </p:sp>
       <p:sp>
         <p:nvSpPr>
@@ -10784,6 +10412,10 @@
           </a:solidFill>
           <a:ln/>
         </p:spPr>
+        <p:txBody>
+          <a:bodyPr/>
+          <a:p/>
+        </p:txBody>
       </p:sp>
       <p:sp>
         <p:nvSpPr>
@@ -10811,6 +10443,10 @@
             </a:outerShdw>
           </a:effectLst>
         </p:spPr>
+        <p:txBody>
+          <a:bodyPr/>
+          <a:p/>
+        </p:txBody>
       </p:sp>
       <p:sp>
         <p:nvSpPr>
@@ -10911,6 +10547,10 @@
           </a:solidFill>
           <a:ln/>
         </p:spPr>
+        <p:txBody>
+          <a:bodyPr/>
+          <a:p/>
+        </p:txBody>
       </p:sp>
       <p:sp>
         <p:nvSpPr>
@@ -10938,6 +10578,10 @@
             </a:outerShdw>
           </a:effectLst>
         </p:spPr>
+        <p:txBody>
+          <a:bodyPr/>
+          <a:p/>
+        </p:txBody>
       </p:sp>
       <p:sp>
         <p:nvSpPr>
@@ -11421,6 +11065,1982 @@
 </p:sld>
 </file>
 
+<file path=ppt/slides/slide26.xml><?xml version="1.0" encoding="utf-8"?>
+<p:sld xmlns:a="http://schemas.openxmlformats.org/drawingml/2006/main" xmlns:p="http://schemas.openxmlformats.org/presentationml/2006/main" xmlns:r="http://schemas.openxmlformats.org/officeDocument/2006/relationships">
+  <p:cSld>
+    <p:spTree>
+      <p:nvGrpSpPr>
+        <p:cNvPr id="1" name=""/>
+        <p:cNvGrpSpPr/>
+        <p:nvPr/>
+      </p:nvGrpSpPr>
+      <p:grpSpPr/>
+      <p:sp>
+        <p:nvSpPr>
+          <p:cNvPr id="2" name="Text 0"/>
+          <p:cNvSpPr/>
+          <p:nvPr/>
+        </p:nvSpPr>
+        <p:spPr>
+          <a:xfrm>
+            <a:off x="566928" y="329184"/>
+            <a:ext cx="10515600" cy="310896"/>
+          </a:xfrm>
+          <a:prstGeom prst="rect">
+            <a:avLst/>
+          </a:prstGeom>
+          <a:noFill/>
+          <a:ln/>
+        </p:spPr>
+        <p:txBody>
+          <a:bodyPr wrap="square" lIns="0" tIns="0" rIns="0" bIns="0" rtlCol="0" anchor="ctr"/>
+          <a:lstStyle/>
+          <a:p>
+            <a:pPr algn="l" indent="0" marL="0">
+              <a:buNone/>
+            </a:pPr>
+            <a:r>
+              <a:rPr lang="en-US" sz="1100" b="1" spc="150" kern="0" dirty="0">
+                <a:solidFill>
+                  <a:srgbClr val="C62133"/>
+                </a:solidFill>
+                <a:latin typeface="Calibri" pitchFamily="34" charset="0"/>
+                <a:ea typeface="Calibri" pitchFamily="34" charset="-122"/>
+                <a:cs typeface="Calibri" pitchFamily="34" charset="-120"/>
+              </a:rPr>
+              <a:t>HEMATOLOGY &amp; COAGULATION   ·   BOARD REVIEW  ·  Q4</a:t>
+            </a:r>
+            <a:endParaRPr lang="en-US" sz="1100" dirty="0"/>
+          </a:p>
+        </p:txBody>
+      </p:sp>
+      <p:sp>
+        <p:nvSpPr>
+          <p:cNvPr id="3" name="Text 1"/>
+          <p:cNvSpPr/>
+          <p:nvPr/>
+        </p:nvSpPr>
+        <p:spPr>
+          <a:xfrm>
+            <a:off x="566928" y="713232"/>
+            <a:ext cx="11064240" cy="749808"/>
+          </a:xfrm>
+          <a:prstGeom prst="rect">
+            <a:avLst/>
+          </a:prstGeom>
+          <a:noFill/>
+          <a:ln/>
+        </p:spPr>
+        <p:txBody>
+          <a:bodyPr wrap="square" lIns="0" tIns="0" rIns="0" bIns="0" rtlCol="0" anchor="ctr"/>
+          <a:lstStyle/>
+          <a:p>
+            <a:pPr algn="l" indent="0" marL="0">
+              <a:buNone/>
+            </a:pPr>
+            <a:r>
+              <a:rPr lang="en-US" sz="2600" b="1" dirty="0">
+                <a:solidFill>
+                  <a:srgbClr val="0E3A5F"/>
+                </a:solidFill>
+                <a:latin typeface="Calibri" pitchFamily="34" charset="0"/>
+                <a:ea typeface="Calibri" pitchFamily="34" charset="-122"/>
+                <a:cs typeface="Calibri" pitchFamily="34" charset="-120"/>
+              </a:rPr>
+              <a:t>Board-Style Review</a:t>
+            </a:r>
+            <a:endParaRPr lang="en-US" sz="2600" dirty="0"/>
+          </a:p>
+        </p:txBody>
+      </p:sp>
+      <p:sp>
+        <p:nvSpPr>
+          <p:cNvPr id="4" name="Text 2"/>
+          <p:cNvSpPr/>
+          <p:nvPr/>
+        </p:nvSpPr>
+        <p:spPr>
+          <a:xfrm>
+            <a:off x="566928" y="1417320"/>
+            <a:ext cx="11057839" cy="914400"/>
+          </a:xfrm>
+          <a:prstGeom prst="rect">
+            <a:avLst/>
+          </a:prstGeom>
+          <a:noFill/>
+          <a:ln/>
+        </p:spPr>
+        <p:txBody>
+          <a:bodyPr wrap="square" lIns="0" tIns="0" rIns="0" bIns="0" rtlCol="0" anchor="t"/>
+          <a:lstStyle/>
+          <a:p>
+            <a:pPr algn="l" indent="0" marL="0">
+              <a:lnSpc>
+                <a:spcPct val="105000"/>
+              </a:lnSpc>
+              <a:buNone/>
+            </a:pPr>
+            <a:r>
+              <a:rPr lang="en-US" sz="1450" b="1" dirty="0">
+                <a:solidFill>
+                  <a:srgbClr val="1B2A38"/>
+                </a:solidFill>
+                <a:latin typeface="Calibri" pitchFamily="34" charset="0"/>
+                <a:ea typeface="Calibri" pitchFamily="34" charset="-122"/>
+                <a:cs typeface="Calibri" pitchFamily="34" charset="-120"/>
+              </a:rPr>
+              <a:t>A positive direct antiglobulin test (DAT) in a hemolytic anemia indicates:</a:t>
+            </a:r>
+            <a:endParaRPr lang="en-US" sz="1450" dirty="0"/>
+          </a:p>
+        </p:txBody>
+      </p:sp>
+      <p:sp>
+        <p:nvSpPr>
+          <p:cNvPr id="5" name="Text 3"/>
+          <p:cNvSpPr/>
+          <p:nvPr/>
+        </p:nvSpPr>
+        <p:spPr>
+          <a:xfrm>
+            <a:off x="658368" y="2395728"/>
+            <a:ext cx="6192390" cy="3017520"/>
+          </a:xfrm>
+          <a:prstGeom prst="rect">
+            <a:avLst/>
+          </a:prstGeom>
+          <a:noFill/>
+          <a:ln/>
+        </p:spPr>
+        <p:txBody>
+          <a:bodyPr wrap="square" lIns="0" tIns="0" rIns="0" bIns="0" rtlCol="0" anchor="t"/>
+          <a:lstStyle/>
+          <a:p>
+            <a:pPr algn="l" indent="0" marL="0">
+              <a:spcAft>
+                <a:spcPts val="600"/>
+              </a:spcAft>
+              <a:buNone/>
+            </a:pPr>
+            <a:r>
+              <a:rPr lang="en-US" sz="1350" dirty="0">
+                <a:solidFill>
+                  <a:srgbClr val="33444F"/>
+                </a:solidFill>
+                <a:latin typeface="Calibri" pitchFamily="34" charset="0"/>
+                <a:ea typeface="Calibri" pitchFamily="34" charset="-122"/>
+                <a:cs typeface="Calibri" pitchFamily="34" charset="-120"/>
+              </a:rPr>
+              <a:t>A. Microangiopathy</a:t>
+            </a:r>
+            <a:endParaRPr lang="en-US" sz="1350" dirty="0"/>
+          </a:p>
+          <a:p>
+            <a:pPr algn="l" indent="0" marL="0">
+              <a:spcAft>
+                <a:spcPts val="600"/>
+              </a:spcAft>
+              <a:buNone/>
+            </a:pPr>
+            <a:r>
+              <a:rPr lang="en-US" sz="1350" b="1" dirty="0">
+                <a:solidFill>
+                  <a:srgbClr val="8E1622"/>
+                </a:solidFill>
+                <a:latin typeface="Calibri" pitchFamily="34" charset="0"/>
+                <a:ea typeface="Calibri" pitchFamily="34" charset="-122"/>
+                <a:cs typeface="Calibri" pitchFamily="34" charset="-120"/>
+              </a:rPr>
+              <a:t>B. An immune (antibody-mediated) mechanism</a:t>
+            </a:r>
+            <a:endParaRPr lang="en-US" sz="1350" dirty="0"/>
+          </a:p>
+          <a:p>
+            <a:pPr algn="l" indent="0" marL="0">
+              <a:spcAft>
+                <a:spcPts val="600"/>
+              </a:spcAft>
+              <a:buNone/>
+            </a:pPr>
+            <a:r>
+              <a:rPr lang="en-US" sz="1350" dirty="0">
+                <a:solidFill>
+                  <a:srgbClr val="33444F"/>
+                </a:solidFill>
+                <a:latin typeface="Calibri" pitchFamily="34" charset="0"/>
+                <a:ea typeface="Calibri" pitchFamily="34" charset="-122"/>
+                <a:cs typeface="Calibri" pitchFamily="34" charset="-120"/>
+              </a:rPr>
+              <a:t>C. G6PD deficiency</a:t>
+            </a:r>
+            <a:endParaRPr lang="en-US" sz="1350" dirty="0"/>
+          </a:p>
+          <a:p>
+            <a:pPr algn="l" indent="0" marL="0">
+              <a:spcAft>
+                <a:spcPts val="600"/>
+              </a:spcAft>
+              <a:buNone/>
+            </a:pPr>
+            <a:r>
+              <a:rPr lang="en-US" sz="1350" dirty="0">
+                <a:solidFill>
+                  <a:srgbClr val="33444F"/>
+                </a:solidFill>
+                <a:latin typeface="Calibri" pitchFamily="34" charset="0"/>
+                <a:ea typeface="Calibri" pitchFamily="34" charset="-122"/>
+                <a:cs typeface="Calibri" pitchFamily="34" charset="-120"/>
+              </a:rPr>
+              <a:t>D. Hereditary spherocytosis</a:t>
+            </a:r>
+            <a:endParaRPr lang="en-US" sz="1350" dirty="0"/>
+          </a:p>
+          <a:p>
+            <a:pPr algn="l" indent="0" marL="0">
+              <a:spcAft>
+                <a:spcPts val="600"/>
+              </a:spcAft>
+              <a:buNone/>
+            </a:pPr>
+            <a:r>
+              <a:rPr lang="en-US" sz="1350" dirty="0">
+                <a:solidFill>
+                  <a:srgbClr val="33444F"/>
+                </a:solidFill>
+                <a:latin typeface="Calibri" pitchFamily="34" charset="0"/>
+                <a:ea typeface="Calibri" pitchFamily="34" charset="-122"/>
+                <a:cs typeface="Calibri" pitchFamily="34" charset="-120"/>
+              </a:rPr>
+              <a:t>E. Thalassemia</a:t>
+            </a:r>
+            <a:endParaRPr lang="en-US" sz="1350" dirty="0"/>
+          </a:p>
+        </p:txBody>
+      </p:sp>
+      <p:sp>
+        <p:nvSpPr>
+          <p:cNvPr id="6" name="Shape 4"/>
+          <p:cNvSpPr/>
+          <p:nvPr/>
+        </p:nvSpPr>
+        <p:spPr>
+          <a:xfrm>
+            <a:off x="7201632" y="2395728"/>
+            <a:ext cx="4423136" cy="3246120"/>
+          </a:xfrm>
+          <a:prstGeom prst="roundRect">
+            <a:avLst>
+              <a:gd name="adj" fmla="val 2535"/>
+            </a:avLst>
+          </a:prstGeom>
+          <a:solidFill>
+            <a:srgbClr val="FBEAEC"/>
+          </a:solidFill>
+          <a:ln/>
+          <a:effectLst>
+            <a:outerShdw sx="100000" sy="100000" kx="0" ky="0" algn="bl" rotWithShape="0" blurRad="88900" dist="25400" dir="5400000">
+              <a:srgbClr val="22303C">
+                <a:alpha val="12000"/>
+              </a:srgbClr>
+            </a:outerShdw>
+          </a:effectLst>
+        </p:spPr>
+        <p:txBody>
+          <a:bodyPr/>
+          <a:p/>
+        </p:txBody>
+      </p:sp>
+      <p:sp>
+        <p:nvSpPr>
+          <p:cNvPr id="7" name="Text 5"/>
+          <p:cNvSpPr/>
+          <p:nvPr/>
+        </p:nvSpPr>
+        <p:spPr>
+          <a:xfrm>
+            <a:off x="7439376" y="2578608"/>
+            <a:ext cx="3965936" cy="457200"/>
+          </a:xfrm>
+          <a:prstGeom prst="rect">
+            <a:avLst/>
+          </a:prstGeom>
+          <a:noFill/>
+          <a:ln/>
+        </p:spPr>
+        <p:txBody>
+          <a:bodyPr wrap="square" lIns="0" tIns="0" rIns="0" bIns="0" rtlCol="0" anchor="ctr"/>
+          <a:lstStyle/>
+          <a:p>
+            <a:pPr indent="0" marL="0">
+              <a:buNone/>
+            </a:pPr>
+            <a:r>
+              <a:rPr lang="en-US" sz="1500" b="1" dirty="0">
+                <a:solidFill>
+                  <a:srgbClr val="C62133"/>
+                </a:solidFill>
+                <a:latin typeface="Calibri" pitchFamily="34" charset="0"/>
+                <a:ea typeface="Calibri" pitchFamily="34" charset="-122"/>
+                <a:cs typeface="Calibri" pitchFamily="34" charset="-120"/>
+              </a:rPr>
+              <a:t>ANSWER  </a:t>
+            </a:r>
+            <a:pPr indent="0" marL="0">
+              <a:buNone/>
+            </a:pPr>
+            <a:r>
+              <a:rPr lang="en-US" sz="1500" b="1" dirty="0">
+                <a:solidFill>
+                  <a:srgbClr val="1B2A38"/>
+                </a:solidFill>
+                <a:latin typeface="Calibri" pitchFamily="34" charset="0"/>
+                <a:ea typeface="Calibri" pitchFamily="34" charset="-122"/>
+                <a:cs typeface="Calibri" pitchFamily="34" charset="-120"/>
+              </a:rPr>
+              <a:t>B — Immune mechanism</a:t>
+            </a:r>
+            <a:endParaRPr lang="en-US" sz="1500" dirty="0"/>
+          </a:p>
+        </p:txBody>
+      </p:sp>
+      <p:sp>
+        <p:nvSpPr>
+          <p:cNvPr id="8" name="Text 6"/>
+          <p:cNvSpPr/>
+          <p:nvPr/>
+        </p:nvSpPr>
+        <p:spPr>
+          <a:xfrm>
+            <a:off x="7439376" y="3127248"/>
+            <a:ext cx="3947648" cy="2377440"/>
+          </a:xfrm>
+          <a:prstGeom prst="rect">
+            <a:avLst/>
+          </a:prstGeom>
+          <a:noFill/>
+          <a:ln/>
+        </p:spPr>
+        <p:txBody>
+          <a:bodyPr wrap="square" lIns="0" tIns="0" rIns="0" bIns="0" rtlCol="0" anchor="t"/>
+          <a:lstStyle/>
+          <a:p>
+            <a:pPr algn="l" indent="0" marL="0">
+              <a:lnSpc>
+                <a:spcPct val="108000"/>
+              </a:lnSpc>
+              <a:buNone/>
+            </a:pPr>
+            <a:r>
+              <a:rPr lang="en-US" sz="1250" dirty="0">
+                <a:solidFill>
+                  <a:srgbClr val="33444F"/>
+                </a:solidFill>
+                <a:latin typeface="Calibri" pitchFamily="34" charset="0"/>
+                <a:ea typeface="Calibri" pitchFamily="34" charset="-122"/>
+                <a:cs typeface="Calibri" pitchFamily="34" charset="-120"/>
+              </a:rPr>
+              <a:t>The DAT detects antibody/complement on red cells, identifying immune-mediated hemolysis.</a:t>
+            </a:r>
+            <a:endParaRPr lang="en-US" sz="1250" dirty="0"/>
+          </a:p>
+        </p:txBody>
+      </p:sp>
+      <p:sp>
+        <p:nvSpPr>
+          <p:cNvPr id="9" name="Text 7"/>
+          <p:cNvSpPr/>
+          <p:nvPr/>
+        </p:nvSpPr>
+        <p:spPr>
+          <a:xfrm>
+            <a:off x="566928" y="6473952"/>
+            <a:ext cx="7772400" cy="274320"/>
+          </a:xfrm>
+          <a:prstGeom prst="rect">
+            <a:avLst/>
+          </a:prstGeom>
+          <a:noFill/>
+          <a:ln/>
+        </p:spPr>
+        <p:txBody>
+          <a:bodyPr wrap="square" lIns="0" tIns="0" rIns="0" bIns="0" rtlCol="0" anchor="ctr"/>
+          <a:lstStyle/>
+          <a:p>
+            <a:pPr algn="l" indent="0" marL="0">
+              <a:buNone/>
+            </a:pPr>
+            <a:r>
+              <a:rPr lang="en-US" sz="850" dirty="0">
+                <a:solidFill>
+                  <a:srgbClr val="9AA8B4"/>
+                </a:solidFill>
+                <a:latin typeface="Calibri" pitchFamily="34" charset="0"/>
+                <a:ea typeface="Calibri" pitchFamily="34" charset="-122"/>
+                <a:cs typeface="Calibri" pitchFamily="34" charset="-120"/>
+              </a:rPr>
+              <a:t>Makassed General Hospital  ·  Department of Laboratory Medicine</a:t>
+            </a:r>
+            <a:endParaRPr lang="en-US" sz="850" dirty="0"/>
+          </a:p>
+        </p:txBody>
+      </p:sp>
+      <p:sp>
+        <p:nvSpPr>
+          <p:cNvPr id="10" name="Text 8"/>
+          <p:cNvSpPr/>
+          <p:nvPr/>
+        </p:nvSpPr>
+        <p:spPr>
+          <a:xfrm>
+            <a:off x="9814255" y="6473952"/>
+            <a:ext cx="1828800" cy="274320"/>
+          </a:xfrm>
+          <a:prstGeom prst="rect">
+            <a:avLst/>
+          </a:prstGeom>
+          <a:noFill/>
+          <a:ln/>
+        </p:spPr>
+        <p:txBody>
+          <a:bodyPr wrap="square" lIns="0" tIns="0" rIns="0" bIns="0" rtlCol="0" anchor="ctr"/>
+          <a:lstStyle/>
+          <a:p>
+            <a:pPr algn="r" indent="0" marL="0">
+              <a:buNone/>
+            </a:pPr>
+            <a:r>
+              <a:rPr lang="en-US" sz="850" dirty="0">
+                <a:solidFill>
+                  <a:srgbClr val="9AA8B4"/>
+                </a:solidFill>
+                <a:latin typeface="Calibri" pitchFamily="34" charset="0"/>
+                <a:ea typeface="Calibri" pitchFamily="34" charset="-122"/>
+                <a:cs typeface="Calibri" pitchFamily="34" charset="-120"/>
+              </a:rPr>
+              <a:t>CP Lecture Series</a:t>
+            </a:r>
+            <a:pPr algn="r" indent="0" marL="0">
+              <a:buNone/>
+            </a:pPr>
+            <a:r>
+              <a:rPr lang="en-US" sz="850" dirty="0">
+                <a:solidFill>
+                  <a:srgbClr val="DCE4EC"/>
+                </a:solidFill>
+                <a:latin typeface="Calibri" pitchFamily="34" charset="0"/>
+                <a:ea typeface="Calibri" pitchFamily="34" charset="-122"/>
+                <a:cs typeface="Calibri" pitchFamily="34" charset="-120"/>
+              </a:rPr>
+              <a:t>   ·   </a:t>
+            </a:r>
+            <a:pPr algn="r" indent="0" marL="0">
+              <a:buNone/>
+            </a:pPr>
+            <a:r>
+              <a:rPr lang="en-US" sz="850" b="1" dirty="0">
+                <a:solidFill>
+                  <a:srgbClr val="C62133"/>
+                </a:solidFill>
+                <a:latin typeface="Calibri" pitchFamily="34" charset="0"/>
+                <a:ea typeface="Calibri" pitchFamily="34" charset="-122"/>
+                <a:cs typeface="Calibri" pitchFamily="34" charset="-120"/>
+              </a:rPr>
+              <a:t>20</a:t>
+            </a:r>
+            <a:endParaRPr lang="en-US" sz="850" dirty="0"/>
+          </a:p>
+        </p:txBody>
+      </p:sp>
+    </p:spTree>
+  </p:cSld>
+  <p:clrMapOvr>
+    <a:masterClrMapping/>
+  </p:clrMapOvr>
+</p:sld>
+</file>
+
+<file path=ppt/slides/slide27.xml><?xml version="1.0" encoding="utf-8"?>
+<p:sld xmlns:a="http://schemas.openxmlformats.org/drawingml/2006/main" xmlns:p="http://schemas.openxmlformats.org/presentationml/2006/main" xmlns:r="http://schemas.openxmlformats.org/officeDocument/2006/relationships">
+  <p:cSld>
+    <p:spTree>
+      <p:nvGrpSpPr>
+        <p:cNvPr id="1" name=""/>
+        <p:cNvGrpSpPr/>
+        <p:nvPr/>
+      </p:nvGrpSpPr>
+      <p:grpSpPr/>
+      <p:sp>
+        <p:nvSpPr>
+          <p:cNvPr id="2" name="Text 0"/>
+          <p:cNvSpPr/>
+          <p:nvPr/>
+        </p:nvSpPr>
+        <p:spPr>
+          <a:xfrm>
+            <a:off x="566928" y="329184"/>
+            <a:ext cx="10515600" cy="310896"/>
+          </a:xfrm>
+          <a:prstGeom prst="rect">
+            <a:avLst/>
+          </a:prstGeom>
+          <a:noFill/>
+          <a:ln/>
+        </p:spPr>
+        <p:txBody>
+          <a:bodyPr wrap="square" lIns="0" tIns="0" rIns="0" bIns="0" rtlCol="0" anchor="ctr"/>
+          <a:lstStyle/>
+          <a:p>
+            <a:pPr algn="l" indent="0" marL="0">
+              <a:buNone/>
+            </a:pPr>
+            <a:r>
+              <a:rPr lang="en-US" sz="1100" b="1" spc="150" kern="0" dirty="0">
+                <a:solidFill>
+                  <a:srgbClr val="C62133"/>
+                </a:solidFill>
+                <a:latin typeface="Calibri" pitchFamily="34" charset="0"/>
+                <a:ea typeface="Calibri" pitchFamily="34" charset="-122"/>
+                <a:cs typeface="Calibri" pitchFamily="34" charset="-120"/>
+              </a:rPr>
+              <a:t>HEMATOLOGY &amp; COAGULATION   ·   BOARD REVIEW  ·  Q3</a:t>
+            </a:r>
+            <a:endParaRPr lang="en-US" sz="1100" dirty="0"/>
+          </a:p>
+        </p:txBody>
+      </p:sp>
+      <p:sp>
+        <p:nvSpPr>
+          <p:cNvPr id="3" name="Text 1"/>
+          <p:cNvSpPr/>
+          <p:nvPr/>
+        </p:nvSpPr>
+        <p:spPr>
+          <a:xfrm>
+            <a:off x="566928" y="713232"/>
+            <a:ext cx="11064240" cy="749808"/>
+          </a:xfrm>
+          <a:prstGeom prst="rect">
+            <a:avLst/>
+          </a:prstGeom>
+          <a:noFill/>
+          <a:ln/>
+        </p:spPr>
+        <p:txBody>
+          <a:bodyPr wrap="square" lIns="0" tIns="0" rIns="0" bIns="0" rtlCol="0" anchor="ctr"/>
+          <a:lstStyle/>
+          <a:p>
+            <a:pPr algn="l" indent="0" marL="0">
+              <a:buNone/>
+            </a:pPr>
+            <a:r>
+              <a:rPr lang="en-US" sz="2600" b="1" dirty="0">
+                <a:solidFill>
+                  <a:srgbClr val="0E3A5F"/>
+                </a:solidFill>
+                <a:latin typeface="Calibri" pitchFamily="34" charset="0"/>
+                <a:ea typeface="Calibri" pitchFamily="34" charset="-122"/>
+                <a:cs typeface="Calibri" pitchFamily="34" charset="-120"/>
+              </a:rPr>
+              <a:t>Board-Style Review</a:t>
+            </a:r>
+            <a:endParaRPr lang="en-US" sz="2600" dirty="0"/>
+          </a:p>
+        </p:txBody>
+      </p:sp>
+      <p:sp>
+        <p:nvSpPr>
+          <p:cNvPr id="4" name="Text 2"/>
+          <p:cNvSpPr/>
+          <p:nvPr/>
+        </p:nvSpPr>
+        <p:spPr>
+          <a:xfrm>
+            <a:off x="566928" y="1417320"/>
+            <a:ext cx="11057839" cy="914400"/>
+          </a:xfrm>
+          <a:prstGeom prst="rect">
+            <a:avLst/>
+          </a:prstGeom>
+          <a:noFill/>
+          <a:ln/>
+        </p:spPr>
+        <p:txBody>
+          <a:bodyPr wrap="square" lIns="0" tIns="0" rIns="0" bIns="0" rtlCol="0" anchor="t"/>
+          <a:lstStyle/>
+          <a:p>
+            <a:pPr algn="l" indent="0" marL="0">
+              <a:lnSpc>
+                <a:spcPct val="105000"/>
+              </a:lnSpc>
+              <a:buNone/>
+            </a:pPr>
+            <a:r>
+              <a:rPr lang="en-US" sz="1450" b="1" dirty="0">
+                <a:solidFill>
+                  <a:srgbClr val="1B2A38"/>
+                </a:solidFill>
+                <a:latin typeface="Calibri" pitchFamily="34" charset="0"/>
+                <a:ea typeface="Calibri" pitchFamily="34" charset="-122"/>
+                <a:cs typeface="Calibri" pitchFamily="34" charset="-120"/>
+              </a:rPr>
+              <a:t>The triad confirming hemolysis is:</a:t>
+            </a:r>
+            <a:endParaRPr lang="en-US" sz="1450" dirty="0"/>
+          </a:p>
+        </p:txBody>
+      </p:sp>
+      <p:sp>
+        <p:nvSpPr>
+          <p:cNvPr id="5" name="Text 3"/>
+          <p:cNvSpPr/>
+          <p:nvPr/>
+        </p:nvSpPr>
+        <p:spPr>
+          <a:xfrm>
+            <a:off x="658368" y="2395728"/>
+            <a:ext cx="6192390" cy="3017520"/>
+          </a:xfrm>
+          <a:prstGeom prst="rect">
+            <a:avLst/>
+          </a:prstGeom>
+          <a:noFill/>
+          <a:ln/>
+        </p:spPr>
+        <p:txBody>
+          <a:bodyPr wrap="square" lIns="0" tIns="0" rIns="0" bIns="0" rtlCol="0" anchor="t"/>
+          <a:lstStyle/>
+          <a:p>
+            <a:pPr algn="l" indent="0" marL="0">
+              <a:spcAft>
+                <a:spcPts val="600"/>
+              </a:spcAft>
+              <a:buNone/>
+            </a:pPr>
+            <a:r>
+              <a:rPr lang="en-US" sz="1350" dirty="0">
+                <a:solidFill>
+                  <a:srgbClr val="33444F"/>
+                </a:solidFill>
+                <a:latin typeface="Calibri" pitchFamily="34" charset="0"/>
+                <a:ea typeface="Calibri" pitchFamily="34" charset="-122"/>
+                <a:cs typeface="Calibri" pitchFamily="34" charset="-120"/>
+              </a:rPr>
+              <a:t>A. High haptoglobin, low LDH, low retic</a:t>
+            </a:r>
+            <a:endParaRPr lang="en-US" sz="1350" dirty="0"/>
+          </a:p>
+          <a:p>
+            <a:pPr algn="l" indent="0" marL="0">
+              <a:spcAft>
+                <a:spcPts val="600"/>
+              </a:spcAft>
+              <a:buNone/>
+            </a:pPr>
+            <a:r>
+              <a:rPr lang="en-US" sz="1350" b="1" dirty="0">
+                <a:solidFill>
+                  <a:srgbClr val="8E1622"/>
+                </a:solidFill>
+                <a:latin typeface="Calibri" pitchFamily="34" charset="0"/>
+                <a:ea typeface="Calibri" pitchFamily="34" charset="-122"/>
+                <a:cs typeface="Calibri" pitchFamily="34" charset="-120"/>
+              </a:rPr>
+              <a:t>B. Low haptoglobin, high LDH, high indirect bilirubin</a:t>
+            </a:r>
+            <a:endParaRPr lang="en-US" sz="1350" dirty="0"/>
+          </a:p>
+          <a:p>
+            <a:pPr algn="l" indent="0" marL="0">
+              <a:spcAft>
+                <a:spcPts val="600"/>
+              </a:spcAft>
+              <a:buNone/>
+            </a:pPr>
+            <a:r>
+              <a:rPr lang="en-US" sz="1350" dirty="0">
+                <a:solidFill>
+                  <a:srgbClr val="33444F"/>
+                </a:solidFill>
+                <a:latin typeface="Calibri" pitchFamily="34" charset="0"/>
+                <a:ea typeface="Calibri" pitchFamily="34" charset="-122"/>
+                <a:cs typeface="Calibri" pitchFamily="34" charset="-120"/>
+              </a:rPr>
+              <a:t>C. High ferritin, low MCV</a:t>
+            </a:r>
+            <a:endParaRPr lang="en-US" sz="1350" dirty="0"/>
+          </a:p>
+          <a:p>
+            <a:pPr algn="l" indent="0" marL="0">
+              <a:spcAft>
+                <a:spcPts val="600"/>
+              </a:spcAft>
+              <a:buNone/>
+            </a:pPr>
+            <a:r>
+              <a:rPr lang="en-US" sz="1350" dirty="0">
+                <a:solidFill>
+                  <a:srgbClr val="33444F"/>
+                </a:solidFill>
+                <a:latin typeface="Calibri" pitchFamily="34" charset="0"/>
+                <a:ea typeface="Calibri" pitchFamily="34" charset="-122"/>
+                <a:cs typeface="Calibri" pitchFamily="34" charset="-120"/>
+              </a:rPr>
+              <a:t>D. High B12, low folate</a:t>
+            </a:r>
+            <a:endParaRPr lang="en-US" sz="1350" dirty="0"/>
+          </a:p>
+          <a:p>
+            <a:pPr algn="l" indent="0" marL="0">
+              <a:spcAft>
+                <a:spcPts val="600"/>
+              </a:spcAft>
+              <a:buNone/>
+            </a:pPr>
+            <a:r>
+              <a:rPr lang="en-US" sz="1350" dirty="0">
+                <a:solidFill>
+                  <a:srgbClr val="33444F"/>
+                </a:solidFill>
+                <a:latin typeface="Calibri" pitchFamily="34" charset="0"/>
+                <a:ea typeface="Calibri" pitchFamily="34" charset="-122"/>
+                <a:cs typeface="Calibri" pitchFamily="34" charset="-120"/>
+              </a:rPr>
+              <a:t>E. Low RDW, high MCHC</a:t>
+            </a:r>
+            <a:endParaRPr lang="en-US" sz="1350" dirty="0"/>
+          </a:p>
+        </p:txBody>
+      </p:sp>
+      <p:sp>
+        <p:nvSpPr>
+          <p:cNvPr id="6" name="Shape 4"/>
+          <p:cNvSpPr/>
+          <p:nvPr/>
+        </p:nvSpPr>
+        <p:spPr>
+          <a:xfrm>
+            <a:off x="7201632" y="2395728"/>
+            <a:ext cx="4423136" cy="3246120"/>
+          </a:xfrm>
+          <a:prstGeom prst="roundRect">
+            <a:avLst>
+              <a:gd name="adj" fmla="val 2535"/>
+            </a:avLst>
+          </a:prstGeom>
+          <a:solidFill>
+            <a:srgbClr val="FBEAEC"/>
+          </a:solidFill>
+          <a:ln/>
+          <a:effectLst>
+            <a:outerShdw sx="100000" sy="100000" kx="0" ky="0" algn="bl" rotWithShape="0" blurRad="88900" dist="25400" dir="5400000">
+              <a:srgbClr val="22303C">
+                <a:alpha val="12000"/>
+              </a:srgbClr>
+            </a:outerShdw>
+          </a:effectLst>
+        </p:spPr>
+        <p:txBody>
+          <a:bodyPr/>
+          <a:p/>
+        </p:txBody>
+      </p:sp>
+      <p:sp>
+        <p:nvSpPr>
+          <p:cNvPr id="7" name="Text 5"/>
+          <p:cNvSpPr/>
+          <p:nvPr/>
+        </p:nvSpPr>
+        <p:spPr>
+          <a:xfrm>
+            <a:off x="7439376" y="2578608"/>
+            <a:ext cx="3965936" cy="457200"/>
+          </a:xfrm>
+          <a:prstGeom prst="rect">
+            <a:avLst/>
+          </a:prstGeom>
+          <a:noFill/>
+          <a:ln/>
+        </p:spPr>
+        <p:txBody>
+          <a:bodyPr wrap="square" lIns="0" tIns="0" rIns="0" bIns="0" rtlCol="0" anchor="ctr"/>
+          <a:lstStyle/>
+          <a:p>
+            <a:pPr indent="0" marL="0">
+              <a:buNone/>
+            </a:pPr>
+            <a:r>
+              <a:rPr lang="en-US" sz="1500" b="1" dirty="0">
+                <a:solidFill>
+                  <a:srgbClr val="C62133"/>
+                </a:solidFill>
+                <a:latin typeface="Calibri" pitchFamily="34" charset="0"/>
+                <a:ea typeface="Calibri" pitchFamily="34" charset="-122"/>
+                <a:cs typeface="Calibri" pitchFamily="34" charset="-120"/>
+              </a:rPr>
+              <a:t>ANSWER  </a:t>
+            </a:r>
+            <a:pPr indent="0" marL="0">
+              <a:buNone/>
+            </a:pPr>
+            <a:r>
+              <a:rPr lang="en-US" sz="1500" b="1" dirty="0">
+                <a:solidFill>
+                  <a:srgbClr val="1B2A38"/>
+                </a:solidFill>
+                <a:latin typeface="Calibri" pitchFamily="34" charset="0"/>
+                <a:ea typeface="Calibri" pitchFamily="34" charset="-122"/>
+                <a:cs typeface="Calibri" pitchFamily="34" charset="-120"/>
+              </a:rPr>
+              <a:t>B — Low haptoglobin, high LDH, high indirect bilirubin</a:t>
+            </a:r>
+            <a:endParaRPr lang="en-US" sz="1500" dirty="0"/>
+          </a:p>
+        </p:txBody>
+      </p:sp>
+      <p:sp>
+        <p:nvSpPr>
+          <p:cNvPr id="8" name="Text 6"/>
+          <p:cNvSpPr/>
+          <p:nvPr/>
+        </p:nvSpPr>
+        <p:spPr>
+          <a:xfrm>
+            <a:off x="7439376" y="3127248"/>
+            <a:ext cx="3947648" cy="2377440"/>
+          </a:xfrm>
+          <a:prstGeom prst="rect">
+            <a:avLst/>
+          </a:prstGeom>
+          <a:noFill/>
+          <a:ln/>
+        </p:spPr>
+        <p:txBody>
+          <a:bodyPr wrap="square" lIns="0" tIns="0" rIns="0" bIns="0" rtlCol="0" anchor="t"/>
+          <a:lstStyle/>
+          <a:p>
+            <a:pPr algn="l" indent="0" marL="0">
+              <a:lnSpc>
+                <a:spcPct val="108000"/>
+              </a:lnSpc>
+              <a:buNone/>
+            </a:pPr>
+            <a:r>
+              <a:rPr lang="en-US" sz="1250" dirty="0">
+                <a:solidFill>
+                  <a:srgbClr val="33444F"/>
+                </a:solidFill>
+                <a:latin typeface="Calibri" pitchFamily="34" charset="0"/>
+                <a:ea typeface="Calibri" pitchFamily="34" charset="-122"/>
+                <a:cs typeface="Calibri" pitchFamily="34" charset="-120"/>
+              </a:rPr>
+              <a:t>Hemolysis releases LDH and bilirubin and consumes haptoglobin, with a compensatory reticulocytosis.</a:t>
+            </a:r>
+            <a:endParaRPr lang="en-US" sz="1250" dirty="0"/>
+          </a:p>
+        </p:txBody>
+      </p:sp>
+      <p:sp>
+        <p:nvSpPr>
+          <p:cNvPr id="9" name="Text 7"/>
+          <p:cNvSpPr/>
+          <p:nvPr/>
+        </p:nvSpPr>
+        <p:spPr>
+          <a:xfrm>
+            <a:off x="566928" y="6473952"/>
+            <a:ext cx="7772400" cy="274320"/>
+          </a:xfrm>
+          <a:prstGeom prst="rect">
+            <a:avLst/>
+          </a:prstGeom>
+          <a:noFill/>
+          <a:ln/>
+        </p:spPr>
+        <p:txBody>
+          <a:bodyPr wrap="square" lIns="0" tIns="0" rIns="0" bIns="0" rtlCol="0" anchor="ctr"/>
+          <a:lstStyle/>
+          <a:p>
+            <a:pPr algn="l" indent="0" marL="0">
+              <a:buNone/>
+            </a:pPr>
+            <a:r>
+              <a:rPr lang="en-US" sz="850" dirty="0">
+                <a:solidFill>
+                  <a:srgbClr val="9AA8B4"/>
+                </a:solidFill>
+                <a:latin typeface="Calibri" pitchFamily="34" charset="0"/>
+                <a:ea typeface="Calibri" pitchFamily="34" charset="-122"/>
+                <a:cs typeface="Calibri" pitchFamily="34" charset="-120"/>
+              </a:rPr>
+              <a:t>Makassed General Hospital  ·  Department of Laboratory Medicine</a:t>
+            </a:r>
+            <a:endParaRPr lang="en-US" sz="850" dirty="0"/>
+          </a:p>
+        </p:txBody>
+      </p:sp>
+      <p:sp>
+        <p:nvSpPr>
+          <p:cNvPr id="10" name="Text 8"/>
+          <p:cNvSpPr/>
+          <p:nvPr/>
+        </p:nvSpPr>
+        <p:spPr>
+          <a:xfrm>
+            <a:off x="9814255" y="6473952"/>
+            <a:ext cx="1828800" cy="274320"/>
+          </a:xfrm>
+          <a:prstGeom prst="rect">
+            <a:avLst/>
+          </a:prstGeom>
+          <a:noFill/>
+          <a:ln/>
+        </p:spPr>
+        <p:txBody>
+          <a:bodyPr wrap="square" lIns="0" tIns="0" rIns="0" bIns="0" rtlCol="0" anchor="ctr"/>
+          <a:lstStyle/>
+          <a:p>
+            <a:pPr algn="r" indent="0" marL="0">
+              <a:buNone/>
+            </a:pPr>
+            <a:r>
+              <a:rPr lang="en-US" sz="850" dirty="0">
+                <a:solidFill>
+                  <a:srgbClr val="9AA8B4"/>
+                </a:solidFill>
+                <a:latin typeface="Calibri" pitchFamily="34" charset="0"/>
+                <a:ea typeface="Calibri" pitchFamily="34" charset="-122"/>
+                <a:cs typeface="Calibri" pitchFamily="34" charset="-120"/>
+              </a:rPr>
+              <a:t>CP Lecture Series</a:t>
+            </a:r>
+            <a:pPr algn="r" indent="0" marL="0">
+              <a:buNone/>
+            </a:pPr>
+            <a:r>
+              <a:rPr lang="en-US" sz="850" dirty="0">
+                <a:solidFill>
+                  <a:srgbClr val="DCE4EC"/>
+                </a:solidFill>
+                <a:latin typeface="Calibri" pitchFamily="34" charset="0"/>
+                <a:ea typeface="Calibri" pitchFamily="34" charset="-122"/>
+                <a:cs typeface="Calibri" pitchFamily="34" charset="-120"/>
+              </a:rPr>
+              <a:t>   ·   </a:t>
+            </a:r>
+            <a:pPr algn="r" indent="0" marL="0">
+              <a:buNone/>
+            </a:pPr>
+            <a:r>
+              <a:rPr lang="en-US" sz="850" b="1" dirty="0">
+                <a:solidFill>
+                  <a:srgbClr val="C62133"/>
+                </a:solidFill>
+                <a:latin typeface="Calibri" pitchFamily="34" charset="0"/>
+                <a:ea typeface="Calibri" pitchFamily="34" charset="-122"/>
+                <a:cs typeface="Calibri" pitchFamily="34" charset="-120"/>
+              </a:rPr>
+              <a:t>19</a:t>
+            </a:r>
+            <a:endParaRPr lang="en-US" sz="850" dirty="0"/>
+          </a:p>
+        </p:txBody>
+      </p:sp>
+    </p:spTree>
+  </p:cSld>
+  <p:clrMapOvr>
+    <a:masterClrMapping/>
+  </p:clrMapOvr>
+</p:sld>
+</file>
+
+<file path=ppt/slides/slide28.xml><?xml version="1.0" encoding="utf-8"?>
+<p:sld xmlns:a="http://schemas.openxmlformats.org/drawingml/2006/main" xmlns:p="http://schemas.openxmlformats.org/presentationml/2006/main" xmlns:r="http://schemas.openxmlformats.org/officeDocument/2006/relationships">
+  <p:cSld>
+    <p:spTree>
+      <p:nvGrpSpPr>
+        <p:cNvPr id="1" name=""/>
+        <p:cNvGrpSpPr/>
+        <p:nvPr/>
+      </p:nvGrpSpPr>
+      <p:grpSpPr/>
+      <p:sp>
+        <p:nvSpPr>
+          <p:cNvPr id="2" name="Text 0"/>
+          <p:cNvSpPr/>
+          <p:nvPr/>
+        </p:nvSpPr>
+        <p:spPr>
+          <a:xfrm>
+            <a:off x="566928" y="329184"/>
+            <a:ext cx="10515600" cy="310896"/>
+          </a:xfrm>
+          <a:prstGeom prst="rect">
+            <a:avLst/>
+          </a:prstGeom>
+          <a:noFill/>
+          <a:ln/>
+        </p:spPr>
+        <p:txBody>
+          <a:bodyPr wrap="square" lIns="0" tIns="0" rIns="0" bIns="0" rtlCol="0" anchor="ctr"/>
+          <a:lstStyle/>
+          <a:p>
+            <a:pPr algn="l" indent="0" marL="0">
+              <a:buNone/>
+            </a:pPr>
+            <a:r>
+              <a:rPr lang="en-US" sz="1100" b="1" spc="150" kern="0" dirty="0">
+                <a:solidFill>
+                  <a:srgbClr val="C62133"/>
+                </a:solidFill>
+                <a:latin typeface="Calibri" pitchFamily="34" charset="0"/>
+                <a:ea typeface="Calibri" pitchFamily="34" charset="-122"/>
+                <a:cs typeface="Calibri" pitchFamily="34" charset="-120"/>
+              </a:rPr>
+              <a:t>HEMATOLOGY &amp; COAGULATION   ·   BOARD REVIEW  ·  Q2</a:t>
+            </a:r>
+            <a:endParaRPr lang="en-US" sz="1100" dirty="0"/>
+          </a:p>
+        </p:txBody>
+      </p:sp>
+      <p:sp>
+        <p:nvSpPr>
+          <p:cNvPr id="3" name="Text 1"/>
+          <p:cNvSpPr/>
+          <p:nvPr/>
+        </p:nvSpPr>
+        <p:spPr>
+          <a:xfrm>
+            <a:off x="566928" y="713232"/>
+            <a:ext cx="11064240" cy="749808"/>
+          </a:xfrm>
+          <a:prstGeom prst="rect">
+            <a:avLst/>
+          </a:prstGeom>
+          <a:noFill/>
+          <a:ln/>
+        </p:spPr>
+        <p:txBody>
+          <a:bodyPr wrap="square" lIns="0" tIns="0" rIns="0" bIns="0" rtlCol="0" anchor="ctr"/>
+          <a:lstStyle/>
+          <a:p>
+            <a:pPr algn="l" indent="0" marL="0">
+              <a:buNone/>
+            </a:pPr>
+            <a:r>
+              <a:rPr lang="en-US" sz="2600" b="1" dirty="0">
+                <a:solidFill>
+                  <a:srgbClr val="0E3A5F"/>
+                </a:solidFill>
+                <a:latin typeface="Calibri" pitchFamily="34" charset="0"/>
+                <a:ea typeface="Calibri" pitchFamily="34" charset="-122"/>
+                <a:cs typeface="Calibri" pitchFamily="34" charset="-120"/>
+              </a:rPr>
+              <a:t>Board-Style Review</a:t>
+            </a:r>
+            <a:endParaRPr lang="en-US" sz="2600" dirty="0"/>
+          </a:p>
+        </p:txBody>
+      </p:sp>
+      <p:sp>
+        <p:nvSpPr>
+          <p:cNvPr id="4" name="Text 2"/>
+          <p:cNvSpPr/>
+          <p:nvPr/>
+        </p:nvSpPr>
+        <p:spPr>
+          <a:xfrm>
+            <a:off x="566928" y="1417320"/>
+            <a:ext cx="11057839" cy="914400"/>
+          </a:xfrm>
+          <a:prstGeom prst="rect">
+            <a:avLst/>
+          </a:prstGeom>
+          <a:noFill/>
+          <a:ln/>
+        </p:spPr>
+        <p:txBody>
+          <a:bodyPr wrap="square" lIns="0" tIns="0" rIns="0" bIns="0" rtlCol="0" anchor="t"/>
+          <a:lstStyle/>
+          <a:p>
+            <a:pPr algn="l" indent="0" marL="0">
+              <a:lnSpc>
+                <a:spcPct val="105000"/>
+              </a:lnSpc>
+              <a:buNone/>
+            </a:pPr>
+            <a:r>
+              <a:rPr lang="en-US" sz="1450" b="1" dirty="0">
+                <a:solidFill>
+                  <a:srgbClr val="1B2A38"/>
+                </a:solidFill>
+                <a:latin typeface="Calibri" pitchFamily="34" charset="0"/>
+                <a:ea typeface="Calibri" pitchFamily="34" charset="-122"/>
+                <a:cs typeface="Calibri" pitchFamily="34" charset="-120"/>
+              </a:rPr>
+              <a:t>Which best distinguishes β-thalassemia trait from iron deficiency?</a:t>
+            </a:r>
+            <a:endParaRPr lang="en-US" sz="1450" dirty="0"/>
+          </a:p>
+        </p:txBody>
+      </p:sp>
+      <p:sp>
+        <p:nvSpPr>
+          <p:cNvPr id="5" name="Text 3"/>
+          <p:cNvSpPr/>
+          <p:nvPr/>
+        </p:nvSpPr>
+        <p:spPr>
+          <a:xfrm>
+            <a:off x="658368" y="2395728"/>
+            <a:ext cx="6192390" cy="3017520"/>
+          </a:xfrm>
+          <a:prstGeom prst="rect">
+            <a:avLst/>
+          </a:prstGeom>
+          <a:noFill/>
+          <a:ln/>
+        </p:spPr>
+        <p:txBody>
+          <a:bodyPr wrap="square" lIns="0" tIns="0" rIns="0" bIns="0" rtlCol="0" anchor="t"/>
+          <a:lstStyle/>
+          <a:p>
+            <a:pPr algn="l" indent="0" marL="0">
+              <a:spcAft>
+                <a:spcPts val="600"/>
+              </a:spcAft>
+              <a:buNone/>
+            </a:pPr>
+            <a:r>
+              <a:rPr lang="en-US" sz="1350" dirty="0">
+                <a:solidFill>
+                  <a:srgbClr val="33444F"/>
+                </a:solidFill>
+                <a:latin typeface="Calibri" pitchFamily="34" charset="0"/>
+                <a:ea typeface="Calibri" pitchFamily="34" charset="-122"/>
+                <a:cs typeface="Calibri" pitchFamily="34" charset="-120"/>
+              </a:rPr>
+              <a:t>A. High RDW</a:t>
+            </a:r>
+            <a:endParaRPr lang="en-US" sz="1350" dirty="0"/>
+          </a:p>
+          <a:p>
+            <a:pPr algn="l" indent="0" marL="0">
+              <a:spcAft>
+                <a:spcPts val="600"/>
+              </a:spcAft>
+              <a:buNone/>
+            </a:pPr>
+            <a:r>
+              <a:rPr lang="en-US" sz="1350" dirty="0">
+                <a:solidFill>
+                  <a:srgbClr val="33444F"/>
+                </a:solidFill>
+                <a:latin typeface="Calibri" pitchFamily="34" charset="0"/>
+                <a:ea typeface="Calibri" pitchFamily="34" charset="-122"/>
+                <a:cs typeface="Calibri" pitchFamily="34" charset="-120"/>
+              </a:rPr>
+              <a:t>B. Low ferritin</a:t>
+            </a:r>
+            <a:endParaRPr lang="en-US" sz="1350" dirty="0"/>
+          </a:p>
+          <a:p>
+            <a:pPr algn="l" indent="0" marL="0">
+              <a:spcAft>
+                <a:spcPts val="600"/>
+              </a:spcAft>
+              <a:buNone/>
+            </a:pPr>
+            <a:r>
+              <a:rPr lang="en-US" sz="1350" b="1" dirty="0">
+                <a:solidFill>
+                  <a:srgbClr val="8E1622"/>
+                </a:solidFill>
+                <a:latin typeface="Calibri" pitchFamily="34" charset="0"/>
+                <a:ea typeface="Calibri" pitchFamily="34" charset="-122"/>
+                <a:cs typeface="Calibri" pitchFamily="34" charset="-120"/>
+              </a:rPr>
+              <a:t>C. Elevated HbA2 with normal iron studies</a:t>
+            </a:r>
+            <a:endParaRPr lang="en-US" sz="1350" dirty="0"/>
+          </a:p>
+          <a:p>
+            <a:pPr algn="l" indent="0" marL="0">
+              <a:spcAft>
+                <a:spcPts val="600"/>
+              </a:spcAft>
+              <a:buNone/>
+            </a:pPr>
+            <a:r>
+              <a:rPr lang="en-US" sz="1350" dirty="0">
+                <a:solidFill>
+                  <a:srgbClr val="33444F"/>
+                </a:solidFill>
+                <a:latin typeface="Calibri" pitchFamily="34" charset="0"/>
+                <a:ea typeface="Calibri" pitchFamily="34" charset="-122"/>
+                <a:cs typeface="Calibri" pitchFamily="34" charset="-120"/>
+              </a:rPr>
+              <a:t>D. High TIBC</a:t>
+            </a:r>
+            <a:endParaRPr lang="en-US" sz="1350" dirty="0"/>
+          </a:p>
+          <a:p>
+            <a:pPr algn="l" indent="0" marL="0">
+              <a:spcAft>
+                <a:spcPts val="600"/>
+              </a:spcAft>
+              <a:buNone/>
+            </a:pPr>
+            <a:r>
+              <a:rPr lang="en-US" sz="1350" dirty="0">
+                <a:solidFill>
+                  <a:srgbClr val="33444F"/>
+                </a:solidFill>
+                <a:latin typeface="Calibri" pitchFamily="34" charset="0"/>
+                <a:ea typeface="Calibri" pitchFamily="34" charset="-122"/>
+                <a:cs typeface="Calibri" pitchFamily="34" charset="-120"/>
+              </a:rPr>
+              <a:t>E. Low RBC count</a:t>
+            </a:r>
+            <a:endParaRPr lang="en-US" sz="1350" dirty="0"/>
+          </a:p>
+        </p:txBody>
+      </p:sp>
+      <p:sp>
+        <p:nvSpPr>
+          <p:cNvPr id="6" name="Shape 4"/>
+          <p:cNvSpPr/>
+          <p:nvPr/>
+        </p:nvSpPr>
+        <p:spPr>
+          <a:xfrm>
+            <a:off x="7201632" y="2395728"/>
+            <a:ext cx="4423136" cy="3246120"/>
+          </a:xfrm>
+          <a:prstGeom prst="roundRect">
+            <a:avLst>
+              <a:gd name="adj" fmla="val 2535"/>
+            </a:avLst>
+          </a:prstGeom>
+          <a:solidFill>
+            <a:srgbClr val="FBEAEC"/>
+          </a:solidFill>
+          <a:ln/>
+          <a:effectLst>
+            <a:outerShdw sx="100000" sy="100000" kx="0" ky="0" algn="bl" rotWithShape="0" blurRad="88900" dist="25400" dir="5400000">
+              <a:srgbClr val="22303C">
+                <a:alpha val="12000"/>
+              </a:srgbClr>
+            </a:outerShdw>
+          </a:effectLst>
+        </p:spPr>
+        <p:txBody>
+          <a:bodyPr/>
+          <a:p/>
+        </p:txBody>
+      </p:sp>
+      <p:sp>
+        <p:nvSpPr>
+          <p:cNvPr id="7" name="Text 5"/>
+          <p:cNvSpPr/>
+          <p:nvPr/>
+        </p:nvSpPr>
+        <p:spPr>
+          <a:xfrm>
+            <a:off x="7439376" y="2578608"/>
+            <a:ext cx="3965936" cy="457200"/>
+          </a:xfrm>
+          <a:prstGeom prst="rect">
+            <a:avLst/>
+          </a:prstGeom>
+          <a:noFill/>
+          <a:ln/>
+        </p:spPr>
+        <p:txBody>
+          <a:bodyPr wrap="square" lIns="0" tIns="0" rIns="0" bIns="0" rtlCol="0" anchor="ctr"/>
+          <a:lstStyle/>
+          <a:p>
+            <a:pPr indent="0" marL="0">
+              <a:buNone/>
+            </a:pPr>
+            <a:r>
+              <a:rPr lang="en-US" sz="1500" b="1" dirty="0">
+                <a:solidFill>
+                  <a:srgbClr val="C62133"/>
+                </a:solidFill>
+                <a:latin typeface="Calibri" pitchFamily="34" charset="0"/>
+                <a:ea typeface="Calibri" pitchFamily="34" charset="-122"/>
+                <a:cs typeface="Calibri" pitchFamily="34" charset="-120"/>
+              </a:rPr>
+              <a:t>ANSWER  </a:t>
+            </a:r>
+            <a:pPr indent="0" marL="0">
+              <a:buNone/>
+            </a:pPr>
+            <a:r>
+              <a:rPr lang="en-US" sz="1500" b="1" dirty="0">
+                <a:solidFill>
+                  <a:srgbClr val="1B2A38"/>
+                </a:solidFill>
+                <a:latin typeface="Calibri" pitchFamily="34" charset="0"/>
+                <a:ea typeface="Calibri" pitchFamily="34" charset="-122"/>
+                <a:cs typeface="Calibri" pitchFamily="34" charset="-120"/>
+              </a:rPr>
+              <a:t>C — ↑HbA2 with normal iron studies</a:t>
+            </a:r>
+            <a:endParaRPr lang="en-US" sz="1500" dirty="0"/>
+          </a:p>
+        </p:txBody>
+      </p:sp>
+      <p:sp>
+        <p:nvSpPr>
+          <p:cNvPr id="8" name="Text 6"/>
+          <p:cNvSpPr/>
+          <p:nvPr/>
+        </p:nvSpPr>
+        <p:spPr>
+          <a:xfrm>
+            <a:off x="7439376" y="3127248"/>
+            <a:ext cx="3947648" cy="2377440"/>
+          </a:xfrm>
+          <a:prstGeom prst="rect">
+            <a:avLst/>
+          </a:prstGeom>
+          <a:noFill/>
+          <a:ln/>
+        </p:spPr>
+        <p:txBody>
+          <a:bodyPr wrap="square" lIns="0" tIns="0" rIns="0" bIns="0" rtlCol="0" anchor="t"/>
+          <a:lstStyle/>
+          <a:p>
+            <a:pPr algn="l" indent="0" marL="0">
+              <a:lnSpc>
+                <a:spcPct val="108000"/>
+              </a:lnSpc>
+              <a:buNone/>
+            </a:pPr>
+            <a:r>
+              <a:rPr lang="en-US" sz="1250" dirty="0">
+                <a:solidFill>
+                  <a:srgbClr val="33444F"/>
+                </a:solidFill>
+                <a:latin typeface="Calibri" pitchFamily="34" charset="0"/>
+                <a:ea typeface="Calibri" pitchFamily="34" charset="-122"/>
+                <a:cs typeface="Calibri" pitchFamily="34" charset="-120"/>
+              </a:rPr>
+              <a:t>β-thalassemia trait shows elevated HbA2 and normal iron studies; iron deficiency shows low ferritin and high RDW.</a:t>
+            </a:r>
+            <a:endParaRPr lang="en-US" sz="1250" dirty="0"/>
+          </a:p>
+        </p:txBody>
+      </p:sp>
+      <p:sp>
+        <p:nvSpPr>
+          <p:cNvPr id="9" name="Text 7"/>
+          <p:cNvSpPr/>
+          <p:nvPr/>
+        </p:nvSpPr>
+        <p:spPr>
+          <a:xfrm>
+            <a:off x="566928" y="6473952"/>
+            <a:ext cx="7772400" cy="274320"/>
+          </a:xfrm>
+          <a:prstGeom prst="rect">
+            <a:avLst/>
+          </a:prstGeom>
+          <a:noFill/>
+          <a:ln/>
+        </p:spPr>
+        <p:txBody>
+          <a:bodyPr wrap="square" lIns="0" tIns="0" rIns="0" bIns="0" rtlCol="0" anchor="ctr"/>
+          <a:lstStyle/>
+          <a:p>
+            <a:pPr algn="l" indent="0" marL="0">
+              <a:buNone/>
+            </a:pPr>
+            <a:r>
+              <a:rPr lang="en-US" sz="850" dirty="0">
+                <a:solidFill>
+                  <a:srgbClr val="9AA8B4"/>
+                </a:solidFill>
+                <a:latin typeface="Calibri" pitchFamily="34" charset="0"/>
+                <a:ea typeface="Calibri" pitchFamily="34" charset="-122"/>
+                <a:cs typeface="Calibri" pitchFamily="34" charset="-120"/>
+              </a:rPr>
+              <a:t>Makassed General Hospital  ·  Department of Laboratory Medicine</a:t>
+            </a:r>
+            <a:endParaRPr lang="en-US" sz="850" dirty="0"/>
+          </a:p>
+        </p:txBody>
+      </p:sp>
+      <p:sp>
+        <p:nvSpPr>
+          <p:cNvPr id="10" name="Text 8"/>
+          <p:cNvSpPr/>
+          <p:nvPr/>
+        </p:nvSpPr>
+        <p:spPr>
+          <a:xfrm>
+            <a:off x="9814255" y="6473952"/>
+            <a:ext cx="1828800" cy="274320"/>
+          </a:xfrm>
+          <a:prstGeom prst="rect">
+            <a:avLst/>
+          </a:prstGeom>
+          <a:noFill/>
+          <a:ln/>
+        </p:spPr>
+        <p:txBody>
+          <a:bodyPr wrap="square" lIns="0" tIns="0" rIns="0" bIns="0" rtlCol="0" anchor="ctr"/>
+          <a:lstStyle/>
+          <a:p>
+            <a:pPr algn="r" indent="0" marL="0">
+              <a:buNone/>
+            </a:pPr>
+            <a:r>
+              <a:rPr lang="en-US" sz="850" dirty="0">
+                <a:solidFill>
+                  <a:srgbClr val="9AA8B4"/>
+                </a:solidFill>
+                <a:latin typeface="Calibri" pitchFamily="34" charset="0"/>
+                <a:ea typeface="Calibri" pitchFamily="34" charset="-122"/>
+                <a:cs typeface="Calibri" pitchFamily="34" charset="-120"/>
+              </a:rPr>
+              <a:t>CP Lecture Series</a:t>
+            </a:r>
+            <a:pPr algn="r" indent="0" marL="0">
+              <a:buNone/>
+            </a:pPr>
+            <a:r>
+              <a:rPr lang="en-US" sz="850" dirty="0">
+                <a:solidFill>
+                  <a:srgbClr val="DCE4EC"/>
+                </a:solidFill>
+                <a:latin typeface="Calibri" pitchFamily="34" charset="0"/>
+                <a:ea typeface="Calibri" pitchFamily="34" charset="-122"/>
+                <a:cs typeface="Calibri" pitchFamily="34" charset="-120"/>
+              </a:rPr>
+              <a:t>   ·   </a:t>
+            </a:r>
+            <a:pPr algn="r" indent="0" marL="0">
+              <a:buNone/>
+            </a:pPr>
+            <a:r>
+              <a:rPr lang="en-US" sz="850" b="1" dirty="0">
+                <a:solidFill>
+                  <a:srgbClr val="C62133"/>
+                </a:solidFill>
+                <a:latin typeface="Calibri" pitchFamily="34" charset="0"/>
+                <a:ea typeface="Calibri" pitchFamily="34" charset="-122"/>
+                <a:cs typeface="Calibri" pitchFamily="34" charset="-120"/>
+              </a:rPr>
+              <a:t>18</a:t>
+            </a:r>
+            <a:endParaRPr lang="en-US" sz="850" dirty="0"/>
+          </a:p>
+        </p:txBody>
+      </p:sp>
+    </p:spTree>
+  </p:cSld>
+  <p:clrMapOvr>
+    <a:masterClrMapping/>
+  </p:clrMapOvr>
+</p:sld>
+</file>
+
+<file path=ppt/slides/slide29.xml><?xml version="1.0" encoding="utf-8"?>
+<p:sld xmlns:a="http://schemas.openxmlformats.org/drawingml/2006/main" xmlns:p="http://schemas.openxmlformats.org/presentationml/2006/main" xmlns:r="http://schemas.openxmlformats.org/officeDocument/2006/relationships">
+  <p:cSld>
+    <p:spTree>
+      <p:nvGrpSpPr>
+        <p:cNvPr id="1" name=""/>
+        <p:cNvGrpSpPr/>
+        <p:nvPr/>
+      </p:nvGrpSpPr>
+      <p:grpSpPr/>
+      <p:sp>
+        <p:nvSpPr>
+          <p:cNvPr id="2" name="Text 0"/>
+          <p:cNvSpPr/>
+          <p:nvPr/>
+        </p:nvSpPr>
+        <p:spPr>
+          <a:xfrm>
+            <a:off x="566928" y="329184"/>
+            <a:ext cx="10515600" cy="310896"/>
+          </a:xfrm>
+          <a:prstGeom prst="rect">
+            <a:avLst/>
+          </a:prstGeom>
+          <a:noFill/>
+          <a:ln/>
+        </p:spPr>
+        <p:txBody>
+          <a:bodyPr wrap="square" lIns="0" tIns="0" rIns="0" bIns="0" rtlCol="0" anchor="ctr"/>
+          <a:lstStyle/>
+          <a:p>
+            <a:pPr algn="l" indent="0" marL="0">
+              <a:buNone/>
+            </a:pPr>
+            <a:r>
+              <a:rPr lang="en-US" sz="1100" b="1" spc="150" kern="0" dirty="0">
+                <a:solidFill>
+                  <a:srgbClr val="C62133"/>
+                </a:solidFill>
+                <a:latin typeface="Calibri" pitchFamily="34" charset="0"/>
+                <a:ea typeface="Calibri" pitchFamily="34" charset="-122"/>
+                <a:cs typeface="Calibri" pitchFamily="34" charset="-120"/>
+              </a:rPr>
+              <a:t>HEMATOLOGY &amp; COAGULATION   ·   BOARD REVIEW  ·  Q1</a:t>
+            </a:r>
+            <a:endParaRPr lang="en-US" sz="1100" dirty="0"/>
+          </a:p>
+        </p:txBody>
+      </p:sp>
+      <p:sp>
+        <p:nvSpPr>
+          <p:cNvPr id="3" name="Text 1"/>
+          <p:cNvSpPr/>
+          <p:nvPr/>
+        </p:nvSpPr>
+        <p:spPr>
+          <a:xfrm>
+            <a:off x="566928" y="713232"/>
+            <a:ext cx="11064240" cy="749808"/>
+          </a:xfrm>
+          <a:prstGeom prst="rect">
+            <a:avLst/>
+          </a:prstGeom>
+          <a:noFill/>
+          <a:ln/>
+        </p:spPr>
+        <p:txBody>
+          <a:bodyPr wrap="square" lIns="0" tIns="0" rIns="0" bIns="0" rtlCol="0" anchor="ctr"/>
+          <a:lstStyle/>
+          <a:p>
+            <a:pPr algn="l" indent="0" marL="0">
+              <a:buNone/>
+            </a:pPr>
+            <a:r>
+              <a:rPr lang="en-US" sz="2600" b="1" dirty="0">
+                <a:solidFill>
+                  <a:srgbClr val="0E3A5F"/>
+                </a:solidFill>
+                <a:latin typeface="Calibri" pitchFamily="34" charset="0"/>
+                <a:ea typeface="Calibri" pitchFamily="34" charset="-122"/>
+                <a:cs typeface="Calibri" pitchFamily="34" charset="-120"/>
+              </a:rPr>
+              <a:t>Board-Style Review</a:t>
+            </a:r>
+            <a:endParaRPr lang="en-US" sz="2600" dirty="0"/>
+          </a:p>
+        </p:txBody>
+      </p:sp>
+      <p:sp>
+        <p:nvSpPr>
+          <p:cNvPr id="4" name="Text 2"/>
+          <p:cNvSpPr/>
+          <p:nvPr/>
+        </p:nvSpPr>
+        <p:spPr>
+          <a:xfrm>
+            <a:off x="566928" y="1417320"/>
+            <a:ext cx="11057839" cy="914400"/>
+          </a:xfrm>
+          <a:prstGeom prst="rect">
+            <a:avLst/>
+          </a:prstGeom>
+          <a:noFill/>
+          <a:ln/>
+        </p:spPr>
+        <p:txBody>
+          <a:bodyPr wrap="square" lIns="0" tIns="0" rIns="0" bIns="0" rtlCol="0" anchor="t"/>
+          <a:lstStyle/>
+          <a:p>
+            <a:pPr algn="l" indent="0" marL="0">
+              <a:lnSpc>
+                <a:spcPct val="105000"/>
+              </a:lnSpc>
+              <a:buNone/>
+            </a:pPr>
+            <a:r>
+              <a:rPr lang="en-US" sz="1450" b="1" dirty="0">
+                <a:solidFill>
+                  <a:srgbClr val="1B2A38"/>
+                </a:solidFill>
+                <a:latin typeface="Calibri" pitchFamily="34" charset="0"/>
+                <a:ea typeface="Calibri" pitchFamily="34" charset="-122"/>
+                <a:cs typeface="Calibri" pitchFamily="34" charset="-120"/>
+              </a:rPr>
+              <a:t>The most specific laboratory marker of iron-deficiency anemia is:</a:t>
+            </a:r>
+            <a:endParaRPr lang="en-US" sz="1450" dirty="0"/>
+          </a:p>
+        </p:txBody>
+      </p:sp>
+      <p:sp>
+        <p:nvSpPr>
+          <p:cNvPr id="5" name="Text 3"/>
+          <p:cNvSpPr/>
+          <p:nvPr/>
+        </p:nvSpPr>
+        <p:spPr>
+          <a:xfrm>
+            <a:off x="658368" y="2395728"/>
+            <a:ext cx="6192390" cy="3017520"/>
+          </a:xfrm>
+          <a:prstGeom prst="rect">
+            <a:avLst/>
+          </a:prstGeom>
+          <a:noFill/>
+          <a:ln/>
+        </p:spPr>
+        <p:txBody>
+          <a:bodyPr wrap="square" lIns="0" tIns="0" rIns="0" bIns="0" rtlCol="0" anchor="t"/>
+          <a:lstStyle/>
+          <a:p>
+            <a:pPr algn="l" indent="0" marL="0">
+              <a:spcAft>
+                <a:spcPts val="600"/>
+              </a:spcAft>
+              <a:buNone/>
+            </a:pPr>
+            <a:r>
+              <a:rPr lang="en-US" sz="1350" dirty="0">
+                <a:solidFill>
+                  <a:srgbClr val="33444F"/>
+                </a:solidFill>
+                <a:latin typeface="Calibri" pitchFamily="34" charset="0"/>
+                <a:ea typeface="Calibri" pitchFamily="34" charset="-122"/>
+                <a:cs typeface="Calibri" pitchFamily="34" charset="-120"/>
+              </a:rPr>
+              <a:t>A. Serum iron</a:t>
+            </a:r>
+            <a:endParaRPr lang="en-US" sz="1350" dirty="0"/>
+          </a:p>
+          <a:p>
+            <a:pPr algn="l" indent="0" marL="0">
+              <a:spcAft>
+                <a:spcPts val="600"/>
+              </a:spcAft>
+              <a:buNone/>
+            </a:pPr>
+            <a:r>
+              <a:rPr lang="en-US" sz="1350" b="1" dirty="0">
+                <a:solidFill>
+                  <a:srgbClr val="8E1622"/>
+                </a:solidFill>
+                <a:latin typeface="Calibri" pitchFamily="34" charset="0"/>
+                <a:ea typeface="Calibri" pitchFamily="34" charset="-122"/>
+                <a:cs typeface="Calibri" pitchFamily="34" charset="-120"/>
+              </a:rPr>
+              <a:t>B. Low ferritin</a:t>
+            </a:r>
+            <a:endParaRPr lang="en-US" sz="1350" dirty="0"/>
+          </a:p>
+          <a:p>
+            <a:pPr algn="l" indent="0" marL="0">
+              <a:spcAft>
+                <a:spcPts val="600"/>
+              </a:spcAft>
+              <a:buNone/>
+            </a:pPr>
+            <a:r>
+              <a:rPr lang="en-US" sz="1350" dirty="0">
+                <a:solidFill>
+                  <a:srgbClr val="33444F"/>
+                </a:solidFill>
+                <a:latin typeface="Calibri" pitchFamily="34" charset="0"/>
+                <a:ea typeface="Calibri" pitchFamily="34" charset="-122"/>
+                <a:cs typeface="Calibri" pitchFamily="34" charset="-120"/>
+              </a:rPr>
+              <a:t>C. MCV</a:t>
+            </a:r>
+            <a:endParaRPr lang="en-US" sz="1350" dirty="0"/>
+          </a:p>
+          <a:p>
+            <a:pPr algn="l" indent="0" marL="0">
+              <a:spcAft>
+                <a:spcPts val="600"/>
+              </a:spcAft>
+              <a:buNone/>
+            </a:pPr>
+            <a:r>
+              <a:rPr lang="en-US" sz="1350" dirty="0">
+                <a:solidFill>
+                  <a:srgbClr val="33444F"/>
+                </a:solidFill>
+                <a:latin typeface="Calibri" pitchFamily="34" charset="0"/>
+                <a:ea typeface="Calibri" pitchFamily="34" charset="-122"/>
+                <a:cs typeface="Calibri" pitchFamily="34" charset="-120"/>
+              </a:rPr>
+              <a:t>D. RDW</a:t>
+            </a:r>
+            <a:endParaRPr lang="en-US" sz="1350" dirty="0"/>
+          </a:p>
+          <a:p>
+            <a:pPr algn="l" indent="0" marL="0">
+              <a:spcAft>
+                <a:spcPts val="600"/>
+              </a:spcAft>
+              <a:buNone/>
+            </a:pPr>
+            <a:r>
+              <a:rPr lang="en-US" sz="1350" dirty="0">
+                <a:solidFill>
+                  <a:srgbClr val="33444F"/>
+                </a:solidFill>
+                <a:latin typeface="Calibri" pitchFamily="34" charset="0"/>
+                <a:ea typeface="Calibri" pitchFamily="34" charset="-122"/>
+                <a:cs typeface="Calibri" pitchFamily="34" charset="-120"/>
+              </a:rPr>
+              <a:t>E. Transferrin</a:t>
+            </a:r>
+            <a:endParaRPr lang="en-US" sz="1350" dirty="0"/>
+          </a:p>
+        </p:txBody>
+      </p:sp>
+      <p:sp>
+        <p:nvSpPr>
+          <p:cNvPr id="6" name="Shape 4"/>
+          <p:cNvSpPr/>
+          <p:nvPr/>
+        </p:nvSpPr>
+        <p:spPr>
+          <a:xfrm>
+            <a:off x="7201632" y="2395728"/>
+            <a:ext cx="4423136" cy="3246120"/>
+          </a:xfrm>
+          <a:prstGeom prst="roundRect">
+            <a:avLst>
+              <a:gd name="adj" fmla="val 2535"/>
+            </a:avLst>
+          </a:prstGeom>
+          <a:solidFill>
+            <a:srgbClr val="FBEAEC"/>
+          </a:solidFill>
+          <a:ln/>
+          <a:effectLst>
+            <a:outerShdw sx="100000" sy="100000" kx="0" ky="0" algn="bl" rotWithShape="0" blurRad="88900" dist="25400" dir="5400000">
+              <a:srgbClr val="22303C">
+                <a:alpha val="12000"/>
+              </a:srgbClr>
+            </a:outerShdw>
+          </a:effectLst>
+        </p:spPr>
+        <p:txBody>
+          <a:bodyPr/>
+          <a:p/>
+        </p:txBody>
+      </p:sp>
+      <p:sp>
+        <p:nvSpPr>
+          <p:cNvPr id="7" name="Text 5"/>
+          <p:cNvSpPr/>
+          <p:nvPr/>
+        </p:nvSpPr>
+        <p:spPr>
+          <a:xfrm>
+            <a:off x="7439376" y="2578608"/>
+            <a:ext cx="3965936" cy="457200"/>
+          </a:xfrm>
+          <a:prstGeom prst="rect">
+            <a:avLst/>
+          </a:prstGeom>
+          <a:noFill/>
+          <a:ln/>
+        </p:spPr>
+        <p:txBody>
+          <a:bodyPr wrap="square" lIns="0" tIns="0" rIns="0" bIns="0" rtlCol="0" anchor="ctr"/>
+          <a:lstStyle/>
+          <a:p>
+            <a:pPr indent="0" marL="0">
+              <a:buNone/>
+            </a:pPr>
+            <a:r>
+              <a:rPr lang="en-US" sz="1500" b="1" dirty="0">
+                <a:solidFill>
+                  <a:srgbClr val="C62133"/>
+                </a:solidFill>
+                <a:latin typeface="Calibri" pitchFamily="34" charset="0"/>
+                <a:ea typeface="Calibri" pitchFamily="34" charset="-122"/>
+                <a:cs typeface="Calibri" pitchFamily="34" charset="-120"/>
+              </a:rPr>
+              <a:t>ANSWER  </a:t>
+            </a:r>
+            <a:pPr indent="0" marL="0">
+              <a:buNone/>
+            </a:pPr>
+            <a:r>
+              <a:rPr lang="en-US" sz="1500" b="1" dirty="0">
+                <a:solidFill>
+                  <a:srgbClr val="1B2A38"/>
+                </a:solidFill>
+                <a:latin typeface="Calibri" pitchFamily="34" charset="0"/>
+                <a:ea typeface="Calibri" pitchFamily="34" charset="-122"/>
+                <a:cs typeface="Calibri" pitchFamily="34" charset="-120"/>
+              </a:rPr>
+              <a:t>B — Low ferritin</a:t>
+            </a:r>
+            <a:endParaRPr lang="en-US" sz="1500" dirty="0"/>
+          </a:p>
+        </p:txBody>
+      </p:sp>
+      <p:sp>
+        <p:nvSpPr>
+          <p:cNvPr id="8" name="Text 6"/>
+          <p:cNvSpPr/>
+          <p:nvPr/>
+        </p:nvSpPr>
+        <p:spPr>
+          <a:xfrm>
+            <a:off x="7439376" y="3127248"/>
+            <a:ext cx="3947648" cy="2377440"/>
+          </a:xfrm>
+          <a:prstGeom prst="rect">
+            <a:avLst/>
+          </a:prstGeom>
+          <a:noFill/>
+          <a:ln/>
+        </p:spPr>
+        <p:txBody>
+          <a:bodyPr wrap="square" lIns="0" tIns="0" rIns="0" bIns="0" rtlCol="0" anchor="t"/>
+          <a:lstStyle/>
+          <a:p>
+            <a:pPr algn="l" indent="0" marL="0">
+              <a:lnSpc>
+                <a:spcPct val="108000"/>
+              </a:lnSpc>
+              <a:buNone/>
+            </a:pPr>
+            <a:r>
+              <a:rPr lang="en-US" sz="1250" dirty="0">
+                <a:solidFill>
+                  <a:srgbClr val="33444F"/>
+                </a:solidFill>
+                <a:latin typeface="Calibri" pitchFamily="34" charset="0"/>
+                <a:ea typeface="Calibri" pitchFamily="34" charset="-122"/>
+                <a:cs typeface="Calibri" pitchFamily="34" charset="-120"/>
+              </a:rPr>
+              <a:t>Low ferritin reflects depleted iron stores; note it can be falsely normal as an acute-phase reactant.</a:t>
+            </a:r>
+            <a:endParaRPr lang="en-US" sz="1250" dirty="0"/>
+          </a:p>
+        </p:txBody>
+      </p:sp>
+      <p:sp>
+        <p:nvSpPr>
+          <p:cNvPr id="9" name="Text 7"/>
+          <p:cNvSpPr/>
+          <p:nvPr/>
+        </p:nvSpPr>
+        <p:spPr>
+          <a:xfrm>
+            <a:off x="566928" y="6473952"/>
+            <a:ext cx="7772400" cy="274320"/>
+          </a:xfrm>
+          <a:prstGeom prst="rect">
+            <a:avLst/>
+          </a:prstGeom>
+          <a:noFill/>
+          <a:ln/>
+        </p:spPr>
+        <p:txBody>
+          <a:bodyPr wrap="square" lIns="0" tIns="0" rIns="0" bIns="0" rtlCol="0" anchor="ctr"/>
+          <a:lstStyle/>
+          <a:p>
+            <a:pPr algn="l" indent="0" marL="0">
+              <a:buNone/>
+            </a:pPr>
+            <a:r>
+              <a:rPr lang="en-US" sz="850" dirty="0">
+                <a:solidFill>
+                  <a:srgbClr val="9AA8B4"/>
+                </a:solidFill>
+                <a:latin typeface="Calibri" pitchFamily="34" charset="0"/>
+                <a:ea typeface="Calibri" pitchFamily="34" charset="-122"/>
+                <a:cs typeface="Calibri" pitchFamily="34" charset="-120"/>
+              </a:rPr>
+              <a:t>Makassed General Hospital  ·  Department of Laboratory Medicine</a:t>
+            </a:r>
+            <a:endParaRPr lang="en-US" sz="850" dirty="0"/>
+          </a:p>
+        </p:txBody>
+      </p:sp>
+      <p:sp>
+        <p:nvSpPr>
+          <p:cNvPr id="10" name="Text 8"/>
+          <p:cNvSpPr/>
+          <p:nvPr/>
+        </p:nvSpPr>
+        <p:spPr>
+          <a:xfrm>
+            <a:off x="9814255" y="6473952"/>
+            <a:ext cx="1828800" cy="274320"/>
+          </a:xfrm>
+          <a:prstGeom prst="rect">
+            <a:avLst/>
+          </a:prstGeom>
+          <a:noFill/>
+          <a:ln/>
+        </p:spPr>
+        <p:txBody>
+          <a:bodyPr wrap="square" lIns="0" tIns="0" rIns="0" bIns="0" rtlCol="0" anchor="ctr"/>
+          <a:lstStyle/>
+          <a:p>
+            <a:pPr algn="r" indent="0" marL="0">
+              <a:buNone/>
+            </a:pPr>
+            <a:r>
+              <a:rPr lang="en-US" sz="850" dirty="0">
+                <a:solidFill>
+                  <a:srgbClr val="9AA8B4"/>
+                </a:solidFill>
+                <a:latin typeface="Calibri" pitchFamily="34" charset="0"/>
+                <a:ea typeface="Calibri" pitchFamily="34" charset="-122"/>
+                <a:cs typeface="Calibri" pitchFamily="34" charset="-120"/>
+              </a:rPr>
+              <a:t>CP Lecture Series</a:t>
+            </a:r>
+            <a:pPr algn="r" indent="0" marL="0">
+              <a:buNone/>
+            </a:pPr>
+            <a:r>
+              <a:rPr lang="en-US" sz="850" dirty="0">
+                <a:solidFill>
+                  <a:srgbClr val="DCE4EC"/>
+                </a:solidFill>
+                <a:latin typeface="Calibri" pitchFamily="34" charset="0"/>
+                <a:ea typeface="Calibri" pitchFamily="34" charset="-122"/>
+                <a:cs typeface="Calibri" pitchFamily="34" charset="-120"/>
+              </a:rPr>
+              <a:t>   ·   </a:t>
+            </a:r>
+            <a:pPr algn="r" indent="0" marL="0">
+              <a:buNone/>
+            </a:pPr>
+            <a:r>
+              <a:rPr lang="en-US" sz="850" b="1" dirty="0">
+                <a:solidFill>
+                  <a:srgbClr val="C62133"/>
+                </a:solidFill>
+                <a:latin typeface="Calibri" pitchFamily="34" charset="0"/>
+                <a:ea typeface="Calibri" pitchFamily="34" charset="-122"/>
+                <a:cs typeface="Calibri" pitchFamily="34" charset="-120"/>
+              </a:rPr>
+              <a:t>17</a:t>
+            </a:r>
+            <a:endParaRPr lang="en-US" sz="850" dirty="0"/>
+          </a:p>
+        </p:txBody>
+      </p:sp>
+    </p:spTree>
+  </p:cSld>
+  <p:clrMapOvr>
+    <a:masterClrMapping/>
+  </p:clrMapOvr>
+</p:sld>
+</file>
+
 <file path=ppt/slides/slide3.xml><?xml version="1.0" encoding="utf-8"?>
 <p:sld xmlns:a="http://schemas.openxmlformats.org/drawingml/2006/main" xmlns:r="http://schemas.openxmlformats.org/officeDocument/2006/relationships" xmlns:p="http://schemas.openxmlformats.org/presentationml/2006/main">
   <p:cSld name="Slide 3">
@@ -11551,6 +13171,10 @@
             </a:outerShdw>
           </a:effectLst>
         </p:spPr>
+        <p:txBody>
+          <a:bodyPr/>
+          <a:p/>
+        </p:txBody>
       </p:sp>
       <p:sp>
         <p:nvSpPr>
@@ -11578,6 +13202,10 @@
             </a:outerShdw>
           </a:effectLst>
         </p:spPr>
+        <p:txBody>
+          <a:bodyPr/>
+          <a:p/>
+        </p:txBody>
       </p:sp>
       <p:sp>
         <p:nvSpPr>
@@ -11685,6 +13313,10 @@
             </a:outerShdw>
           </a:effectLst>
         </p:spPr>
+        <p:txBody>
+          <a:bodyPr/>
+          <a:p/>
+        </p:txBody>
       </p:sp>
       <p:sp>
         <p:nvSpPr>
@@ -11712,6 +13344,10 @@
             </a:outerShdw>
           </a:effectLst>
         </p:spPr>
+        <p:txBody>
+          <a:bodyPr/>
+          <a:p/>
+        </p:txBody>
       </p:sp>
       <p:sp>
         <p:nvSpPr>
@@ -11819,6 +13455,10 @@
             </a:outerShdw>
           </a:effectLst>
         </p:spPr>
+        <p:txBody>
+          <a:bodyPr/>
+          <a:p/>
+        </p:txBody>
       </p:sp>
       <p:sp>
         <p:nvSpPr>
@@ -11846,6 +13486,10 @@
             </a:outerShdw>
           </a:effectLst>
         </p:spPr>
+        <p:txBody>
+          <a:bodyPr/>
+          <a:p/>
+        </p:txBody>
       </p:sp>
       <p:sp>
         <p:nvSpPr>
@@ -11953,6 +13597,10 @@
             </a:outerShdw>
           </a:effectLst>
         </p:spPr>
+        <p:txBody>
+          <a:bodyPr/>
+          <a:p/>
+        </p:txBody>
       </p:sp>
       <p:sp>
         <p:nvSpPr>
@@ -11980,6 +13628,10 @@
             </a:outerShdw>
           </a:effectLst>
         </p:spPr>
+        <p:txBody>
+          <a:bodyPr/>
+          <a:p/>
+        </p:txBody>
       </p:sp>
       <p:sp>
         <p:nvSpPr>
@@ -12087,6 +13739,10 @@
             </a:outerShdw>
           </a:effectLst>
         </p:spPr>
+        <p:txBody>
+          <a:bodyPr/>
+          <a:p/>
+        </p:txBody>
       </p:sp>
       <p:sp>
         <p:nvSpPr>
@@ -12114,6 +13770,10 @@
             </a:outerShdw>
           </a:effectLst>
         </p:spPr>
+        <p:txBody>
+          <a:bodyPr/>
+          <a:p/>
+        </p:txBody>
       </p:sp>
       <p:sp>
         <p:nvSpPr>
@@ -12221,6 +13881,10 @@
             </a:outerShdw>
           </a:effectLst>
         </p:spPr>
+        <p:txBody>
+          <a:bodyPr/>
+          <a:p/>
+        </p:txBody>
       </p:sp>
       <p:sp>
         <p:nvSpPr>
@@ -12248,6 +13912,10 @@
             </a:outerShdw>
           </a:effectLst>
         </p:spPr>
+        <p:txBody>
+          <a:bodyPr/>
+          <a:p/>
+        </p:txBody>
       </p:sp>
       <p:sp>
         <p:nvSpPr>
@@ -12571,6 +14239,10 @@
             </a:outerShdw>
           </a:effectLst>
         </p:spPr>
+        <p:txBody>
+          <a:bodyPr/>
+          <a:p/>
+        </p:txBody>
       </p:sp>
       <p:sp>
         <p:nvSpPr>
@@ -12598,6 +14270,10 @@
             </a:outerShdw>
           </a:effectLst>
         </p:spPr>
+        <p:txBody>
+          <a:bodyPr/>
+          <a:p/>
+        </p:txBody>
       </p:sp>
       <p:sp>
         <p:nvSpPr>
@@ -12712,6 +14388,10 @@
           </a:solidFill>
           <a:ln/>
         </p:spPr>
+        <p:txBody>
+          <a:bodyPr/>
+          <a:p/>
+        </p:txBody>
       </p:sp>
       <p:sp>
         <p:nvSpPr>
@@ -12739,6 +14419,10 @@
             </a:outerShdw>
           </a:effectLst>
         </p:spPr>
+        <p:txBody>
+          <a:bodyPr/>
+          <a:p/>
+        </p:txBody>
       </p:sp>
       <p:sp>
         <p:nvSpPr>
@@ -12860,6 +14544,10 @@
             </a:outerShdw>
           </a:effectLst>
         </p:spPr>
+        <p:txBody>
+          <a:bodyPr/>
+          <a:p/>
+        </p:txBody>
       </p:sp>
       <p:sp>
         <p:nvSpPr>
@@ -12887,6 +14575,10 @@
             </a:outerShdw>
           </a:effectLst>
         </p:spPr>
+        <p:txBody>
+          <a:bodyPr/>
+          <a:p/>
+        </p:txBody>
       </p:sp>
       <p:sp>
         <p:nvSpPr>
@@ -13001,6 +14693,10 @@
           </a:solidFill>
           <a:ln/>
         </p:spPr>
+        <p:txBody>
+          <a:bodyPr/>
+          <a:p/>
+        </p:txBody>
       </p:sp>
       <p:sp>
         <p:nvSpPr>
@@ -13028,6 +14724,10 @@
             </a:outerShdw>
           </a:effectLst>
         </p:spPr>
+        <p:txBody>
+          <a:bodyPr/>
+          <a:p/>
+        </p:txBody>
       </p:sp>
       <p:sp>
         <p:nvSpPr>
@@ -13149,6 +14849,10 @@
             </a:outerShdw>
           </a:effectLst>
         </p:spPr>
+        <p:txBody>
+          <a:bodyPr/>
+          <a:p/>
+        </p:txBody>
       </p:sp>
       <p:sp>
         <p:nvSpPr>
@@ -13176,6 +14880,10 @@
             </a:outerShdw>
           </a:effectLst>
         </p:spPr>
+        <p:txBody>
+          <a:bodyPr/>
+          <a:p/>
+        </p:txBody>
       </p:sp>
       <p:sp>
         <p:nvSpPr>
@@ -13414,6 +15122,10 @@
           </a:solidFill>
           <a:ln/>
         </p:spPr>
+        <p:txBody>
+          <a:bodyPr/>
+          <a:p/>
+        </p:txBody>
       </p:sp>
       <p:sp>
         <p:nvSpPr>
@@ -13436,6 +15148,10 @@
           </a:solidFill>
           <a:ln/>
         </p:spPr>
+        <p:txBody>
+          <a:bodyPr/>
+          <a:p/>
+        </p:txBody>
       </p:sp>
       <p:sp>
         <p:nvSpPr>
@@ -13697,6 +15413,10 @@
             </a:outerShdw>
           </a:effectLst>
         </p:spPr>
+        <p:txBody>
+          <a:bodyPr/>
+          <a:p/>
+        </p:txBody>
       </p:sp>
       <p:pic>
         <p:nvPicPr>
@@ -14005,6 +15725,10 @@
             </a:outerShdw>
           </a:effectLst>
         </p:spPr>
+        <p:txBody>
+          <a:bodyPr/>
+          <a:p/>
+        </p:txBody>
       </p:sp>
       <p:sp>
         <p:nvSpPr>
@@ -14179,6 +15903,10 @@
             </a:outerShdw>
           </a:effectLst>
         </p:spPr>
+        <p:txBody>
+          <a:bodyPr/>
+          <a:p/>
+        </p:txBody>
       </p:sp>
       <p:sp>
         <p:nvSpPr>
@@ -14484,6 +16212,10 @@
           </a:solidFill>
           <a:ln/>
         </p:spPr>
+        <p:txBody>
+          <a:bodyPr/>
+          <a:p/>
+        </p:txBody>
       </p:sp>
       <p:sp>
         <p:nvSpPr>
@@ -14506,6 +16238,10 @@
           </a:solidFill>
           <a:ln/>
         </p:spPr>
+        <p:txBody>
+          <a:bodyPr/>
+          <a:p/>
+        </p:txBody>
       </p:sp>
       <p:sp>
         <p:nvSpPr>
@@ -14762,6 +16498,10 @@
             </a:outerShdw>
           </a:effectLst>
         </p:spPr>
+        <p:txBody>
+          <a:bodyPr/>
+          <a:p/>
+        </p:txBody>
       </p:sp>
       <p:sp>
         <p:nvSpPr>
@@ -14936,6 +16676,10 @@
             </a:outerShdw>
           </a:effectLst>
         </p:spPr>
+        <p:txBody>
+          <a:bodyPr/>
+          <a:p/>
+        </p:txBody>
       </p:sp>
       <p:sp>
         <p:nvSpPr>
